--- a/docs/presentacion/presentacion-cache.pptx
+++ b/docs/presentacion/presentacion-cache.pptx
@@ -4,6 +4,9 @@
   <p:sldMasterIdLst>
     <p:sldMasterId id="2147483648" r:id="rId1"/>
   </p:sldMasterIdLst>
+  <p:notesMasterIdLst>
+    <p:notesMasterId r:id="rId17"/>
+  </p:notesMasterIdLst>
   <p:sldIdLst>
     <p:sldId id="256" r:id="rId2"/>
     <p:sldId id="257" r:id="rId3"/>
@@ -21,9 +24,6 @@
     <p:sldId id="269" r:id="rId15"/>
     <p:sldId id="270" r:id="rId16"/>
   </p:sldIdLst>
-  <p:notesMasterIdLst>
-    <p:notesMasterId r:id="rId17"/>
-  </p:notesMasterIdLst>
   <p:sldSz cx="12192000" cy="6858000"/>
   <p:notesSz cx="6858000" cy="12192000"/>
   <p:defaultTextStyle>
@@ -121,7 +121,7 @@
   <p:extLst>
     <p:ext uri="{521415D9-36F7-43E2-AB2F-B90AF26B5E84}">
       <p14:sectionLst xmlns:p14="http://schemas.microsoft.com/office/powerpoint/2010/main">
-        <p14:section name="A · Tema y arquitectura (3 min)" id="{1f3b3e50-16aa-9b8e-5f29-b604298f167e}">
+        <p14:section name="A · Tema y arquitectura (3 min)" id="{1F3B3E50-16AA-9B8E-5F29-B604298F167E}">
           <p14:sldIdLst>
             <p14:sldId id="256"/>
             <p14:sldId id="257"/>
@@ -130,7 +130,7 @@
             <p14:sldId id="260"/>
           </p14:sldIdLst>
         </p14:section>
-        <p14:section name="B · Estrategia y casos (5 min)" id="{f0e387cc-fc89-a058-3b64-8faec9fba285}">
+        <p14:section name="B · Estrategia y casos (5 min)" id="{F0E387CC-FC89-A058-3B64-8FAEC9FBA285}">
           <p14:sldIdLst>
             <p14:sldId id="261"/>
             <p14:sldId id="262"/>
@@ -138,12 +138,12 @@
             <p14:sldId id="264"/>
           </p14:sldIdLst>
         </p14:section>
-        <p14:section name="Demostración (8 min)" id="{41c1f28f-a5f7-71e6-f7c0-619006aefee2}">
+        <p14:section name="Demostración (8 min)" id="{41C1F28F-A5F7-71E6-F7C0-619006AEFEE2}">
           <p14:sldIdLst>
             <p14:sldId id="265"/>
           </p14:sldIdLst>
         </p14:section>
-        <p14:section name="C · Resultados y conclusiones (3 min)" id="{fe244bc4-a45c-e0cd-91ba-cf52d35433e9}">
+        <p14:section name="C · Resultados y conclusiones (3 min)" id="{FE244BC4-A45C-E0CD-91BA-CF52D35433E9}">
           <p14:sldIdLst>
             <p14:sldId id="266"/>
             <p14:sldId id="267"/>
@@ -151,7 +151,7 @@
             <p14:sldId id="269"/>
           </p14:sldIdLst>
         </p14:section>
-        <p14:section name="Preguntas (1 min)" id="{3912a892-a935-5076-0bbd-2f9222274a6e}">
+        <p14:section name="Preguntas (1 min)" id="{3912A892-A935-5076-0BBD-2F9222274A6E}">
           <p14:sldIdLst>
             <p14:sldId id="270"/>
           </p14:sldIdLst>
@@ -187,234 +187,10 @@
           <a:chExt cx="0" cy="0"/>
         </a:xfrm>
       </p:grpSpPr>
-      <p:sp>
-        <p:nvSpPr>
-          <p:cNvPr id="2" name="Header Placeholder 1"/>
-          <p:cNvSpPr>
-            <a:spLocks noGrp="1"/>
-          </p:cNvSpPr>
-          <p:nvPr>
-            <p:ph type="hdr" sz="quarter"/>
-          </p:nvPr>
-        </p:nvSpPr>
-        <p:spPr>
-          <a:xfrm>
-            <a:off x="0" y="0"/>
-            <a:ext cx="2971800" cy="458788"/>
-          </a:xfrm>
-          <a:prstGeom prst="rect">
-            <a:avLst/>
-          </a:prstGeom>
-        </p:spPr>
-        <p:txBody>
-          <a:bodyPr vert="horz" lIns="91440" tIns="45720" rIns="91440" bIns="45720" rtlCol="0"/>
-          <a:lstStyle>
-            <a:lvl1pPr algn="l">
-              <a:defRPr sz="1200"/>
-            </a:lvl1pPr>
-          </a:lstStyle>
-          <a:p>
-            <a:endParaRPr lang="en-US"/>
-          </a:p>
-        </p:txBody>
-      </p:sp>
-      <p:sp>
-        <p:nvSpPr>
-          <p:cNvPr id="3" name="Date Placeholder 2"/>
-          <p:cNvSpPr>
-            <a:spLocks noGrp="1"/>
-          </p:cNvSpPr>
-          <p:nvPr>
-            <p:ph type="dt" idx="1"/>
-          </p:nvPr>
-        </p:nvSpPr>
-        <p:spPr>
-          <a:xfrm>
-            <a:off x="3884613" y="0"/>
-            <a:ext cx="2971800" cy="458788"/>
-          </a:xfrm>
-          <a:prstGeom prst="rect">
-            <a:avLst/>
-          </a:prstGeom>
-        </p:spPr>
-        <p:txBody>
-          <a:bodyPr vert="horz" lIns="91440" tIns="45720" rIns="91440" bIns="45720" rtlCol="0"/>
-          <a:lstStyle>
-            <a:lvl1pPr algn="r">
-              <a:defRPr sz="1200"/>
-            </a:lvl1pPr>
-          </a:lstStyle>
-          <a:p>
-            <a:fld id="{5282F153-3F37-0F45-9E97-73ACFA13230C}" type="datetimeFigureOut">
-              <a:rPr lang="en-US"/>
-              <a:t>7/23/19</a:t>
-            </a:fld>
-            <a:endParaRPr lang="en-US"/>
-          </a:p>
-        </p:txBody>
-      </p:sp>
-      <p:sp>
-        <p:nvSpPr>
-          <p:cNvPr id="4" name="Slide Image Placeholder 3"/>
-          <p:cNvSpPr>
-            <a:spLocks noGrp="1" noRot="1" noChangeAspect="1"/>
-          </p:cNvSpPr>
-          <p:nvPr>
-            <p:ph type="sldImg" idx="2"/>
-          </p:nvPr>
-        </p:nvSpPr>
-        <p:spPr>
-          <a:xfrm>
-            <a:off x="685800" y="1143000"/>
-            <a:ext cx="5486400" cy="3086100"/>
-          </a:xfrm>
-          <a:prstGeom prst="rect">
-            <a:avLst/>
-          </a:prstGeom>
-          <a:noFill/>
-          <a:ln w="12700">
-            <a:solidFill>
-              <a:prstClr val="black"/>
-            </a:solidFill>
-          </a:ln>
-        </p:spPr>
-        <p:txBody>
-          <a:bodyPr vert="horz" lIns="91440" tIns="45720" rIns="91440" bIns="45720" rtlCol="0" anchor="ctr"/>
-          <a:lstStyle/>
-          <a:p>
-            <a:endParaRPr lang="en-US"/>
-          </a:p>
-        </p:txBody>
-      </p:sp>
-      <p:sp>
-        <p:nvSpPr>
-          <p:cNvPr id="5" name="Notes Placeholder 4"/>
-          <p:cNvSpPr>
-            <a:spLocks noGrp="1"/>
-          </p:cNvSpPr>
-          <p:nvPr>
-            <p:ph type="body" sz="quarter" idx="3"/>
-          </p:nvPr>
-        </p:nvSpPr>
-        <p:spPr>
-          <a:xfrm>
-            <a:off x="685800" y="4400550"/>
-            <a:ext cx="5486400" cy="3600450"/>
-          </a:xfrm>
-          <a:prstGeom prst="rect">
-            <a:avLst/>
-          </a:prstGeom>
-        </p:spPr>
-        <p:txBody>
-          <a:bodyPr vert="horz" lIns="91440" tIns="45720" rIns="91440" bIns="45720" rtlCol="0"/>
-          <a:lstStyle/>
-          <a:p>
-            <a:pPr lvl="0"/>
-            <a:r>
-              <a:rPr lang="en-US"/>
-              <a:t>Click to edit Master text styles</a:t>
-            </a:r>
-          </a:p>
-          <a:p>
-            <a:pPr lvl="1"/>
-            <a:r>
-              <a:rPr lang="en-US"/>
-              <a:t>Second level</a:t>
-            </a:r>
-          </a:p>
-          <a:p>
-            <a:pPr lvl="2"/>
-            <a:r>
-              <a:rPr lang="en-US"/>
-              <a:t>Third level</a:t>
-            </a:r>
-          </a:p>
-          <a:p>
-            <a:pPr lvl="3"/>
-            <a:r>
-              <a:rPr lang="en-US"/>
-              <a:t>Fourth level</a:t>
-            </a:r>
-          </a:p>
-          <a:p>
-            <a:pPr lvl="4"/>
-            <a:r>
-              <a:rPr lang="en-US"/>
-              <a:t>Fifth level</a:t>
-            </a:r>
-          </a:p>
-        </p:txBody>
-      </p:sp>
-      <p:sp>
-        <p:nvSpPr>
-          <p:cNvPr id="6" name="Footer Placeholder 5"/>
-          <p:cNvSpPr>
-            <a:spLocks noGrp="1"/>
-          </p:cNvSpPr>
-          <p:nvPr>
-            <p:ph type="ftr" sz="quarter" idx="4"/>
-          </p:nvPr>
-        </p:nvSpPr>
-        <p:spPr>
-          <a:xfrm>
-            <a:off x="0" y="8685213"/>
-            <a:ext cx="2971800" cy="458787"/>
-          </a:xfrm>
-          <a:prstGeom prst="rect">
-            <a:avLst/>
-          </a:prstGeom>
-        </p:spPr>
-        <p:txBody>
-          <a:bodyPr vert="horz" lIns="91440" tIns="45720" rIns="91440" bIns="45720" rtlCol="0" anchor="b"/>
-          <a:lstStyle>
-            <a:lvl1pPr algn="l">
-              <a:defRPr sz="1200"/>
-            </a:lvl1pPr>
-          </a:lstStyle>
-          <a:p>
-            <a:endParaRPr lang="en-US"/>
-          </a:p>
-        </p:txBody>
-      </p:sp>
-      <p:sp>
-        <p:nvSpPr>
-          <p:cNvPr id="7" name="Slide Number Placeholder 6"/>
-          <p:cNvSpPr>
-            <a:spLocks noGrp="1"/>
-          </p:cNvSpPr>
-          <p:nvPr>
-            <p:ph type="sldNum" sz="quarter" idx="5"/>
-          </p:nvPr>
-        </p:nvSpPr>
-        <p:spPr>
-          <a:xfrm>
-            <a:off x="3884613" y="8685213"/>
-            <a:ext cx="2971800" cy="458787"/>
-          </a:xfrm>
-          <a:prstGeom prst="rect">
-            <a:avLst/>
-          </a:prstGeom>
-        </p:spPr>
-        <p:txBody>
-          <a:bodyPr vert="horz" lIns="91440" tIns="45720" rIns="91440" bIns="45720" rtlCol="0" anchor="b"/>
-          <a:lstStyle>
-            <a:lvl1pPr algn="r">
-              <a:defRPr sz="1200"/>
-            </a:lvl1pPr>
-          </a:lstStyle>
-          <a:p>
-            <a:fld id="{CE5E9CC1-C706-0F49-92D6-E571CC5EEA8F}" type="slidenum">
-              <a:rPr lang="en-US"/>
-              <a:t>‹#›</a:t>
-            </a:fld>
-            <a:endParaRPr lang="en-US"/>
-          </a:p>
-        </p:txBody>
-      </p:sp>
     </p:spTree>
     <p:extLst>
       <p:ext uri="{BB962C8B-B14F-4D97-AF65-F5344CB8AC3E}">
-        <p14:creationId xmlns:p14="http://schemas.microsoft.com/office/powerpoint/2010/main" val="1024086991"/>
+        <p14:creationId xmlns:p14="http://schemas.microsoft.com/office/powerpoint/2010/main" val="1248708940"/>
       </p:ext>
     </p:extLst>
   </p:cSld>
@@ -562,7 +338,6 @@
               <a:rPr lang="en-US" dirty="0"/>
               <a:t>Integrante A. Presentar el tema 14: una API con caché. Decir en una frase qué se va a ver: una API REST de productos con Redis como caché y PostgreSQL como base de datos, la estrategia de pruebas, los casos, la demo y los resultados. Tiempo del bloque A: 3 minutos.</a:t>
             </a:r>
-            <a:endParaRPr lang="en-US" dirty="0"/>
           </a:p>
         </p:txBody>
       </p:sp>
@@ -650,7 +425,6 @@
               <a:rPr lang="en-US" dirty="0"/>
               <a:t>Antes de exponer: npm run infra:up y npm start en una terminal, para que la API esté arriba. A (unos 2 min): dos GET al mismo producto mostrando el header X-Cache MISS y luego HIT, y el log de la API; luego POST, PUT y otra lectura que vuelve a ser MISS. B (unos 4 min): escenario CP-05 detiene Redis y muestra BYPASS en milisegundos, 404 y 400 siguen funcionando y /health dice degraded; CP-08 lo levanta y la caché se reconstruye; CP-06 solo si queda tiempo, porque espera el TTL de 60 s. C (unos 2 min): npm test, mostrar 3 suites y 6 pruebas aprobadas, abrir el reporte JSON y una evidencia. CP-05 dentro de la suite detiene y vuelve a levantar el contenedor de Redis automáticamente.</a:t>
             </a:r>
-            <a:endParaRPr lang="en-US" dirty="0"/>
           </a:p>
         </p:txBody>
       </p:sp>
@@ -738,7 +512,6 @@
               <a:rPr lang="en-US" dirty="0"/>
               <a:t>Integrante C. Ejecución del 4 de octubre de 2026 sobre un entorno limpio (npm run infra:reset). Jest: 3 suites y 6 pruebas aprobadas, ninguna fallida. CP-06 y CP-08 se ejecutaron con sus scripts y también terminaron en APROBADO. La tabla muestra cuatro casos representativos; la comparación completa de esperado contra obtenido está en la estrategia, sección 11, y en la matriz. Cómo leer un fallo: Jest devuelve código distinto de cero y el reporte JSON guarda el mensaje de error de la aserción que no se cumplió.</a:t>
             </a:r>
-            <a:endParaRPr lang="en-US" dirty="0"/>
           </a:p>
         </p:txBody>
       </p:sp>
@@ -826,7 +599,6 @@
               <a:rPr lang="en-US" dirty="0"/>
               <a:t>Integrante C. Valores tomados del log de la API durante los escenarios. Con Redis detenido el BYPASS es casi tan rápido como un MISS porque el comando falla de inmediato (no hay cola fuera de línea). No se sacan conclusiones de rendimiento: son mediciones individuales, sin carga ni percentiles. La pregunta interesante es qué pasa si Redis no está caído sino lento: eso es el hallazgo de la siguiente diapositiva.</a:t>
             </a:r>
-            <a:endParaRPr lang="en-US" dirty="0"/>
           </a:p>
         </p:txBody>
       </p:sp>
@@ -914,7 +686,6 @@
               <a:rPr lang="en-US" dirty="0"/>
               <a:t>Integrante C (medición hecha por B con npm run hallazgo:cliente-redis). El cliente redis por defecto tiene una cola fuera de línea: si Redis no está, el comando espera a que se conecte. Con Redis detenido la petición queda bloqueada 5 s y luego lanza una excepción, que sin manejo sería un 500 aunque la BD esté bien. Con Redis congelado la conexión sigue abierta y la espera no tiene límite. Desactivar la cola solo arregla el caso detenido; el congelado lo cubre únicamente el timeout por comando. Con las dos medidas el peor caso queda en REDIS_COMMAND_TIMEOUT_MS (500 ms), por debajo del objetivo de 1 s.</a:t>
             </a:r>
-            <a:endParaRPr lang="en-US" dirty="0"/>
           </a:p>
         </p:txBody>
       </p:sp>
@@ -1002,7 +773,6 @@
               <a:rPr lang="en-US" dirty="0"/>
               <a:t>Integrante C. Cerrar con las cuatro ideas. La tercera es el aprendizaje principal: que la API sobreviva a la caída de la caché no viene gratis con el patrón, depende de cómo se configura el cliente, y eso solo se descubrió probando contra el Redis real. Límite: la suite limpia la tabla productos y vacía Redis, así que solo debe correr en el entorno de laboratorio.</a:t>
             </a:r>
-            <a:endParaRPr lang="en-US" dirty="0"/>
           </a:p>
         </p:txBody>
       </p:sp>
@@ -1090,7 +860,6 @@
               <a:rPr lang="en-US" dirty="0"/>
               <a:t>Los tres. Un minuto de preguntas. Recordar que el docente puede preguntarle a cualquiera sobre cualquier parte: la arquitectura, el código, la configuración o los casos.</a:t>
             </a:r>
-            <a:endParaRPr lang="en-US" dirty="0"/>
           </a:p>
         </p:txBody>
       </p:sp>
@@ -1178,7 +947,6 @@
               <a:rPr lang="en-US" dirty="0"/>
               <a:t>Integrante A. Son los cuatro comportamientos que pide el tema 14 de la guía. Cada tarjeta dice qué caso de prueba lo demuestra, para que se vea desde el inicio que todo lo pedido tiene un caso asociado.</a:t>
             </a:r>
-            <a:endParaRPr lang="en-US" dirty="0"/>
           </a:p>
         </p:txBody>
       </p:sp>
@@ -1266,7 +1034,6 @@
               <a:rPr lang="en-US" dirty="0"/>
               <a:t>Integrante A. Tres componentes: la API en Node con Express, Redis como caché y PostgreSQL como fuente de verdad, ambos en contenedores. Cache-aside significa que la API decide cuándo leer, llenar e invalidar la caché; Redis y PostgreSQL nunca hablan entre sí. Se eligió frente a write-through (escribir en caché y BD a la vez) y write-behind (escribir en caché y luego en BD) porque es el más simple y la BD sigue siendo la fuente de verdad. El header X-Cache existe para que las pruebas y la demo puedan comprobar de dónde salió cada respuesta. Señalar PI-1 a PI-4 en el diagrama.</a:t>
             </a:r>
-            <a:endParaRPr lang="en-US" dirty="0"/>
           </a:p>
         </p:txBody>
       </p:sp>
@@ -1354,7 +1121,6 @@
               <a:rPr lang="en-US" dirty="0"/>
               <a:t>Integrante A. En el MISS, pg devuelve el precio NUMERIC como string ("189900.00"); normalizar() lo convierte a número en un solo punto, antes de cachear y antes de responder. Por eso el HIT devuelve exactamente el mismo JSON que el MISS (riesgo R5, caso CP-01). Si el producto no existe se responde 404 y no se guarda nada en Redis (R4, CP-04). Las consultas son parametrizadas ($1), así que el id nunca se concatena en el SQL.</a:t>
             </a:r>
-            <a:endParaRPr lang="en-US" dirty="0"/>
           </a:p>
         </p:txBody>
       </p:sp>
@@ -1442,7 +1208,6 @@
               <a:rPr lang="en-US" dirty="0"/>
               <a:t>Integrante A. Se invalida (DEL) en lugar de actualizar la llave porque así la caché solo se llena desde la BD y se evita que dos escrituras concurrentes dejen en Redis un valor distinto al de la BD. Se borra después de escribir en la BD (R1, CP-02). Si el DEL falla, se registra en el log y el dato viejo dura como máximo el TTL. Con Redis caído, el módulo de caché no lanza excepciones: devuelve un estado ERROR y la API responde desde PostgreSQL con BYPASS (R3, CP-05). Aquí termina el bloque de A; pasa la palabra a B.</a:t>
             </a:r>
-            <a:endParaRPr lang="en-US" dirty="0"/>
           </a:p>
         </p:txBody>
       </p:sp>
@@ -1530,7 +1295,6 @@
               <a:rPr lang="en-US" dirty="0"/>
               <a:t>Integrante B. La estrategia completa tiene los 10 elementos que pide la guía y se definió antes de ejecutar. Aquí van las cuatro decisiones que más pesan. Se usan componentes reales porque un mock no reproduce el TTL, el desalojo ni los errores de conexión. Las fallas se provocan sobre los contenedores reales sin tocar el código de la API. Cada prueba deja Redis vacío y la tabla con los 4 productos semilla, así no depende del orden de ejecución. Herramientas: Jest y Supertest para la suite, Docker CLI para la caída y scripts en Bash para los escenarios manuales.</a:t>
             </a:r>
-            <a:endParaRPr lang="en-US" dirty="0"/>
           </a:p>
         </p:txBody>
       </p:sp>
@@ -1618,7 +1382,6 @@
               <a:rPr lang="en-US" dirty="0"/>
               <a:t>Integrante B. Estos son los cuatro puntos donde puede fallar la integración. PI-1 y PI-2 son conexiones reales de la API; PI-3 es el contrato HTTP que ve el cliente; PI-4 es la coherencia entre caché y BD, que no se puede observar en una conexión sino comparando lo que responde la API con lo que hay en PostgreSQL.</a:t>
             </a:r>
-            <a:endParaRPr lang="en-US" dirty="0"/>
           </a:p>
         </p:txBody>
       </p:sp>
@@ -1706,7 +1469,6 @@
               <a:rPr lang="en-US" dirty="0"/>
               <a:t>Integrante B. Cada riesgo tiene una mitigación en el código o la configuración y al menos un caso que la verifica. R2 no se elimina, se acepta y se acota con el TTL: una escritura que no pasa por la API no puede invalidar la caché. R6: el SET lleva EX en la misma operación, así nunca queda una llave sin expiración; además Redis tiene maxmemory de 64 MB con desalojo allkeys-lru y no persiste en disco porque es una caché, no la fuente de verdad. R7 apareció durante la implementación y se verificó manualmente, pero no tiene caso formal.</a:t>
             </a:r>
-            <a:endParaRPr lang="en-US" dirty="0"/>
           </a:p>
         </p:txBody>
       </p:sp>
@@ -1794,7 +1556,6 @@
               <a:rPr lang="en-US" dirty="0"/>
               <a:t>Integrante B. La matriz completa tiene los 12 campos de la guía para cada caso y relaciona cada uno con su riesgo y su punto de integración. Integración: el caso prueba la colaboración entre la API y uno o dos componentes. Sistema: CP-07 y CP-08 recorren un flujo completo de principio a fin con todo el stack levantado. Los 6 casos Jest corren con npm test; CP-06 y CP-08 se ejecutan con scripts porque dependen de esperar el TTL o de reiniciar Redis. Aquí termina el bloque de B; empieza la demo.</a:t>
             </a:r>
-            <a:endParaRPr lang="en-US" dirty="0"/>
           </a:p>
         </p:txBody>
       </p:sp>
@@ -1872,6 +1633,7 @@
         <a:solidFill>
           <a:schemeClr val="tx1"/>
         </a:solidFill>
+        <a:effectLst/>
       </p:bgPr>
     </p:bg>
     <p:spTree>
@@ -1891,9 +1653,11 @@
       <p:sp>
         <p:nvSpPr>
           <p:cNvPr id="2" name="Text 0"/>
-          <p:cNvSpPr/>
+          <p:cNvSpPr>
+            <a:spLocks noGrp="1"/>
+          </p:cNvSpPr>
           <p:nvPr>
-            <p:ph idx="100" type="title" hasCustomPrompt="1"/>
+            <p:ph type="title" idx="100" hasCustomPrompt="1"/>
           </p:nvPr>
         </p:nvSpPr>
         <p:spPr>
@@ -1910,7 +1674,7 @@
         <p:txBody>
           <a:bodyPr wrap="square" rtlCol="0"/>
           <a:lstStyle>
-            <a:lvl1pPr algn="l" indent="0" marL="0">
+            <a:lvl1pPr marL="0" indent="0" algn="l">
               <a:buNone/>
               <a:defRPr lang="en-US" sz="4800" b="1" dirty="0">
                 <a:solidFill>
@@ -1920,7 +1684,7 @@
             </a:lvl1pPr>
           </a:lstStyle>
           <a:p>
-            <a:pPr algn="l" indent="0" marL="0">
+            <a:pPr marL="0" indent="0" algn="l">
               <a:buNone/>
             </a:pPr>
             <a:endParaRPr lang="en-US" sz="4800" dirty="0"/>
@@ -1930,9 +1694,11 @@
       <p:sp>
         <p:nvSpPr>
           <p:cNvPr id="3" name="Text 0"/>
-          <p:cNvSpPr/>
+          <p:cNvSpPr>
+            <a:spLocks noGrp="1"/>
+          </p:cNvSpPr>
           <p:nvPr>
-            <p:ph idx="101" type="body" hasCustomPrompt="1"/>
+            <p:ph type="body" idx="101" hasCustomPrompt="1"/>
           </p:nvPr>
         </p:nvSpPr>
         <p:spPr>
@@ -1949,7 +1715,7 @@
         <p:txBody>
           <a:bodyPr wrap="square" rtlCol="0"/>
           <a:lstStyle>
-            <a:lvl1pPr indent="0" marL="0">
+            <a:lvl1pPr marL="0" indent="0">
               <a:buNone/>
               <a:defRPr lang="en-US" sz="2200" dirty="0">
                 <a:solidFill>
@@ -1959,7 +1725,7 @@
             </a:lvl1pPr>
           </a:lstStyle>
           <a:p>
-            <a:pPr indent="0" marL="0">
+            <a:pPr marL="0" indent="0">
               <a:buNone/>
             </a:pPr>
             <a:endParaRPr lang="en-US" sz="2200" dirty="0"/>
@@ -1982,6 +1748,7 @@
         <a:solidFill>
           <a:schemeClr val="bg1"/>
         </a:solidFill>
+        <a:effectLst/>
       </p:bgPr>
     </p:bg>
     <p:spTree>
@@ -2001,9 +1768,11 @@
       <p:sp>
         <p:nvSpPr>
           <p:cNvPr id="2" name="Text 0"/>
-          <p:cNvSpPr/>
+          <p:cNvSpPr>
+            <a:spLocks noGrp="1"/>
+          </p:cNvSpPr>
           <p:nvPr>
-            <p:ph idx="100" type="title" hasCustomPrompt="1"/>
+            <p:ph type="title" idx="100" hasCustomPrompt="1"/>
           </p:nvPr>
         </p:nvSpPr>
         <p:spPr>
@@ -2020,7 +1789,7 @@
         <p:txBody>
           <a:bodyPr wrap="square" rtlCol="0"/>
           <a:lstStyle>
-            <a:lvl1pPr algn="l" indent="0" marL="0">
+            <a:lvl1pPr marL="0" indent="0" algn="l">
               <a:buNone/>
               <a:defRPr lang="en-US" sz="3600" b="1" dirty="0">
                 <a:solidFill>
@@ -2030,7 +1799,7 @@
             </a:lvl1pPr>
           </a:lstStyle>
           <a:p>
-            <a:pPr algn="l" indent="0" marL="0">
+            <a:pPr marL="0" indent="0" algn="l">
               <a:buNone/>
             </a:pPr>
             <a:endParaRPr lang="en-US" sz="3600" dirty="0"/>
@@ -2040,9 +1809,11 @@
       <p:sp>
         <p:nvSpPr>
           <p:cNvPr id="3" name="Text 0"/>
-          <p:cNvSpPr/>
+          <p:cNvSpPr>
+            <a:spLocks noGrp="1"/>
+          </p:cNvSpPr>
           <p:nvPr>
-            <p:ph idx="101" type="body" hasCustomPrompt="1"/>
+            <p:ph type="body" idx="101" hasCustomPrompt="1"/>
           </p:nvPr>
         </p:nvSpPr>
         <p:spPr>
@@ -2059,7 +1830,7 @@
         <p:txBody>
           <a:bodyPr wrap="square" rtlCol="0"/>
           <a:lstStyle>
-            <a:lvl1pPr indent="0" marL="0">
+            <a:lvl1pPr marL="0" indent="0">
               <a:buNone/>
               <a:defRPr lang="en-US" sz="1100" dirty="0">
                 <a:solidFill>
@@ -2069,7 +1840,7 @@
             </a:lvl1pPr>
           </a:lstStyle>
           <a:p>
-            <a:pPr indent="0" marL="0">
+            <a:pPr marL="0" indent="0">
               <a:buNone/>
             </a:pPr>
             <a:endParaRPr lang="en-US" sz="1100" dirty="0"/>
@@ -2079,9 +1850,11 @@
       <p:sp>
         <p:nvSpPr>
           <p:cNvPr id="4" name="Text 0"/>
-          <p:cNvSpPr/>
+          <p:cNvSpPr>
+            <a:spLocks noGrp="1"/>
+          </p:cNvSpPr>
           <p:nvPr>
-            <p:ph idx="102" type="body" hasCustomPrompt="1"/>
+            <p:ph type="body" idx="102" hasCustomPrompt="1"/>
           </p:nvPr>
         </p:nvSpPr>
         <p:spPr>
@@ -2098,7 +1871,7 @@
         <p:txBody>
           <a:bodyPr wrap="square" rtlCol="0"/>
           <a:lstStyle>
-            <a:lvl1pPr algn="r" indent="0" marL="0">
+            <a:lvl1pPr marL="0" indent="0" algn="r">
               <a:buNone/>
               <a:defRPr lang="en-US" sz="1100" dirty="0">
                 <a:solidFill>
@@ -2108,7 +1881,7 @@
             </a:lvl1pPr>
           </a:lstStyle>
           <a:p>
-            <a:pPr algn="r" indent="0" marL="0">
+            <a:pPr marL="0" indent="0" algn="r">
               <a:buNone/>
             </a:pPr>
             <a:endParaRPr lang="en-US" sz="1100" dirty="0"/>
@@ -2131,6 +1904,7 @@
         <a:solidFill>
           <a:schemeClr val="tx1"/>
         </a:solidFill>
+        <a:effectLst/>
       </p:bgPr>
     </p:bg>
     <p:spTree>
@@ -2150,9 +1924,11 @@
       <p:sp>
         <p:nvSpPr>
           <p:cNvPr id="2" name="Text 0"/>
-          <p:cNvSpPr/>
+          <p:cNvSpPr>
+            <a:spLocks noGrp="1"/>
+          </p:cNvSpPr>
           <p:nvPr>
-            <p:ph idx="100" type="title" hasCustomPrompt="1"/>
+            <p:ph type="title" idx="100" hasCustomPrompt="1"/>
           </p:nvPr>
         </p:nvSpPr>
         <p:spPr>
@@ -2169,7 +1945,7 @@
         <p:txBody>
           <a:bodyPr wrap="square" rtlCol="0"/>
           <a:lstStyle>
-            <a:lvl1pPr algn="l" indent="0" marL="0">
+            <a:lvl1pPr marL="0" indent="0" algn="l">
               <a:buNone/>
               <a:defRPr lang="en-US" sz="3600" b="1" dirty="0">
                 <a:solidFill>
@@ -2179,7 +1955,7 @@
             </a:lvl1pPr>
           </a:lstStyle>
           <a:p>
-            <a:pPr algn="l" indent="0" marL="0">
+            <a:pPr marL="0" indent="0" algn="l">
               <a:buNone/>
             </a:pPr>
             <a:endParaRPr lang="en-US" sz="3600" dirty="0"/>
@@ -2189,9 +1965,11 @@
       <p:sp>
         <p:nvSpPr>
           <p:cNvPr id="3" name="Text 0"/>
-          <p:cNvSpPr/>
+          <p:cNvSpPr>
+            <a:spLocks noGrp="1"/>
+          </p:cNvSpPr>
           <p:nvPr>
-            <p:ph idx="101" type="body" hasCustomPrompt="1"/>
+            <p:ph type="body" idx="101" hasCustomPrompt="1"/>
           </p:nvPr>
         </p:nvSpPr>
         <p:spPr>
@@ -2208,7 +1986,7 @@
         <p:txBody>
           <a:bodyPr wrap="square" rtlCol="0"/>
           <a:lstStyle>
-            <a:lvl1pPr indent="0" marL="0">
+            <a:lvl1pPr marL="0" indent="0">
               <a:buNone/>
               <a:defRPr lang="en-US" sz="1100" dirty="0">
                 <a:solidFill>
@@ -2218,7 +1996,7 @@
             </a:lvl1pPr>
           </a:lstStyle>
           <a:p>
-            <a:pPr indent="0" marL="0">
+            <a:pPr marL="0" indent="0">
               <a:buNone/>
             </a:pPr>
             <a:endParaRPr lang="en-US" sz="1100" dirty="0"/>
@@ -2228,9 +2006,11 @@
       <p:sp>
         <p:nvSpPr>
           <p:cNvPr id="4" name="Text 0"/>
-          <p:cNvSpPr/>
+          <p:cNvSpPr>
+            <a:spLocks noGrp="1"/>
+          </p:cNvSpPr>
           <p:nvPr>
-            <p:ph idx="102" type="body" hasCustomPrompt="1"/>
+            <p:ph type="body" idx="102" hasCustomPrompt="1"/>
           </p:nvPr>
         </p:nvSpPr>
         <p:spPr>
@@ -2247,7 +2027,7 @@
         <p:txBody>
           <a:bodyPr wrap="square" rtlCol="0"/>
           <a:lstStyle>
-            <a:lvl1pPr algn="r" indent="0" marL="0">
+            <a:lvl1pPr marL="0" indent="0" algn="r">
               <a:buNone/>
               <a:defRPr lang="en-US" sz="1100" dirty="0">
                 <a:solidFill>
@@ -2257,7 +2037,7 @@
             </a:lvl1pPr>
           </a:lstStyle>
           <a:p>
-            <a:pPr algn="r" indent="0" marL="0">
+            <a:pPr marL="0" indent="0" algn="r">
               <a:buNone/>
             </a:pPr>
             <a:endParaRPr lang="en-US" sz="1100" dirty="0"/>
@@ -2275,6 +2055,11 @@
 <file path=ppt/slideMasters/slideMaster1.xml><?xml version="1.0" encoding="utf-8"?>
 <p:sldMaster xmlns:a="http://schemas.openxmlformats.org/drawingml/2006/main" xmlns:r="http://schemas.openxmlformats.org/officeDocument/2006/relationships" xmlns:p="http://schemas.openxmlformats.org/presentationml/2006/main">
   <p:cSld>
+    <p:bg>
+      <p:bgRef idx="1001">
+        <a:schemeClr val="bg1"/>
+      </p:bgRef>
+    </p:bg>
     <p:spTree>
       <p:nvGrpSpPr>
         <p:cNvPr id="1" name=""/>
@@ -2572,9 +2357,11 @@
       <p:sp>
         <p:nvSpPr>
           <p:cNvPr id="2" name="Text 0"/>
-          <p:cNvSpPr/>
+          <p:cNvSpPr>
+            <a:spLocks noGrp="1"/>
+          </p:cNvSpPr>
           <p:nvPr>
-            <p:ph idx="100" type="title" hasCustomPrompt="1"/>
+            <p:ph type="title" idx="100" hasCustomPrompt="1"/>
           </p:nvPr>
         </p:nvSpPr>
         <p:spPr>
@@ -2592,7 +2379,7 @@
           <a:bodyPr wrap="square" lIns="0" tIns="0" rIns="0" bIns="0" rtlCol="0" anchor="b"/>
           <a:lstStyle/>
           <a:p>
-            <a:pPr algn="l" indent="0" marL="0">
+            <a:pPr marL="0" indent="0" algn="l">
               <a:buNone/>
             </a:pPr>
             <a:r>
@@ -2610,9 +2397,11 @@
       <p:sp>
         <p:nvSpPr>
           <p:cNvPr id="3" name="Text 0"/>
-          <p:cNvSpPr/>
+          <p:cNvSpPr>
+            <a:spLocks noGrp="1"/>
+          </p:cNvSpPr>
           <p:nvPr>
-            <p:ph idx="101" type="body" hasCustomPrompt="1"/>
+            <p:ph type="body" idx="101" hasCustomPrompt="1"/>
           </p:nvPr>
         </p:nvSpPr>
         <p:spPr>
@@ -2630,7 +2419,7 @@
           <a:bodyPr wrap="square" lIns="0" tIns="0" rIns="0" bIns="0" rtlCol="0" anchor="t"/>
           <a:lstStyle/>
           <a:p>
-            <a:pPr indent="0" marL="0">
+            <a:pPr marL="0" indent="0">
               <a:buNone/>
             </a:pPr>
             <a:r>
@@ -2666,7 +2455,7 @@
           <a:bodyPr wrap="square" lIns="0" tIns="0" rIns="0" bIns="0" rtlCol="0" anchor="t"/>
           <a:lstStyle/>
           <a:p>
-            <a:pPr indent="0" marL="0">
+            <a:pPr marL="0" indent="0">
               <a:buNone/>
             </a:pPr>
             <a:r>
@@ -2705,7 +2494,7 @@
           <a:bodyPr wrap="square" lIns="0" tIns="0" rIns="0" bIns="0" rtlCol="0" anchor="t"/>
           <a:lstStyle/>
           <a:p>
-            <a:pPr indent="0" marL="0">
+            <a:pPr marL="0" indent="0">
               <a:buNone/>
             </a:pPr>
             <a:r>
@@ -2744,7 +2533,7 @@
           <a:bodyPr wrap="square" lIns="0" tIns="0" rIns="0" bIns="0" rtlCol="0" anchor="t"/>
           <a:lstStyle/>
           <a:p>
-            <a:pPr indent="0" marL="0">
+            <a:pPr marL="0" indent="0">
               <a:buNone/>
             </a:pPr>
             <a:r>
@@ -2770,8 +2559,8 @@
         </p:nvSpPr>
         <p:spPr>
           <a:xfrm>
-            <a:off x="7589520" y="5623560"/>
-            <a:ext cx="4053535" cy="320040"/>
+            <a:off x="8366234" y="5623560"/>
+            <a:ext cx="3276821" cy="320040"/>
           </a:xfrm>
           <a:prstGeom prst="rect">
             <a:avLst/>
@@ -2783,7 +2572,7 @@
           <a:bodyPr wrap="square" lIns="0" tIns="0" rIns="0" bIns="0" rtlCol="0" anchor="t"/>
           <a:lstStyle/>
           <a:p>
-            <a:pPr algn="r" indent="0" marL="0">
+            <a:pPr marL="0" indent="0" algn="r">
               <a:buNone/>
             </a:pPr>
             <a:r>
@@ -2795,7 +2584,39 @@
                 <a:ea typeface="Arial" pitchFamily="34" charset="-122"/>
                 <a:cs typeface="Arial" pitchFamily="34" charset="-120"/>
               </a:rPr>
-              <a:t>[Integrante A] · [Integrante B] · [Integrante C]</a:t>
+              <a:t>Sebastian Villa Castillo</a:t>
+            </a:r>
+          </a:p>
+          <a:p>
+            <a:pPr marL="0" indent="0" algn="r">
+              <a:buNone/>
+            </a:pPr>
+            <a:r>
+              <a:rPr lang="en-US" sz="1400" dirty="0">
+                <a:solidFill>
+                  <a:schemeClr val="accent6"/>
+                </a:solidFill>
+                <a:latin typeface="Arial" pitchFamily="34" charset="0"/>
+                <a:ea typeface="Arial" pitchFamily="34" charset="-122"/>
+                <a:cs typeface="Arial" pitchFamily="34" charset="-120"/>
+              </a:rPr>
+              <a:t> Jhon Eduardo Zabala Garzon </a:t>
+            </a:r>
+          </a:p>
+          <a:p>
+            <a:pPr marL="0" indent="0" algn="r">
+              <a:buNone/>
+            </a:pPr>
+            <a:r>
+              <a:rPr lang="en-US" sz="1400" dirty="0">
+                <a:solidFill>
+                  <a:schemeClr val="accent6"/>
+                </a:solidFill>
+                <a:latin typeface="Arial" pitchFamily="34" charset="0"/>
+                <a:ea typeface="Arial" pitchFamily="34" charset="-122"/>
+                <a:cs typeface="Arial" pitchFamily="34" charset="-120"/>
+              </a:rPr>
+              <a:t> Robin Alexander Montoya Velasquez</a:t>
             </a:r>
             <a:endParaRPr lang="en-US" sz="1400" dirty="0"/>
           </a:p>
@@ -2829,9 +2650,11 @@
       <p:sp>
         <p:nvSpPr>
           <p:cNvPr id="2" name="Text 0"/>
-          <p:cNvSpPr/>
+          <p:cNvSpPr>
+            <a:spLocks noGrp="1"/>
+          </p:cNvSpPr>
           <p:nvPr>
-            <p:ph idx="100" type="title" hasCustomPrompt="1"/>
+            <p:ph type="title" idx="100" hasCustomPrompt="1"/>
           </p:nvPr>
         </p:nvSpPr>
         <p:spPr>
@@ -2849,7 +2672,7 @@
           <a:bodyPr wrap="square" lIns="0" tIns="0" rIns="0" bIns="0" rtlCol="0" anchor="ctr"/>
           <a:lstStyle/>
           <a:p>
-            <a:pPr algn="l" indent="0" marL="0">
+            <a:pPr marL="0" indent="0" algn="l">
               <a:buNone/>
             </a:pPr>
             <a:r>
@@ -2867,9 +2690,11 @@
       <p:sp>
         <p:nvSpPr>
           <p:cNvPr id="3" name="Text 0"/>
-          <p:cNvSpPr/>
+          <p:cNvSpPr>
+            <a:spLocks noGrp="1"/>
+          </p:cNvSpPr>
           <p:nvPr>
-            <p:ph idx="101" type="body" hasCustomPrompt="1"/>
+            <p:ph type="body" idx="101" hasCustomPrompt="1"/>
           </p:nvPr>
         </p:nvSpPr>
         <p:spPr>
@@ -2887,7 +2712,7 @@
           <a:bodyPr wrap="square" lIns="0" tIns="0" rIns="0" bIns="0" rtlCol="0" anchor="ctr"/>
           <a:lstStyle/>
           <a:p>
-            <a:pPr indent="0" marL="0">
+            <a:pPr marL="0" indent="0">
               <a:buNone/>
             </a:pPr>
             <a:r>
@@ -2905,9 +2730,11 @@
       <p:sp>
         <p:nvSpPr>
           <p:cNvPr id="4" name="Text 0"/>
-          <p:cNvSpPr/>
+          <p:cNvSpPr>
+            <a:spLocks noGrp="1"/>
+          </p:cNvSpPr>
           <p:nvPr>
-            <p:ph idx="102" type="body" hasCustomPrompt="1"/>
+            <p:ph type="body" idx="102" hasCustomPrompt="1"/>
           </p:nvPr>
         </p:nvSpPr>
         <p:spPr>
@@ -2925,7 +2752,7 @@
           <a:bodyPr wrap="square" lIns="0" tIns="0" rIns="0" bIns="0" rtlCol="0" anchor="ctr"/>
           <a:lstStyle/>
           <a:p>
-            <a:pPr algn="r" indent="0" marL="0">
+            <a:pPr marL="0" indent="0" algn="r">
               <a:buNone/>
             </a:pPr>
             <a:r>
@@ -2961,6 +2788,13 @@
           </a:solidFill>
           <a:ln/>
         </p:spPr>
+        <p:txBody>
+          <a:bodyPr/>
+          <a:lstStyle/>
+          <a:p>
+            <a:endParaRPr lang="es-ES_tradnl"/>
+          </a:p>
+        </p:txBody>
       </p:sp>
       <p:sp>
         <p:nvSpPr>
@@ -2983,7 +2817,7 @@
           <a:bodyPr wrap="square" lIns="0" tIns="0" rIns="0" bIns="0" rtlCol="0" anchor="t"/>
           <a:lstStyle/>
           <a:p>
-            <a:pPr indent="0" marL="0">
+            <a:pPr marL="0" indent="0">
               <a:buNone/>
             </a:pPr>
             <a:r>
@@ -3022,7 +2856,7 @@
           <a:bodyPr wrap="square" lIns="0" tIns="0" rIns="0" bIns="0" rtlCol="0" anchor="t"/>
           <a:lstStyle/>
           <a:p>
-            <a:pPr indent="0" marL="0">
+            <a:pPr marL="0" indent="0">
               <a:buNone/>
             </a:pPr>
             <a:r>
@@ -3061,7 +2895,7 @@
           <a:bodyPr wrap="square" lIns="0" tIns="0" rIns="0" bIns="0" rtlCol="0" anchor="t"/>
           <a:lstStyle/>
           <a:p>
-            <a:pPr indent="0" marL="0">
+            <a:pPr marL="0" indent="0">
               <a:spcAft>
                 <a:spcPts val="1000"/>
               </a:spcAft>
@@ -3081,7 +2915,7 @@
             <a:endParaRPr lang="en-US" sz="1400" dirty="0"/>
           </a:p>
           <a:p>
-            <a:pPr indent="0" marL="0">
+            <a:pPr marL="0" indent="0">
               <a:spcAft>
                 <a:spcPts val="1000"/>
               </a:spcAft>
@@ -3101,7 +2935,7 @@
             <a:endParaRPr lang="en-US" sz="1400" dirty="0"/>
           </a:p>
           <a:p>
-            <a:pPr indent="0" marL="0">
+            <a:pPr marL="0" indent="0">
               <a:spcAft>
                 <a:spcPts val="1000"/>
               </a:spcAft>
@@ -3121,7 +2955,7 @@
             <a:endParaRPr lang="en-US" sz="1400" dirty="0"/>
           </a:p>
           <a:p>
-            <a:pPr indent="0" marL="0">
+            <a:pPr marL="0" indent="0">
               <a:spcAft>
                 <a:spcPts val="1000"/>
               </a:spcAft>
@@ -3163,6 +2997,13 @@
           </a:solidFill>
           <a:ln/>
         </p:spPr>
+        <p:txBody>
+          <a:bodyPr/>
+          <a:lstStyle/>
+          <a:p>
+            <a:endParaRPr lang="es-ES_tradnl"/>
+          </a:p>
+        </p:txBody>
       </p:sp>
       <p:sp>
         <p:nvSpPr>
@@ -3185,7 +3026,7 @@
           <a:bodyPr wrap="square" lIns="0" tIns="0" rIns="0" bIns="0" rtlCol="0" anchor="t"/>
           <a:lstStyle/>
           <a:p>
-            <a:pPr indent="0" marL="0">
+            <a:pPr marL="0" indent="0">
               <a:buNone/>
             </a:pPr>
             <a:r>
@@ -3224,7 +3065,7 @@
           <a:bodyPr wrap="square" lIns="0" tIns="0" rIns="0" bIns="0" rtlCol="0" anchor="t"/>
           <a:lstStyle/>
           <a:p>
-            <a:pPr indent="0" marL="0">
+            <a:pPr marL="0" indent="0">
               <a:buNone/>
             </a:pPr>
             <a:r>
@@ -3263,7 +3104,7 @@
           <a:bodyPr wrap="square" lIns="0" tIns="0" rIns="0" bIns="0" rtlCol="0" anchor="t"/>
           <a:lstStyle/>
           <a:p>
-            <a:pPr indent="0" marL="0">
+            <a:pPr marL="0" indent="0">
               <a:spcAft>
                 <a:spcPts val="1000"/>
               </a:spcAft>
@@ -3283,7 +3124,7 @@
             <a:endParaRPr lang="en-US" sz="1400" dirty="0"/>
           </a:p>
           <a:p>
-            <a:pPr indent="0" marL="0">
+            <a:pPr marL="0" indent="0">
               <a:spcAft>
                 <a:spcPts val="1000"/>
               </a:spcAft>
@@ -3303,7 +3144,7 @@
             <a:endParaRPr lang="en-US" sz="1400" dirty="0"/>
           </a:p>
           <a:p>
-            <a:pPr indent="0" marL="0">
+            <a:pPr marL="0" indent="0">
               <a:spcAft>
                 <a:spcPts val="1000"/>
               </a:spcAft>
@@ -3323,7 +3164,7 @@
             <a:endParaRPr lang="en-US" sz="1400" dirty="0"/>
           </a:p>
           <a:p>
-            <a:pPr indent="0" marL="0">
+            <a:pPr marL="0" indent="0">
               <a:spcAft>
                 <a:spcPts val="1000"/>
               </a:spcAft>
@@ -3365,6 +3206,13 @@
           </a:solidFill>
           <a:ln/>
         </p:spPr>
+        <p:txBody>
+          <a:bodyPr/>
+          <a:lstStyle/>
+          <a:p>
+            <a:endParaRPr lang="es-ES_tradnl"/>
+          </a:p>
+        </p:txBody>
       </p:sp>
       <p:sp>
         <p:nvSpPr>
@@ -3387,7 +3235,7 @@
           <a:bodyPr wrap="square" lIns="0" tIns="0" rIns="0" bIns="0" rtlCol="0" anchor="t"/>
           <a:lstStyle/>
           <a:p>
-            <a:pPr indent="0" marL="0">
+            <a:pPr marL="0" indent="0">
               <a:buNone/>
             </a:pPr>
             <a:r>
@@ -3426,7 +3274,7 @@
           <a:bodyPr wrap="square" lIns="0" tIns="0" rIns="0" bIns="0" rtlCol="0" anchor="t"/>
           <a:lstStyle/>
           <a:p>
-            <a:pPr indent="0" marL="0">
+            <a:pPr marL="0" indent="0">
               <a:buNone/>
             </a:pPr>
             <a:r>
@@ -3465,7 +3313,7 @@
           <a:bodyPr wrap="square" lIns="0" tIns="0" rIns="0" bIns="0" rtlCol="0" anchor="t"/>
           <a:lstStyle/>
           <a:p>
-            <a:pPr indent="0" marL="0">
+            <a:pPr marL="0" indent="0">
               <a:spcAft>
                 <a:spcPts val="1000"/>
               </a:spcAft>
@@ -3485,7 +3333,7 @@
             <a:endParaRPr lang="en-US" sz="1400" dirty="0"/>
           </a:p>
           <a:p>
-            <a:pPr indent="0" marL="0">
+            <a:pPr marL="0" indent="0">
               <a:spcAft>
                 <a:spcPts val="1000"/>
               </a:spcAft>
@@ -3505,7 +3353,7 @@
             <a:endParaRPr lang="en-US" sz="1400" dirty="0"/>
           </a:p>
           <a:p>
-            <a:pPr indent="0" marL="0">
+            <a:pPr marL="0" indent="0">
               <a:spcAft>
                 <a:spcPts val="1000"/>
               </a:spcAft>
@@ -3525,7 +3373,7 @@
             <a:endParaRPr lang="en-US" sz="1400" dirty="0"/>
           </a:p>
           <a:p>
-            <a:pPr indent="0" marL="0">
+            <a:pPr marL="0" indent="0">
               <a:spcAft>
                 <a:spcPts val="1000"/>
               </a:spcAft>
@@ -3574,9 +3422,11 @@
       <p:sp>
         <p:nvSpPr>
           <p:cNvPr id="2" name="Text 0"/>
-          <p:cNvSpPr/>
+          <p:cNvSpPr>
+            <a:spLocks noGrp="1"/>
+          </p:cNvSpPr>
           <p:nvPr>
-            <p:ph idx="100" type="title" hasCustomPrompt="1"/>
+            <p:ph type="title" idx="100" hasCustomPrompt="1"/>
           </p:nvPr>
         </p:nvSpPr>
         <p:spPr>
@@ -3594,7 +3444,7 @@
           <a:bodyPr wrap="square" lIns="0" tIns="0" rIns="0" bIns="0" rtlCol="0" anchor="ctr"/>
           <a:lstStyle/>
           <a:p>
-            <a:pPr algn="l" indent="0" marL="0">
+            <a:pPr marL="0" indent="0" algn="l">
               <a:buNone/>
             </a:pPr>
             <a:r>
@@ -3612,9 +3462,11 @@
       <p:sp>
         <p:nvSpPr>
           <p:cNvPr id="3" name="Text 0"/>
-          <p:cNvSpPr/>
+          <p:cNvSpPr>
+            <a:spLocks noGrp="1"/>
+          </p:cNvSpPr>
           <p:nvPr>
-            <p:ph idx="101" type="body" hasCustomPrompt="1"/>
+            <p:ph type="body" idx="101" hasCustomPrompt="1"/>
           </p:nvPr>
         </p:nvSpPr>
         <p:spPr>
@@ -3632,7 +3484,7 @@
           <a:bodyPr wrap="square" lIns="0" tIns="0" rIns="0" bIns="0" rtlCol="0" anchor="ctr"/>
           <a:lstStyle/>
           <a:p>
-            <a:pPr indent="0" marL="0">
+            <a:pPr marL="0" indent="0">
               <a:buNone/>
             </a:pPr>
             <a:r>
@@ -3650,9 +3502,11 @@
       <p:sp>
         <p:nvSpPr>
           <p:cNvPr id="4" name="Text 0"/>
-          <p:cNvSpPr/>
+          <p:cNvSpPr>
+            <a:spLocks noGrp="1"/>
+          </p:cNvSpPr>
           <p:nvPr>
-            <p:ph idx="102" type="body" hasCustomPrompt="1"/>
+            <p:ph type="body" idx="102" hasCustomPrompt="1"/>
           </p:nvPr>
         </p:nvSpPr>
         <p:spPr>
@@ -3670,7 +3524,7 @@
           <a:bodyPr wrap="square" lIns="0" tIns="0" rIns="0" bIns="0" rtlCol="0" anchor="ctr"/>
           <a:lstStyle/>
           <a:p>
-            <a:pPr algn="r" indent="0" marL="0">
+            <a:pPr marL="0" indent="0" algn="r">
               <a:buNone/>
             </a:pPr>
             <a:r>
@@ -3706,6 +3560,13 @@
           </a:solidFill>
           <a:ln/>
         </p:spPr>
+        <p:txBody>
+          <a:bodyPr/>
+          <a:lstStyle/>
+          <a:p>
+            <a:endParaRPr lang="es-ES_tradnl"/>
+          </a:p>
+        </p:txBody>
       </p:sp>
       <p:sp>
         <p:nvSpPr>
@@ -3728,7 +3589,7 @@
           <a:bodyPr wrap="square" lIns="0" tIns="0" rIns="0" bIns="0" rtlCol="0" anchor="ctr"/>
           <a:lstStyle/>
           <a:p>
-            <a:pPr indent="0" marL="0">
+            <a:pPr marL="0" indent="0">
               <a:buNone/>
             </a:pPr>
             <a:r>
@@ -3767,7 +3628,7 @@
           <a:bodyPr wrap="square" lIns="0" tIns="0" rIns="0" bIns="0" rtlCol="0" anchor="t"/>
           <a:lstStyle/>
           <a:p>
-            <a:pPr indent="0" marL="0">
+            <a:pPr marL="0" indent="0">
               <a:buNone/>
             </a:pPr>
             <a:r>
@@ -3806,6 +3667,13 @@
           </a:solidFill>
           <a:ln/>
         </p:spPr>
+        <p:txBody>
+          <a:bodyPr/>
+          <a:lstStyle/>
+          <a:p>
+            <a:endParaRPr lang="es-ES_tradnl"/>
+          </a:p>
+        </p:txBody>
       </p:sp>
       <p:sp>
         <p:nvSpPr>
@@ -3828,7 +3696,7 @@
           <a:bodyPr wrap="square" lIns="0" tIns="0" rIns="0" bIns="0" rtlCol="0" anchor="ctr"/>
           <a:lstStyle/>
           <a:p>
-            <a:pPr indent="0" marL="0">
+            <a:pPr marL="0" indent="0">
               <a:buNone/>
             </a:pPr>
             <a:r>
@@ -3867,7 +3735,7 @@
           <a:bodyPr wrap="square" lIns="0" tIns="0" rIns="0" bIns="0" rtlCol="0" anchor="t"/>
           <a:lstStyle/>
           <a:p>
-            <a:pPr indent="0" marL="0">
+            <a:pPr marL="0" indent="0">
               <a:buNone/>
             </a:pPr>
             <a:r>
@@ -3906,6 +3774,13 @@
           </a:solidFill>
           <a:ln/>
         </p:spPr>
+        <p:txBody>
+          <a:bodyPr/>
+          <a:lstStyle/>
+          <a:p>
+            <a:endParaRPr lang="es-ES_tradnl"/>
+          </a:p>
+        </p:txBody>
       </p:sp>
       <p:sp>
         <p:nvSpPr>
@@ -3928,7 +3803,7 @@
           <a:bodyPr wrap="square" lIns="0" tIns="0" rIns="0" bIns="0" rtlCol="0" anchor="ctr"/>
           <a:lstStyle/>
           <a:p>
-            <a:pPr indent="0" marL="0">
+            <a:pPr marL="0" indent="0">
               <a:buNone/>
             </a:pPr>
             <a:r>
@@ -3967,7 +3842,7 @@
           <a:bodyPr wrap="square" lIns="0" tIns="0" rIns="0" bIns="0" rtlCol="0" anchor="t"/>
           <a:lstStyle/>
           <a:p>
-            <a:pPr indent="0" marL="0">
+            <a:pPr marL="0" indent="0">
               <a:buNone/>
             </a:pPr>
             <a:r>
@@ -4006,6 +3881,13 @@
           </a:solidFill>
           <a:ln/>
         </p:spPr>
+        <p:txBody>
+          <a:bodyPr/>
+          <a:lstStyle/>
+          <a:p>
+            <a:endParaRPr lang="es-ES_tradnl"/>
+          </a:p>
+        </p:txBody>
       </p:sp>
       <p:sp>
         <p:nvSpPr>
@@ -4028,7 +3910,7 @@
           <a:bodyPr wrap="square" lIns="0" tIns="0" rIns="0" bIns="0" rtlCol="0" anchor="ctr"/>
           <a:lstStyle/>
           <a:p>
-            <a:pPr indent="0" marL="0">
+            <a:pPr marL="0" indent="0">
               <a:buNone/>
             </a:pPr>
             <a:r>
@@ -4067,7 +3949,7 @@
           <a:bodyPr wrap="square" lIns="0" tIns="0" rIns="0" bIns="0" rtlCol="0" anchor="t"/>
           <a:lstStyle/>
           <a:p>
-            <a:pPr indent="0" marL="0">
+            <a:pPr marL="0" indent="0">
               <a:buNone/>
             </a:pPr>
             <a:r>
@@ -4087,7 +3969,7 @@
       </p:sp>
       <p:graphicFrame>
         <p:nvGraphicFramePr>
-          <p:cNvPr id="12" name="Table 0"/>
+          <p:cNvPr id="17" name="Table 0"/>
           <p:cNvGraphicFramePr>
             <a:graphicFrameLocks noGrp="1"/>
           </p:cNvGraphicFramePr>
@@ -4101,16 +3983,34 @@
         </p:nvGraphicFramePr>
         <p:xfrm>
           <a:off x="548640" y="2926080"/>
-          <a:ext cx="11094415" cy="914400"/>
+          <a:ext cx="11094415" cy="2514600"/>
         </p:xfrm>
         <a:graphic>
           <a:graphicData uri="http://schemas.openxmlformats.org/drawingml/2006/table">
             <a:tbl>
               <a:tblPr/>
               <a:tblGrid>
-                <a:gridCol w="1005840"/>
-                <a:gridCol w="4206240"/>
-                <a:gridCol w="5882335"/>
+                <a:gridCol w="1005840">
+                  <a:extLst>
+                    <a:ext uri="{9D8B030D-6E8A-4147-A177-3AD203B41FA5}">
+                      <a16:colId xmlns:a16="http://schemas.microsoft.com/office/drawing/2014/main" val="20000"/>
+                    </a:ext>
+                  </a:extLst>
+                </a:gridCol>
+                <a:gridCol w="4206240">
+                  <a:extLst>
+                    <a:ext uri="{9D8B030D-6E8A-4147-A177-3AD203B41FA5}">
+                      <a16:colId xmlns:a16="http://schemas.microsoft.com/office/drawing/2014/main" val="20001"/>
+                    </a:ext>
+                  </a:extLst>
+                </a:gridCol>
+                <a:gridCol w="5882335">
+                  <a:extLst>
+                    <a:ext uri="{9D8B030D-6E8A-4147-A177-3AD203B41FA5}">
+                      <a16:colId xmlns:a16="http://schemas.microsoft.com/office/drawing/2014/main" val="20002"/>
+                    </a:ext>
+                  </a:extLst>
+                </a:gridCol>
               </a:tblGrid>
               <a:tr h="502920">
                 <a:tc>
@@ -4118,7 +4018,7 @@
                     <a:bodyPr/>
                     <a:lstStyle/>
                     <a:p>
-                      <a:pPr indent="0" marL="0">
+                      <a:pPr marL="0" indent="0">
                         <a:buNone/>
                       </a:pPr>
                       <a:r>
@@ -4139,7 +4039,7 @@
                       </a:endParaRPr>
                     </a:p>
                   </a:txBody>
-                  <a:tcPr marL="91440" marR="91440" marT="45720" marB="45720" anchor="ctr">
+                  <a:tcPr anchor="ctr">
                     <a:lnL w="9525" cap="flat" cmpd="sng" algn="ctr">
                       <a:solidFill>
                         <a:srgbClr val="D5D9DE"/>
@@ -4186,7 +4086,7 @@
                     <a:bodyPr/>
                     <a:lstStyle/>
                     <a:p>
-                      <a:pPr indent="0" marL="0">
+                      <a:pPr marL="0" indent="0">
                         <a:buNone/>
                       </a:pPr>
                       <a:r>
@@ -4207,7 +4107,7 @@
                       </a:endParaRPr>
                     </a:p>
                   </a:txBody>
-                  <a:tcPr marL="91440" marR="91440" marT="45720" marB="45720" anchor="ctr">
+                  <a:tcPr anchor="ctr">
                     <a:lnL w="9525" cap="flat" cmpd="sng" algn="ctr">
                       <a:solidFill>
                         <a:srgbClr val="D5D9DE"/>
@@ -4254,7 +4154,7 @@
                     <a:bodyPr/>
                     <a:lstStyle/>
                     <a:p>
-                      <a:pPr indent="0" marL="0">
+                      <a:pPr marL="0" indent="0">
                         <a:buNone/>
                       </a:pPr>
                       <a:r>
@@ -4275,7 +4175,7 @@
                       </a:endParaRPr>
                     </a:p>
                   </a:txBody>
-                  <a:tcPr marL="91440" marR="91440" marT="45720" marB="45720" anchor="ctr">
+                  <a:tcPr anchor="ctr">
                     <a:lnL w="9525" cap="flat" cmpd="sng" algn="ctr">
                       <a:solidFill>
                         <a:srgbClr val="D5D9DE"/>
@@ -4317,6 +4217,11 @@
                     </a:solidFill>
                   </a:tcPr>
                 </a:tc>
+                <a:extLst>
+                  <a:ext uri="{0D108BD9-81ED-4DB2-BD59-A6C34878D82A}">
+                    <a16:rowId xmlns:a16="http://schemas.microsoft.com/office/drawing/2014/main" val="10000"/>
+                  </a:ext>
+                </a:extLst>
               </a:tr>
               <a:tr h="502920">
                 <a:tc>
@@ -4324,7 +4229,7 @@
                     <a:bodyPr/>
                     <a:lstStyle/>
                     <a:p>
-                      <a:pPr indent="0" marL="0">
+                      <a:pPr marL="0" indent="0">
                         <a:buNone/>
                       </a:pPr>
                       <a:r>
@@ -4345,7 +4250,7 @@
                       </a:endParaRPr>
                     </a:p>
                   </a:txBody>
-                  <a:tcPr marL="91440" marR="91440" marT="45720" marB="45720" anchor="ctr">
+                  <a:tcPr anchor="ctr">
                     <a:lnL w="9525" cap="flat" cmpd="sng" algn="ctr">
                       <a:solidFill>
                         <a:srgbClr val="D5D9DE"/>
@@ -4392,7 +4297,7 @@
                     <a:bodyPr/>
                     <a:lstStyle/>
                     <a:p>
-                      <a:pPr indent="0" marL="0">
+                      <a:pPr marL="0" indent="0">
                         <a:buNone/>
                       </a:pPr>
                       <a:r>
@@ -4413,7 +4318,7 @@
                       </a:endParaRPr>
                     </a:p>
                   </a:txBody>
-                  <a:tcPr marL="91440" marR="91440" marT="45720" marB="45720" anchor="ctr">
+                  <a:tcPr anchor="ctr">
                     <a:lnL w="9525" cap="flat" cmpd="sng" algn="ctr">
                       <a:solidFill>
                         <a:srgbClr val="D5D9DE"/>
@@ -4460,7 +4365,7 @@
                     <a:bodyPr/>
                     <a:lstStyle/>
                     <a:p>
-                      <a:pPr indent="0" marL="0">
+                      <a:pPr marL="0" indent="0">
                         <a:buNone/>
                       </a:pPr>
                       <a:r>
@@ -4481,7 +4386,7 @@
                       </a:endParaRPr>
                     </a:p>
                   </a:txBody>
-                  <a:tcPr marL="91440" marR="91440" marT="45720" marB="45720" anchor="ctr">
+                  <a:tcPr anchor="ctr">
                     <a:lnL w="9525" cap="flat" cmpd="sng" algn="ctr">
                       <a:solidFill>
                         <a:srgbClr val="D5D9DE"/>
@@ -4523,6 +4428,11 @@
                     </a:solidFill>
                   </a:tcPr>
                 </a:tc>
+                <a:extLst>
+                  <a:ext uri="{0D108BD9-81ED-4DB2-BD59-A6C34878D82A}">
+                    <a16:rowId xmlns:a16="http://schemas.microsoft.com/office/drawing/2014/main" val="10001"/>
+                  </a:ext>
+                </a:extLst>
               </a:tr>
               <a:tr h="502920">
                 <a:tc>
@@ -4530,7 +4440,7 @@
                     <a:bodyPr/>
                     <a:lstStyle/>
                     <a:p>
-                      <a:pPr indent="0" marL="0">
+                      <a:pPr marL="0" indent="0">
                         <a:buNone/>
                       </a:pPr>
                       <a:r>
@@ -4551,7 +4461,7 @@
                       </a:endParaRPr>
                     </a:p>
                   </a:txBody>
-                  <a:tcPr marL="91440" marR="91440" marT="45720" marB="45720" anchor="ctr">
+                  <a:tcPr anchor="ctr">
                     <a:lnL w="9525" cap="flat" cmpd="sng" algn="ctr">
                       <a:solidFill>
                         <a:srgbClr val="D5D9DE"/>
@@ -4598,7 +4508,7 @@
                     <a:bodyPr/>
                     <a:lstStyle/>
                     <a:p>
-                      <a:pPr indent="0" marL="0">
+                      <a:pPr marL="0" indent="0">
                         <a:buNone/>
                       </a:pPr>
                       <a:r>
@@ -4619,7 +4529,7 @@
                       </a:endParaRPr>
                     </a:p>
                   </a:txBody>
-                  <a:tcPr marL="91440" marR="91440" marT="45720" marB="45720" anchor="ctr">
+                  <a:tcPr anchor="ctr">
                     <a:lnL w="9525" cap="flat" cmpd="sng" algn="ctr">
                       <a:solidFill>
                         <a:srgbClr val="D5D9DE"/>
@@ -4666,7 +4576,7 @@
                     <a:bodyPr/>
                     <a:lstStyle/>
                     <a:p>
-                      <a:pPr indent="0" marL="0">
+                      <a:pPr marL="0" indent="0">
                         <a:buNone/>
                       </a:pPr>
                       <a:r>
@@ -4687,7 +4597,7 @@
                       </a:endParaRPr>
                     </a:p>
                   </a:txBody>
-                  <a:tcPr marL="91440" marR="91440" marT="45720" marB="45720" anchor="ctr">
+                  <a:tcPr anchor="ctr">
                     <a:lnL w="9525" cap="flat" cmpd="sng" algn="ctr">
                       <a:solidFill>
                         <a:srgbClr val="D5D9DE"/>
@@ -4729,6 +4639,11 @@
                     </a:solidFill>
                   </a:tcPr>
                 </a:tc>
+                <a:extLst>
+                  <a:ext uri="{0D108BD9-81ED-4DB2-BD59-A6C34878D82A}">
+                    <a16:rowId xmlns:a16="http://schemas.microsoft.com/office/drawing/2014/main" val="10002"/>
+                  </a:ext>
+                </a:extLst>
               </a:tr>
               <a:tr h="502920">
                 <a:tc>
@@ -4736,7 +4651,7 @@
                     <a:bodyPr/>
                     <a:lstStyle/>
                     <a:p>
-                      <a:pPr indent="0" marL="0">
+                      <a:pPr marL="0" indent="0">
                         <a:buNone/>
                       </a:pPr>
                       <a:r>
@@ -4757,7 +4672,7 @@
                       </a:endParaRPr>
                     </a:p>
                   </a:txBody>
-                  <a:tcPr marL="91440" marR="91440" marT="45720" marB="45720" anchor="ctr">
+                  <a:tcPr anchor="ctr">
                     <a:lnL w="9525" cap="flat" cmpd="sng" algn="ctr">
                       <a:solidFill>
                         <a:srgbClr val="D5D9DE"/>
@@ -4804,7 +4719,7 @@
                     <a:bodyPr/>
                     <a:lstStyle/>
                     <a:p>
-                      <a:pPr indent="0" marL="0">
+                      <a:pPr marL="0" indent="0">
                         <a:buNone/>
                       </a:pPr>
                       <a:r>
@@ -4825,7 +4740,7 @@
                       </a:endParaRPr>
                     </a:p>
                   </a:txBody>
-                  <a:tcPr marL="91440" marR="91440" marT="45720" marB="45720" anchor="ctr">
+                  <a:tcPr anchor="ctr">
                     <a:lnL w="9525" cap="flat" cmpd="sng" algn="ctr">
                       <a:solidFill>
                         <a:srgbClr val="D5D9DE"/>
@@ -4872,7 +4787,7 @@
                     <a:bodyPr/>
                     <a:lstStyle/>
                     <a:p>
-                      <a:pPr indent="0" marL="0">
+                      <a:pPr marL="0" indent="0">
                         <a:buNone/>
                       </a:pPr>
                       <a:r>
@@ -4893,7 +4808,7 @@
                       </a:endParaRPr>
                     </a:p>
                   </a:txBody>
-                  <a:tcPr marL="91440" marR="91440" marT="45720" marB="45720" anchor="ctr">
+                  <a:tcPr anchor="ctr">
                     <a:lnL w="9525" cap="flat" cmpd="sng" algn="ctr">
                       <a:solidFill>
                         <a:srgbClr val="D5D9DE"/>
@@ -4935,6 +4850,11 @@
                     </a:solidFill>
                   </a:tcPr>
                 </a:tc>
+                <a:extLst>
+                  <a:ext uri="{0D108BD9-81ED-4DB2-BD59-A6C34878D82A}">
+                    <a16:rowId xmlns:a16="http://schemas.microsoft.com/office/drawing/2014/main" val="10003"/>
+                  </a:ext>
+                </a:extLst>
               </a:tr>
               <a:tr h="502920">
                 <a:tc>
@@ -4942,7 +4862,7 @@
                     <a:bodyPr/>
                     <a:lstStyle/>
                     <a:p>
-                      <a:pPr indent="0" marL="0">
+                      <a:pPr marL="0" indent="0">
                         <a:buNone/>
                       </a:pPr>
                       <a:r>
@@ -4963,7 +4883,7 @@
                       </a:endParaRPr>
                     </a:p>
                   </a:txBody>
-                  <a:tcPr marL="91440" marR="91440" marT="45720" marB="45720" anchor="ctr">
+                  <a:tcPr anchor="ctr">
                     <a:lnL w="9525" cap="flat" cmpd="sng" algn="ctr">
                       <a:solidFill>
                         <a:srgbClr val="D5D9DE"/>
@@ -5010,7 +4930,7 @@
                     <a:bodyPr/>
                     <a:lstStyle/>
                     <a:p>
-                      <a:pPr indent="0" marL="0">
+                      <a:pPr marL="0" indent="0">
                         <a:buNone/>
                       </a:pPr>
                       <a:r>
@@ -5031,7 +4951,7 @@
                       </a:endParaRPr>
                     </a:p>
                   </a:txBody>
-                  <a:tcPr marL="91440" marR="91440" marT="45720" marB="45720" anchor="ctr">
+                  <a:tcPr anchor="ctr">
                     <a:lnL w="9525" cap="flat" cmpd="sng" algn="ctr">
                       <a:solidFill>
                         <a:srgbClr val="D5D9DE"/>
@@ -5078,7 +4998,7 @@
                     <a:bodyPr/>
                     <a:lstStyle/>
                     <a:p>
-                      <a:pPr indent="0" marL="0">
+                      <a:pPr marL="0" indent="0">
                         <a:buNone/>
                       </a:pPr>
                       <a:r>
@@ -5099,7 +5019,7 @@
                       </a:endParaRPr>
                     </a:p>
                   </a:txBody>
-                  <a:tcPr marL="91440" marR="91440" marT="45720" marB="45720" anchor="ctr">
+                  <a:tcPr anchor="ctr">
                     <a:lnL w="9525" cap="flat" cmpd="sng" algn="ctr">
                       <a:solidFill>
                         <a:srgbClr val="D5D9DE"/>
@@ -5141,6 +5061,11 @@
                     </a:solidFill>
                   </a:tcPr>
                 </a:tc>
+                <a:extLst>
+                  <a:ext uri="{0D108BD9-81ED-4DB2-BD59-A6C34878D82A}">
+                    <a16:rowId xmlns:a16="http://schemas.microsoft.com/office/drawing/2014/main" val="10004"/>
+                  </a:ext>
+                </a:extLst>
               </a:tr>
             </a:tbl>
           </a:graphicData>
@@ -5174,9 +5099,11 @@
       <p:sp>
         <p:nvSpPr>
           <p:cNvPr id="2" name="Text 0"/>
-          <p:cNvSpPr/>
+          <p:cNvSpPr>
+            <a:spLocks noGrp="1"/>
+          </p:cNvSpPr>
           <p:nvPr>
-            <p:ph idx="100" type="title" hasCustomPrompt="1"/>
+            <p:ph type="title" idx="100" hasCustomPrompt="1"/>
           </p:nvPr>
         </p:nvSpPr>
         <p:spPr>
@@ -5194,7 +5121,7 @@
           <a:bodyPr wrap="square" lIns="0" tIns="0" rIns="0" bIns="0" rtlCol="0" anchor="ctr"/>
           <a:lstStyle/>
           <a:p>
-            <a:pPr algn="l" indent="0" marL="0">
+            <a:pPr marL="0" indent="0" algn="l">
               <a:buNone/>
             </a:pPr>
             <a:r>
@@ -5212,9 +5139,11 @@
       <p:sp>
         <p:nvSpPr>
           <p:cNvPr id="3" name="Text 0"/>
-          <p:cNvSpPr/>
+          <p:cNvSpPr>
+            <a:spLocks noGrp="1"/>
+          </p:cNvSpPr>
           <p:nvPr>
-            <p:ph idx="101" type="body" hasCustomPrompt="1"/>
+            <p:ph type="body" idx="101" hasCustomPrompt="1"/>
           </p:nvPr>
         </p:nvSpPr>
         <p:spPr>
@@ -5232,7 +5161,7 @@
           <a:bodyPr wrap="square" lIns="0" tIns="0" rIns="0" bIns="0" rtlCol="0" anchor="ctr"/>
           <a:lstStyle/>
           <a:p>
-            <a:pPr indent="0" marL="0">
+            <a:pPr marL="0" indent="0">
               <a:buNone/>
             </a:pPr>
             <a:r>
@@ -5250,9 +5179,11 @@
       <p:sp>
         <p:nvSpPr>
           <p:cNvPr id="4" name="Text 0"/>
-          <p:cNvSpPr/>
+          <p:cNvSpPr>
+            <a:spLocks noGrp="1"/>
+          </p:cNvSpPr>
           <p:nvPr>
-            <p:ph idx="102" type="body" hasCustomPrompt="1"/>
+            <p:ph type="body" idx="102" hasCustomPrompt="1"/>
           </p:nvPr>
         </p:nvSpPr>
         <p:spPr>
@@ -5270,7 +5201,7 @@
           <a:bodyPr wrap="square" lIns="0" tIns="0" rIns="0" bIns="0" rtlCol="0" anchor="ctr"/>
           <a:lstStyle/>
           <a:p>
-            <a:pPr algn="r" indent="0" marL="0">
+            <a:pPr marL="0" indent="0" algn="r">
               <a:buNone/>
             </a:pPr>
             <a:r>
@@ -5306,6 +5237,13 @@
           </a:solidFill>
           <a:ln/>
         </p:spPr>
+        <p:txBody>
+          <a:bodyPr/>
+          <a:lstStyle/>
+          <a:p>
+            <a:endParaRPr lang="es-ES_tradnl"/>
+          </a:p>
+        </p:txBody>
       </p:sp>
       <p:sp>
         <p:nvSpPr>
@@ -5328,7 +5266,7 @@
           <a:bodyPr wrap="square" lIns="0" tIns="0" rIns="0" bIns="0" rtlCol="0" anchor="t"/>
           <a:lstStyle/>
           <a:p>
-            <a:pPr indent="0" marL="0">
+            <a:pPr marL="0" indent="0">
               <a:buNone/>
             </a:pPr>
             <a:r>
@@ -5367,7 +5305,7 @@
           <a:bodyPr wrap="square" lIns="0" tIns="0" rIns="0" bIns="0" rtlCol="0" anchor="ctr"/>
           <a:lstStyle/>
           <a:p>
-            <a:pPr indent="0" marL="0">
+            <a:pPr marL="0" indent="0">
               <a:buNone/>
             </a:pPr>
             <a:r>
@@ -5406,7 +5344,7 @@
           <a:bodyPr wrap="square" lIns="0" tIns="0" rIns="0" bIns="0" rtlCol="0" anchor="t"/>
           <a:lstStyle/>
           <a:p>
-            <a:pPr indent="0" marL="0">
+            <a:pPr marL="0" indent="0">
               <a:buNone/>
             </a:pPr>
             <a:r>
@@ -5445,6 +5383,13 @@
           </a:solidFill>
           <a:ln/>
         </p:spPr>
+        <p:txBody>
+          <a:bodyPr/>
+          <a:lstStyle/>
+          <a:p>
+            <a:endParaRPr lang="es-ES_tradnl"/>
+          </a:p>
+        </p:txBody>
       </p:sp>
       <p:sp>
         <p:nvSpPr>
@@ -5467,7 +5412,7 @@
           <a:bodyPr wrap="square" lIns="0" tIns="0" rIns="0" bIns="0" rtlCol="0" anchor="t"/>
           <a:lstStyle/>
           <a:p>
-            <a:pPr indent="0" marL="0">
+            <a:pPr marL="0" indent="0">
               <a:buNone/>
             </a:pPr>
             <a:r>
@@ -5506,7 +5451,7 @@
           <a:bodyPr wrap="square" lIns="0" tIns="0" rIns="0" bIns="0" rtlCol="0" anchor="ctr"/>
           <a:lstStyle/>
           <a:p>
-            <a:pPr indent="0" marL="0">
+            <a:pPr marL="0" indent="0">
               <a:buNone/>
             </a:pPr>
             <a:r>
@@ -5545,7 +5490,7 @@
           <a:bodyPr wrap="square" lIns="0" tIns="0" rIns="0" bIns="0" rtlCol="0" anchor="t"/>
           <a:lstStyle/>
           <a:p>
-            <a:pPr indent="0" marL="0">
+            <a:pPr marL="0" indent="0">
               <a:buNone/>
             </a:pPr>
             <a:r>
@@ -5584,6 +5529,13 @@
           </a:solidFill>
           <a:ln/>
         </p:spPr>
+        <p:txBody>
+          <a:bodyPr/>
+          <a:lstStyle/>
+          <a:p>
+            <a:endParaRPr lang="es-ES_tradnl"/>
+          </a:p>
+        </p:txBody>
       </p:sp>
       <p:sp>
         <p:nvSpPr>
@@ -5606,7 +5558,7 @@
           <a:bodyPr wrap="square" lIns="0" tIns="0" rIns="0" bIns="0" rtlCol="0" anchor="t"/>
           <a:lstStyle/>
           <a:p>
-            <a:pPr indent="0" marL="0">
+            <a:pPr marL="0" indent="0">
               <a:buNone/>
             </a:pPr>
             <a:r>
@@ -5645,7 +5597,7 @@
           <a:bodyPr wrap="square" lIns="0" tIns="0" rIns="0" bIns="0" rtlCol="0" anchor="ctr"/>
           <a:lstStyle/>
           <a:p>
-            <a:pPr indent="0" marL="0">
+            <a:pPr marL="0" indent="0">
               <a:buNone/>
             </a:pPr>
             <a:r>
@@ -5684,7 +5636,7 @@
           <a:bodyPr wrap="square" lIns="0" tIns="0" rIns="0" bIns="0" rtlCol="0" anchor="t"/>
           <a:lstStyle/>
           <a:p>
-            <a:pPr indent="0" marL="0">
+            <a:pPr marL="0" indent="0">
               <a:buNone/>
             </a:pPr>
             <a:r>
@@ -5723,7 +5675,7 @@
           <a:bodyPr wrap="square" lIns="0" tIns="0" rIns="0" bIns="0" rtlCol="0" anchor="t"/>
           <a:lstStyle/>
           <a:p>
-            <a:pPr indent="0" marL="0">
+            <a:pPr marL="0" indent="0">
               <a:buNone/>
             </a:pPr>
             <a:r>
@@ -5769,9 +5721,11 @@
       <p:sp>
         <p:nvSpPr>
           <p:cNvPr id="2" name="Text 0"/>
-          <p:cNvSpPr/>
+          <p:cNvSpPr>
+            <a:spLocks noGrp="1"/>
+          </p:cNvSpPr>
           <p:nvPr>
-            <p:ph idx="100" type="title" hasCustomPrompt="1"/>
+            <p:ph type="title" idx="100" hasCustomPrompt="1"/>
           </p:nvPr>
         </p:nvSpPr>
         <p:spPr>
@@ -5789,7 +5743,7 @@
           <a:bodyPr wrap="square" lIns="0" tIns="0" rIns="0" bIns="0" rtlCol="0" anchor="ctr"/>
           <a:lstStyle/>
           <a:p>
-            <a:pPr algn="l" indent="0" marL="0">
+            <a:pPr marL="0" indent="0" algn="l">
               <a:buNone/>
             </a:pPr>
             <a:r>
@@ -5807,9 +5761,11 @@
       <p:sp>
         <p:nvSpPr>
           <p:cNvPr id="3" name="Text 0"/>
-          <p:cNvSpPr/>
+          <p:cNvSpPr>
+            <a:spLocks noGrp="1"/>
+          </p:cNvSpPr>
           <p:nvPr>
-            <p:ph idx="101" type="body" hasCustomPrompt="1"/>
+            <p:ph type="body" idx="101" hasCustomPrompt="1"/>
           </p:nvPr>
         </p:nvSpPr>
         <p:spPr>
@@ -5827,7 +5783,7 @@
           <a:bodyPr wrap="square" lIns="0" tIns="0" rIns="0" bIns="0" rtlCol="0" anchor="ctr"/>
           <a:lstStyle/>
           <a:p>
-            <a:pPr indent="0" marL="0">
+            <a:pPr marL="0" indent="0">
               <a:buNone/>
             </a:pPr>
             <a:r>
@@ -5845,9 +5801,11 @@
       <p:sp>
         <p:nvSpPr>
           <p:cNvPr id="4" name="Text 0"/>
-          <p:cNvSpPr/>
+          <p:cNvSpPr>
+            <a:spLocks noGrp="1"/>
+          </p:cNvSpPr>
           <p:nvPr>
-            <p:ph idx="102" type="body" hasCustomPrompt="1"/>
+            <p:ph type="body" idx="102" hasCustomPrompt="1"/>
           </p:nvPr>
         </p:nvSpPr>
         <p:spPr>
@@ -5865,7 +5823,7 @@
           <a:bodyPr wrap="square" lIns="0" tIns="0" rIns="0" bIns="0" rtlCol="0" anchor="ctr"/>
           <a:lstStyle/>
           <a:p>
-            <a:pPr algn="r" indent="0" marL="0">
+            <a:pPr marL="0" indent="0" algn="r">
               <a:buNone/>
             </a:pPr>
             <a:r>
@@ -5896,16 +5854,34 @@
         </p:nvGraphicFramePr>
         <p:xfrm>
           <a:off x="548640" y="1417320"/>
-          <a:ext cx="11094415" cy="914400"/>
+          <a:ext cx="11094415" cy="1920240"/>
         </p:xfrm>
         <a:graphic>
           <a:graphicData uri="http://schemas.openxmlformats.org/drawingml/2006/table">
             <a:tbl>
               <a:tblPr/>
               <a:tblGrid>
-                <a:gridCol w="3749040"/>
-                <a:gridCol w="3657600"/>
-                <a:gridCol w="3687775"/>
+                <a:gridCol w="3749040">
+                  <a:extLst>
+                    <a:ext uri="{9D8B030D-6E8A-4147-A177-3AD203B41FA5}">
+                      <a16:colId xmlns:a16="http://schemas.microsoft.com/office/drawing/2014/main" val="20000"/>
+                    </a:ext>
+                  </a:extLst>
+                </a:gridCol>
+                <a:gridCol w="3657600">
+                  <a:extLst>
+                    <a:ext uri="{9D8B030D-6E8A-4147-A177-3AD203B41FA5}">
+                      <a16:colId xmlns:a16="http://schemas.microsoft.com/office/drawing/2014/main" val="20001"/>
+                    </a:ext>
+                  </a:extLst>
+                </a:gridCol>
+                <a:gridCol w="3687775">
+                  <a:extLst>
+                    <a:ext uri="{9D8B030D-6E8A-4147-A177-3AD203B41FA5}">
+                      <a16:colId xmlns:a16="http://schemas.microsoft.com/office/drawing/2014/main" val="20002"/>
+                    </a:ext>
+                  </a:extLst>
+                </a:gridCol>
               </a:tblGrid>
               <a:tr h="640080">
                 <a:tc>
@@ -5913,7 +5889,7 @@
                     <a:bodyPr/>
                     <a:lstStyle/>
                     <a:p>
-                      <a:pPr indent="0" marL="0">
+                      <a:pPr marL="0" indent="0">
                         <a:buNone/>
                       </a:pPr>
                       <a:r>
@@ -5934,7 +5910,7 @@
                       </a:endParaRPr>
                     </a:p>
                   </a:txBody>
-                  <a:tcPr marL="91440" marR="91440" marT="45720" marB="45720" anchor="ctr">
+                  <a:tcPr anchor="ctr">
                     <a:lnL w="9525" cap="flat" cmpd="sng" algn="ctr">
                       <a:solidFill>
                         <a:srgbClr val="34445A"/>
@@ -5981,7 +5957,7 @@
                     <a:bodyPr/>
                     <a:lstStyle/>
                     <a:p>
-                      <a:pPr indent="0" marL="0">
+                      <a:pPr marL="0" indent="0">
                         <a:buNone/>
                       </a:pPr>
                       <a:r>
@@ -6002,7 +5978,7 @@
                       </a:endParaRPr>
                     </a:p>
                   </a:txBody>
-                  <a:tcPr marL="91440" marR="91440" marT="45720" marB="45720" anchor="ctr">
+                  <a:tcPr anchor="ctr">
                     <a:lnL w="9525" cap="flat" cmpd="sng" algn="ctr">
                       <a:solidFill>
                         <a:srgbClr val="34445A"/>
@@ -6049,7 +6025,7 @@
                     <a:bodyPr/>
                     <a:lstStyle/>
                     <a:p>
-                      <a:pPr indent="0" marL="0">
+                      <a:pPr marL="0" indent="0">
                         <a:buNone/>
                       </a:pPr>
                       <a:r>
@@ -6070,7 +6046,7 @@
                       </a:endParaRPr>
                     </a:p>
                   </a:txBody>
-                  <a:tcPr marL="91440" marR="91440" marT="45720" marB="45720" anchor="ctr">
+                  <a:tcPr anchor="ctr">
                     <a:lnL w="9525" cap="flat" cmpd="sng" algn="ctr">
                       <a:solidFill>
                         <a:srgbClr val="34445A"/>
@@ -6112,6 +6088,11 @@
                     </a:solidFill>
                   </a:tcPr>
                 </a:tc>
+                <a:extLst>
+                  <a:ext uri="{0D108BD9-81ED-4DB2-BD59-A6C34878D82A}">
+                    <a16:rowId xmlns:a16="http://schemas.microsoft.com/office/drawing/2014/main" val="10000"/>
+                  </a:ext>
+                </a:extLst>
               </a:tr>
               <a:tr h="640080">
                 <a:tc>
@@ -6119,7 +6100,7 @@
                     <a:bodyPr/>
                     <a:lstStyle/>
                     <a:p>
-                      <a:pPr indent="0" marL="0">
+                      <a:pPr marL="0" indent="0">
                         <a:buNone/>
                       </a:pPr>
                       <a:r>
@@ -6140,7 +6121,7 @@
                       </a:endParaRPr>
                     </a:p>
                   </a:txBody>
-                  <a:tcPr marL="91440" marR="91440" marT="45720" marB="45720" anchor="ctr">
+                  <a:tcPr anchor="ctr">
                     <a:lnL w="9525" cap="flat" cmpd="sng" algn="ctr">
                       <a:solidFill>
                         <a:srgbClr val="34445A"/>
@@ -6187,7 +6168,7 @@
                     <a:bodyPr/>
                     <a:lstStyle/>
                     <a:p>
-                      <a:pPr indent="0" marL="0">
+                      <a:pPr marL="0" indent="0">
                         <a:buNone/>
                       </a:pPr>
                       <a:r>
@@ -6208,7 +6189,7 @@
                       </a:endParaRPr>
                     </a:p>
                   </a:txBody>
-                  <a:tcPr marL="91440" marR="91440" marT="45720" marB="45720" anchor="ctr">
+                  <a:tcPr anchor="ctr">
                     <a:lnL w="9525" cap="flat" cmpd="sng" algn="ctr">
                       <a:solidFill>
                         <a:srgbClr val="34445A"/>
@@ -6255,7 +6236,7 @@
                     <a:bodyPr/>
                     <a:lstStyle/>
                     <a:p>
-                      <a:pPr indent="0" marL="0">
+                      <a:pPr marL="0" indent="0">
                         <a:buNone/>
                       </a:pPr>
                       <a:r>
@@ -6276,7 +6257,7 @@
                       </a:endParaRPr>
                     </a:p>
                   </a:txBody>
-                  <a:tcPr marL="91440" marR="91440" marT="45720" marB="45720" anchor="ctr">
+                  <a:tcPr anchor="ctr">
                     <a:lnL w="9525" cap="flat" cmpd="sng" algn="ctr">
                       <a:solidFill>
                         <a:srgbClr val="34445A"/>
@@ -6318,6 +6299,11 @@
                     </a:solidFill>
                   </a:tcPr>
                 </a:tc>
+                <a:extLst>
+                  <a:ext uri="{0D108BD9-81ED-4DB2-BD59-A6C34878D82A}">
+                    <a16:rowId xmlns:a16="http://schemas.microsoft.com/office/drawing/2014/main" val="10001"/>
+                  </a:ext>
+                </a:extLst>
               </a:tr>
               <a:tr h="640080">
                 <a:tc>
@@ -6325,7 +6311,7 @@
                     <a:bodyPr/>
                     <a:lstStyle/>
                     <a:p>
-                      <a:pPr indent="0" marL="0">
+                      <a:pPr marL="0" indent="0">
                         <a:buNone/>
                       </a:pPr>
                       <a:r>
@@ -6346,7 +6332,7 @@
                       </a:endParaRPr>
                     </a:p>
                   </a:txBody>
-                  <a:tcPr marL="91440" marR="91440" marT="45720" marB="45720" anchor="ctr">
+                  <a:tcPr anchor="ctr">
                     <a:lnL w="9525" cap="flat" cmpd="sng" algn="ctr">
                       <a:solidFill>
                         <a:srgbClr val="34445A"/>
@@ -6393,7 +6379,7 @@
                     <a:bodyPr/>
                     <a:lstStyle/>
                     <a:p>
-                      <a:pPr indent="0" marL="0">
+                      <a:pPr marL="0" indent="0">
                         <a:buNone/>
                       </a:pPr>
                       <a:r>
@@ -6414,7 +6400,7 @@
                       </a:endParaRPr>
                     </a:p>
                   </a:txBody>
-                  <a:tcPr marL="91440" marR="91440" marT="45720" marB="45720" anchor="ctr">
+                  <a:tcPr anchor="ctr">
                     <a:lnL w="9525" cap="flat" cmpd="sng" algn="ctr">
                       <a:solidFill>
                         <a:srgbClr val="34445A"/>
@@ -6461,7 +6447,7 @@
                     <a:bodyPr/>
                     <a:lstStyle/>
                     <a:p>
-                      <a:pPr indent="0" marL="0">
+                      <a:pPr marL="0" indent="0">
                         <a:buNone/>
                       </a:pPr>
                       <a:r>
@@ -6482,7 +6468,7 @@
                       </a:endParaRPr>
                     </a:p>
                   </a:txBody>
-                  <a:tcPr marL="91440" marR="91440" marT="45720" marB="45720" anchor="ctr">
+                  <a:tcPr anchor="ctr">
                     <a:lnL w="9525" cap="flat" cmpd="sng" algn="ctr">
                       <a:solidFill>
                         <a:srgbClr val="34445A"/>
@@ -6524,6 +6510,11 @@
                     </a:solidFill>
                   </a:tcPr>
                 </a:tc>
+                <a:extLst>
+                  <a:ext uri="{0D108BD9-81ED-4DB2-BD59-A6C34878D82A}">
+                    <a16:rowId xmlns:a16="http://schemas.microsoft.com/office/drawing/2014/main" val="10002"/>
+                  </a:ext>
+                </a:extLst>
               </a:tr>
             </a:tbl>
           </a:graphicData>
@@ -6550,6 +6541,13 @@
           </a:solidFill>
           <a:ln/>
         </p:spPr>
+        <p:txBody>
+          <a:bodyPr/>
+          <a:lstStyle/>
+          <a:p>
+            <a:endParaRPr lang="es-ES_tradnl"/>
+          </a:p>
+        </p:txBody>
       </p:sp>
       <p:sp>
         <p:nvSpPr>
@@ -6572,7 +6570,7 @@
           <a:bodyPr wrap="square" lIns="0" tIns="0" rIns="0" bIns="0" rtlCol="0" anchor="ctr"/>
           <a:lstStyle/>
           <a:p>
-            <a:pPr indent="0" marL="0">
+            <a:pPr marL="0" indent="0">
               <a:buNone/>
             </a:pPr>
             <a:r>
@@ -6611,6 +6609,13 @@
           </a:solidFill>
           <a:ln/>
         </p:spPr>
+        <p:txBody>
+          <a:bodyPr/>
+          <a:lstStyle/>
+          <a:p>
+            <a:endParaRPr lang="es-ES_tradnl"/>
+          </a:p>
+        </p:txBody>
       </p:sp>
       <p:sp>
         <p:nvSpPr>
@@ -6633,7 +6638,7 @@
           <a:bodyPr wrap="square" lIns="0" tIns="0" rIns="0" bIns="0" rtlCol="0" anchor="ctr"/>
           <a:lstStyle/>
           <a:p>
-            <a:pPr indent="0" marL="0">
+            <a:pPr marL="0" indent="0">
               <a:buNone/>
             </a:pPr>
             <a:r>
@@ -6679,9 +6684,11 @@
       <p:sp>
         <p:nvSpPr>
           <p:cNvPr id="2" name="Text 0"/>
-          <p:cNvSpPr/>
+          <p:cNvSpPr>
+            <a:spLocks noGrp="1"/>
+          </p:cNvSpPr>
           <p:nvPr>
-            <p:ph idx="100" type="title" hasCustomPrompt="1"/>
+            <p:ph type="title" idx="100" hasCustomPrompt="1"/>
           </p:nvPr>
         </p:nvSpPr>
         <p:spPr>
@@ -6699,7 +6706,7 @@
           <a:bodyPr wrap="square" lIns="0" tIns="0" rIns="0" bIns="0" rtlCol="0" anchor="ctr"/>
           <a:lstStyle/>
           <a:p>
-            <a:pPr algn="l" indent="0" marL="0">
+            <a:pPr marL="0" indent="0" algn="l">
               <a:buNone/>
             </a:pPr>
             <a:r>
@@ -6717,9 +6724,11 @@
       <p:sp>
         <p:nvSpPr>
           <p:cNvPr id="3" name="Text 0"/>
-          <p:cNvSpPr/>
+          <p:cNvSpPr>
+            <a:spLocks noGrp="1"/>
+          </p:cNvSpPr>
           <p:nvPr>
-            <p:ph idx="101" type="body" hasCustomPrompt="1"/>
+            <p:ph type="body" idx="101" hasCustomPrompt="1"/>
           </p:nvPr>
         </p:nvSpPr>
         <p:spPr>
@@ -6737,7 +6746,7 @@
           <a:bodyPr wrap="square" lIns="0" tIns="0" rIns="0" bIns="0" rtlCol="0" anchor="ctr"/>
           <a:lstStyle/>
           <a:p>
-            <a:pPr indent="0" marL="0">
+            <a:pPr marL="0" indent="0">
               <a:buNone/>
             </a:pPr>
             <a:r>
@@ -6755,9 +6764,11 @@
       <p:sp>
         <p:nvSpPr>
           <p:cNvPr id="4" name="Text 0"/>
-          <p:cNvSpPr/>
+          <p:cNvSpPr>
+            <a:spLocks noGrp="1"/>
+          </p:cNvSpPr>
           <p:nvPr>
-            <p:ph idx="102" type="body" hasCustomPrompt="1"/>
+            <p:ph type="body" idx="102" hasCustomPrompt="1"/>
           </p:nvPr>
         </p:nvSpPr>
         <p:spPr>
@@ -6775,7 +6786,7 @@
           <a:bodyPr wrap="square" lIns="0" tIns="0" rIns="0" bIns="0" rtlCol="0" anchor="ctr"/>
           <a:lstStyle/>
           <a:p>
-            <a:pPr algn="r" indent="0" marL="0">
+            <a:pPr marL="0" indent="0" algn="r">
               <a:buNone/>
             </a:pPr>
             <a:r>
@@ -6809,6 +6820,13 @@
           </a:solidFill>
           <a:ln/>
         </p:spPr>
+        <p:txBody>
+          <a:bodyPr/>
+          <a:lstStyle/>
+          <a:p>
+            <a:endParaRPr lang="es-ES_tradnl"/>
+          </a:p>
+        </p:txBody>
       </p:sp>
       <p:sp>
         <p:nvSpPr>
@@ -6831,7 +6849,7 @@
           <a:bodyPr wrap="square" lIns="0" tIns="0" rIns="0" bIns="0" rtlCol="0" anchor="ctr"/>
           <a:lstStyle/>
           <a:p>
-            <a:pPr algn="ctr" indent="0" marL="0">
+            <a:pPr marL="0" indent="0" algn="ctr">
               <a:buNone/>
             </a:pPr>
             <a:r>
@@ -6870,7 +6888,7 @@
           <a:bodyPr wrap="square" lIns="0" tIns="0" rIns="0" bIns="0" rtlCol="0" anchor="ctr"/>
           <a:lstStyle/>
           <a:p>
-            <a:pPr indent="0" marL="0">
+            <a:pPr marL="0" indent="0">
               <a:buNone/>
             </a:pPr>
             <a:r>
@@ -6907,6 +6925,13 @@
           </a:solidFill>
           <a:ln/>
         </p:spPr>
+        <p:txBody>
+          <a:bodyPr/>
+          <a:lstStyle/>
+          <a:p>
+            <a:endParaRPr lang="es-ES_tradnl"/>
+          </a:p>
+        </p:txBody>
       </p:sp>
       <p:sp>
         <p:nvSpPr>
@@ -6929,7 +6954,7 @@
           <a:bodyPr wrap="square" lIns="0" tIns="0" rIns="0" bIns="0" rtlCol="0" anchor="ctr"/>
           <a:lstStyle/>
           <a:p>
-            <a:pPr algn="ctr" indent="0" marL="0">
+            <a:pPr marL="0" indent="0" algn="ctr">
               <a:buNone/>
             </a:pPr>
             <a:r>
@@ -6968,7 +6993,7 @@
           <a:bodyPr wrap="square" lIns="0" tIns="0" rIns="0" bIns="0" rtlCol="0" anchor="ctr"/>
           <a:lstStyle/>
           <a:p>
-            <a:pPr indent="0" marL="0">
+            <a:pPr marL="0" indent="0">
               <a:buNone/>
             </a:pPr>
             <a:r>
@@ -7005,6 +7030,13 @@
           </a:solidFill>
           <a:ln/>
         </p:spPr>
+        <p:txBody>
+          <a:bodyPr/>
+          <a:lstStyle/>
+          <a:p>
+            <a:endParaRPr lang="es-ES_tradnl"/>
+          </a:p>
+        </p:txBody>
       </p:sp>
       <p:sp>
         <p:nvSpPr>
@@ -7027,7 +7059,7 @@
           <a:bodyPr wrap="square" lIns="0" tIns="0" rIns="0" bIns="0" rtlCol="0" anchor="ctr"/>
           <a:lstStyle/>
           <a:p>
-            <a:pPr algn="ctr" indent="0" marL="0">
+            <a:pPr marL="0" indent="0" algn="ctr">
               <a:buNone/>
             </a:pPr>
             <a:r>
@@ -7066,7 +7098,7 @@
           <a:bodyPr wrap="square" lIns="0" tIns="0" rIns="0" bIns="0" rtlCol="0" anchor="ctr"/>
           <a:lstStyle/>
           <a:p>
-            <a:pPr indent="0" marL="0">
+            <a:pPr marL="0" indent="0">
               <a:buNone/>
             </a:pPr>
             <a:r>
@@ -7103,6 +7135,13 @@
           </a:solidFill>
           <a:ln/>
         </p:spPr>
+        <p:txBody>
+          <a:bodyPr/>
+          <a:lstStyle/>
+          <a:p>
+            <a:endParaRPr lang="es-ES_tradnl"/>
+          </a:p>
+        </p:txBody>
       </p:sp>
       <p:sp>
         <p:nvSpPr>
@@ -7125,7 +7164,7 @@
           <a:bodyPr wrap="square" lIns="0" tIns="0" rIns="0" bIns="0" rtlCol="0" anchor="ctr"/>
           <a:lstStyle/>
           <a:p>
-            <a:pPr algn="ctr" indent="0" marL="0">
+            <a:pPr marL="0" indent="0" algn="ctr">
               <a:buNone/>
             </a:pPr>
             <a:r>
@@ -7164,7 +7203,7 @@
           <a:bodyPr wrap="square" lIns="0" tIns="0" rIns="0" bIns="0" rtlCol="0" anchor="ctr"/>
           <a:lstStyle/>
           <a:p>
-            <a:pPr indent="0" marL="0">
+            <a:pPr marL="0" indent="0">
               <a:buNone/>
             </a:pPr>
             <a:r>
@@ -7210,14 +7249,16 @@
       <p:sp>
         <p:nvSpPr>
           <p:cNvPr id="2" name="Text 0"/>
-          <p:cNvSpPr/>
+          <p:cNvSpPr>
+            <a:spLocks noGrp="1"/>
+          </p:cNvSpPr>
           <p:nvPr>
-            <p:ph idx="100" type="title" hasCustomPrompt="1"/>
+            <p:ph type="title" idx="100" hasCustomPrompt="1"/>
           </p:nvPr>
         </p:nvSpPr>
         <p:spPr>
           <a:xfrm>
-            <a:off x="548640" y="1737360"/>
+            <a:off x="548640" y="1243374"/>
             <a:ext cx="11094415" cy="1737360"/>
           </a:xfrm>
           <a:prstGeom prst="rect">
@@ -7230,7 +7271,7 @@
           <a:bodyPr wrap="square" lIns="0" tIns="0" rIns="0" bIns="0" rtlCol="0" anchor="b"/>
           <a:lstStyle/>
           <a:p>
-            <a:pPr algn="l" indent="0" marL="0">
+            <a:pPr marL="0" indent="0" algn="l">
               <a:buNone/>
             </a:pPr>
             <a:r>
@@ -7248,9 +7289,11 @@
       <p:sp>
         <p:nvSpPr>
           <p:cNvPr id="3" name="Text 0"/>
-          <p:cNvSpPr/>
+          <p:cNvSpPr>
+            <a:spLocks noGrp="1"/>
+          </p:cNvSpPr>
           <p:nvPr>
-            <p:ph idx="101" type="body" hasCustomPrompt="1"/>
+            <p:ph type="body" idx="101" hasCustomPrompt="1"/>
           </p:nvPr>
         </p:nvSpPr>
         <p:spPr>
@@ -7268,7 +7311,7 @@
           <a:bodyPr wrap="square" lIns="0" tIns="0" rIns="0" bIns="0" rtlCol="0" anchor="t"/>
           <a:lstStyle/>
           <a:p>
-            <a:pPr indent="0" marL="0">
+            <a:pPr marL="0" indent="0">
               <a:buNone/>
             </a:pPr>
             <a:r>
@@ -7304,7 +7347,7 @@
           <a:bodyPr wrap="square" lIns="0" tIns="0" rIns="0" bIns="0" rtlCol="0" anchor="t"/>
           <a:lstStyle/>
           <a:p>
-            <a:pPr indent="0" marL="0">
+            <a:pPr marL="0" indent="0">
               <a:buNone/>
             </a:pPr>
             <a:r>
@@ -7318,9 +7361,6 @@
               </a:rPr>
               <a:t>Código</a:t>
             </a:r>
-            <a:pPr indent="0" marL="0">
-              <a:buNone/>
-            </a:pPr>
             <a:r>
               <a:rPr lang="en-US" sz="1500" dirty="0">
                 <a:solidFill>
@@ -7357,7 +7397,7 @@
           <a:bodyPr wrap="square" lIns="0" tIns="0" rIns="0" bIns="0" rtlCol="0" anchor="t"/>
           <a:lstStyle/>
           <a:p>
-            <a:pPr indent="0" marL="0">
+            <a:pPr marL="0" indent="0">
               <a:buNone/>
             </a:pPr>
             <a:r>
@@ -7371,9 +7411,6 @@
               </a:rPr>
               <a:t>Estrategia y análisis</a:t>
             </a:r>
-            <a:pPr indent="0" marL="0">
-              <a:buNone/>
-            </a:pPr>
             <a:r>
               <a:rPr lang="en-US" sz="1500" dirty="0">
                 <a:solidFill>
@@ -7410,7 +7447,7 @@
           <a:bodyPr wrap="square" lIns="0" tIns="0" rIns="0" bIns="0" rtlCol="0" anchor="t"/>
           <a:lstStyle/>
           <a:p>
-            <a:pPr indent="0" marL="0">
+            <a:pPr marL="0" indent="0">
               <a:buNone/>
             </a:pPr>
             <a:r>
@@ -7424,9 +7461,6 @@
               </a:rPr>
               <a:t>Matriz de casos</a:t>
             </a:r>
-            <a:pPr indent="0" marL="0">
-              <a:buNone/>
-            </a:pPr>
             <a:r>
               <a:rPr lang="en-US" sz="1500" dirty="0">
                 <a:solidFill>
@@ -7463,7 +7497,7 @@
           <a:bodyPr wrap="square" lIns="0" tIns="0" rIns="0" bIns="0" rtlCol="0" anchor="t"/>
           <a:lstStyle/>
           <a:p>
-            <a:pPr indent="0" marL="0">
+            <a:pPr marL="0" indent="0">
               <a:buNone/>
             </a:pPr>
             <a:r>
@@ -7477,9 +7511,6 @@
               </a:rPr>
               <a:t>Evidencias</a:t>
             </a:r>
-            <a:pPr indent="0" marL="0">
-              <a:buNone/>
-            </a:pPr>
             <a:r>
               <a:rPr lang="en-US" sz="1500" dirty="0">
                 <a:solidFill>
@@ -7516,7 +7547,7 @@
           <a:bodyPr wrap="square" lIns="0" tIns="0" rIns="0" bIns="0" rtlCol="0" anchor="t"/>
           <a:lstStyle/>
           <a:p>
-            <a:pPr indent="0" marL="0">
+            <a:pPr marL="0" indent="0">
               <a:buNone/>
             </a:pPr>
             <a:r>
@@ -7530,9 +7561,6 @@
               </a:rPr>
               <a:t>Scripts de falla</a:t>
             </a:r>
-            <a:pPr indent="0" marL="0">
-              <a:buNone/>
-            </a:pPr>
             <a:r>
               <a:rPr lang="en-US" sz="1500" dirty="0">
                 <a:solidFill>
@@ -7569,7 +7597,7 @@
           <a:bodyPr wrap="square" lIns="0" tIns="0" rIns="0" bIns="0" rtlCol="0" anchor="t"/>
           <a:lstStyle/>
           <a:p>
-            <a:pPr indent="0" marL="0">
+            <a:pPr marL="0" indent="0">
               <a:buNone/>
             </a:pPr>
             <a:r>
@@ -7583,9 +7611,6 @@
               </a:rPr>
               <a:t>Instalación</a:t>
             </a:r>
-            <a:pPr indent="0" marL="0">
-              <a:buNone/>
-            </a:pPr>
             <a:r>
               <a:rPr lang="en-US" sz="1500" dirty="0">
                 <a:solidFill>
@@ -7609,7 +7634,7 @@
         </p:nvSpPr>
         <p:spPr>
           <a:xfrm>
-            <a:off x="548640" y="5989320"/>
+            <a:off x="670712" y="6062892"/>
             <a:ext cx="11094415" cy="320040"/>
           </a:xfrm>
           <a:prstGeom prst="rect">
@@ -7622,9 +7647,18 @@
           <a:bodyPr wrap="square" lIns="0" tIns="0" rIns="0" bIns="0" rtlCol="0" anchor="t"/>
           <a:lstStyle/>
           <a:p>
-            <a:pPr indent="0" marL="0">
-              <a:buNone/>
-            </a:pPr>
+            <a:r>
+              <a:rPr lang="en-US" sz="1300" dirty="0">
+                <a:solidFill>
+                  <a:schemeClr val="accent6"/>
+                </a:solidFill>
+                <a:latin typeface="Arial" pitchFamily="34" charset="0"/>
+                <a:ea typeface="Arial" pitchFamily="34" charset="-122"/>
+                <a:cs typeface="Arial" pitchFamily="34" charset="-120"/>
+                <a:hlinkClick r:id="rId3"/>
+              </a:rPr>
+              <a:t>https://github.com/SebastianVillaC/lab-cache</a:t>
+            </a:r>
             <a:r>
               <a:rPr lang="en-US" sz="1300" dirty="0">
                 <a:solidFill>
@@ -7634,7 +7668,7 @@
                 <a:ea typeface="Arial" pitchFamily="34" charset="-122"/>
                 <a:cs typeface="Arial" pitchFamily="34" charset="-120"/>
               </a:rPr>
-              <a:t>[Enlace del repositorio] · [Integrante A] · [Integrante B] · [Integrante C]</a:t>
+              <a:t>. </a:t>
             </a:r>
             <a:endParaRPr lang="en-US" sz="1300" dirty="0"/>
           </a:p>
@@ -7668,9 +7702,11 @@
       <p:sp>
         <p:nvSpPr>
           <p:cNvPr id="2" name="Text 0"/>
-          <p:cNvSpPr/>
+          <p:cNvSpPr>
+            <a:spLocks noGrp="1"/>
+          </p:cNvSpPr>
           <p:nvPr>
-            <p:ph idx="100" type="title" hasCustomPrompt="1"/>
+            <p:ph type="title" idx="100" hasCustomPrompt="1"/>
           </p:nvPr>
         </p:nvSpPr>
         <p:spPr>
@@ -7688,7 +7724,7 @@
           <a:bodyPr wrap="square" lIns="0" tIns="0" rIns="0" bIns="0" rtlCol="0" anchor="ctr"/>
           <a:lstStyle/>
           <a:p>
-            <a:pPr algn="l" indent="0" marL="0">
+            <a:pPr marL="0" indent="0" algn="l">
               <a:buNone/>
             </a:pPr>
             <a:r>
@@ -7706,9 +7742,11 @@
       <p:sp>
         <p:nvSpPr>
           <p:cNvPr id="3" name="Text 0"/>
-          <p:cNvSpPr/>
+          <p:cNvSpPr>
+            <a:spLocks noGrp="1"/>
+          </p:cNvSpPr>
           <p:nvPr>
-            <p:ph idx="101" type="body" hasCustomPrompt="1"/>
+            <p:ph type="body" idx="101" hasCustomPrompt="1"/>
           </p:nvPr>
         </p:nvSpPr>
         <p:spPr>
@@ -7726,7 +7764,7 @@
           <a:bodyPr wrap="square" lIns="0" tIns="0" rIns="0" bIns="0" rtlCol="0" anchor="ctr"/>
           <a:lstStyle/>
           <a:p>
-            <a:pPr indent="0" marL="0">
+            <a:pPr marL="0" indent="0">
               <a:buNone/>
             </a:pPr>
             <a:r>
@@ -7744,9 +7782,11 @@
       <p:sp>
         <p:nvSpPr>
           <p:cNvPr id="4" name="Text 0"/>
-          <p:cNvSpPr/>
+          <p:cNvSpPr>
+            <a:spLocks noGrp="1"/>
+          </p:cNvSpPr>
           <p:nvPr>
-            <p:ph idx="102" type="body" hasCustomPrompt="1"/>
+            <p:ph type="body" idx="102" hasCustomPrompt="1"/>
           </p:nvPr>
         </p:nvSpPr>
         <p:spPr>
@@ -7764,7 +7804,7 @@
           <a:bodyPr wrap="square" lIns="0" tIns="0" rIns="0" bIns="0" rtlCol="0" anchor="ctr"/>
           <a:lstStyle/>
           <a:p>
-            <a:pPr algn="r" indent="0" marL="0">
+            <a:pPr marL="0" indent="0" algn="r">
               <a:buNone/>
             </a:pPr>
             <a:r>
@@ -7800,6 +7840,13 @@
           </a:solidFill>
           <a:ln/>
         </p:spPr>
+        <p:txBody>
+          <a:bodyPr/>
+          <a:lstStyle/>
+          <a:p>
+            <a:endParaRPr lang="es-ES_tradnl"/>
+          </a:p>
+        </p:txBody>
       </p:sp>
       <p:sp>
         <p:nvSpPr>
@@ -7822,7 +7869,7 @@
           <a:bodyPr wrap="square" lIns="0" tIns="0" rIns="0" bIns="0" rtlCol="0" anchor="t"/>
           <a:lstStyle/>
           <a:p>
-            <a:pPr indent="0" marL="0">
+            <a:pPr marL="0" indent="0">
               <a:buNone/>
             </a:pPr>
             <a:r>
@@ -7861,7 +7908,7 @@
           <a:bodyPr wrap="square" lIns="0" tIns="0" rIns="0" bIns="0" rtlCol="0" anchor="t"/>
           <a:lstStyle/>
           <a:p>
-            <a:pPr indent="0" marL="0">
+            <a:pPr marL="0" indent="0">
               <a:buNone/>
             </a:pPr>
             <a:r>
@@ -7900,7 +7947,7 @@
           <a:bodyPr wrap="square" lIns="0" tIns="0" rIns="0" bIns="0" rtlCol="0" anchor="t"/>
           <a:lstStyle/>
           <a:p>
-            <a:pPr indent="0" marL="0">
+            <a:pPr marL="0" indent="0">
               <a:buNone/>
             </a:pPr>
             <a:r>
@@ -7939,6 +7986,13 @@
           </a:solidFill>
           <a:ln/>
         </p:spPr>
+        <p:txBody>
+          <a:bodyPr/>
+          <a:lstStyle/>
+          <a:p>
+            <a:endParaRPr lang="es-ES_tradnl"/>
+          </a:p>
+        </p:txBody>
       </p:sp>
       <p:sp>
         <p:nvSpPr>
@@ -7961,7 +8015,7 @@
           <a:bodyPr wrap="square" lIns="0" tIns="0" rIns="0" bIns="0" rtlCol="0" anchor="t"/>
           <a:lstStyle/>
           <a:p>
-            <a:pPr indent="0" marL="0">
+            <a:pPr marL="0" indent="0">
               <a:buNone/>
             </a:pPr>
             <a:r>
@@ -8000,7 +8054,7 @@
           <a:bodyPr wrap="square" lIns="0" tIns="0" rIns="0" bIns="0" rtlCol="0" anchor="t"/>
           <a:lstStyle/>
           <a:p>
-            <a:pPr indent="0" marL="0">
+            <a:pPr marL="0" indent="0">
               <a:buNone/>
             </a:pPr>
             <a:r>
@@ -8039,7 +8093,7 @@
           <a:bodyPr wrap="square" lIns="0" tIns="0" rIns="0" bIns="0" rtlCol="0" anchor="t"/>
           <a:lstStyle/>
           <a:p>
-            <a:pPr indent="0" marL="0">
+            <a:pPr marL="0" indent="0">
               <a:buNone/>
             </a:pPr>
             <a:r>
@@ -8078,6 +8132,13 @@
           </a:solidFill>
           <a:ln/>
         </p:spPr>
+        <p:txBody>
+          <a:bodyPr/>
+          <a:lstStyle/>
+          <a:p>
+            <a:endParaRPr lang="es-ES_tradnl"/>
+          </a:p>
+        </p:txBody>
       </p:sp>
       <p:sp>
         <p:nvSpPr>
@@ -8100,7 +8161,7 @@
           <a:bodyPr wrap="square" lIns="0" tIns="0" rIns="0" bIns="0" rtlCol="0" anchor="t"/>
           <a:lstStyle/>
           <a:p>
-            <a:pPr indent="0" marL="0">
+            <a:pPr marL="0" indent="0">
               <a:buNone/>
             </a:pPr>
             <a:r>
@@ -8139,7 +8200,7 @@
           <a:bodyPr wrap="square" lIns="0" tIns="0" rIns="0" bIns="0" rtlCol="0" anchor="t"/>
           <a:lstStyle/>
           <a:p>
-            <a:pPr indent="0" marL="0">
+            <a:pPr marL="0" indent="0">
               <a:buNone/>
             </a:pPr>
             <a:r>
@@ -8178,7 +8239,7 @@
           <a:bodyPr wrap="square" lIns="0" tIns="0" rIns="0" bIns="0" rtlCol="0" anchor="t"/>
           <a:lstStyle/>
           <a:p>
-            <a:pPr indent="0" marL="0">
+            <a:pPr marL="0" indent="0">
               <a:buNone/>
             </a:pPr>
             <a:r>
@@ -8217,6 +8278,13 @@
           </a:solidFill>
           <a:ln/>
         </p:spPr>
+        <p:txBody>
+          <a:bodyPr/>
+          <a:lstStyle/>
+          <a:p>
+            <a:endParaRPr lang="es-ES_tradnl"/>
+          </a:p>
+        </p:txBody>
       </p:sp>
       <p:sp>
         <p:nvSpPr>
@@ -8239,7 +8307,7 @@
           <a:bodyPr wrap="square" lIns="0" tIns="0" rIns="0" bIns="0" rtlCol="0" anchor="t"/>
           <a:lstStyle/>
           <a:p>
-            <a:pPr indent="0" marL="0">
+            <a:pPr marL="0" indent="0">
               <a:buNone/>
             </a:pPr>
             <a:r>
@@ -8278,7 +8346,7 @@
           <a:bodyPr wrap="square" lIns="0" tIns="0" rIns="0" bIns="0" rtlCol="0" anchor="t"/>
           <a:lstStyle/>
           <a:p>
-            <a:pPr indent="0" marL="0">
+            <a:pPr marL="0" indent="0">
               <a:buNone/>
             </a:pPr>
             <a:r>
@@ -8317,7 +8385,7 @@
           <a:bodyPr wrap="square" lIns="0" tIns="0" rIns="0" bIns="0" rtlCol="0" anchor="t"/>
           <a:lstStyle/>
           <a:p>
-            <a:pPr indent="0" marL="0">
+            <a:pPr marL="0" indent="0">
               <a:buNone/>
             </a:pPr>
             <a:r>
@@ -8363,9 +8431,11 @@
       <p:sp>
         <p:nvSpPr>
           <p:cNvPr id="2" name="Text 0"/>
-          <p:cNvSpPr/>
+          <p:cNvSpPr>
+            <a:spLocks noGrp="1"/>
+          </p:cNvSpPr>
           <p:nvPr>
-            <p:ph idx="100" type="title" hasCustomPrompt="1"/>
+            <p:ph type="title" idx="100" hasCustomPrompt="1"/>
           </p:nvPr>
         </p:nvSpPr>
         <p:spPr>
@@ -8383,7 +8453,7 @@
           <a:bodyPr wrap="square" lIns="0" tIns="0" rIns="0" bIns="0" rtlCol="0" anchor="ctr"/>
           <a:lstStyle/>
           <a:p>
-            <a:pPr algn="l" indent="0" marL="0">
+            <a:pPr marL="0" indent="0" algn="l">
               <a:buNone/>
             </a:pPr>
             <a:r>
@@ -8401,9 +8471,11 @@
       <p:sp>
         <p:nvSpPr>
           <p:cNvPr id="3" name="Text 0"/>
-          <p:cNvSpPr/>
+          <p:cNvSpPr>
+            <a:spLocks noGrp="1"/>
+          </p:cNvSpPr>
           <p:nvPr>
-            <p:ph idx="101" type="body" hasCustomPrompt="1"/>
+            <p:ph type="body" idx="101" hasCustomPrompt="1"/>
           </p:nvPr>
         </p:nvSpPr>
         <p:spPr>
@@ -8421,7 +8493,7 @@
           <a:bodyPr wrap="square" lIns="0" tIns="0" rIns="0" bIns="0" rtlCol="0" anchor="ctr"/>
           <a:lstStyle/>
           <a:p>
-            <a:pPr indent="0" marL="0">
+            <a:pPr marL="0" indent="0">
               <a:buNone/>
             </a:pPr>
             <a:r>
@@ -8439,9 +8511,11 @@
       <p:sp>
         <p:nvSpPr>
           <p:cNvPr id="4" name="Text 0"/>
-          <p:cNvSpPr/>
+          <p:cNvSpPr>
+            <a:spLocks noGrp="1"/>
+          </p:cNvSpPr>
           <p:nvPr>
-            <p:ph idx="102" type="body" hasCustomPrompt="1"/>
+            <p:ph type="body" idx="102" hasCustomPrompt="1"/>
           </p:nvPr>
         </p:nvSpPr>
         <p:spPr>
@@ -8459,7 +8533,7 @@
           <a:bodyPr wrap="square" lIns="0" tIns="0" rIns="0" bIns="0" rtlCol="0" anchor="ctr"/>
           <a:lstStyle/>
           <a:p>
-            <a:pPr algn="r" indent="0" marL="0">
+            <a:pPr marL="0" indent="0" algn="r">
               <a:buNone/>
             </a:pPr>
             <a:r>
@@ -8500,17 +8574,24 @@
             <a:prstDash val="solid"/>
           </a:ln>
         </p:spPr>
+        <p:txBody>
+          <a:bodyPr/>
+          <a:lstStyle/>
+          <a:p>
+            <a:endParaRPr lang="es-ES_tradnl"/>
+          </a:p>
+        </p:txBody>
       </p:sp>
       <p:pic>
         <p:nvPicPr>
-          <p:cNvPr id="6" name="Image 0" descr="Diagrama de componentes: cliente o tests, API Express con sus módulos, Redis y PostgreSQL, con los puntos de integración PI-1 a PI-4">    </p:cNvPr>
+          <p:cNvPr id="6" name="Image 0" descr="Diagrama de componentes: cliente o tests, API Express con sus módulos, Redis y PostgreSQL, con los puntos de integración PI-1 a PI-4"/>
           <p:cNvPicPr>
             <a:picLocks noChangeAspect="1"/>
           </p:cNvPicPr>
           <p:nvPr/>
         </p:nvPicPr>
         <p:blipFill>
-          <a:blip r:embed="rId1"/>
+          <a:blip r:embed="rId3"/>
           <a:stretch>
             <a:fillRect/>
           </a:stretch>
@@ -8546,7 +8627,7 @@
           <a:bodyPr wrap="square" lIns="0" tIns="0" rIns="0" bIns="0" rtlCol="0" anchor="t"/>
           <a:lstStyle/>
           <a:p>
-            <a:pPr indent="0" marL="0">
+            <a:pPr marL="0" indent="0">
               <a:buNone/>
             </a:pPr>
             <a:r>
@@ -8583,6 +8664,13 @@
           </a:solidFill>
           <a:ln/>
         </p:spPr>
+        <p:txBody>
+          <a:bodyPr/>
+          <a:lstStyle/>
+          <a:p>
+            <a:endParaRPr lang="es-ES_tradnl"/>
+          </a:p>
+        </p:txBody>
       </p:sp>
       <p:sp>
         <p:nvSpPr>
@@ -8605,7 +8693,7 @@
           <a:bodyPr wrap="square" lIns="0" tIns="0" rIns="0" bIns="0" rtlCol="0" anchor="ctr"/>
           <a:lstStyle/>
           <a:p>
-            <a:pPr algn="ctr" indent="0" marL="0">
+            <a:pPr marL="0" indent="0" algn="ctr">
               <a:buNone/>
             </a:pPr>
             <a:r>
@@ -8644,7 +8732,7 @@
           <a:bodyPr wrap="square" lIns="0" tIns="0" rIns="0" bIns="0" rtlCol="0" anchor="t"/>
           <a:lstStyle/>
           <a:p>
-            <a:pPr indent="0" marL="0">
+            <a:pPr marL="0" indent="0">
               <a:buNone/>
             </a:pPr>
             <a:r>
@@ -8683,7 +8771,7 @@
           <a:bodyPr wrap="square" lIns="0" tIns="0" rIns="0" bIns="0" rtlCol="0" anchor="t"/>
           <a:lstStyle/>
           <a:p>
-            <a:pPr indent="0" marL="0">
+            <a:pPr marL="0" indent="0">
               <a:buNone/>
             </a:pPr>
             <a:r>
@@ -8720,6 +8808,13 @@
           </a:solidFill>
           <a:ln/>
         </p:spPr>
+        <p:txBody>
+          <a:bodyPr/>
+          <a:lstStyle/>
+          <a:p>
+            <a:endParaRPr lang="es-ES_tradnl"/>
+          </a:p>
+        </p:txBody>
       </p:sp>
       <p:sp>
         <p:nvSpPr>
@@ -8742,7 +8837,7 @@
           <a:bodyPr wrap="square" lIns="0" tIns="0" rIns="0" bIns="0" rtlCol="0" anchor="ctr"/>
           <a:lstStyle/>
           <a:p>
-            <a:pPr algn="ctr" indent="0" marL="0">
+            <a:pPr marL="0" indent="0" algn="ctr">
               <a:buNone/>
             </a:pPr>
             <a:r>
@@ -8781,7 +8876,7 @@
           <a:bodyPr wrap="square" lIns="0" tIns="0" rIns="0" bIns="0" rtlCol="0" anchor="t"/>
           <a:lstStyle/>
           <a:p>
-            <a:pPr indent="0" marL="0">
+            <a:pPr marL="0" indent="0">
               <a:buNone/>
             </a:pPr>
             <a:r>
@@ -8820,7 +8915,7 @@
           <a:bodyPr wrap="square" lIns="0" tIns="0" rIns="0" bIns="0" rtlCol="0" anchor="t"/>
           <a:lstStyle/>
           <a:p>
-            <a:pPr indent="0" marL="0">
+            <a:pPr marL="0" indent="0">
               <a:buNone/>
             </a:pPr>
             <a:r>
@@ -8857,6 +8952,13 @@
           </a:solidFill>
           <a:ln/>
         </p:spPr>
+        <p:txBody>
+          <a:bodyPr/>
+          <a:lstStyle/>
+          <a:p>
+            <a:endParaRPr lang="es-ES_tradnl"/>
+          </a:p>
+        </p:txBody>
       </p:sp>
       <p:sp>
         <p:nvSpPr>
@@ -8879,7 +8981,7 @@
           <a:bodyPr wrap="square" lIns="0" tIns="0" rIns="0" bIns="0" rtlCol="0" anchor="ctr"/>
           <a:lstStyle/>
           <a:p>
-            <a:pPr algn="ctr" indent="0" marL="0">
+            <a:pPr marL="0" indent="0" algn="ctr">
               <a:buNone/>
             </a:pPr>
             <a:r>
@@ -8918,7 +9020,7 @@
           <a:bodyPr wrap="square" lIns="0" tIns="0" rIns="0" bIns="0" rtlCol="0" anchor="t"/>
           <a:lstStyle/>
           <a:p>
-            <a:pPr indent="0" marL="0">
+            <a:pPr marL="0" indent="0">
               <a:buNone/>
             </a:pPr>
             <a:r>
@@ -8957,7 +9059,7 @@
           <a:bodyPr wrap="square" lIns="0" tIns="0" rIns="0" bIns="0" rtlCol="0" anchor="t"/>
           <a:lstStyle/>
           <a:p>
-            <a:pPr indent="0" marL="0">
+            <a:pPr marL="0" indent="0">
               <a:buNone/>
             </a:pPr>
             <a:r>
@@ -9003,9 +9105,11 @@
       <p:sp>
         <p:nvSpPr>
           <p:cNvPr id="2" name="Text 0"/>
-          <p:cNvSpPr/>
+          <p:cNvSpPr>
+            <a:spLocks noGrp="1"/>
+          </p:cNvSpPr>
           <p:nvPr>
-            <p:ph idx="100" type="title" hasCustomPrompt="1"/>
+            <p:ph type="title" idx="100" hasCustomPrompt="1"/>
           </p:nvPr>
         </p:nvSpPr>
         <p:spPr>
@@ -9023,7 +9127,7 @@
           <a:bodyPr wrap="square" lIns="0" tIns="0" rIns="0" bIns="0" rtlCol="0" anchor="ctr"/>
           <a:lstStyle/>
           <a:p>
-            <a:pPr algn="l" indent="0" marL="0">
+            <a:pPr marL="0" indent="0" algn="l">
               <a:buNone/>
             </a:pPr>
             <a:r>
@@ -9041,9 +9145,11 @@
       <p:sp>
         <p:nvSpPr>
           <p:cNvPr id="3" name="Text 0"/>
-          <p:cNvSpPr/>
+          <p:cNvSpPr>
+            <a:spLocks noGrp="1"/>
+          </p:cNvSpPr>
           <p:nvPr>
-            <p:ph idx="101" type="body" hasCustomPrompt="1"/>
+            <p:ph type="body" idx="101" hasCustomPrompt="1"/>
           </p:nvPr>
         </p:nvSpPr>
         <p:spPr>
@@ -9061,7 +9167,7 @@
           <a:bodyPr wrap="square" lIns="0" tIns="0" rIns="0" bIns="0" rtlCol="0" anchor="ctr"/>
           <a:lstStyle/>
           <a:p>
-            <a:pPr indent="0" marL="0">
+            <a:pPr marL="0" indent="0">
               <a:buNone/>
             </a:pPr>
             <a:r>
@@ -9079,9 +9185,11 @@
       <p:sp>
         <p:nvSpPr>
           <p:cNvPr id="4" name="Text 0"/>
-          <p:cNvSpPr/>
+          <p:cNvSpPr>
+            <a:spLocks noGrp="1"/>
+          </p:cNvSpPr>
           <p:nvPr>
-            <p:ph idx="102" type="body" hasCustomPrompt="1"/>
+            <p:ph type="body" idx="102" hasCustomPrompt="1"/>
           </p:nvPr>
         </p:nvSpPr>
         <p:spPr>
@@ -9099,7 +9207,7 @@
           <a:bodyPr wrap="square" lIns="0" tIns="0" rIns="0" bIns="0" rtlCol="0" anchor="ctr"/>
           <a:lstStyle/>
           <a:p>
-            <a:pPr algn="r" indent="0" marL="0">
+            <a:pPr marL="0" indent="0" algn="r">
               <a:buNone/>
             </a:pPr>
             <a:r>
@@ -9140,17 +9248,24 @@
             <a:prstDash val="solid"/>
           </a:ln>
         </p:spPr>
+        <p:txBody>
+          <a:bodyPr/>
+          <a:lstStyle/>
+          <a:p>
+            <a:endParaRPr lang="es-ES_tradnl"/>
+          </a:p>
+        </p:txBody>
       </p:sp>
       <p:pic>
         <p:nvPicPr>
-          <p:cNvPr id="6" name="Image 0" descr="Secuencia de lectura con MISS: la API consulta Redis, no encuentra la llave, lee de PostgreSQL, normaliza y guarda con TTL">    </p:cNvPr>
+          <p:cNvPr id="6" name="Image 0" descr="Secuencia de lectura con MISS: la API consulta Redis, no encuentra la llave, lee de PostgreSQL, normaliza y guarda con TTL"/>
           <p:cNvPicPr>
             <a:picLocks noChangeAspect="1"/>
           </p:cNvPicPr>
           <p:nvPr/>
         </p:nvPicPr>
         <p:blipFill>
-          <a:blip r:embed="rId1"/>
+          <a:blip r:embed="rId3"/>
           <a:stretch>
             <a:fillRect/>
           </a:stretch>
@@ -9186,7 +9301,7 @@
           <a:bodyPr wrap="square" lIns="0" tIns="0" rIns="0" bIns="0" rtlCol="0" anchor="t"/>
           <a:lstStyle/>
           <a:p>
-            <a:pPr indent="0" marL="0">
+            <a:pPr marL="0" indent="0">
               <a:buNone/>
             </a:pPr>
             <a:r>
@@ -9200,9 +9315,6 @@
               </a:rPr>
               <a:t>MISS:</a:t>
             </a:r>
-            <a:pPr indent="0" marL="0">
-              <a:buNone/>
-            </a:pPr>
             <a:r>
               <a:rPr lang="en-US" sz="1600" dirty="0">
                 <a:solidFill>
@@ -9244,17 +9356,24 @@
             <a:prstDash val="solid"/>
           </a:ln>
         </p:spPr>
+        <p:txBody>
+          <a:bodyPr/>
+          <a:lstStyle/>
+          <a:p>
+            <a:endParaRPr lang="es-ES_tradnl"/>
+          </a:p>
+        </p:txBody>
       </p:sp>
       <p:pic>
         <p:nvPicPr>
-          <p:cNvPr id="9" name="Image 1" descr="Secuencia de lectura con HIT: la API encuentra la llave en Redis y responde sin consultar PostgreSQL">    </p:cNvPr>
+          <p:cNvPr id="9" name="Image 1" descr="Secuencia de lectura con HIT: la API encuentra la llave en Redis y responde sin consultar PostgreSQL"/>
           <p:cNvPicPr>
             <a:picLocks noChangeAspect="1"/>
           </p:cNvPicPr>
           <p:nvPr/>
         </p:nvPicPr>
         <p:blipFill>
-          <a:blip r:embed="rId2"/>
+          <a:blip r:embed="rId4"/>
           <a:stretch>
             <a:fillRect/>
           </a:stretch>
@@ -9290,7 +9409,7 @@
           <a:bodyPr wrap="square" lIns="0" tIns="0" rIns="0" bIns="0" rtlCol="0" anchor="t"/>
           <a:lstStyle/>
           <a:p>
-            <a:pPr indent="0" marL="0">
+            <a:pPr marL="0" indent="0">
               <a:buNone/>
             </a:pPr>
             <a:r>
@@ -9304,9 +9423,6 @@
               </a:rPr>
               <a:t>HIT:</a:t>
             </a:r>
-            <a:pPr indent="0" marL="0">
-              <a:buNone/>
-            </a:pPr>
             <a:r>
               <a:rPr lang="en-US" sz="1600" dirty="0">
                 <a:solidFill>
@@ -9350,9 +9466,11 @@
       <p:sp>
         <p:nvSpPr>
           <p:cNvPr id="2" name="Text 0"/>
-          <p:cNvSpPr/>
+          <p:cNvSpPr>
+            <a:spLocks noGrp="1"/>
+          </p:cNvSpPr>
           <p:nvPr>
-            <p:ph idx="100" type="title" hasCustomPrompt="1"/>
+            <p:ph type="title" idx="100" hasCustomPrompt="1"/>
           </p:nvPr>
         </p:nvSpPr>
         <p:spPr>
@@ -9370,7 +9488,7 @@
           <a:bodyPr wrap="square" lIns="0" tIns="0" rIns="0" bIns="0" rtlCol="0" anchor="ctr"/>
           <a:lstStyle/>
           <a:p>
-            <a:pPr algn="l" indent="0" marL="0">
+            <a:pPr marL="0" indent="0" algn="l">
               <a:buNone/>
             </a:pPr>
             <a:r>
@@ -9388,9 +9506,11 @@
       <p:sp>
         <p:nvSpPr>
           <p:cNvPr id="3" name="Text 0"/>
-          <p:cNvSpPr/>
+          <p:cNvSpPr>
+            <a:spLocks noGrp="1"/>
+          </p:cNvSpPr>
           <p:nvPr>
-            <p:ph idx="101" type="body" hasCustomPrompt="1"/>
+            <p:ph type="body" idx="101" hasCustomPrompt="1"/>
           </p:nvPr>
         </p:nvSpPr>
         <p:spPr>
@@ -9408,7 +9528,7 @@
           <a:bodyPr wrap="square" lIns="0" tIns="0" rIns="0" bIns="0" rtlCol="0" anchor="ctr"/>
           <a:lstStyle/>
           <a:p>
-            <a:pPr indent="0" marL="0">
+            <a:pPr marL="0" indent="0">
               <a:buNone/>
             </a:pPr>
             <a:r>
@@ -9426,9 +9546,11 @@
       <p:sp>
         <p:nvSpPr>
           <p:cNvPr id="4" name="Text 0"/>
-          <p:cNvSpPr/>
+          <p:cNvSpPr>
+            <a:spLocks noGrp="1"/>
+          </p:cNvSpPr>
           <p:nvPr>
-            <p:ph idx="102" type="body" hasCustomPrompt="1"/>
+            <p:ph type="body" idx="102" hasCustomPrompt="1"/>
           </p:nvPr>
         </p:nvSpPr>
         <p:spPr>
@@ -9446,7 +9568,7 @@
           <a:bodyPr wrap="square" lIns="0" tIns="0" rIns="0" bIns="0" rtlCol="0" anchor="ctr"/>
           <a:lstStyle/>
           <a:p>
-            <a:pPr algn="r" indent="0" marL="0">
+            <a:pPr marL="0" indent="0" algn="r">
               <a:buNone/>
             </a:pPr>
             <a:r>
@@ -9487,17 +9609,24 @@
             <a:prstDash val="solid"/>
           </a:ln>
         </p:spPr>
+        <p:txBody>
+          <a:bodyPr/>
+          <a:lstStyle/>
+          <a:p>
+            <a:endParaRPr lang="es-ES_tradnl"/>
+          </a:p>
+        </p:txBody>
       </p:sp>
       <p:pic>
         <p:nvPicPr>
-          <p:cNvPr id="6" name="Image 0" descr="Secuencia de escritura: PUT, UPDATE en PostgreSQL, DEL de la llave en Redis y lectura posterior con MISS y el valor nuevo">    </p:cNvPr>
+          <p:cNvPr id="6" name="Image 0" descr="Secuencia de escritura: PUT, UPDATE en PostgreSQL, DEL de la llave en Redis y lectura posterior con MISS y el valor nuevo"/>
           <p:cNvPicPr>
             <a:picLocks noChangeAspect="1"/>
           </p:cNvPicPr>
           <p:nvPr/>
         </p:nvPicPr>
         <p:blipFill>
-          <a:blip r:embed="rId1"/>
+          <a:blip r:embed="rId3"/>
           <a:stretch>
             <a:fillRect/>
           </a:stretch>
@@ -9533,7 +9662,7 @@
           <a:bodyPr wrap="square" lIns="0" tIns="0" rIns="0" bIns="0" rtlCol="0" anchor="t"/>
           <a:lstStyle/>
           <a:p>
-            <a:pPr indent="0" marL="0">
+            <a:pPr marL="0" indent="0">
               <a:buNone/>
             </a:pPr>
             <a:r>
@@ -9547,9 +9676,6 @@
               </a:rPr>
               <a:t>PUT:</a:t>
             </a:r>
-            <a:pPr indent="0" marL="0">
-              <a:buNone/>
-            </a:pPr>
             <a:r>
               <a:rPr lang="en-US" sz="1600" dirty="0">
                 <a:solidFill>
@@ -9591,17 +9717,24 @@
             <a:prstDash val="solid"/>
           </a:ln>
         </p:spPr>
+        <p:txBody>
+          <a:bodyPr/>
+          <a:lstStyle/>
+          <a:p>
+            <a:endParaRPr lang="es-ES_tradnl"/>
+          </a:p>
+        </p:txBody>
       </p:sp>
       <p:pic>
         <p:nvPicPr>
-          <p:cNvPr id="9" name="Image 1" descr="Secuencia con Redis caído: la consulta a Redis falla, la API lee de PostgreSQL y responde con X-Cache BYPASS">    </p:cNvPr>
+          <p:cNvPr id="9" name="Image 1" descr="Secuencia con Redis caído: la consulta a Redis falla, la API lee de PostgreSQL y responde con X-Cache BYPASS"/>
           <p:cNvPicPr>
             <a:picLocks noChangeAspect="1"/>
           </p:cNvPicPr>
           <p:nvPr/>
         </p:nvPicPr>
         <p:blipFill>
-          <a:blip r:embed="rId2"/>
+          <a:blip r:embed="rId4"/>
           <a:stretch>
             <a:fillRect/>
           </a:stretch>
@@ -9637,7 +9770,7 @@
           <a:bodyPr wrap="square" lIns="0" tIns="0" rIns="0" bIns="0" rtlCol="0" anchor="t"/>
           <a:lstStyle/>
           <a:p>
-            <a:pPr indent="0" marL="0">
+            <a:pPr marL="0" indent="0">
               <a:buNone/>
             </a:pPr>
             <a:r>
@@ -9651,9 +9784,6 @@
               </a:rPr>
               <a:t>Redis caído:</a:t>
             </a:r>
-            <a:pPr indent="0" marL="0">
-              <a:buNone/>
-            </a:pPr>
             <a:r>
               <a:rPr lang="en-US" sz="1600" dirty="0">
                 <a:solidFill>
@@ -9697,9 +9827,11 @@
       <p:sp>
         <p:nvSpPr>
           <p:cNvPr id="2" name="Text 0"/>
-          <p:cNvSpPr/>
+          <p:cNvSpPr>
+            <a:spLocks noGrp="1"/>
+          </p:cNvSpPr>
           <p:nvPr>
-            <p:ph idx="100" type="title" hasCustomPrompt="1"/>
+            <p:ph type="title" idx="100" hasCustomPrompt="1"/>
           </p:nvPr>
         </p:nvSpPr>
         <p:spPr>
@@ -9717,7 +9849,7 @@
           <a:bodyPr wrap="square" lIns="0" tIns="0" rIns="0" bIns="0" rtlCol="0" anchor="ctr"/>
           <a:lstStyle/>
           <a:p>
-            <a:pPr algn="l" indent="0" marL="0">
+            <a:pPr marL="0" indent="0" algn="l">
               <a:buNone/>
             </a:pPr>
             <a:r>
@@ -9735,9 +9867,11 @@
       <p:sp>
         <p:nvSpPr>
           <p:cNvPr id="3" name="Text 0"/>
-          <p:cNvSpPr/>
+          <p:cNvSpPr>
+            <a:spLocks noGrp="1"/>
+          </p:cNvSpPr>
           <p:nvPr>
-            <p:ph idx="101" type="body" hasCustomPrompt="1"/>
+            <p:ph type="body" idx="101" hasCustomPrompt="1"/>
           </p:nvPr>
         </p:nvSpPr>
         <p:spPr>
@@ -9755,7 +9889,7 @@
           <a:bodyPr wrap="square" lIns="0" tIns="0" rIns="0" bIns="0" rtlCol="0" anchor="ctr"/>
           <a:lstStyle/>
           <a:p>
-            <a:pPr indent="0" marL="0">
+            <a:pPr marL="0" indent="0">
               <a:buNone/>
             </a:pPr>
             <a:r>
@@ -9773,9 +9907,11 @@
       <p:sp>
         <p:nvSpPr>
           <p:cNvPr id="4" name="Text 0"/>
-          <p:cNvSpPr/>
+          <p:cNvSpPr>
+            <a:spLocks noGrp="1"/>
+          </p:cNvSpPr>
           <p:nvPr>
-            <p:ph idx="102" type="body" hasCustomPrompt="1"/>
+            <p:ph type="body" idx="102" hasCustomPrompt="1"/>
           </p:nvPr>
         </p:nvSpPr>
         <p:spPr>
@@ -9793,7 +9929,7 @@
           <a:bodyPr wrap="square" lIns="0" tIns="0" rIns="0" bIns="0" rtlCol="0" anchor="ctr"/>
           <a:lstStyle/>
           <a:p>
-            <a:pPr algn="r" indent="0" marL="0">
+            <a:pPr marL="0" indent="0" algn="r">
               <a:buNone/>
             </a:pPr>
             <a:r>
@@ -9829,6 +9965,13 @@
           </a:solidFill>
           <a:ln/>
         </p:spPr>
+        <p:txBody>
+          <a:bodyPr/>
+          <a:lstStyle/>
+          <a:p>
+            <a:endParaRPr lang="es-ES_tradnl"/>
+          </a:p>
+        </p:txBody>
       </p:sp>
       <p:sp>
         <p:nvSpPr>
@@ -9849,6 +9992,13 @@
           </a:solidFill>
           <a:ln/>
         </p:spPr>
+        <p:txBody>
+          <a:bodyPr/>
+          <a:lstStyle/>
+          <a:p>
+            <a:endParaRPr lang="es-ES_tradnl"/>
+          </a:p>
+        </p:txBody>
       </p:sp>
       <p:sp>
         <p:nvSpPr>
@@ -9871,7 +10021,7 @@
           <a:bodyPr wrap="square" lIns="0" tIns="0" rIns="0" bIns="0" rtlCol="0" anchor="ctr"/>
           <a:lstStyle/>
           <a:p>
-            <a:pPr algn="ctr" indent="0" marL="0">
+            <a:pPr marL="0" indent="0" algn="ctr">
               <a:buNone/>
             </a:pPr>
             <a:r>
@@ -9910,7 +10060,7 @@
           <a:bodyPr wrap="square" lIns="0" tIns="0" rIns="0" bIns="0" rtlCol="0" anchor="t"/>
           <a:lstStyle/>
           <a:p>
-            <a:pPr indent="0" marL="0">
+            <a:pPr marL="0" indent="0">
               <a:buNone/>
             </a:pPr>
             <a:r>
@@ -9949,7 +10099,7 @@
           <a:bodyPr wrap="square" lIns="0" tIns="0" rIns="0" bIns="0" rtlCol="0" anchor="t"/>
           <a:lstStyle/>
           <a:p>
-            <a:pPr indent="0" marL="0">
+            <a:pPr marL="0" indent="0">
               <a:buNone/>
             </a:pPr>
             <a:r>
@@ -9988,6 +10138,13 @@
           </a:solidFill>
           <a:ln/>
         </p:spPr>
+        <p:txBody>
+          <a:bodyPr/>
+          <a:lstStyle/>
+          <a:p>
+            <a:endParaRPr lang="es-ES_tradnl"/>
+          </a:p>
+        </p:txBody>
       </p:sp>
       <p:sp>
         <p:nvSpPr>
@@ -10008,6 +10165,13 @@
           </a:solidFill>
           <a:ln/>
         </p:spPr>
+        <p:txBody>
+          <a:bodyPr/>
+          <a:lstStyle/>
+          <a:p>
+            <a:endParaRPr lang="es-ES_tradnl"/>
+          </a:p>
+        </p:txBody>
       </p:sp>
       <p:sp>
         <p:nvSpPr>
@@ -10030,7 +10194,7 @@
           <a:bodyPr wrap="square" lIns="0" tIns="0" rIns="0" bIns="0" rtlCol="0" anchor="ctr"/>
           <a:lstStyle/>
           <a:p>
-            <a:pPr algn="ctr" indent="0" marL="0">
+            <a:pPr marL="0" indent="0" algn="ctr">
               <a:buNone/>
             </a:pPr>
             <a:r>
@@ -10069,7 +10233,7 @@
           <a:bodyPr wrap="square" lIns="0" tIns="0" rIns="0" bIns="0" rtlCol="0" anchor="t"/>
           <a:lstStyle/>
           <a:p>
-            <a:pPr indent="0" marL="0">
+            <a:pPr marL="0" indent="0">
               <a:buNone/>
             </a:pPr>
             <a:r>
@@ -10108,7 +10272,7 @@
           <a:bodyPr wrap="square" lIns="0" tIns="0" rIns="0" bIns="0" rtlCol="0" anchor="t"/>
           <a:lstStyle/>
           <a:p>
-            <a:pPr indent="0" marL="0">
+            <a:pPr marL="0" indent="0">
               <a:buNone/>
             </a:pPr>
             <a:r>
@@ -10147,6 +10311,13 @@
           </a:solidFill>
           <a:ln/>
         </p:spPr>
+        <p:txBody>
+          <a:bodyPr/>
+          <a:lstStyle/>
+          <a:p>
+            <a:endParaRPr lang="es-ES_tradnl"/>
+          </a:p>
+        </p:txBody>
       </p:sp>
       <p:sp>
         <p:nvSpPr>
@@ -10167,6 +10338,13 @@
           </a:solidFill>
           <a:ln/>
         </p:spPr>
+        <p:txBody>
+          <a:bodyPr/>
+          <a:lstStyle/>
+          <a:p>
+            <a:endParaRPr lang="es-ES_tradnl"/>
+          </a:p>
+        </p:txBody>
       </p:sp>
       <p:sp>
         <p:nvSpPr>
@@ -10189,7 +10367,7 @@
           <a:bodyPr wrap="square" lIns="0" tIns="0" rIns="0" bIns="0" rtlCol="0" anchor="ctr"/>
           <a:lstStyle/>
           <a:p>
-            <a:pPr algn="ctr" indent="0" marL="0">
+            <a:pPr marL="0" indent="0" algn="ctr">
               <a:buNone/>
             </a:pPr>
             <a:r>
@@ -10228,7 +10406,7 @@
           <a:bodyPr wrap="square" lIns="0" tIns="0" rIns="0" bIns="0" rtlCol="0" anchor="t"/>
           <a:lstStyle/>
           <a:p>
-            <a:pPr indent="0" marL="0">
+            <a:pPr marL="0" indent="0">
               <a:buNone/>
             </a:pPr>
             <a:r>
@@ -10267,7 +10445,7 @@
           <a:bodyPr wrap="square" lIns="0" tIns="0" rIns="0" bIns="0" rtlCol="0" anchor="t"/>
           <a:lstStyle/>
           <a:p>
-            <a:pPr indent="0" marL="0">
+            <a:pPr marL="0" indent="0">
               <a:buNone/>
             </a:pPr>
             <a:r>
@@ -10306,6 +10484,13 @@
           </a:solidFill>
           <a:ln/>
         </p:spPr>
+        <p:txBody>
+          <a:bodyPr/>
+          <a:lstStyle/>
+          <a:p>
+            <a:endParaRPr lang="es-ES_tradnl"/>
+          </a:p>
+        </p:txBody>
       </p:sp>
       <p:sp>
         <p:nvSpPr>
@@ -10326,6 +10511,13 @@
           </a:solidFill>
           <a:ln/>
         </p:spPr>
+        <p:txBody>
+          <a:bodyPr/>
+          <a:lstStyle/>
+          <a:p>
+            <a:endParaRPr lang="es-ES_tradnl"/>
+          </a:p>
+        </p:txBody>
       </p:sp>
       <p:sp>
         <p:nvSpPr>
@@ -10348,7 +10540,7 @@
           <a:bodyPr wrap="square" lIns="0" tIns="0" rIns="0" bIns="0" rtlCol="0" anchor="ctr"/>
           <a:lstStyle/>
           <a:p>
-            <a:pPr algn="ctr" indent="0" marL="0">
+            <a:pPr marL="0" indent="0" algn="ctr">
               <a:buNone/>
             </a:pPr>
             <a:r>
@@ -10387,7 +10579,7 @@
           <a:bodyPr wrap="square" lIns="0" tIns="0" rIns="0" bIns="0" rtlCol="0" anchor="t"/>
           <a:lstStyle/>
           <a:p>
-            <a:pPr indent="0" marL="0">
+            <a:pPr marL="0" indent="0">
               <a:buNone/>
             </a:pPr>
             <a:r>
@@ -10426,7 +10618,7 @@
           <a:bodyPr wrap="square" lIns="0" tIns="0" rIns="0" bIns="0" rtlCol="0" anchor="t"/>
           <a:lstStyle/>
           <a:p>
-            <a:pPr indent="0" marL="0">
+            <a:pPr marL="0" indent="0">
               <a:buNone/>
             </a:pPr>
             <a:r>
@@ -10472,9 +10664,11 @@
       <p:sp>
         <p:nvSpPr>
           <p:cNvPr id="2" name="Text 0"/>
-          <p:cNvSpPr/>
+          <p:cNvSpPr>
+            <a:spLocks noGrp="1"/>
+          </p:cNvSpPr>
           <p:nvPr>
-            <p:ph idx="100" type="title" hasCustomPrompt="1"/>
+            <p:ph type="title" idx="100" hasCustomPrompt="1"/>
           </p:nvPr>
         </p:nvSpPr>
         <p:spPr>
@@ -10492,7 +10686,7 @@
           <a:bodyPr wrap="square" lIns="0" tIns="0" rIns="0" bIns="0" rtlCol="0" anchor="ctr"/>
           <a:lstStyle/>
           <a:p>
-            <a:pPr algn="l" indent="0" marL="0">
+            <a:pPr marL="0" indent="0" algn="l">
               <a:buNone/>
             </a:pPr>
             <a:r>
@@ -10510,9 +10704,11 @@
       <p:sp>
         <p:nvSpPr>
           <p:cNvPr id="3" name="Text 0"/>
-          <p:cNvSpPr/>
+          <p:cNvSpPr>
+            <a:spLocks noGrp="1"/>
+          </p:cNvSpPr>
           <p:nvPr>
-            <p:ph idx="101" type="body" hasCustomPrompt="1"/>
+            <p:ph type="body" idx="101" hasCustomPrompt="1"/>
           </p:nvPr>
         </p:nvSpPr>
         <p:spPr>
@@ -10530,7 +10726,7 @@
           <a:bodyPr wrap="square" lIns="0" tIns="0" rIns="0" bIns="0" rtlCol="0" anchor="ctr"/>
           <a:lstStyle/>
           <a:p>
-            <a:pPr indent="0" marL="0">
+            <a:pPr marL="0" indent="0">
               <a:buNone/>
             </a:pPr>
             <a:r>
@@ -10548,9 +10744,11 @@
       <p:sp>
         <p:nvSpPr>
           <p:cNvPr id="4" name="Text 0"/>
-          <p:cNvSpPr/>
+          <p:cNvSpPr>
+            <a:spLocks noGrp="1"/>
+          </p:cNvSpPr>
           <p:nvPr>
-            <p:ph idx="102" type="body" hasCustomPrompt="1"/>
+            <p:ph type="body" idx="102" hasCustomPrompt="1"/>
           </p:nvPr>
         </p:nvSpPr>
         <p:spPr>
@@ -10568,7 +10766,7 @@
           <a:bodyPr wrap="square" lIns="0" tIns="0" rIns="0" bIns="0" rtlCol="0" anchor="ctr"/>
           <a:lstStyle/>
           <a:p>
-            <a:pPr algn="r" indent="0" marL="0">
+            <a:pPr marL="0" indent="0" algn="r">
               <a:buNone/>
             </a:pPr>
             <a:r>
@@ -10599,17 +10797,41 @@
         </p:nvGraphicFramePr>
         <p:xfrm>
           <a:off x="548640" y="1371600"/>
-          <a:ext cx="11094415" cy="914400"/>
+          <a:ext cx="11094415" cy="2871216"/>
         </p:xfrm>
         <a:graphic>
           <a:graphicData uri="http://schemas.openxmlformats.org/drawingml/2006/table">
             <a:tbl>
               <a:tblPr/>
               <a:tblGrid>
-                <a:gridCol w="822960"/>
-                <a:gridCol w="2240280"/>
-                <a:gridCol w="4572000"/>
-                <a:gridCol w="3459175"/>
+                <a:gridCol w="822960">
+                  <a:extLst>
+                    <a:ext uri="{9D8B030D-6E8A-4147-A177-3AD203B41FA5}">
+                      <a16:colId xmlns:a16="http://schemas.microsoft.com/office/drawing/2014/main" val="20000"/>
+                    </a:ext>
+                  </a:extLst>
+                </a:gridCol>
+                <a:gridCol w="2240280">
+                  <a:extLst>
+                    <a:ext uri="{9D8B030D-6E8A-4147-A177-3AD203B41FA5}">
+                      <a16:colId xmlns:a16="http://schemas.microsoft.com/office/drawing/2014/main" val="20001"/>
+                    </a:ext>
+                  </a:extLst>
+                </a:gridCol>
+                <a:gridCol w="4572000">
+                  <a:extLst>
+                    <a:ext uri="{9D8B030D-6E8A-4147-A177-3AD203B41FA5}">
+                      <a16:colId xmlns:a16="http://schemas.microsoft.com/office/drawing/2014/main" val="20002"/>
+                    </a:ext>
+                  </a:extLst>
+                </a:gridCol>
+                <a:gridCol w="3459175">
+                  <a:extLst>
+                    <a:ext uri="{9D8B030D-6E8A-4147-A177-3AD203B41FA5}">
+                      <a16:colId xmlns:a16="http://schemas.microsoft.com/office/drawing/2014/main" val="20003"/>
+                    </a:ext>
+                  </a:extLst>
+                </a:gridCol>
               </a:tblGrid>
               <a:tr h="566928">
                 <a:tc>
@@ -10617,7 +10839,7 @@
                     <a:bodyPr/>
                     <a:lstStyle/>
                     <a:p>
-                      <a:pPr indent="0" marL="0">
+                      <a:pPr marL="0" indent="0">
                         <a:buNone/>
                       </a:pPr>
                       <a:r>
@@ -10638,7 +10860,7 @@
                       </a:endParaRPr>
                     </a:p>
                   </a:txBody>
-                  <a:tcPr marL="91440" marR="91440" marT="45720" marB="45720" anchor="ctr">
+                  <a:tcPr anchor="ctr">
                     <a:lnL w="9525" cap="flat" cmpd="sng" algn="ctr">
                       <a:solidFill>
                         <a:srgbClr val="D5D9DE"/>
@@ -10685,7 +10907,7 @@
                     <a:bodyPr/>
                     <a:lstStyle/>
                     <a:p>
-                      <a:pPr indent="0" marL="0">
+                      <a:pPr marL="0" indent="0">
                         <a:buNone/>
                       </a:pPr>
                       <a:r>
@@ -10706,7 +10928,7 @@
                       </a:endParaRPr>
                     </a:p>
                   </a:txBody>
-                  <a:tcPr marL="91440" marR="91440" marT="45720" marB="45720" anchor="ctr">
+                  <a:tcPr anchor="ctr">
                     <a:lnL w="9525" cap="flat" cmpd="sng" algn="ctr">
                       <a:solidFill>
                         <a:srgbClr val="D5D9DE"/>
@@ -10753,7 +10975,7 @@
                     <a:bodyPr/>
                     <a:lstStyle/>
                     <a:p>
-                      <a:pPr indent="0" marL="0">
+                      <a:pPr marL="0" indent="0">
                         <a:buNone/>
                       </a:pPr>
                       <a:r>
@@ -10774,7 +10996,7 @@
                       </a:endParaRPr>
                     </a:p>
                   </a:txBody>
-                  <a:tcPr marL="91440" marR="91440" marT="45720" marB="45720" anchor="ctr">
+                  <a:tcPr anchor="ctr">
                     <a:lnL w="9525" cap="flat" cmpd="sng" algn="ctr">
                       <a:solidFill>
                         <a:srgbClr val="D5D9DE"/>
@@ -10821,7 +11043,7 @@
                     <a:bodyPr/>
                     <a:lstStyle/>
                     <a:p>
-                      <a:pPr indent="0" marL="0">
+                      <a:pPr marL="0" indent="0">
                         <a:buNone/>
                       </a:pPr>
                       <a:r>
@@ -10842,7 +11064,7 @@
                       </a:endParaRPr>
                     </a:p>
                   </a:txBody>
-                  <a:tcPr marL="91440" marR="91440" marT="45720" marB="45720" anchor="ctr">
+                  <a:tcPr anchor="ctr">
                     <a:lnL w="9525" cap="flat" cmpd="sng" algn="ctr">
                       <a:solidFill>
                         <a:srgbClr val="D5D9DE"/>
@@ -10884,6 +11106,11 @@
                     </a:solidFill>
                   </a:tcPr>
                 </a:tc>
+                <a:extLst>
+                  <a:ext uri="{0D108BD9-81ED-4DB2-BD59-A6C34878D82A}">
+                    <a16:rowId xmlns:a16="http://schemas.microsoft.com/office/drawing/2014/main" val="10000"/>
+                  </a:ext>
+                </a:extLst>
               </a:tr>
               <a:tr h="566928">
                 <a:tc>
@@ -10891,7 +11118,7 @@
                     <a:bodyPr/>
                     <a:lstStyle/>
                     <a:p>
-                      <a:pPr indent="0" marL="0">
+                      <a:pPr marL="0" indent="0">
                         <a:buNone/>
                       </a:pPr>
                       <a:r>
@@ -10912,7 +11139,7 @@
                       </a:endParaRPr>
                     </a:p>
                   </a:txBody>
-                  <a:tcPr marL="91440" marR="91440" marT="45720" marB="45720" anchor="ctr">
+                  <a:tcPr anchor="ctr">
                     <a:lnL w="9525" cap="flat" cmpd="sng" algn="ctr">
                       <a:solidFill>
                         <a:srgbClr val="D5D9DE"/>
@@ -10959,7 +11186,7 @@
                     <a:bodyPr/>
                     <a:lstStyle/>
                     <a:p>
-                      <a:pPr indent="0" marL="0">
+                      <a:pPr marL="0" indent="0">
                         <a:buNone/>
                       </a:pPr>
                       <a:r>
@@ -10980,7 +11207,7 @@
                       </a:endParaRPr>
                     </a:p>
                   </a:txBody>
-                  <a:tcPr marL="91440" marR="91440" marT="45720" marB="45720" anchor="ctr">
+                  <a:tcPr anchor="ctr">
                     <a:lnL w="9525" cap="flat" cmpd="sng" algn="ctr">
                       <a:solidFill>
                         <a:srgbClr val="D5D9DE"/>
@@ -11027,7 +11254,7 @@
                     <a:bodyPr/>
                     <a:lstStyle/>
                     <a:p>
-                      <a:pPr indent="0" marL="0">
+                      <a:pPr marL="0" indent="0">
                         <a:buNone/>
                       </a:pPr>
                       <a:r>
@@ -11048,7 +11275,7 @@
                       </a:endParaRPr>
                     </a:p>
                   </a:txBody>
-                  <a:tcPr marL="91440" marR="91440" marT="45720" marB="45720" anchor="ctr">
+                  <a:tcPr anchor="ctr">
                     <a:lnL w="9525" cap="flat" cmpd="sng" algn="ctr">
                       <a:solidFill>
                         <a:srgbClr val="D5D9DE"/>
@@ -11095,7 +11322,7 @@
                     <a:bodyPr/>
                     <a:lstStyle/>
                     <a:p>
-                      <a:pPr indent="0" marL="0">
+                      <a:pPr marL="0" indent="0">
                         <a:buNone/>
                       </a:pPr>
                       <a:r>
@@ -11116,7 +11343,7 @@
                       </a:endParaRPr>
                     </a:p>
                   </a:txBody>
-                  <a:tcPr marL="91440" marR="91440" marT="45720" marB="45720" anchor="ctr">
+                  <a:tcPr anchor="ctr">
                     <a:lnL w="9525" cap="flat" cmpd="sng" algn="ctr">
                       <a:solidFill>
                         <a:srgbClr val="D5D9DE"/>
@@ -11158,6 +11385,11 @@
                     </a:solidFill>
                   </a:tcPr>
                 </a:tc>
+                <a:extLst>
+                  <a:ext uri="{0D108BD9-81ED-4DB2-BD59-A6C34878D82A}">
+                    <a16:rowId xmlns:a16="http://schemas.microsoft.com/office/drawing/2014/main" val="10001"/>
+                  </a:ext>
+                </a:extLst>
               </a:tr>
               <a:tr h="566928">
                 <a:tc>
@@ -11165,7 +11397,7 @@
                     <a:bodyPr/>
                     <a:lstStyle/>
                     <a:p>
-                      <a:pPr indent="0" marL="0">
+                      <a:pPr marL="0" indent="0">
                         <a:buNone/>
                       </a:pPr>
                       <a:r>
@@ -11186,7 +11418,7 @@
                       </a:endParaRPr>
                     </a:p>
                   </a:txBody>
-                  <a:tcPr marL="91440" marR="91440" marT="45720" marB="45720" anchor="ctr">
+                  <a:tcPr anchor="ctr">
                     <a:lnL w="9525" cap="flat" cmpd="sng" algn="ctr">
                       <a:solidFill>
                         <a:srgbClr val="D5D9DE"/>
@@ -11233,7 +11465,7 @@
                     <a:bodyPr/>
                     <a:lstStyle/>
                     <a:p>
-                      <a:pPr indent="0" marL="0">
+                      <a:pPr marL="0" indent="0">
                         <a:buNone/>
                       </a:pPr>
                       <a:r>
@@ -11254,7 +11486,7 @@
                       </a:endParaRPr>
                     </a:p>
                   </a:txBody>
-                  <a:tcPr marL="91440" marR="91440" marT="45720" marB="45720" anchor="ctr">
+                  <a:tcPr anchor="ctr">
                     <a:lnL w="9525" cap="flat" cmpd="sng" algn="ctr">
                       <a:solidFill>
                         <a:srgbClr val="D5D9DE"/>
@@ -11301,7 +11533,7 @@
                     <a:bodyPr/>
                     <a:lstStyle/>
                     <a:p>
-                      <a:pPr indent="0" marL="0">
+                      <a:pPr marL="0" indent="0">
                         <a:buNone/>
                       </a:pPr>
                       <a:r>
@@ -11322,7 +11554,7 @@
                       </a:endParaRPr>
                     </a:p>
                   </a:txBody>
-                  <a:tcPr marL="91440" marR="91440" marT="45720" marB="45720" anchor="ctr">
+                  <a:tcPr anchor="ctr">
                     <a:lnL w="9525" cap="flat" cmpd="sng" algn="ctr">
                       <a:solidFill>
                         <a:srgbClr val="D5D9DE"/>
@@ -11369,7 +11601,7 @@
                     <a:bodyPr/>
                     <a:lstStyle/>
                     <a:p>
-                      <a:pPr indent="0" marL="0">
+                      <a:pPr marL="0" indent="0">
                         <a:buNone/>
                       </a:pPr>
                       <a:r>
@@ -11390,7 +11622,7 @@
                       </a:endParaRPr>
                     </a:p>
                   </a:txBody>
-                  <a:tcPr marL="91440" marR="91440" marT="45720" marB="45720" anchor="ctr">
+                  <a:tcPr anchor="ctr">
                     <a:lnL w="9525" cap="flat" cmpd="sng" algn="ctr">
                       <a:solidFill>
                         <a:srgbClr val="D5D9DE"/>
@@ -11432,6 +11664,11 @@
                     </a:solidFill>
                   </a:tcPr>
                 </a:tc>
+                <a:extLst>
+                  <a:ext uri="{0D108BD9-81ED-4DB2-BD59-A6C34878D82A}">
+                    <a16:rowId xmlns:a16="http://schemas.microsoft.com/office/drawing/2014/main" val="10002"/>
+                  </a:ext>
+                </a:extLst>
               </a:tr>
               <a:tr h="566928">
                 <a:tc>
@@ -11439,7 +11676,7 @@
                     <a:bodyPr/>
                     <a:lstStyle/>
                     <a:p>
-                      <a:pPr indent="0" marL="0">
+                      <a:pPr marL="0" indent="0">
                         <a:buNone/>
                       </a:pPr>
                       <a:r>
@@ -11460,7 +11697,7 @@
                       </a:endParaRPr>
                     </a:p>
                   </a:txBody>
-                  <a:tcPr marL="91440" marR="91440" marT="45720" marB="45720" anchor="ctr">
+                  <a:tcPr anchor="ctr">
                     <a:lnL w="9525" cap="flat" cmpd="sng" algn="ctr">
                       <a:solidFill>
                         <a:srgbClr val="D5D9DE"/>
@@ -11507,7 +11744,7 @@
                     <a:bodyPr/>
                     <a:lstStyle/>
                     <a:p>
-                      <a:pPr indent="0" marL="0">
+                      <a:pPr marL="0" indent="0">
                         <a:buNone/>
                       </a:pPr>
                       <a:r>
@@ -11528,7 +11765,7 @@
                       </a:endParaRPr>
                     </a:p>
                   </a:txBody>
-                  <a:tcPr marL="91440" marR="91440" marT="45720" marB="45720" anchor="ctr">
+                  <a:tcPr anchor="ctr">
                     <a:lnL w="9525" cap="flat" cmpd="sng" algn="ctr">
                       <a:solidFill>
                         <a:srgbClr val="D5D9DE"/>
@@ -11575,7 +11812,7 @@
                     <a:bodyPr/>
                     <a:lstStyle/>
                     <a:p>
-                      <a:pPr indent="0" marL="0">
+                      <a:pPr marL="0" indent="0">
                         <a:buNone/>
                       </a:pPr>
                       <a:r>
@@ -11596,7 +11833,7 @@
                       </a:endParaRPr>
                     </a:p>
                   </a:txBody>
-                  <a:tcPr marL="91440" marR="91440" marT="45720" marB="45720" anchor="ctr">
+                  <a:tcPr anchor="ctr">
                     <a:lnL w="9525" cap="flat" cmpd="sng" algn="ctr">
                       <a:solidFill>
                         <a:srgbClr val="D5D9DE"/>
@@ -11643,7 +11880,7 @@
                     <a:bodyPr/>
                     <a:lstStyle/>
                     <a:p>
-                      <a:pPr indent="0" marL="0">
+                      <a:pPr marL="0" indent="0">
                         <a:buNone/>
                       </a:pPr>
                       <a:r>
@@ -11664,7 +11901,7 @@
                       </a:endParaRPr>
                     </a:p>
                   </a:txBody>
-                  <a:tcPr marL="91440" marR="91440" marT="45720" marB="45720" anchor="ctr">
+                  <a:tcPr anchor="ctr">
                     <a:lnL w="9525" cap="flat" cmpd="sng" algn="ctr">
                       <a:solidFill>
                         <a:srgbClr val="D5D9DE"/>
@@ -11706,6 +11943,11 @@
                     </a:solidFill>
                   </a:tcPr>
                 </a:tc>
+                <a:extLst>
+                  <a:ext uri="{0D108BD9-81ED-4DB2-BD59-A6C34878D82A}">
+                    <a16:rowId xmlns:a16="http://schemas.microsoft.com/office/drawing/2014/main" val="10003"/>
+                  </a:ext>
+                </a:extLst>
               </a:tr>
               <a:tr h="566928">
                 <a:tc>
@@ -11713,7 +11955,7 @@
                     <a:bodyPr/>
                     <a:lstStyle/>
                     <a:p>
-                      <a:pPr indent="0" marL="0">
+                      <a:pPr marL="0" indent="0">
                         <a:buNone/>
                       </a:pPr>
                       <a:r>
@@ -11734,7 +11976,7 @@
                       </a:endParaRPr>
                     </a:p>
                   </a:txBody>
-                  <a:tcPr marL="91440" marR="91440" marT="45720" marB="45720" anchor="ctr">
+                  <a:tcPr anchor="ctr">
                     <a:lnL w="9525" cap="flat" cmpd="sng" algn="ctr">
                       <a:solidFill>
                         <a:srgbClr val="D5D9DE"/>
@@ -11781,7 +12023,7 @@
                     <a:bodyPr/>
                     <a:lstStyle/>
                     <a:p>
-                      <a:pPr indent="0" marL="0">
+                      <a:pPr marL="0" indent="0">
                         <a:buNone/>
                       </a:pPr>
                       <a:r>
@@ -11802,7 +12044,7 @@
                       </a:endParaRPr>
                     </a:p>
                   </a:txBody>
-                  <a:tcPr marL="91440" marR="91440" marT="45720" marB="45720" anchor="ctr">
+                  <a:tcPr anchor="ctr">
                     <a:lnL w="9525" cap="flat" cmpd="sng" algn="ctr">
                       <a:solidFill>
                         <a:srgbClr val="D5D9DE"/>
@@ -11849,7 +12091,7 @@
                     <a:bodyPr/>
                     <a:lstStyle/>
                     <a:p>
-                      <a:pPr indent="0" marL="0">
+                      <a:pPr marL="0" indent="0">
                         <a:buNone/>
                       </a:pPr>
                       <a:r>
@@ -11870,7 +12112,7 @@
                       </a:endParaRPr>
                     </a:p>
                   </a:txBody>
-                  <a:tcPr marL="91440" marR="91440" marT="45720" marB="45720" anchor="ctr">
+                  <a:tcPr anchor="ctr">
                     <a:lnL w="9525" cap="flat" cmpd="sng" algn="ctr">
                       <a:solidFill>
                         <a:srgbClr val="D5D9DE"/>
@@ -11917,7 +12159,7 @@
                     <a:bodyPr/>
                     <a:lstStyle/>
                     <a:p>
-                      <a:pPr indent="0" marL="0">
+                      <a:pPr marL="0" indent="0">
                         <a:buNone/>
                       </a:pPr>
                       <a:r>
@@ -11938,7 +12180,7 @@
                       </a:endParaRPr>
                     </a:p>
                   </a:txBody>
-                  <a:tcPr marL="91440" marR="91440" marT="45720" marB="45720" anchor="ctr">
+                  <a:tcPr anchor="ctr">
                     <a:lnL w="9525" cap="flat" cmpd="sng" algn="ctr">
                       <a:solidFill>
                         <a:srgbClr val="D5D9DE"/>
@@ -11980,6 +12222,11 @@
                     </a:solidFill>
                   </a:tcPr>
                 </a:tc>
+                <a:extLst>
+                  <a:ext uri="{0D108BD9-81ED-4DB2-BD59-A6C34878D82A}">
+                    <a16:rowId xmlns:a16="http://schemas.microsoft.com/office/drawing/2014/main" val="10004"/>
+                  </a:ext>
+                </a:extLst>
               </a:tr>
             </a:tbl>
           </a:graphicData>
@@ -12006,6 +12253,13 @@
           </a:solidFill>
           <a:ln/>
         </p:spPr>
+        <p:txBody>
+          <a:bodyPr/>
+          <a:lstStyle/>
+          <a:p>
+            <a:endParaRPr lang="es-ES_tradnl"/>
+          </a:p>
+        </p:txBody>
       </p:sp>
       <p:sp>
         <p:nvSpPr>
@@ -12028,7 +12282,7 @@
           <a:bodyPr wrap="square" lIns="0" tIns="0" rIns="0" bIns="0" rtlCol="0" anchor="ctr"/>
           <a:lstStyle/>
           <a:p>
-            <a:pPr indent="0" marL="0">
+            <a:pPr marL="0" indent="0">
               <a:buNone/>
             </a:pPr>
             <a:r>
@@ -12074,9 +12328,11 @@
       <p:sp>
         <p:nvSpPr>
           <p:cNvPr id="2" name="Text 0"/>
-          <p:cNvSpPr/>
+          <p:cNvSpPr>
+            <a:spLocks noGrp="1"/>
+          </p:cNvSpPr>
           <p:nvPr>
-            <p:ph idx="100" type="title" hasCustomPrompt="1"/>
+            <p:ph type="title" idx="100" hasCustomPrompt="1"/>
           </p:nvPr>
         </p:nvSpPr>
         <p:spPr>
@@ -12094,7 +12350,7 @@
           <a:bodyPr wrap="square" lIns="0" tIns="0" rIns="0" bIns="0" rtlCol="0" anchor="ctr"/>
           <a:lstStyle/>
           <a:p>
-            <a:pPr algn="l" indent="0" marL="0">
+            <a:pPr marL="0" indent="0" algn="l">
               <a:buNone/>
             </a:pPr>
             <a:r>
@@ -12112,9 +12368,11 @@
       <p:sp>
         <p:nvSpPr>
           <p:cNvPr id="3" name="Text 0"/>
-          <p:cNvSpPr/>
+          <p:cNvSpPr>
+            <a:spLocks noGrp="1"/>
+          </p:cNvSpPr>
           <p:nvPr>
-            <p:ph idx="101" type="body" hasCustomPrompt="1"/>
+            <p:ph type="body" idx="101" hasCustomPrompt="1"/>
           </p:nvPr>
         </p:nvSpPr>
         <p:spPr>
@@ -12132,7 +12390,7 @@
           <a:bodyPr wrap="square" lIns="0" tIns="0" rIns="0" bIns="0" rtlCol="0" anchor="ctr"/>
           <a:lstStyle/>
           <a:p>
-            <a:pPr indent="0" marL="0">
+            <a:pPr marL="0" indent="0">
               <a:buNone/>
             </a:pPr>
             <a:r>
@@ -12150,9 +12408,11 @@
       <p:sp>
         <p:nvSpPr>
           <p:cNvPr id="4" name="Text 0"/>
-          <p:cNvSpPr/>
+          <p:cNvSpPr>
+            <a:spLocks noGrp="1"/>
+          </p:cNvSpPr>
           <p:nvPr>
-            <p:ph idx="102" type="body" hasCustomPrompt="1"/>
+            <p:ph type="body" idx="102" hasCustomPrompt="1"/>
           </p:nvPr>
         </p:nvSpPr>
         <p:spPr>
@@ -12170,7 +12430,7 @@
           <a:bodyPr wrap="square" lIns="0" tIns="0" rIns="0" bIns="0" rtlCol="0" anchor="ctr"/>
           <a:lstStyle/>
           <a:p>
-            <a:pPr algn="r" indent="0" marL="0">
+            <a:pPr marL="0" indent="0" algn="r">
               <a:buNone/>
             </a:pPr>
             <a:r>
@@ -12201,17 +12461,41 @@
         </p:nvGraphicFramePr>
         <p:xfrm>
           <a:off x="548640" y="1371600"/>
-          <a:ext cx="11094415" cy="914400"/>
+          <a:ext cx="11094415" cy="4389120"/>
         </p:xfrm>
         <a:graphic>
           <a:graphicData uri="http://schemas.openxmlformats.org/drawingml/2006/table">
             <a:tbl>
               <a:tblPr/>
               <a:tblGrid>
-                <a:gridCol w="731520"/>
-                <a:gridCol w="4206240"/>
-                <a:gridCol w="4480560"/>
-                <a:gridCol w="1676095"/>
+                <a:gridCol w="731520">
+                  <a:extLst>
+                    <a:ext uri="{9D8B030D-6E8A-4147-A177-3AD203B41FA5}">
+                      <a16:colId xmlns:a16="http://schemas.microsoft.com/office/drawing/2014/main" val="20000"/>
+                    </a:ext>
+                  </a:extLst>
+                </a:gridCol>
+                <a:gridCol w="4206240">
+                  <a:extLst>
+                    <a:ext uri="{9D8B030D-6E8A-4147-A177-3AD203B41FA5}">
+                      <a16:colId xmlns:a16="http://schemas.microsoft.com/office/drawing/2014/main" val="20001"/>
+                    </a:ext>
+                  </a:extLst>
+                </a:gridCol>
+                <a:gridCol w="4480560">
+                  <a:extLst>
+                    <a:ext uri="{9D8B030D-6E8A-4147-A177-3AD203B41FA5}">
+                      <a16:colId xmlns:a16="http://schemas.microsoft.com/office/drawing/2014/main" val="20002"/>
+                    </a:ext>
+                  </a:extLst>
+                </a:gridCol>
+                <a:gridCol w="1676095">
+                  <a:extLst>
+                    <a:ext uri="{9D8B030D-6E8A-4147-A177-3AD203B41FA5}">
+                      <a16:colId xmlns:a16="http://schemas.microsoft.com/office/drawing/2014/main" val="20003"/>
+                    </a:ext>
+                  </a:extLst>
+                </a:gridCol>
               </a:tblGrid>
               <a:tr h="548640">
                 <a:tc>
@@ -12219,7 +12503,7 @@
                     <a:bodyPr/>
                     <a:lstStyle/>
                     <a:p>
-                      <a:pPr indent="0" marL="0">
+                      <a:pPr marL="0" indent="0">
                         <a:buNone/>
                       </a:pPr>
                       <a:r>
@@ -12240,7 +12524,7 @@
                       </a:endParaRPr>
                     </a:p>
                   </a:txBody>
-                  <a:tcPr marL="91440" marR="91440" marT="45720" marB="45720" anchor="ctr">
+                  <a:tcPr anchor="ctr">
                     <a:lnL w="9525" cap="flat" cmpd="sng" algn="ctr">
                       <a:solidFill>
                         <a:srgbClr val="D5D9DE"/>
@@ -12287,7 +12571,7 @@
                     <a:bodyPr/>
                     <a:lstStyle/>
                     <a:p>
-                      <a:pPr indent="0" marL="0">
+                      <a:pPr marL="0" indent="0">
                         <a:buNone/>
                       </a:pPr>
                       <a:r>
@@ -12308,7 +12592,7 @@
                       </a:endParaRPr>
                     </a:p>
                   </a:txBody>
-                  <a:tcPr marL="91440" marR="91440" marT="45720" marB="45720" anchor="ctr">
+                  <a:tcPr anchor="ctr">
                     <a:lnL w="9525" cap="flat" cmpd="sng" algn="ctr">
                       <a:solidFill>
                         <a:srgbClr val="D5D9DE"/>
@@ -12355,7 +12639,7 @@
                     <a:bodyPr/>
                     <a:lstStyle/>
                     <a:p>
-                      <a:pPr indent="0" marL="0">
+                      <a:pPr marL="0" indent="0">
                         <a:buNone/>
                       </a:pPr>
                       <a:r>
@@ -12376,7 +12660,7 @@
                       </a:endParaRPr>
                     </a:p>
                   </a:txBody>
-                  <a:tcPr marL="91440" marR="91440" marT="45720" marB="45720" anchor="ctr">
+                  <a:tcPr anchor="ctr">
                     <a:lnL w="9525" cap="flat" cmpd="sng" algn="ctr">
                       <a:solidFill>
                         <a:srgbClr val="D5D9DE"/>
@@ -12423,7 +12707,7 @@
                     <a:bodyPr/>
                     <a:lstStyle/>
                     <a:p>
-                      <a:pPr indent="0" marL="0">
+                      <a:pPr marL="0" indent="0">
                         <a:buNone/>
                       </a:pPr>
                       <a:r>
@@ -12444,7 +12728,7 @@
                       </a:endParaRPr>
                     </a:p>
                   </a:txBody>
-                  <a:tcPr marL="91440" marR="91440" marT="45720" marB="45720" anchor="ctr">
+                  <a:tcPr anchor="ctr">
                     <a:lnL w="9525" cap="flat" cmpd="sng" algn="ctr">
                       <a:solidFill>
                         <a:srgbClr val="D5D9DE"/>
@@ -12486,6 +12770,11 @@
                     </a:solidFill>
                   </a:tcPr>
                 </a:tc>
+                <a:extLst>
+                  <a:ext uri="{0D108BD9-81ED-4DB2-BD59-A6C34878D82A}">
+                    <a16:rowId xmlns:a16="http://schemas.microsoft.com/office/drawing/2014/main" val="10000"/>
+                  </a:ext>
+                </a:extLst>
               </a:tr>
               <a:tr h="548640">
                 <a:tc>
@@ -12493,7 +12782,7 @@
                     <a:bodyPr/>
                     <a:lstStyle/>
                     <a:p>
-                      <a:pPr indent="0" marL="0">
+                      <a:pPr marL="0" indent="0">
                         <a:buNone/>
                       </a:pPr>
                       <a:r>
@@ -12514,7 +12803,7 @@
                       </a:endParaRPr>
                     </a:p>
                   </a:txBody>
-                  <a:tcPr marL="91440" marR="91440" marT="45720" marB="45720" anchor="ctr">
+                  <a:tcPr anchor="ctr">
                     <a:lnL w="9525" cap="flat" cmpd="sng" algn="ctr">
                       <a:solidFill>
                         <a:srgbClr val="D5D9DE"/>
@@ -12561,7 +12850,7 @@
                     <a:bodyPr/>
                     <a:lstStyle/>
                     <a:p>
-                      <a:pPr indent="0" marL="0">
+                      <a:pPr marL="0" indent="0">
                         <a:buNone/>
                       </a:pPr>
                       <a:r>
@@ -12582,7 +12871,7 @@
                       </a:endParaRPr>
                     </a:p>
                   </a:txBody>
-                  <a:tcPr marL="91440" marR="91440" marT="45720" marB="45720" anchor="ctr">
+                  <a:tcPr anchor="ctr">
                     <a:lnL w="9525" cap="flat" cmpd="sng" algn="ctr">
                       <a:solidFill>
                         <a:srgbClr val="D5D9DE"/>
@@ -12629,7 +12918,7 @@
                     <a:bodyPr/>
                     <a:lstStyle/>
                     <a:p>
-                      <a:pPr indent="0" marL="0">
+                      <a:pPr marL="0" indent="0">
                         <a:buNone/>
                       </a:pPr>
                       <a:r>
@@ -12650,7 +12939,7 @@
                       </a:endParaRPr>
                     </a:p>
                   </a:txBody>
-                  <a:tcPr marL="91440" marR="91440" marT="45720" marB="45720" anchor="ctr">
+                  <a:tcPr anchor="ctr">
                     <a:lnL w="9525" cap="flat" cmpd="sng" algn="ctr">
                       <a:solidFill>
                         <a:srgbClr val="D5D9DE"/>
@@ -12697,7 +12986,7 @@
                     <a:bodyPr/>
                     <a:lstStyle/>
                     <a:p>
-                      <a:pPr indent="0" marL="0">
+                      <a:pPr marL="0" indent="0">
                         <a:buNone/>
                       </a:pPr>
                       <a:r>
@@ -12718,7 +13007,7 @@
                       </a:endParaRPr>
                     </a:p>
                   </a:txBody>
-                  <a:tcPr marL="91440" marR="91440" marT="45720" marB="45720" anchor="ctr">
+                  <a:tcPr anchor="ctr">
                     <a:lnL w="9525" cap="flat" cmpd="sng" algn="ctr">
                       <a:solidFill>
                         <a:srgbClr val="D5D9DE"/>
@@ -12760,6 +13049,11 @@
                     </a:solidFill>
                   </a:tcPr>
                 </a:tc>
+                <a:extLst>
+                  <a:ext uri="{0D108BD9-81ED-4DB2-BD59-A6C34878D82A}">
+                    <a16:rowId xmlns:a16="http://schemas.microsoft.com/office/drawing/2014/main" val="10001"/>
+                  </a:ext>
+                </a:extLst>
               </a:tr>
               <a:tr h="548640">
                 <a:tc>
@@ -12767,7 +13061,7 @@
                     <a:bodyPr/>
                     <a:lstStyle/>
                     <a:p>
-                      <a:pPr indent="0" marL="0">
+                      <a:pPr marL="0" indent="0">
                         <a:buNone/>
                       </a:pPr>
                       <a:r>
@@ -12788,7 +13082,7 @@
                       </a:endParaRPr>
                     </a:p>
                   </a:txBody>
-                  <a:tcPr marL="91440" marR="91440" marT="45720" marB="45720" anchor="ctr">
+                  <a:tcPr anchor="ctr">
                     <a:lnL w="9525" cap="flat" cmpd="sng" algn="ctr">
                       <a:solidFill>
                         <a:srgbClr val="D5D9DE"/>
@@ -12835,7 +13129,7 @@
                     <a:bodyPr/>
                     <a:lstStyle/>
                     <a:p>
-                      <a:pPr indent="0" marL="0">
+                      <a:pPr marL="0" indent="0">
                         <a:buNone/>
                       </a:pPr>
                       <a:r>
@@ -12856,7 +13150,7 @@
                       </a:endParaRPr>
                     </a:p>
                   </a:txBody>
-                  <a:tcPr marL="91440" marR="91440" marT="45720" marB="45720" anchor="ctr">
+                  <a:tcPr anchor="ctr">
                     <a:lnL w="9525" cap="flat" cmpd="sng" algn="ctr">
                       <a:solidFill>
                         <a:srgbClr val="D5D9DE"/>
@@ -12903,7 +13197,7 @@
                     <a:bodyPr/>
                     <a:lstStyle/>
                     <a:p>
-                      <a:pPr indent="0" marL="0">
+                      <a:pPr marL="0" indent="0">
                         <a:buNone/>
                       </a:pPr>
                       <a:r>
@@ -12924,7 +13218,7 @@
                       </a:endParaRPr>
                     </a:p>
                   </a:txBody>
-                  <a:tcPr marL="91440" marR="91440" marT="45720" marB="45720" anchor="ctr">
+                  <a:tcPr anchor="ctr">
                     <a:lnL w="9525" cap="flat" cmpd="sng" algn="ctr">
                       <a:solidFill>
                         <a:srgbClr val="D5D9DE"/>
@@ -12971,7 +13265,7 @@
                     <a:bodyPr/>
                     <a:lstStyle/>
                     <a:p>
-                      <a:pPr indent="0" marL="0">
+                      <a:pPr marL="0" indent="0">
                         <a:buNone/>
                       </a:pPr>
                       <a:r>
@@ -12992,7 +13286,7 @@
                       </a:endParaRPr>
                     </a:p>
                   </a:txBody>
-                  <a:tcPr marL="91440" marR="91440" marT="45720" marB="45720" anchor="ctr">
+                  <a:tcPr anchor="ctr">
                     <a:lnL w="9525" cap="flat" cmpd="sng" algn="ctr">
                       <a:solidFill>
                         <a:srgbClr val="D5D9DE"/>
@@ -13034,6 +13328,11 @@
                     </a:solidFill>
                   </a:tcPr>
                 </a:tc>
+                <a:extLst>
+                  <a:ext uri="{0D108BD9-81ED-4DB2-BD59-A6C34878D82A}">
+                    <a16:rowId xmlns:a16="http://schemas.microsoft.com/office/drawing/2014/main" val="10002"/>
+                  </a:ext>
+                </a:extLst>
               </a:tr>
               <a:tr h="548640">
                 <a:tc>
@@ -13041,7 +13340,7 @@
                     <a:bodyPr/>
                     <a:lstStyle/>
                     <a:p>
-                      <a:pPr indent="0" marL="0">
+                      <a:pPr marL="0" indent="0">
                         <a:buNone/>
                       </a:pPr>
                       <a:r>
@@ -13062,7 +13361,7 @@
                       </a:endParaRPr>
                     </a:p>
                   </a:txBody>
-                  <a:tcPr marL="91440" marR="91440" marT="45720" marB="45720" anchor="ctr">
+                  <a:tcPr anchor="ctr">
                     <a:lnL w="9525" cap="flat" cmpd="sng" algn="ctr">
                       <a:solidFill>
                         <a:srgbClr val="D5D9DE"/>
@@ -13109,7 +13408,7 @@
                     <a:bodyPr/>
                     <a:lstStyle/>
                     <a:p>
-                      <a:pPr indent="0" marL="0">
+                      <a:pPr marL="0" indent="0">
                         <a:buNone/>
                       </a:pPr>
                       <a:r>
@@ -13130,7 +13429,7 @@
                       </a:endParaRPr>
                     </a:p>
                   </a:txBody>
-                  <a:tcPr marL="91440" marR="91440" marT="45720" marB="45720" anchor="ctr">
+                  <a:tcPr anchor="ctr">
                     <a:lnL w="9525" cap="flat" cmpd="sng" algn="ctr">
                       <a:solidFill>
                         <a:srgbClr val="D5D9DE"/>
@@ -13177,7 +13476,7 @@
                     <a:bodyPr/>
                     <a:lstStyle/>
                     <a:p>
-                      <a:pPr indent="0" marL="0">
+                      <a:pPr marL="0" indent="0">
                         <a:buNone/>
                       </a:pPr>
                       <a:r>
@@ -13198,7 +13497,7 @@
                       </a:endParaRPr>
                     </a:p>
                   </a:txBody>
-                  <a:tcPr marL="91440" marR="91440" marT="45720" marB="45720" anchor="ctr">
+                  <a:tcPr anchor="ctr">
                     <a:lnL w="9525" cap="flat" cmpd="sng" algn="ctr">
                       <a:solidFill>
                         <a:srgbClr val="D5D9DE"/>
@@ -13245,7 +13544,7 @@
                     <a:bodyPr/>
                     <a:lstStyle/>
                     <a:p>
-                      <a:pPr indent="0" marL="0">
+                      <a:pPr marL="0" indent="0">
                         <a:buNone/>
                       </a:pPr>
                       <a:r>
@@ -13266,7 +13565,7 @@
                       </a:endParaRPr>
                     </a:p>
                   </a:txBody>
-                  <a:tcPr marL="91440" marR="91440" marT="45720" marB="45720" anchor="ctr">
+                  <a:tcPr anchor="ctr">
                     <a:lnL w="9525" cap="flat" cmpd="sng" algn="ctr">
                       <a:solidFill>
                         <a:srgbClr val="D5D9DE"/>
@@ -13308,6 +13607,11 @@
                     </a:solidFill>
                   </a:tcPr>
                 </a:tc>
+                <a:extLst>
+                  <a:ext uri="{0D108BD9-81ED-4DB2-BD59-A6C34878D82A}">
+                    <a16:rowId xmlns:a16="http://schemas.microsoft.com/office/drawing/2014/main" val="10003"/>
+                  </a:ext>
+                </a:extLst>
               </a:tr>
               <a:tr h="548640">
                 <a:tc>
@@ -13315,7 +13619,7 @@
                     <a:bodyPr/>
                     <a:lstStyle/>
                     <a:p>
-                      <a:pPr indent="0" marL="0">
+                      <a:pPr marL="0" indent="0">
                         <a:buNone/>
                       </a:pPr>
                       <a:r>
@@ -13336,7 +13640,7 @@
                       </a:endParaRPr>
                     </a:p>
                   </a:txBody>
-                  <a:tcPr marL="91440" marR="91440" marT="45720" marB="45720" anchor="ctr">
+                  <a:tcPr anchor="ctr">
                     <a:lnL w="9525" cap="flat" cmpd="sng" algn="ctr">
                       <a:solidFill>
                         <a:srgbClr val="D5D9DE"/>
@@ -13383,7 +13687,7 @@
                     <a:bodyPr/>
                     <a:lstStyle/>
                     <a:p>
-                      <a:pPr indent="0" marL="0">
+                      <a:pPr marL="0" indent="0">
                         <a:buNone/>
                       </a:pPr>
                       <a:r>
@@ -13404,7 +13708,7 @@
                       </a:endParaRPr>
                     </a:p>
                   </a:txBody>
-                  <a:tcPr marL="91440" marR="91440" marT="45720" marB="45720" anchor="ctr">
+                  <a:tcPr anchor="ctr">
                     <a:lnL w="9525" cap="flat" cmpd="sng" algn="ctr">
                       <a:solidFill>
                         <a:srgbClr val="D5D9DE"/>
@@ -13451,7 +13755,7 @@
                     <a:bodyPr/>
                     <a:lstStyle/>
                     <a:p>
-                      <a:pPr indent="0" marL="0">
+                      <a:pPr marL="0" indent="0">
                         <a:buNone/>
                       </a:pPr>
                       <a:r>
@@ -13472,7 +13776,7 @@
                       </a:endParaRPr>
                     </a:p>
                   </a:txBody>
-                  <a:tcPr marL="91440" marR="91440" marT="45720" marB="45720" anchor="ctr">
+                  <a:tcPr anchor="ctr">
                     <a:lnL w="9525" cap="flat" cmpd="sng" algn="ctr">
                       <a:solidFill>
                         <a:srgbClr val="D5D9DE"/>
@@ -13519,7 +13823,7 @@
                     <a:bodyPr/>
                     <a:lstStyle/>
                     <a:p>
-                      <a:pPr indent="0" marL="0">
+                      <a:pPr marL="0" indent="0">
                         <a:buNone/>
                       </a:pPr>
                       <a:r>
@@ -13540,7 +13844,7 @@
                       </a:endParaRPr>
                     </a:p>
                   </a:txBody>
-                  <a:tcPr marL="91440" marR="91440" marT="45720" marB="45720" anchor="ctr">
+                  <a:tcPr anchor="ctr">
                     <a:lnL w="9525" cap="flat" cmpd="sng" algn="ctr">
                       <a:solidFill>
                         <a:srgbClr val="D5D9DE"/>
@@ -13582,6 +13886,11 @@
                     </a:solidFill>
                   </a:tcPr>
                 </a:tc>
+                <a:extLst>
+                  <a:ext uri="{0D108BD9-81ED-4DB2-BD59-A6C34878D82A}">
+                    <a16:rowId xmlns:a16="http://schemas.microsoft.com/office/drawing/2014/main" val="10004"/>
+                  </a:ext>
+                </a:extLst>
               </a:tr>
               <a:tr h="548640">
                 <a:tc>
@@ -13589,7 +13898,7 @@
                     <a:bodyPr/>
                     <a:lstStyle/>
                     <a:p>
-                      <a:pPr indent="0" marL="0">
+                      <a:pPr marL="0" indent="0">
                         <a:buNone/>
                       </a:pPr>
                       <a:r>
@@ -13610,7 +13919,7 @@
                       </a:endParaRPr>
                     </a:p>
                   </a:txBody>
-                  <a:tcPr marL="91440" marR="91440" marT="45720" marB="45720" anchor="ctr">
+                  <a:tcPr anchor="ctr">
                     <a:lnL w="9525" cap="flat" cmpd="sng" algn="ctr">
                       <a:solidFill>
                         <a:srgbClr val="D5D9DE"/>
@@ -13657,7 +13966,7 @@
                     <a:bodyPr/>
                     <a:lstStyle/>
                     <a:p>
-                      <a:pPr indent="0" marL="0">
+                      <a:pPr marL="0" indent="0">
                         <a:buNone/>
                       </a:pPr>
                       <a:r>
@@ -13678,7 +13987,7 @@
                       </a:endParaRPr>
                     </a:p>
                   </a:txBody>
-                  <a:tcPr marL="91440" marR="91440" marT="45720" marB="45720" anchor="ctr">
+                  <a:tcPr anchor="ctr">
                     <a:lnL w="9525" cap="flat" cmpd="sng" algn="ctr">
                       <a:solidFill>
                         <a:srgbClr val="D5D9DE"/>
@@ -13725,7 +14034,7 @@
                     <a:bodyPr/>
                     <a:lstStyle/>
                     <a:p>
-                      <a:pPr indent="0" marL="0">
+                      <a:pPr marL="0" indent="0">
                         <a:buNone/>
                       </a:pPr>
                       <a:r>
@@ -13746,7 +14055,7 @@
                       </a:endParaRPr>
                     </a:p>
                   </a:txBody>
-                  <a:tcPr marL="91440" marR="91440" marT="45720" marB="45720" anchor="ctr">
+                  <a:tcPr anchor="ctr">
                     <a:lnL w="9525" cap="flat" cmpd="sng" algn="ctr">
                       <a:solidFill>
                         <a:srgbClr val="D5D9DE"/>
@@ -13793,7 +14102,7 @@
                     <a:bodyPr/>
                     <a:lstStyle/>
                     <a:p>
-                      <a:pPr indent="0" marL="0">
+                      <a:pPr marL="0" indent="0">
                         <a:buNone/>
                       </a:pPr>
                       <a:r>
@@ -13814,7 +14123,7 @@
                       </a:endParaRPr>
                     </a:p>
                   </a:txBody>
-                  <a:tcPr marL="91440" marR="91440" marT="45720" marB="45720" anchor="ctr">
+                  <a:tcPr anchor="ctr">
                     <a:lnL w="9525" cap="flat" cmpd="sng" algn="ctr">
                       <a:solidFill>
                         <a:srgbClr val="D5D9DE"/>
@@ -13856,6 +14165,11 @@
                     </a:solidFill>
                   </a:tcPr>
                 </a:tc>
+                <a:extLst>
+                  <a:ext uri="{0D108BD9-81ED-4DB2-BD59-A6C34878D82A}">
+                    <a16:rowId xmlns:a16="http://schemas.microsoft.com/office/drawing/2014/main" val="10005"/>
+                  </a:ext>
+                </a:extLst>
               </a:tr>
               <a:tr h="548640">
                 <a:tc>
@@ -13863,7 +14177,7 @@
                     <a:bodyPr/>
                     <a:lstStyle/>
                     <a:p>
-                      <a:pPr indent="0" marL="0">
+                      <a:pPr marL="0" indent="0">
                         <a:buNone/>
                       </a:pPr>
                       <a:r>
@@ -13884,7 +14198,7 @@
                       </a:endParaRPr>
                     </a:p>
                   </a:txBody>
-                  <a:tcPr marL="91440" marR="91440" marT="45720" marB="45720" anchor="ctr">
+                  <a:tcPr anchor="ctr">
                     <a:lnL w="9525" cap="flat" cmpd="sng" algn="ctr">
                       <a:solidFill>
                         <a:srgbClr val="D5D9DE"/>
@@ -13931,7 +14245,7 @@
                     <a:bodyPr/>
                     <a:lstStyle/>
                     <a:p>
-                      <a:pPr indent="0" marL="0">
+                      <a:pPr marL="0" indent="0">
                         <a:buNone/>
                       </a:pPr>
                       <a:r>
@@ -13952,7 +14266,7 @@
                       </a:endParaRPr>
                     </a:p>
                   </a:txBody>
-                  <a:tcPr marL="91440" marR="91440" marT="45720" marB="45720" anchor="ctr">
+                  <a:tcPr anchor="ctr">
                     <a:lnL w="9525" cap="flat" cmpd="sng" algn="ctr">
                       <a:solidFill>
                         <a:srgbClr val="D5D9DE"/>
@@ -13999,7 +14313,7 @@
                     <a:bodyPr/>
                     <a:lstStyle/>
                     <a:p>
-                      <a:pPr indent="0" marL="0">
+                      <a:pPr marL="0" indent="0">
                         <a:buNone/>
                       </a:pPr>
                       <a:r>
@@ -14020,7 +14334,7 @@
                       </a:endParaRPr>
                     </a:p>
                   </a:txBody>
-                  <a:tcPr marL="91440" marR="91440" marT="45720" marB="45720" anchor="ctr">
+                  <a:tcPr anchor="ctr">
                     <a:lnL w="9525" cap="flat" cmpd="sng" algn="ctr">
                       <a:solidFill>
                         <a:srgbClr val="D5D9DE"/>
@@ -14067,7 +14381,7 @@
                     <a:bodyPr/>
                     <a:lstStyle/>
                     <a:p>
-                      <a:pPr indent="0" marL="0">
+                      <a:pPr marL="0" indent="0">
                         <a:buNone/>
                       </a:pPr>
                       <a:r>
@@ -14088,7 +14402,7 @@
                       </a:endParaRPr>
                     </a:p>
                   </a:txBody>
-                  <a:tcPr marL="91440" marR="91440" marT="45720" marB="45720" anchor="ctr">
+                  <a:tcPr anchor="ctr">
                     <a:lnL w="9525" cap="flat" cmpd="sng" algn="ctr">
                       <a:solidFill>
                         <a:srgbClr val="D5D9DE"/>
@@ -14130,6 +14444,11 @@
                     </a:solidFill>
                   </a:tcPr>
                 </a:tc>
+                <a:extLst>
+                  <a:ext uri="{0D108BD9-81ED-4DB2-BD59-A6C34878D82A}">
+                    <a16:rowId xmlns:a16="http://schemas.microsoft.com/office/drawing/2014/main" val="10006"/>
+                  </a:ext>
+                </a:extLst>
               </a:tr>
               <a:tr h="548640">
                 <a:tc>
@@ -14137,7 +14456,7 @@
                     <a:bodyPr/>
                     <a:lstStyle/>
                     <a:p>
-                      <a:pPr indent="0" marL="0">
+                      <a:pPr marL="0" indent="0">
                         <a:buNone/>
                       </a:pPr>
                       <a:r>
@@ -14158,7 +14477,7 @@
                       </a:endParaRPr>
                     </a:p>
                   </a:txBody>
-                  <a:tcPr marL="91440" marR="91440" marT="45720" marB="45720" anchor="ctr">
+                  <a:tcPr anchor="ctr">
                     <a:lnL w="9525" cap="flat" cmpd="sng" algn="ctr">
                       <a:solidFill>
                         <a:srgbClr val="D5D9DE"/>
@@ -14205,7 +14524,7 @@
                     <a:bodyPr/>
                     <a:lstStyle/>
                     <a:p>
-                      <a:pPr indent="0" marL="0">
+                      <a:pPr marL="0" indent="0">
                         <a:buNone/>
                       </a:pPr>
                       <a:r>
@@ -14226,7 +14545,7 @@
                       </a:endParaRPr>
                     </a:p>
                   </a:txBody>
-                  <a:tcPr marL="91440" marR="91440" marT="45720" marB="45720" anchor="ctr">
+                  <a:tcPr anchor="ctr">
                     <a:lnL w="9525" cap="flat" cmpd="sng" algn="ctr">
                       <a:solidFill>
                         <a:srgbClr val="D5D9DE"/>
@@ -14273,7 +14592,7 @@
                     <a:bodyPr/>
                     <a:lstStyle/>
                     <a:p>
-                      <a:pPr indent="0" marL="0">
+                      <a:pPr marL="0" indent="0">
                         <a:buNone/>
                       </a:pPr>
                       <a:r>
@@ -14294,7 +14613,7 @@
                       </a:endParaRPr>
                     </a:p>
                   </a:txBody>
-                  <a:tcPr marL="91440" marR="91440" marT="45720" marB="45720" anchor="ctr">
+                  <a:tcPr anchor="ctr">
                     <a:lnL w="9525" cap="flat" cmpd="sng" algn="ctr">
                       <a:solidFill>
                         <a:srgbClr val="D5D9DE"/>
@@ -14341,7 +14660,7 @@
                     <a:bodyPr/>
                     <a:lstStyle/>
                     <a:p>
-                      <a:pPr indent="0" marL="0">
+                      <a:pPr marL="0" indent="0">
                         <a:buNone/>
                       </a:pPr>
                       <a:r>
@@ -14362,7 +14681,7 @@
                       </a:endParaRPr>
                     </a:p>
                   </a:txBody>
-                  <a:tcPr marL="91440" marR="91440" marT="45720" marB="45720" anchor="ctr">
+                  <a:tcPr anchor="ctr">
                     <a:lnL w="9525" cap="flat" cmpd="sng" algn="ctr">
                       <a:solidFill>
                         <a:srgbClr val="D5D9DE"/>
@@ -14404,6 +14723,11 @@
                     </a:solidFill>
                   </a:tcPr>
                 </a:tc>
+                <a:extLst>
+                  <a:ext uri="{0D108BD9-81ED-4DB2-BD59-A6C34878D82A}">
+                    <a16:rowId xmlns:a16="http://schemas.microsoft.com/office/drawing/2014/main" val="10007"/>
+                  </a:ext>
+                </a:extLst>
               </a:tr>
             </a:tbl>
           </a:graphicData>
@@ -14437,9 +14761,11 @@
       <p:sp>
         <p:nvSpPr>
           <p:cNvPr id="2" name="Text 0"/>
-          <p:cNvSpPr/>
+          <p:cNvSpPr>
+            <a:spLocks noGrp="1"/>
+          </p:cNvSpPr>
           <p:nvPr>
-            <p:ph idx="100" type="title" hasCustomPrompt="1"/>
+            <p:ph type="title" idx="100" hasCustomPrompt="1"/>
           </p:nvPr>
         </p:nvSpPr>
         <p:spPr>
@@ -14457,7 +14783,7 @@
           <a:bodyPr wrap="square" lIns="0" tIns="0" rIns="0" bIns="0" rtlCol="0" anchor="ctr"/>
           <a:lstStyle/>
           <a:p>
-            <a:pPr algn="l" indent="0" marL="0">
+            <a:pPr marL="0" indent="0" algn="l">
               <a:buNone/>
             </a:pPr>
             <a:r>
@@ -14475,9 +14801,11 @@
       <p:sp>
         <p:nvSpPr>
           <p:cNvPr id="3" name="Text 0"/>
-          <p:cNvSpPr/>
+          <p:cNvSpPr>
+            <a:spLocks noGrp="1"/>
+          </p:cNvSpPr>
           <p:nvPr>
-            <p:ph idx="101" type="body" hasCustomPrompt="1"/>
+            <p:ph type="body" idx="101" hasCustomPrompt="1"/>
           </p:nvPr>
         </p:nvSpPr>
         <p:spPr>
@@ -14495,7 +14823,7 @@
           <a:bodyPr wrap="square" lIns="0" tIns="0" rIns="0" bIns="0" rtlCol="0" anchor="ctr"/>
           <a:lstStyle/>
           <a:p>
-            <a:pPr indent="0" marL="0">
+            <a:pPr marL="0" indent="0">
               <a:buNone/>
             </a:pPr>
             <a:r>
@@ -14513,9 +14841,11 @@
       <p:sp>
         <p:nvSpPr>
           <p:cNvPr id="4" name="Text 0"/>
-          <p:cNvSpPr/>
+          <p:cNvSpPr>
+            <a:spLocks noGrp="1"/>
+          </p:cNvSpPr>
           <p:nvPr>
-            <p:ph idx="102" type="body" hasCustomPrompt="1"/>
+            <p:ph type="body" idx="102" hasCustomPrompt="1"/>
           </p:nvPr>
         </p:nvSpPr>
         <p:spPr>
@@ -14533,7 +14863,7 @@
           <a:bodyPr wrap="square" lIns="0" tIns="0" rIns="0" bIns="0" rtlCol="0" anchor="ctr"/>
           <a:lstStyle/>
           <a:p>
-            <a:pPr algn="r" indent="0" marL="0">
+            <a:pPr marL="0" indent="0" algn="r">
               <a:buNone/>
             </a:pPr>
             <a:r>
@@ -14564,18 +14894,48 @@
         </p:nvGraphicFramePr>
         <p:xfrm>
           <a:off x="548640" y="1325880"/>
-          <a:ext cx="11094415" cy="914400"/>
+          <a:ext cx="11091672" cy="4114800"/>
         </p:xfrm>
         <a:graphic>
           <a:graphicData uri="http://schemas.openxmlformats.org/drawingml/2006/table">
             <a:tbl>
               <a:tblPr/>
               <a:tblGrid>
-                <a:gridCol w="914400"/>
-                <a:gridCol w="5257800"/>
-                <a:gridCol w="1463040"/>
-                <a:gridCol w="2084832"/>
-                <a:gridCol w="1371600"/>
+                <a:gridCol w="914400">
+                  <a:extLst>
+                    <a:ext uri="{9D8B030D-6E8A-4147-A177-3AD203B41FA5}">
+                      <a16:colId xmlns:a16="http://schemas.microsoft.com/office/drawing/2014/main" val="20000"/>
+                    </a:ext>
+                  </a:extLst>
+                </a:gridCol>
+                <a:gridCol w="5257800">
+                  <a:extLst>
+                    <a:ext uri="{9D8B030D-6E8A-4147-A177-3AD203B41FA5}">
+                      <a16:colId xmlns:a16="http://schemas.microsoft.com/office/drawing/2014/main" val="20001"/>
+                    </a:ext>
+                  </a:extLst>
+                </a:gridCol>
+                <a:gridCol w="1463040">
+                  <a:extLst>
+                    <a:ext uri="{9D8B030D-6E8A-4147-A177-3AD203B41FA5}">
+                      <a16:colId xmlns:a16="http://schemas.microsoft.com/office/drawing/2014/main" val="20002"/>
+                    </a:ext>
+                  </a:extLst>
+                </a:gridCol>
+                <a:gridCol w="2084832">
+                  <a:extLst>
+                    <a:ext uri="{9D8B030D-6E8A-4147-A177-3AD203B41FA5}">
+                      <a16:colId xmlns:a16="http://schemas.microsoft.com/office/drawing/2014/main" val="20003"/>
+                    </a:ext>
+                  </a:extLst>
+                </a:gridCol>
+                <a:gridCol w="1371600">
+                  <a:extLst>
+                    <a:ext uri="{9D8B030D-6E8A-4147-A177-3AD203B41FA5}">
+                      <a16:colId xmlns:a16="http://schemas.microsoft.com/office/drawing/2014/main" val="20004"/>
+                    </a:ext>
+                  </a:extLst>
+                </a:gridCol>
               </a:tblGrid>
               <a:tr h="457200">
                 <a:tc>
@@ -14583,7 +14943,7 @@
                     <a:bodyPr/>
                     <a:lstStyle/>
                     <a:p>
-                      <a:pPr indent="0" marL="0">
+                      <a:pPr marL="0" indent="0">
                         <a:buNone/>
                       </a:pPr>
                       <a:r>
@@ -14604,7 +14964,7 @@
                       </a:endParaRPr>
                     </a:p>
                   </a:txBody>
-                  <a:tcPr marL="91440" marR="91440" marT="45720" marB="45720" anchor="ctr">
+                  <a:tcPr anchor="ctr">
                     <a:lnL w="9525" cap="flat" cmpd="sng" algn="ctr">
                       <a:solidFill>
                         <a:srgbClr val="D5D9DE"/>
@@ -14651,7 +15011,7 @@
                     <a:bodyPr/>
                     <a:lstStyle/>
                     <a:p>
-                      <a:pPr indent="0" marL="0">
+                      <a:pPr marL="0" indent="0">
                         <a:buNone/>
                       </a:pPr>
                       <a:r>
@@ -14672,7 +15032,7 @@
                       </a:endParaRPr>
                     </a:p>
                   </a:txBody>
-                  <a:tcPr marL="91440" marR="91440" marT="45720" marB="45720" anchor="ctr">
+                  <a:tcPr anchor="ctr">
                     <a:lnL w="9525" cap="flat" cmpd="sng" algn="ctr">
                       <a:solidFill>
                         <a:srgbClr val="D5D9DE"/>
@@ -14719,7 +15079,7 @@
                     <a:bodyPr/>
                     <a:lstStyle/>
                     <a:p>
-                      <a:pPr indent="0" marL="0">
+                      <a:pPr marL="0" indent="0">
                         <a:buNone/>
                       </a:pPr>
                       <a:r>
@@ -14740,7 +15100,7 @@
                       </a:endParaRPr>
                     </a:p>
                   </a:txBody>
-                  <a:tcPr marL="91440" marR="91440" marT="45720" marB="45720" anchor="ctr">
+                  <a:tcPr anchor="ctr">
                     <a:lnL w="9525" cap="flat" cmpd="sng" algn="ctr">
                       <a:solidFill>
                         <a:srgbClr val="D5D9DE"/>
@@ -14787,7 +15147,7 @@
                     <a:bodyPr/>
                     <a:lstStyle/>
                     <a:p>
-                      <a:pPr indent="0" marL="0">
+                      <a:pPr marL="0" indent="0">
                         <a:buNone/>
                       </a:pPr>
                       <a:r>
@@ -14808,7 +15168,7 @@
                       </a:endParaRPr>
                     </a:p>
                   </a:txBody>
-                  <a:tcPr marL="91440" marR="91440" marT="45720" marB="45720" anchor="ctr">
+                  <a:tcPr anchor="ctr">
                     <a:lnL w="9525" cap="flat" cmpd="sng" algn="ctr">
                       <a:solidFill>
                         <a:srgbClr val="D5D9DE"/>
@@ -14855,7 +15215,7 @@
                     <a:bodyPr/>
                     <a:lstStyle/>
                     <a:p>
-                      <a:pPr indent="0" marL="0">
+                      <a:pPr marL="0" indent="0">
                         <a:buNone/>
                       </a:pPr>
                       <a:r>
@@ -14876,7 +15236,7 @@
                       </a:endParaRPr>
                     </a:p>
                   </a:txBody>
-                  <a:tcPr marL="91440" marR="91440" marT="45720" marB="45720" anchor="ctr">
+                  <a:tcPr anchor="ctr">
                     <a:lnL w="9525" cap="flat" cmpd="sng" algn="ctr">
                       <a:solidFill>
                         <a:srgbClr val="D5D9DE"/>
@@ -14918,6 +15278,11 @@
                     </a:solidFill>
                   </a:tcPr>
                 </a:tc>
+                <a:extLst>
+                  <a:ext uri="{0D108BD9-81ED-4DB2-BD59-A6C34878D82A}">
+                    <a16:rowId xmlns:a16="http://schemas.microsoft.com/office/drawing/2014/main" val="10000"/>
+                  </a:ext>
+                </a:extLst>
               </a:tr>
               <a:tr h="457200">
                 <a:tc>
@@ -14925,7 +15290,7 @@
                     <a:bodyPr/>
                     <a:lstStyle/>
                     <a:p>
-                      <a:pPr indent="0" marL="0">
+                      <a:pPr marL="0" indent="0">
                         <a:buNone/>
                       </a:pPr>
                       <a:r>
@@ -14946,7 +15311,7 @@
                       </a:endParaRPr>
                     </a:p>
                   </a:txBody>
-                  <a:tcPr marL="91440" marR="91440" marT="45720" marB="45720" anchor="ctr">
+                  <a:tcPr anchor="ctr">
                     <a:lnL w="9525" cap="flat" cmpd="sng" algn="ctr">
                       <a:solidFill>
                         <a:srgbClr val="D5D9DE"/>
@@ -14993,7 +15358,7 @@
                     <a:bodyPr/>
                     <a:lstStyle/>
                     <a:p>
-                      <a:pPr indent="0" marL="0">
+                      <a:pPr marL="0" indent="0">
                         <a:buNone/>
                       </a:pPr>
                       <a:r>
@@ -15014,7 +15379,7 @@
                       </a:endParaRPr>
                     </a:p>
                   </a:txBody>
-                  <a:tcPr marL="91440" marR="91440" marT="45720" marB="45720" anchor="ctr">
+                  <a:tcPr anchor="ctr">
                     <a:lnL w="9525" cap="flat" cmpd="sng" algn="ctr">
                       <a:solidFill>
                         <a:srgbClr val="D5D9DE"/>
@@ -15061,7 +15426,7 @@
                     <a:bodyPr/>
                     <a:lstStyle/>
                     <a:p>
-                      <a:pPr indent="0" marL="0">
+                      <a:pPr marL="0" indent="0">
                         <a:buNone/>
                       </a:pPr>
                       <a:r>
@@ -15082,7 +15447,7 @@
                       </a:endParaRPr>
                     </a:p>
                   </a:txBody>
-                  <a:tcPr marL="91440" marR="91440" marT="45720" marB="45720" anchor="ctr">
+                  <a:tcPr anchor="ctr">
                     <a:lnL w="9525" cap="flat" cmpd="sng" algn="ctr">
                       <a:solidFill>
                         <a:srgbClr val="D5D9DE"/>
@@ -15129,7 +15494,7 @@
                     <a:bodyPr/>
                     <a:lstStyle/>
                     <a:p>
-                      <a:pPr indent="0" marL="0">
+                      <a:pPr marL="0" indent="0">
                         <a:buNone/>
                       </a:pPr>
                       <a:r>
@@ -15150,7 +15515,7 @@
                       </a:endParaRPr>
                     </a:p>
                   </a:txBody>
-                  <a:tcPr marL="91440" marR="91440" marT="45720" marB="45720" anchor="ctr">
+                  <a:tcPr anchor="ctr">
                     <a:lnL w="9525" cap="flat" cmpd="sng" algn="ctr">
                       <a:solidFill>
                         <a:srgbClr val="D5D9DE"/>
@@ -15197,7 +15562,7 @@
                     <a:bodyPr/>
                     <a:lstStyle/>
                     <a:p>
-                      <a:pPr indent="0" marL="0">
+                      <a:pPr marL="0" indent="0">
                         <a:buNone/>
                       </a:pPr>
                       <a:r>
@@ -15218,7 +15583,7 @@
                       </a:endParaRPr>
                     </a:p>
                   </a:txBody>
-                  <a:tcPr marL="91440" marR="91440" marT="45720" marB="45720" anchor="ctr">
+                  <a:tcPr anchor="ctr">
                     <a:lnL w="9525" cap="flat" cmpd="sng" algn="ctr">
                       <a:solidFill>
                         <a:srgbClr val="D5D9DE"/>
@@ -15260,6 +15625,11 @@
                     </a:solidFill>
                   </a:tcPr>
                 </a:tc>
+                <a:extLst>
+                  <a:ext uri="{0D108BD9-81ED-4DB2-BD59-A6C34878D82A}">
+                    <a16:rowId xmlns:a16="http://schemas.microsoft.com/office/drawing/2014/main" val="10001"/>
+                  </a:ext>
+                </a:extLst>
               </a:tr>
               <a:tr h="457200">
                 <a:tc>
@@ -15267,7 +15637,7 @@
                     <a:bodyPr/>
                     <a:lstStyle/>
                     <a:p>
-                      <a:pPr indent="0" marL="0">
+                      <a:pPr marL="0" indent="0">
                         <a:buNone/>
                       </a:pPr>
                       <a:r>
@@ -15288,7 +15658,7 @@
                       </a:endParaRPr>
                     </a:p>
                   </a:txBody>
-                  <a:tcPr marL="91440" marR="91440" marT="45720" marB="45720" anchor="ctr">
+                  <a:tcPr anchor="ctr">
                     <a:lnL w="9525" cap="flat" cmpd="sng" algn="ctr">
                       <a:solidFill>
                         <a:srgbClr val="D5D9DE"/>
@@ -15335,7 +15705,7 @@
                     <a:bodyPr/>
                     <a:lstStyle/>
                     <a:p>
-                      <a:pPr indent="0" marL="0">
+                      <a:pPr marL="0" indent="0">
                         <a:buNone/>
                       </a:pPr>
                       <a:r>
@@ -15356,7 +15726,7 @@
                       </a:endParaRPr>
                     </a:p>
                   </a:txBody>
-                  <a:tcPr marL="91440" marR="91440" marT="45720" marB="45720" anchor="ctr">
+                  <a:tcPr anchor="ctr">
                     <a:lnL w="9525" cap="flat" cmpd="sng" algn="ctr">
                       <a:solidFill>
                         <a:srgbClr val="D5D9DE"/>
@@ -15403,7 +15773,7 @@
                     <a:bodyPr/>
                     <a:lstStyle/>
                     <a:p>
-                      <a:pPr indent="0" marL="0">
+                      <a:pPr marL="0" indent="0">
                         <a:buNone/>
                       </a:pPr>
                       <a:r>
@@ -15424,7 +15794,7 @@
                       </a:endParaRPr>
                     </a:p>
                   </a:txBody>
-                  <a:tcPr marL="91440" marR="91440" marT="45720" marB="45720" anchor="ctr">
+                  <a:tcPr anchor="ctr">
                     <a:lnL w="9525" cap="flat" cmpd="sng" algn="ctr">
                       <a:solidFill>
                         <a:srgbClr val="D5D9DE"/>
@@ -15471,7 +15841,7 @@
                     <a:bodyPr/>
                     <a:lstStyle/>
                     <a:p>
-                      <a:pPr indent="0" marL="0">
+                      <a:pPr marL="0" indent="0">
                         <a:buNone/>
                       </a:pPr>
                       <a:r>
@@ -15492,7 +15862,7 @@
                       </a:endParaRPr>
                     </a:p>
                   </a:txBody>
-                  <a:tcPr marL="91440" marR="91440" marT="45720" marB="45720" anchor="ctr">
+                  <a:tcPr anchor="ctr">
                     <a:lnL w="9525" cap="flat" cmpd="sng" algn="ctr">
                       <a:solidFill>
                         <a:srgbClr val="D5D9DE"/>
@@ -15539,7 +15909,7 @@
                     <a:bodyPr/>
                     <a:lstStyle/>
                     <a:p>
-                      <a:pPr indent="0" marL="0">
+                      <a:pPr marL="0" indent="0">
                         <a:buNone/>
                       </a:pPr>
                       <a:r>
@@ -15560,7 +15930,7 @@
                       </a:endParaRPr>
                     </a:p>
                   </a:txBody>
-                  <a:tcPr marL="91440" marR="91440" marT="45720" marB="45720" anchor="ctr">
+                  <a:tcPr anchor="ctr">
                     <a:lnL w="9525" cap="flat" cmpd="sng" algn="ctr">
                       <a:solidFill>
                         <a:srgbClr val="D5D9DE"/>
@@ -15602,6 +15972,11 @@
                     </a:solidFill>
                   </a:tcPr>
                 </a:tc>
+                <a:extLst>
+                  <a:ext uri="{0D108BD9-81ED-4DB2-BD59-A6C34878D82A}">
+                    <a16:rowId xmlns:a16="http://schemas.microsoft.com/office/drawing/2014/main" val="10002"/>
+                  </a:ext>
+                </a:extLst>
               </a:tr>
               <a:tr h="457200">
                 <a:tc>
@@ -15609,7 +15984,7 @@
                     <a:bodyPr/>
                     <a:lstStyle/>
                     <a:p>
-                      <a:pPr indent="0" marL="0">
+                      <a:pPr marL="0" indent="0">
                         <a:buNone/>
                       </a:pPr>
                       <a:r>
@@ -15630,7 +16005,7 @@
                       </a:endParaRPr>
                     </a:p>
                   </a:txBody>
-                  <a:tcPr marL="91440" marR="91440" marT="45720" marB="45720" anchor="ctr">
+                  <a:tcPr anchor="ctr">
                     <a:lnL w="9525" cap="flat" cmpd="sng" algn="ctr">
                       <a:solidFill>
                         <a:srgbClr val="D5D9DE"/>
@@ -15677,7 +16052,7 @@
                     <a:bodyPr/>
                     <a:lstStyle/>
                     <a:p>
-                      <a:pPr indent="0" marL="0">
+                      <a:pPr marL="0" indent="0">
                         <a:buNone/>
                       </a:pPr>
                       <a:r>
@@ -15698,7 +16073,7 @@
                       </a:endParaRPr>
                     </a:p>
                   </a:txBody>
-                  <a:tcPr marL="91440" marR="91440" marT="45720" marB="45720" anchor="ctr">
+                  <a:tcPr anchor="ctr">
                     <a:lnL w="9525" cap="flat" cmpd="sng" algn="ctr">
                       <a:solidFill>
                         <a:srgbClr val="D5D9DE"/>
@@ -15745,7 +16120,7 @@
                     <a:bodyPr/>
                     <a:lstStyle/>
                     <a:p>
-                      <a:pPr indent="0" marL="0">
+                      <a:pPr marL="0" indent="0">
                         <a:buNone/>
                       </a:pPr>
                       <a:r>
@@ -15766,7 +16141,7 @@
                       </a:endParaRPr>
                     </a:p>
                   </a:txBody>
-                  <a:tcPr marL="91440" marR="91440" marT="45720" marB="45720" anchor="ctr">
+                  <a:tcPr anchor="ctr">
                     <a:lnL w="9525" cap="flat" cmpd="sng" algn="ctr">
                       <a:solidFill>
                         <a:srgbClr val="D5D9DE"/>
@@ -15813,7 +16188,7 @@
                     <a:bodyPr/>
                     <a:lstStyle/>
                     <a:p>
-                      <a:pPr indent="0" marL="0">
+                      <a:pPr marL="0" indent="0">
                         <a:buNone/>
                       </a:pPr>
                       <a:r>
@@ -15834,7 +16209,7 @@
                       </a:endParaRPr>
                     </a:p>
                   </a:txBody>
-                  <a:tcPr marL="91440" marR="91440" marT="45720" marB="45720" anchor="ctr">
+                  <a:tcPr anchor="ctr">
                     <a:lnL w="9525" cap="flat" cmpd="sng" algn="ctr">
                       <a:solidFill>
                         <a:srgbClr val="D5D9DE"/>
@@ -15881,7 +16256,7 @@
                     <a:bodyPr/>
                     <a:lstStyle/>
                     <a:p>
-                      <a:pPr indent="0" marL="0">
+                      <a:pPr marL="0" indent="0">
                         <a:buNone/>
                       </a:pPr>
                       <a:r>
@@ -15902,7 +16277,7 @@
                       </a:endParaRPr>
                     </a:p>
                   </a:txBody>
-                  <a:tcPr marL="91440" marR="91440" marT="45720" marB="45720" anchor="ctr">
+                  <a:tcPr anchor="ctr">
                     <a:lnL w="9525" cap="flat" cmpd="sng" algn="ctr">
                       <a:solidFill>
                         <a:srgbClr val="D5D9DE"/>
@@ -15944,6 +16319,11 @@
                     </a:solidFill>
                   </a:tcPr>
                 </a:tc>
+                <a:extLst>
+                  <a:ext uri="{0D108BD9-81ED-4DB2-BD59-A6C34878D82A}">
+                    <a16:rowId xmlns:a16="http://schemas.microsoft.com/office/drawing/2014/main" val="10003"/>
+                  </a:ext>
+                </a:extLst>
               </a:tr>
               <a:tr h="457200">
                 <a:tc>
@@ -15951,7 +16331,7 @@
                     <a:bodyPr/>
                     <a:lstStyle/>
                     <a:p>
-                      <a:pPr indent="0" marL="0">
+                      <a:pPr marL="0" indent="0">
                         <a:buNone/>
                       </a:pPr>
                       <a:r>
@@ -15972,7 +16352,7 @@
                       </a:endParaRPr>
                     </a:p>
                   </a:txBody>
-                  <a:tcPr marL="91440" marR="91440" marT="45720" marB="45720" anchor="ctr">
+                  <a:tcPr anchor="ctr">
                     <a:lnL w="9525" cap="flat" cmpd="sng" algn="ctr">
                       <a:solidFill>
                         <a:srgbClr val="D5D9DE"/>
@@ -16019,7 +16399,7 @@
                     <a:bodyPr/>
                     <a:lstStyle/>
                     <a:p>
-                      <a:pPr indent="0" marL="0">
+                      <a:pPr marL="0" indent="0">
                         <a:buNone/>
                       </a:pPr>
                       <a:r>
@@ -16040,7 +16420,7 @@
                       </a:endParaRPr>
                     </a:p>
                   </a:txBody>
-                  <a:tcPr marL="91440" marR="91440" marT="45720" marB="45720" anchor="ctr">
+                  <a:tcPr anchor="ctr">
                     <a:lnL w="9525" cap="flat" cmpd="sng" algn="ctr">
                       <a:solidFill>
                         <a:srgbClr val="D5D9DE"/>
@@ -16087,7 +16467,7 @@
                     <a:bodyPr/>
                     <a:lstStyle/>
                     <a:p>
-                      <a:pPr indent="0" marL="0">
+                      <a:pPr marL="0" indent="0">
                         <a:buNone/>
                       </a:pPr>
                       <a:r>
@@ -16108,7 +16488,7 @@
                       </a:endParaRPr>
                     </a:p>
                   </a:txBody>
-                  <a:tcPr marL="91440" marR="91440" marT="45720" marB="45720" anchor="ctr">
+                  <a:tcPr anchor="ctr">
                     <a:lnL w="9525" cap="flat" cmpd="sng" algn="ctr">
                       <a:solidFill>
                         <a:srgbClr val="D5D9DE"/>
@@ -16155,7 +16535,7 @@
                     <a:bodyPr/>
                     <a:lstStyle/>
                     <a:p>
-                      <a:pPr indent="0" marL="0">
+                      <a:pPr marL="0" indent="0">
                         <a:buNone/>
                       </a:pPr>
                       <a:r>
@@ -16176,7 +16556,7 @@
                       </a:endParaRPr>
                     </a:p>
                   </a:txBody>
-                  <a:tcPr marL="91440" marR="91440" marT="45720" marB="45720" anchor="ctr">
+                  <a:tcPr anchor="ctr">
                     <a:lnL w="9525" cap="flat" cmpd="sng" algn="ctr">
                       <a:solidFill>
                         <a:srgbClr val="D5D9DE"/>
@@ -16223,7 +16603,7 @@
                     <a:bodyPr/>
                     <a:lstStyle/>
                     <a:p>
-                      <a:pPr indent="0" marL="0">
+                      <a:pPr marL="0" indent="0">
                         <a:buNone/>
                       </a:pPr>
                       <a:r>
@@ -16244,7 +16624,7 @@
                       </a:endParaRPr>
                     </a:p>
                   </a:txBody>
-                  <a:tcPr marL="91440" marR="91440" marT="45720" marB="45720" anchor="ctr">
+                  <a:tcPr anchor="ctr">
                     <a:lnL w="9525" cap="flat" cmpd="sng" algn="ctr">
                       <a:solidFill>
                         <a:srgbClr val="D5D9DE"/>
@@ -16286,6 +16666,11 @@
                     </a:solidFill>
                   </a:tcPr>
                 </a:tc>
+                <a:extLst>
+                  <a:ext uri="{0D108BD9-81ED-4DB2-BD59-A6C34878D82A}">
+                    <a16:rowId xmlns:a16="http://schemas.microsoft.com/office/drawing/2014/main" val="10004"/>
+                  </a:ext>
+                </a:extLst>
               </a:tr>
               <a:tr h="457200">
                 <a:tc>
@@ -16293,7 +16678,7 @@
                     <a:bodyPr/>
                     <a:lstStyle/>
                     <a:p>
-                      <a:pPr indent="0" marL="0">
+                      <a:pPr marL="0" indent="0">
                         <a:buNone/>
                       </a:pPr>
                       <a:r>
@@ -16314,7 +16699,7 @@
                       </a:endParaRPr>
                     </a:p>
                   </a:txBody>
-                  <a:tcPr marL="91440" marR="91440" marT="45720" marB="45720" anchor="ctr">
+                  <a:tcPr anchor="ctr">
                     <a:lnL w="9525" cap="flat" cmpd="sng" algn="ctr">
                       <a:solidFill>
                         <a:srgbClr val="D5D9DE"/>
@@ -16361,7 +16746,7 @@
                     <a:bodyPr/>
                     <a:lstStyle/>
                     <a:p>
-                      <a:pPr indent="0" marL="0">
+                      <a:pPr marL="0" indent="0">
                         <a:buNone/>
                       </a:pPr>
                       <a:r>
@@ -16382,7 +16767,7 @@
                       </a:endParaRPr>
                     </a:p>
                   </a:txBody>
-                  <a:tcPr marL="91440" marR="91440" marT="45720" marB="45720" anchor="ctr">
+                  <a:tcPr anchor="ctr">
                     <a:lnL w="9525" cap="flat" cmpd="sng" algn="ctr">
                       <a:solidFill>
                         <a:srgbClr val="D5D9DE"/>
@@ -16429,7 +16814,7 @@
                     <a:bodyPr/>
                     <a:lstStyle/>
                     <a:p>
-                      <a:pPr indent="0" marL="0">
+                      <a:pPr marL="0" indent="0">
                         <a:buNone/>
                       </a:pPr>
                       <a:r>
@@ -16450,7 +16835,7 @@
                       </a:endParaRPr>
                     </a:p>
                   </a:txBody>
-                  <a:tcPr marL="91440" marR="91440" marT="45720" marB="45720" anchor="ctr">
+                  <a:tcPr anchor="ctr">
                     <a:lnL w="9525" cap="flat" cmpd="sng" algn="ctr">
                       <a:solidFill>
                         <a:srgbClr val="D5D9DE"/>
@@ -16497,7 +16882,7 @@
                     <a:bodyPr/>
                     <a:lstStyle/>
                     <a:p>
-                      <a:pPr indent="0" marL="0">
+                      <a:pPr marL="0" indent="0">
                         <a:buNone/>
                       </a:pPr>
                       <a:r>
@@ -16518,7 +16903,7 @@
                       </a:endParaRPr>
                     </a:p>
                   </a:txBody>
-                  <a:tcPr marL="91440" marR="91440" marT="45720" marB="45720" anchor="ctr">
+                  <a:tcPr anchor="ctr">
                     <a:lnL w="9525" cap="flat" cmpd="sng" algn="ctr">
                       <a:solidFill>
                         <a:srgbClr val="D5D9DE"/>
@@ -16565,7 +16950,7 @@
                     <a:bodyPr/>
                     <a:lstStyle/>
                     <a:p>
-                      <a:pPr indent="0" marL="0">
+                      <a:pPr marL="0" indent="0">
                         <a:buNone/>
                       </a:pPr>
                       <a:r>
@@ -16586,7 +16971,7 @@
                       </a:endParaRPr>
                     </a:p>
                   </a:txBody>
-                  <a:tcPr marL="91440" marR="91440" marT="45720" marB="45720" anchor="ctr">
+                  <a:tcPr anchor="ctr">
                     <a:lnL w="9525" cap="flat" cmpd="sng" algn="ctr">
                       <a:solidFill>
                         <a:srgbClr val="D5D9DE"/>
@@ -16628,6 +17013,11 @@
                     </a:solidFill>
                   </a:tcPr>
                 </a:tc>
+                <a:extLst>
+                  <a:ext uri="{0D108BD9-81ED-4DB2-BD59-A6C34878D82A}">
+                    <a16:rowId xmlns:a16="http://schemas.microsoft.com/office/drawing/2014/main" val="10005"/>
+                  </a:ext>
+                </a:extLst>
               </a:tr>
               <a:tr h="457200">
                 <a:tc>
@@ -16635,7 +17025,7 @@
                     <a:bodyPr/>
                     <a:lstStyle/>
                     <a:p>
-                      <a:pPr indent="0" marL="0">
+                      <a:pPr marL="0" indent="0">
                         <a:buNone/>
                       </a:pPr>
                       <a:r>
@@ -16656,7 +17046,7 @@
                       </a:endParaRPr>
                     </a:p>
                   </a:txBody>
-                  <a:tcPr marL="91440" marR="91440" marT="45720" marB="45720" anchor="ctr">
+                  <a:tcPr anchor="ctr">
                     <a:lnL w="9525" cap="flat" cmpd="sng" algn="ctr">
                       <a:solidFill>
                         <a:srgbClr val="D5D9DE"/>
@@ -16703,7 +17093,7 @@
                     <a:bodyPr/>
                     <a:lstStyle/>
                     <a:p>
-                      <a:pPr indent="0" marL="0">
+                      <a:pPr marL="0" indent="0">
                         <a:buNone/>
                       </a:pPr>
                       <a:r>
@@ -16724,7 +17114,7 @@
                       </a:endParaRPr>
                     </a:p>
                   </a:txBody>
-                  <a:tcPr marL="91440" marR="91440" marT="45720" marB="45720" anchor="ctr">
+                  <a:tcPr anchor="ctr">
                     <a:lnL w="9525" cap="flat" cmpd="sng" algn="ctr">
                       <a:solidFill>
                         <a:srgbClr val="D5D9DE"/>
@@ -16771,7 +17161,7 @@
                     <a:bodyPr/>
                     <a:lstStyle/>
                     <a:p>
-                      <a:pPr indent="0" marL="0">
+                      <a:pPr marL="0" indent="0">
                         <a:buNone/>
                       </a:pPr>
                       <a:r>
@@ -16792,7 +17182,7 @@
                       </a:endParaRPr>
                     </a:p>
                   </a:txBody>
-                  <a:tcPr marL="91440" marR="91440" marT="45720" marB="45720" anchor="ctr">
+                  <a:tcPr anchor="ctr">
                     <a:lnL w="9525" cap="flat" cmpd="sng" algn="ctr">
                       <a:solidFill>
                         <a:srgbClr val="D5D9DE"/>
@@ -16839,7 +17229,7 @@
                     <a:bodyPr/>
                     <a:lstStyle/>
                     <a:p>
-                      <a:pPr indent="0" marL="0">
+                      <a:pPr marL="0" indent="0">
                         <a:buNone/>
                       </a:pPr>
                       <a:r>
@@ -16860,7 +17250,7 @@
                       </a:endParaRPr>
                     </a:p>
                   </a:txBody>
-                  <a:tcPr marL="91440" marR="91440" marT="45720" marB="45720" anchor="ctr">
+                  <a:tcPr anchor="ctr">
                     <a:lnL w="9525" cap="flat" cmpd="sng" algn="ctr">
                       <a:solidFill>
                         <a:srgbClr val="D5D9DE"/>
@@ -16907,7 +17297,7 @@
                     <a:bodyPr/>
                     <a:lstStyle/>
                     <a:p>
-                      <a:pPr indent="0" marL="0">
+                      <a:pPr marL="0" indent="0">
                         <a:buNone/>
                       </a:pPr>
                       <a:r>
@@ -16928,7 +17318,7 @@
                       </a:endParaRPr>
                     </a:p>
                   </a:txBody>
-                  <a:tcPr marL="91440" marR="91440" marT="45720" marB="45720" anchor="ctr">
+                  <a:tcPr anchor="ctr">
                     <a:lnL w="9525" cap="flat" cmpd="sng" algn="ctr">
                       <a:solidFill>
                         <a:srgbClr val="D5D9DE"/>
@@ -16970,6 +17360,11 @@
                     </a:solidFill>
                   </a:tcPr>
                 </a:tc>
+                <a:extLst>
+                  <a:ext uri="{0D108BD9-81ED-4DB2-BD59-A6C34878D82A}">
+                    <a16:rowId xmlns:a16="http://schemas.microsoft.com/office/drawing/2014/main" val="10006"/>
+                  </a:ext>
+                </a:extLst>
               </a:tr>
               <a:tr h="457200">
                 <a:tc>
@@ -16977,7 +17372,7 @@
                     <a:bodyPr/>
                     <a:lstStyle/>
                     <a:p>
-                      <a:pPr indent="0" marL="0">
+                      <a:pPr marL="0" indent="0">
                         <a:buNone/>
                       </a:pPr>
                       <a:r>
@@ -16998,7 +17393,7 @@
                       </a:endParaRPr>
                     </a:p>
                   </a:txBody>
-                  <a:tcPr marL="91440" marR="91440" marT="45720" marB="45720" anchor="ctr">
+                  <a:tcPr anchor="ctr">
                     <a:lnL w="9525" cap="flat" cmpd="sng" algn="ctr">
                       <a:solidFill>
                         <a:srgbClr val="D5D9DE"/>
@@ -17045,7 +17440,7 @@
                     <a:bodyPr/>
                     <a:lstStyle/>
                     <a:p>
-                      <a:pPr indent="0" marL="0">
+                      <a:pPr marL="0" indent="0">
                         <a:buNone/>
                       </a:pPr>
                       <a:r>
@@ -17066,7 +17461,7 @@
                       </a:endParaRPr>
                     </a:p>
                   </a:txBody>
-                  <a:tcPr marL="91440" marR="91440" marT="45720" marB="45720" anchor="ctr">
+                  <a:tcPr anchor="ctr">
                     <a:lnL w="9525" cap="flat" cmpd="sng" algn="ctr">
                       <a:solidFill>
                         <a:srgbClr val="D5D9DE"/>
@@ -17113,7 +17508,7 @@
                     <a:bodyPr/>
                     <a:lstStyle/>
                     <a:p>
-                      <a:pPr indent="0" marL="0">
+                      <a:pPr marL="0" indent="0">
                         <a:buNone/>
                       </a:pPr>
                       <a:r>
@@ -17134,7 +17529,7 @@
                       </a:endParaRPr>
                     </a:p>
                   </a:txBody>
-                  <a:tcPr marL="91440" marR="91440" marT="45720" marB="45720" anchor="ctr">
+                  <a:tcPr anchor="ctr">
                     <a:lnL w="9525" cap="flat" cmpd="sng" algn="ctr">
                       <a:solidFill>
                         <a:srgbClr val="D5D9DE"/>
@@ -17181,7 +17576,7 @@
                     <a:bodyPr/>
                     <a:lstStyle/>
                     <a:p>
-                      <a:pPr indent="0" marL="0">
+                      <a:pPr marL="0" indent="0">
                         <a:buNone/>
                       </a:pPr>
                       <a:r>
@@ -17202,7 +17597,7 @@
                       </a:endParaRPr>
                     </a:p>
                   </a:txBody>
-                  <a:tcPr marL="91440" marR="91440" marT="45720" marB="45720" anchor="ctr">
+                  <a:tcPr anchor="ctr">
                     <a:lnL w="9525" cap="flat" cmpd="sng" algn="ctr">
                       <a:solidFill>
                         <a:srgbClr val="D5D9DE"/>
@@ -17249,7 +17644,7 @@
                     <a:bodyPr/>
                     <a:lstStyle/>
                     <a:p>
-                      <a:pPr indent="0" marL="0">
+                      <a:pPr marL="0" indent="0">
                         <a:buNone/>
                       </a:pPr>
                       <a:r>
@@ -17270,7 +17665,7 @@
                       </a:endParaRPr>
                     </a:p>
                   </a:txBody>
-                  <a:tcPr marL="91440" marR="91440" marT="45720" marB="45720" anchor="ctr">
+                  <a:tcPr anchor="ctr">
                     <a:lnL w="9525" cap="flat" cmpd="sng" algn="ctr">
                       <a:solidFill>
                         <a:srgbClr val="D5D9DE"/>
@@ -17312,6 +17707,11 @@
                     </a:solidFill>
                   </a:tcPr>
                 </a:tc>
+                <a:extLst>
+                  <a:ext uri="{0D108BD9-81ED-4DB2-BD59-A6C34878D82A}">
+                    <a16:rowId xmlns:a16="http://schemas.microsoft.com/office/drawing/2014/main" val="10007"/>
+                  </a:ext>
+                </a:extLst>
               </a:tr>
               <a:tr h="457200">
                 <a:tc>
@@ -17319,7 +17719,7 @@
                     <a:bodyPr/>
                     <a:lstStyle/>
                     <a:p>
-                      <a:pPr indent="0" marL="0">
+                      <a:pPr marL="0" indent="0">
                         <a:buNone/>
                       </a:pPr>
                       <a:r>
@@ -17340,7 +17740,7 @@
                       </a:endParaRPr>
                     </a:p>
                   </a:txBody>
-                  <a:tcPr marL="91440" marR="91440" marT="45720" marB="45720" anchor="ctr">
+                  <a:tcPr anchor="ctr">
                     <a:lnL w="9525" cap="flat" cmpd="sng" algn="ctr">
                       <a:solidFill>
                         <a:srgbClr val="D5D9DE"/>
@@ -17387,7 +17787,7 @@
                     <a:bodyPr/>
                     <a:lstStyle/>
                     <a:p>
-                      <a:pPr indent="0" marL="0">
+                      <a:pPr marL="0" indent="0">
                         <a:buNone/>
                       </a:pPr>
                       <a:r>
@@ -17408,7 +17808,7 @@
                       </a:endParaRPr>
                     </a:p>
                   </a:txBody>
-                  <a:tcPr marL="91440" marR="91440" marT="45720" marB="45720" anchor="ctr">
+                  <a:tcPr anchor="ctr">
                     <a:lnL w="9525" cap="flat" cmpd="sng" algn="ctr">
                       <a:solidFill>
                         <a:srgbClr val="D5D9DE"/>
@@ -17455,7 +17855,7 @@
                     <a:bodyPr/>
                     <a:lstStyle/>
                     <a:p>
-                      <a:pPr indent="0" marL="0">
+                      <a:pPr marL="0" indent="0">
                         <a:buNone/>
                       </a:pPr>
                       <a:r>
@@ -17476,7 +17876,7 @@
                       </a:endParaRPr>
                     </a:p>
                   </a:txBody>
-                  <a:tcPr marL="91440" marR="91440" marT="45720" marB="45720" anchor="ctr">
+                  <a:tcPr anchor="ctr">
                     <a:lnL w="9525" cap="flat" cmpd="sng" algn="ctr">
                       <a:solidFill>
                         <a:srgbClr val="D5D9DE"/>
@@ -17523,7 +17923,7 @@
                     <a:bodyPr/>
                     <a:lstStyle/>
                     <a:p>
-                      <a:pPr indent="0" marL="0">
+                      <a:pPr marL="0" indent="0">
                         <a:buNone/>
                       </a:pPr>
                       <a:r>
@@ -17544,7 +17944,7 @@
                       </a:endParaRPr>
                     </a:p>
                   </a:txBody>
-                  <a:tcPr marL="91440" marR="91440" marT="45720" marB="45720" anchor="ctr">
+                  <a:tcPr anchor="ctr">
                     <a:lnL w="9525" cap="flat" cmpd="sng" algn="ctr">
                       <a:solidFill>
                         <a:srgbClr val="D5D9DE"/>
@@ -17591,7 +17991,7 @@
                     <a:bodyPr/>
                     <a:lstStyle/>
                     <a:p>
-                      <a:pPr indent="0" marL="0">
+                      <a:pPr marL="0" indent="0">
                         <a:buNone/>
                       </a:pPr>
                       <a:r>
@@ -17612,7 +18012,7 @@
                       </a:endParaRPr>
                     </a:p>
                   </a:txBody>
-                  <a:tcPr marL="91440" marR="91440" marT="45720" marB="45720" anchor="ctr">
+                  <a:tcPr anchor="ctr">
                     <a:lnL w="9525" cap="flat" cmpd="sng" algn="ctr">
                       <a:solidFill>
                         <a:srgbClr val="D5D9DE"/>
@@ -17654,6 +18054,11 @@
                     </a:solidFill>
                   </a:tcPr>
                 </a:tc>
+                <a:extLst>
+                  <a:ext uri="{0D108BD9-81ED-4DB2-BD59-A6C34878D82A}">
+                    <a16:rowId xmlns:a16="http://schemas.microsoft.com/office/drawing/2014/main" val="10008"/>
+                  </a:ext>
+                </a:extLst>
               </a:tr>
             </a:tbl>
           </a:graphicData>
@@ -17680,7 +18085,7 @@
           <a:bodyPr wrap="square" lIns="0" tIns="0" rIns="0" bIns="0" rtlCol="0" anchor="t"/>
           <a:lstStyle/>
           <a:p>
-            <a:pPr indent="0" marL="0">
+            <a:pPr marL="0" indent="0">
               <a:buNone/>
             </a:pPr>
             <a:r>
@@ -17999,4 +18404,319 @@
     </a:ext>
   </a:extLst>
 </a:theme>
+</file>
+
+<file path=ppt/theme/theme2.xml><?xml version="1.0" encoding="utf-8"?>
+<a:theme xmlns:a="http://schemas.openxmlformats.org/drawingml/2006/main" name="Office Theme">
+  <a:themeElements>
+    <a:clrScheme name="Office">
+      <a:dk1>
+        <a:sysClr val="windowText" lastClr="000000"/>
+      </a:dk1>
+      <a:lt1>
+        <a:sysClr val="window" lastClr="FFFFFF"/>
+      </a:lt1>
+      <a:dk2>
+        <a:srgbClr val="0E2841"/>
+      </a:dk2>
+      <a:lt2>
+        <a:srgbClr val="E8E8E8"/>
+      </a:lt2>
+      <a:accent1>
+        <a:srgbClr val="156082"/>
+      </a:accent1>
+      <a:accent2>
+        <a:srgbClr val="E97132"/>
+      </a:accent2>
+      <a:accent3>
+        <a:srgbClr val="196B24"/>
+      </a:accent3>
+      <a:accent4>
+        <a:srgbClr val="0F9ED5"/>
+      </a:accent4>
+      <a:accent5>
+        <a:srgbClr val="A02B93"/>
+      </a:accent5>
+      <a:accent6>
+        <a:srgbClr val="4EA72E"/>
+      </a:accent6>
+      <a:hlink>
+        <a:srgbClr val="467886"/>
+      </a:hlink>
+      <a:folHlink>
+        <a:srgbClr val="96607D"/>
+      </a:folHlink>
+    </a:clrScheme>
+    <a:fontScheme name="Office">
+      <a:majorFont>
+        <a:latin typeface="Aptos Display" panose="02110004020202020204"/>
+        <a:ea typeface=""/>
+        <a:cs typeface=""/>
+        <a:font script="Jpan" typeface="游ゴシック Light"/>
+        <a:font script="Hang" typeface="맑은 고딕"/>
+        <a:font script="Hans" typeface="等线 Light"/>
+        <a:font script="Hant" typeface="新細明體"/>
+        <a:font script="Arab" typeface="Times New Roman"/>
+        <a:font script="Hebr" typeface="Times New Roman"/>
+        <a:font script="Thai" typeface="Angsana New"/>
+        <a:font script="Ethi" typeface="Nyala"/>
+        <a:font script="Beng" typeface="Vrinda"/>
+        <a:font script="Gujr" typeface="Shruti"/>
+        <a:font script="Khmr" typeface="MoolBoran"/>
+        <a:font script="Knda" typeface="Tunga"/>
+        <a:font script="Guru" typeface="Raavi"/>
+        <a:font script="Cans" typeface="Euphemia"/>
+        <a:font script="Cher" typeface="Plantagenet Cherokee"/>
+        <a:font script="Yiii" typeface="Microsoft Yi Baiti"/>
+        <a:font script="Tibt" typeface="Microsoft Himalaya"/>
+        <a:font script="Thaa" typeface="MV Boli"/>
+        <a:font script="Deva" typeface="Mangal"/>
+        <a:font script="Telu" typeface="Gautami"/>
+        <a:font script="Taml" typeface="Latha"/>
+        <a:font script="Syrc" typeface="Estrangelo Edessa"/>
+        <a:font script="Orya" typeface="Kalinga"/>
+        <a:font script="Mlym" typeface="Kartika"/>
+        <a:font script="Laoo" typeface="DokChampa"/>
+        <a:font script="Sinh" typeface="Iskoola Pota"/>
+        <a:font script="Mong" typeface="Mongolian Baiti"/>
+        <a:font script="Viet" typeface="Times New Roman"/>
+        <a:font script="Uigh" typeface="Microsoft Uighur"/>
+        <a:font script="Geor" typeface="Sylfaen"/>
+        <a:font script="Armn" typeface="Arial"/>
+        <a:font script="Bugi" typeface="Leelawadee UI"/>
+        <a:font script="Bopo" typeface="Microsoft JhengHei"/>
+        <a:font script="Java" typeface="Javanese Text"/>
+        <a:font script="Lisu" typeface="Segoe UI"/>
+        <a:font script="Mymr" typeface="Myanmar Text"/>
+        <a:font script="Nkoo" typeface="Ebrima"/>
+        <a:font script="Olck" typeface="Nirmala UI"/>
+        <a:font script="Osma" typeface="Ebrima"/>
+        <a:font script="Phag" typeface="Phagspa"/>
+        <a:font script="Syrn" typeface="Estrangelo Edessa"/>
+        <a:font script="Syrj" typeface="Estrangelo Edessa"/>
+        <a:font script="Syre" typeface="Estrangelo Edessa"/>
+        <a:font script="Sora" typeface="Nirmala UI"/>
+        <a:font script="Tale" typeface="Microsoft Tai Le"/>
+        <a:font script="Talu" typeface="Microsoft New Tai Lue"/>
+        <a:font script="Tfng" typeface="Ebrima"/>
+      </a:majorFont>
+      <a:minorFont>
+        <a:latin typeface="Aptos" panose="02110004020202020204"/>
+        <a:ea typeface=""/>
+        <a:cs typeface=""/>
+        <a:font script="Jpan" typeface="游ゴシック"/>
+        <a:font script="Hang" typeface="맑은 고딕"/>
+        <a:font script="Hans" typeface="等线"/>
+        <a:font script="Hant" typeface="新細明體"/>
+        <a:font script="Arab" typeface="Arial"/>
+        <a:font script="Hebr" typeface="Arial"/>
+        <a:font script="Thai" typeface="Cordia New"/>
+        <a:font script="Ethi" typeface="Nyala"/>
+        <a:font script="Beng" typeface="Vrinda"/>
+        <a:font script="Gujr" typeface="Shruti"/>
+        <a:font script="Khmr" typeface="DaunPenh"/>
+        <a:font script="Knda" typeface="Tunga"/>
+        <a:font script="Guru" typeface="Raavi"/>
+        <a:font script="Cans" typeface="Euphemia"/>
+        <a:font script="Cher" typeface="Plantagenet Cherokee"/>
+        <a:font script="Yiii" typeface="Microsoft Yi Baiti"/>
+        <a:font script="Tibt" typeface="Microsoft Himalaya"/>
+        <a:font script="Thaa" typeface="MV Boli"/>
+        <a:font script="Deva" typeface="Mangal"/>
+        <a:font script="Telu" typeface="Gautami"/>
+        <a:font script="Taml" typeface="Latha"/>
+        <a:font script="Syrc" typeface="Estrangelo Edessa"/>
+        <a:font script="Orya" typeface="Kalinga"/>
+        <a:font script="Mlym" typeface="Kartika"/>
+        <a:font script="Laoo" typeface="DokChampa"/>
+        <a:font script="Sinh" typeface="Iskoola Pota"/>
+        <a:font script="Mong" typeface="Mongolian Baiti"/>
+        <a:font script="Viet" typeface="Arial"/>
+        <a:font script="Uigh" typeface="Microsoft Uighur"/>
+        <a:font script="Geor" typeface="Sylfaen"/>
+        <a:font script="Armn" typeface="Arial"/>
+        <a:font script="Bugi" typeface="Leelawadee UI"/>
+        <a:font script="Bopo" typeface="Microsoft JhengHei"/>
+        <a:font script="Java" typeface="Javanese Text"/>
+        <a:font script="Lisu" typeface="Segoe UI"/>
+        <a:font script="Mymr" typeface="Myanmar Text"/>
+        <a:font script="Nkoo" typeface="Ebrima"/>
+        <a:font script="Olck" typeface="Nirmala UI"/>
+        <a:font script="Osma" typeface="Ebrima"/>
+        <a:font script="Phag" typeface="Phagspa"/>
+        <a:font script="Syrn" typeface="Estrangelo Edessa"/>
+        <a:font script="Syrj" typeface="Estrangelo Edessa"/>
+        <a:font script="Syre" typeface="Estrangelo Edessa"/>
+        <a:font script="Sora" typeface="Nirmala UI"/>
+        <a:font script="Tale" typeface="Microsoft Tai Le"/>
+        <a:font script="Talu" typeface="Microsoft New Tai Lue"/>
+        <a:font script="Tfng" typeface="Ebrima"/>
+      </a:minorFont>
+    </a:fontScheme>
+    <a:fmtScheme name="Office">
+      <a:fillStyleLst>
+        <a:solidFill>
+          <a:schemeClr val="phClr"/>
+        </a:solidFill>
+        <a:gradFill rotWithShape="1">
+          <a:gsLst>
+            <a:gs pos="0">
+              <a:schemeClr val="phClr">
+                <a:lumMod val="110000"/>
+                <a:satMod val="105000"/>
+                <a:tint val="67000"/>
+              </a:schemeClr>
+            </a:gs>
+            <a:gs pos="50000">
+              <a:schemeClr val="phClr">
+                <a:lumMod val="105000"/>
+                <a:satMod val="103000"/>
+                <a:tint val="73000"/>
+              </a:schemeClr>
+            </a:gs>
+            <a:gs pos="100000">
+              <a:schemeClr val="phClr">
+                <a:lumMod val="105000"/>
+                <a:satMod val="109000"/>
+                <a:tint val="81000"/>
+              </a:schemeClr>
+            </a:gs>
+          </a:gsLst>
+          <a:lin ang="5400000" scaled="0"/>
+        </a:gradFill>
+        <a:gradFill rotWithShape="1">
+          <a:gsLst>
+            <a:gs pos="0">
+              <a:schemeClr val="phClr">
+                <a:satMod val="103000"/>
+                <a:lumMod val="102000"/>
+                <a:tint val="94000"/>
+              </a:schemeClr>
+            </a:gs>
+            <a:gs pos="50000">
+              <a:schemeClr val="phClr">
+                <a:satMod val="110000"/>
+                <a:lumMod val="100000"/>
+                <a:shade val="100000"/>
+              </a:schemeClr>
+            </a:gs>
+            <a:gs pos="100000">
+              <a:schemeClr val="phClr">
+                <a:lumMod val="99000"/>
+                <a:satMod val="120000"/>
+                <a:shade val="78000"/>
+              </a:schemeClr>
+            </a:gs>
+          </a:gsLst>
+          <a:lin ang="5400000" scaled="0"/>
+        </a:gradFill>
+      </a:fillStyleLst>
+      <a:lnStyleLst>
+        <a:ln w="12700" cap="flat" cmpd="sng" algn="ctr">
+          <a:solidFill>
+            <a:schemeClr val="phClr"/>
+          </a:solidFill>
+          <a:prstDash val="solid"/>
+          <a:miter lim="800000"/>
+        </a:ln>
+        <a:ln w="19050" cap="flat" cmpd="sng" algn="ctr">
+          <a:solidFill>
+            <a:schemeClr val="phClr"/>
+          </a:solidFill>
+          <a:prstDash val="solid"/>
+          <a:miter lim="800000"/>
+        </a:ln>
+        <a:ln w="25400" cap="flat" cmpd="sng" algn="ctr">
+          <a:solidFill>
+            <a:schemeClr val="phClr"/>
+          </a:solidFill>
+          <a:prstDash val="solid"/>
+          <a:miter lim="800000"/>
+        </a:ln>
+      </a:lnStyleLst>
+      <a:effectStyleLst>
+        <a:effectStyle>
+          <a:effectLst/>
+        </a:effectStyle>
+        <a:effectStyle>
+          <a:effectLst/>
+        </a:effectStyle>
+        <a:effectStyle>
+          <a:effectLst>
+            <a:outerShdw blurRad="57150" dist="19050" dir="5400000" algn="ctr" rotWithShape="0">
+              <a:srgbClr val="000000">
+                <a:alpha val="63000"/>
+              </a:srgbClr>
+            </a:outerShdw>
+          </a:effectLst>
+        </a:effectStyle>
+      </a:effectStyleLst>
+      <a:bgFillStyleLst>
+        <a:solidFill>
+          <a:schemeClr val="phClr"/>
+        </a:solidFill>
+        <a:solidFill>
+          <a:schemeClr val="phClr">
+            <a:tint val="95000"/>
+            <a:satMod val="170000"/>
+          </a:schemeClr>
+        </a:solidFill>
+        <a:gradFill rotWithShape="1">
+          <a:gsLst>
+            <a:gs pos="0">
+              <a:schemeClr val="phClr">
+                <a:tint val="93000"/>
+                <a:satMod val="150000"/>
+                <a:shade val="98000"/>
+                <a:lumMod val="102000"/>
+              </a:schemeClr>
+            </a:gs>
+            <a:gs pos="50000">
+              <a:schemeClr val="phClr">
+                <a:tint val="98000"/>
+                <a:satMod val="130000"/>
+                <a:shade val="90000"/>
+                <a:lumMod val="103000"/>
+              </a:schemeClr>
+            </a:gs>
+            <a:gs pos="100000">
+              <a:schemeClr val="phClr">
+                <a:shade val="63000"/>
+                <a:satMod val="120000"/>
+              </a:schemeClr>
+            </a:gs>
+          </a:gsLst>
+          <a:lin ang="5400000" scaled="0"/>
+        </a:gradFill>
+      </a:bgFillStyleLst>
+    </a:fmtScheme>
+  </a:themeElements>
+  <a:objectDefaults>
+    <a:lnDef>
+      <a:spPr/>
+      <a:bodyPr/>
+      <a:lstStyle/>
+      <a:style>
+        <a:lnRef idx="2">
+          <a:schemeClr val="accent1"/>
+        </a:lnRef>
+        <a:fillRef idx="0">
+          <a:schemeClr val="accent1"/>
+        </a:fillRef>
+        <a:effectRef idx="1">
+          <a:schemeClr val="accent1"/>
+        </a:effectRef>
+        <a:fontRef idx="minor">
+          <a:schemeClr val="tx1"/>
+        </a:fontRef>
+      </a:style>
+    </a:lnDef>
+  </a:objectDefaults>
+  <a:extraClrSchemeLst/>
+  <a:extLst>
+    <a:ext uri="{05A4C25C-085E-4340-85A3-A5531E510DB2}">
+      <thm15:themeFamily xmlns:thm15="http://schemas.microsoft.com/office/thememl/2012/main" name="Office Theme" id="{2E142A2C-CD16-42D6-873A-C26D2A0506FA}" vid="{1BDDFF52-6CD6-40A5-AB3C-68EB2F1E4D0A}"/>
+    </a:ext>
+  </a:extLst>
+</a:theme>
 </file>
--- a/docs/presentacion/presentacion-cache.pptx
+++ b/docs/presentacion/presentacion-cache.pptx
@@ -6,17 +6,14 @@
   </p:sldMasterIdLst>
   <p:sldIdLst>
     <p:sldId id="256" r:id="rId2"/>
-    <p:sldId id="257" r:id="rId3"/>
     <p:sldId id="258" r:id="rId4"/>
-    <p:sldId id="259" r:id="rId5"/>
-    <p:sldId id="260" r:id="rId6"/>
     <p:sldId id="261" r:id="rId7"/>
-    <p:sldId id="262" r:id="rId8"/>
     <p:sldId id="263" r:id="rId9"/>
     <p:sldId id="264" r:id="rId10"/>
+    <p:sldId id="267" r:id="rId13"/>
+    <p:sldId id="262" r:id="rId8"/>
     <p:sldId id="265" r:id="rId11"/>
     <p:sldId id="266" r:id="rId12"/>
-    <p:sldId id="267" r:id="rId13"/>
     <p:sldId id="268" r:id="rId14"/>
     <p:sldId id="269" r:id="rId15"/>
     <p:sldId id="270" r:id="rId16"/>
@@ -559,10 +556,8 @@
           <a:lstStyle/>
           <a:p>
             <a:r>
-              <a:rPr lang="en-US" dirty="0"/>
-              <a:t>Sebastian (15 s). Buenos días. Somos Sebastian Villa Castillo, Jhon Eduardo Zabala Garzon, Robin Alexander Montoya Velasquez. Nuestro tema es el 14: pruebas de una arquitectura con caché. Construimos una API de productos que usa Redis como caché y PostgreSQL como base de datos, y sobre ella diseñamos, automatizamos y ejecutamos pruebas de integración y de sistema. Cada uno presenta una parte completa: yo la arquitectura y el flujo exitoso, Jhon Eduardo la estrategia y las fallas, y Robin los casos, las pruebas automatizadas y los resultados.</a:t>
+              <a:t>Sebastian (45 s). Buenos días. Somos Sebastian Villa Castillo, Jhon Eduardo Zabala Garzon, Robin Alexander Montoya Velasquez. Nuestro tema es el 14: pruebas de una arquitectura con caché. Construimos una API de productos que usa Redis como caché y PostgreSQL como base de datos, y sobre ella diseñamos, automatizamos y ejecutamos pruebas de integración y de sistema. La guía pide demostrar cuatro cosas: la consulta (CP-01), la actualización con invalidación (CP-02 y CP-07), qué pasa cuando la caché falla (CP-05 y CP-08) y qué pasa con los datos desactualizados (CP-06). Primero explicamos la arquitectura, la estrategia y los casos; después lo mostramos funcionando en vivo, y al final los resultados.</a:t>
             </a:r>
-            <a:endParaRPr lang="en-US" dirty="0"/>
           </a:p>
         </p:txBody>
       </p:sp>
@@ -647,10 +642,8 @@
           <a:lstStyle/>
           <a:p>
             <a:r>
-              <a:rPr lang="en-US" dirty="0"/>
-              <a:t>Jhon Eduardo (3:00). Con la API corriendo: (1) npm run escenario:cp-05 y señalar BYPASS, los milisegundos, que 404 y 400 siguen bien y /health degraded. (2) npm run escenario:cp-08: Redis vuelve vacío porque no guarda en disco, MISS y luego HIT. (3) No ejecutar CP-06 en vivo (espera 60 s): abrir docs/evidencias/CP-06_dato-desactualizado-ttl.txt y explicar. (4) Abrir api/src/cache.ts, 30 s: disableOfflineQueue, withTimeout y que get/set/del devuelven ERROR. Eso conecta con el hallazgo.</a:t>
+              <a:t>Jhon Eduardo (3:30). Terminal 1: la API; terminal 2: los scripts. Cada script se detiene antes de cada paso: decir qué se va a provocar y pulsar Enter. (1) Ctrl+C en la terminal 1 y npm run demo:api: misma API con TTL de 20 s para no esperar un minuto. (2) npm run demo:cp-08: señalar la línea $ docker stop lab-cache-redis, el BYPASS en milisegundos, /health degraded y en la terminal 1 los errores ECONNREFUSED de la caché sin que la API falle. Enter: $ docker start; Redis vuelve vacío porque no guarda en disco; la API se reconecta sola: MISS y luego HIT. (3) npm run demo:cp-06: señalar el UPDATE directo con psql (otro sistema que no pasa por la API), la respuesta HIT con 99000 y la consulta a la BD con 104000: dato desactualizado. Enter en la espera del TTL y, mientras baja, abrir api/src/cache.ts (30 s): disableOfflineQueue, withTimeout y que get/set/del devuelven ERROR. Volver: MISS con 104000. Eso conecta con el hallazgo.</a:t>
             </a:r>
-            <a:endParaRPr lang="en-US" dirty="0"/>
           </a:p>
         </p:txBody>
       </p:sp>
@@ -735,10 +728,8 @@
           <a:lstStyle/>
           <a:p>
             <a:r>
-              <a:rPr lang="en-US" dirty="0"/>
-              <a:t>Jhon Eduardo (60 s). Medimos qué pasa cuando Redis falla con dos configuraciones del cliente (npm run hallazgo:cliente-redis). Por defecto, con Redis detenido la petición espera 5 s y lanza un error, que sin manejo sería un 500; con Redis congelado no responde nunca (cortamos a los 10 s). Con nuestra configuración, detenido responde BYPASS en 1 ms y congelado en 500 ms. Desactivar la cola resuelve la caída, no la lentitud; la lentitud solo la resuelve el timeout. Se necesitan las dos. Robin muestra los casos, las pruebas automatizadas y los resultados.</a:t>
+              <a:t>Jhon Eduardo (60 s). Medimos qué pasa cuando Redis falla con dos configuraciones del cliente (npm run hallazgo:cliente-redis). Por defecto, con Redis detenido la petición espera 5 s y lanza un error, que sin manejo sería un 500; con Redis congelado no responde nunca (cortamos a los 10 s). Con nuestra configuración, detenido responde BYPASS en 1 ms y congelado en 500 ms. Desactivar la cola resuelve la caída, no la lentitud; la lentitud solo la resuelve el timeout. Se necesitan las dos. Robin muestra las pruebas automatizadas y los resultados.</a:t>
             </a:r>
-            <a:endParaRPr lang="en-US" dirty="0"/>
           </a:p>
         </p:txBody>
       </p:sp>
@@ -823,10 +814,8 @@
           <a:lstStyle/>
           <a:p>
             <a:r>
-              <a:rPr lang="en-US" dirty="0"/>
-              <a:t>Robin (90 s). Ocho casos propios, cada uno con los doce campos de la guía en la matriz. Seis de integración, porque prueban la API con Redis o PostgreSQL, y dos de sistema, porque recorren un flujo completo: CP-07 y CP-08. Cubrimos exitosos, datos inválidos, error funcional y fallas técnicas. Seis están automatizados con Jest; los resaltados son los tres mínimos de la guía. CP-06 y CP-08 se ejecutan con scripts porque esperan el TTL o reinician Redis; los acaban de ver con Jhon Eduardo.</a:t>
+              <a:t>Robin (90 s). Ocho casos propios, cada uno con los doce campos de la guía en la matriz. Seis de integración, porque prueban la API con Redis o PostgreSQL, y dos de sistema, porque recorren un flujo completo: CP-07 y CP-08. Cubrimos exitosos, datos inválidos, error funcional y fallas técnicas. Seis están automatizados con Jest; los resaltados son los tres mínimos de la guía. CP-06 y CP-08 se ejecutan con scripts porque esperan el TTL o reinician Redis; los van a ver en vivo en la demo de Jhon Eduardo, en modo paso a paso. Pasamos a la demostración: Sebastian muestra el laboratorio funcionando.</a:t>
             </a:r>
-            <a:endParaRPr lang="en-US" dirty="0"/>
           </a:p>
         </p:txBody>
       </p:sp>
@@ -1306,94 +1295,6 @@
 </p:notes>
 </file>
 
-<file path=ppt/notesSlides/notesSlide2.xml><?xml version="1.0" encoding="utf-8"?>
-<p:notes xmlns:a="http://schemas.openxmlformats.org/drawingml/2006/main" xmlns:r="http://schemas.openxmlformats.org/officeDocument/2006/relationships" xmlns:p="http://schemas.openxmlformats.org/presentationml/2006/main">
-  <p:cSld>
-    <p:spTree>
-      <p:nvGrpSpPr>
-        <p:cNvPr id="1" name=""/>
-        <p:cNvGrpSpPr/>
-        <p:nvPr/>
-      </p:nvGrpSpPr>
-      <p:grpSpPr>
-        <a:xfrm>
-          <a:off x="0" y="0"/>
-          <a:ext cx="0" cy="0"/>
-          <a:chOff x="0" y="0"/>
-          <a:chExt cx="0" cy="0"/>
-        </a:xfrm>
-      </p:grpSpPr>
-      <p:sp>
-        <p:nvSpPr>
-          <p:cNvPr id="2" name="Slide Image Placeholder 1"/>
-          <p:cNvSpPr>
-            <a:spLocks noGrp="1" noRot="1" noChangeAspect="1"/>
-          </p:cNvSpPr>
-          <p:nvPr>
-            <p:ph type="sldImg"/>
-          </p:nvPr>
-        </p:nvSpPr>
-        <p:spPr/>
-      </p:sp>
-      <p:sp>
-        <p:nvSpPr>
-          <p:cNvPr id="3" name="Notes Placeholder 2"/>
-          <p:cNvSpPr>
-            <a:spLocks noGrp="1"/>
-          </p:cNvSpPr>
-          <p:nvPr>
-            <p:ph type="body" idx="1"/>
-          </p:nvPr>
-        </p:nvSpPr>
-        <p:spPr/>
-        <p:txBody>
-          <a:bodyPr/>
-          <a:lstStyle/>
-          <a:p>
-            <a:r>
-              <a:rPr lang="en-US" dirty="0"/>
-              <a:t>Sebastian (30 s). La guía pide demostrar cuatro cosas: la consulta, la actualización con invalidación, qué pasa cuando la caché falla y qué pasa con los datos desactualizados. Cada tarjeta dice qué caso de prueba lo demuestra.</a:t>
-            </a:r>
-            <a:endParaRPr lang="en-US" dirty="0"/>
-          </a:p>
-        </p:txBody>
-      </p:sp>
-      <p:sp>
-        <p:nvSpPr>
-          <p:cNvPr id="4" name="Slide Number Placeholder 3"/>
-          <p:cNvSpPr>
-            <a:spLocks noGrp="1"/>
-          </p:cNvSpPr>
-          <p:nvPr>
-            <p:ph type="sldNum" sz="quarter" idx="10"/>
-          </p:nvPr>
-        </p:nvSpPr>
-        <p:spPr/>
-        <p:txBody>
-          <a:bodyPr/>
-          <a:lstStyle/>
-          <a:p>
-            <a:fld id="{F7021451-1387-4CA6-816F-3879F97B5CBC}" type="slidenum">
-              <a:rPr lang="en-US"/>
-              <a:t>2</a:t>
-            </a:fld>
-            <a:endParaRPr lang="en-US"/>
-          </a:p>
-        </p:txBody>
-      </p:sp>
-    </p:spTree>
-    <p:extLst>
-      <p:ext uri="{BB962C8B-B14F-4D97-AF65-F5344CB8AC3E}">
-        <p14:creationId xmlns:p14="http://schemas.microsoft.com/office/powerpoint/2010/main" val="1024086991"/>
-      </p:ext>
-    </p:extLst>
-  </p:cSld>
-  <p:clrMapOvr>
-    <a:masterClrMapping/>
-  </p:clrMapOvr>
-</p:notes>
-</file>
-
 <file path=ppt/notesSlides/notesSlide3.xml><?xml version="1.0" encoding="utf-8"?>
 <p:notes xmlns:a="http://schemas.openxmlformats.org/drawingml/2006/main" xmlns:r="http://schemas.openxmlformats.org/officeDocument/2006/relationships" xmlns:p="http://schemas.openxmlformats.org/presentationml/2006/main">
   <p:cSld>
@@ -1439,10 +1340,8 @@
           <a:lstStyle/>
           <a:p>
             <a:r>
-              <a:rPr lang="en-US" dirty="0"/>
-              <a:t>Sebastian (60 s). Son tres componentes: la API en Node con Express, Redis como caché y PostgreSQL como fuente de verdad, en contenedores con Docker Compose. Usamos cache-aside: la API decide cuándo leer, llenar y borrar la caché; Redis y PostgreSQL nunca se hablan entre sí. Se eligió frente a write-through y write-behind porque es el más simple y la BD sigue siendo la fuente de verdad. Al leer busca en Redis; si no está, va a PostgreSQL y guarda con TTL de 60 s. Al escribir actualiza PostgreSQL y borra la llave. El header X-Cache dice de dónde salió cada respuesta; con él comprobamos todo en las pruebas.</a:t>
+              <a:t>Sebastian (75 s). Son tres componentes: la API en Node con Express, Redis como caché y PostgreSQL como fuente de verdad, en contenedores con Docker Compose. Usamos cache-aside: la API decide cuándo leer, llenar y borrar la caché; Redis y PostgreSQL nunca se hablan entre sí. Se eligió frente a write-through y write-behind porque es el más simple y la BD sigue siendo la fuente de verdad. Al leer busca en Redis; si no está (MISS), va a PostgreSQL, normaliza el precio (PostgreSQL lo devuelve como texto) y lo guarda con TTL de 60 s, así el HIT devuelve exactamente el mismo JSON (R5, CP-01). Un 404 no se guarda (R4). Al escribir actualiza PostgreSQL y borra la llave, para que la caché solo se llene desde la BD (R1). Si Redis está caído, la API lee de PostgreSQL y responde BYPASS (R3). El header X-Cache dice de dónde salió cada respuesta; con él comprobamos todo en las pruebas, y estos flujos los van a ver en vivo en la demo.</a:t>
             </a:r>
-            <a:endParaRPr lang="en-US" dirty="0"/>
           </a:p>
         </p:txBody>
       </p:sp>
@@ -1464,182 +1363,6 @@
             <a:fld id="{F7021451-1387-4CA6-816F-3879F97B5CBC}" type="slidenum">
               <a:rPr lang="en-US"/>
               <a:t>3</a:t>
-            </a:fld>
-            <a:endParaRPr lang="en-US"/>
-          </a:p>
-        </p:txBody>
-      </p:sp>
-    </p:spTree>
-    <p:extLst>
-      <p:ext uri="{BB962C8B-B14F-4D97-AF65-F5344CB8AC3E}">
-        <p14:creationId xmlns:p14="http://schemas.microsoft.com/office/powerpoint/2010/main" val="1024086991"/>
-      </p:ext>
-    </p:extLst>
-  </p:cSld>
-  <p:clrMapOvr>
-    <a:masterClrMapping/>
-  </p:clrMapOvr>
-</p:notes>
-</file>
-
-<file path=ppt/notesSlides/notesSlide4.xml><?xml version="1.0" encoding="utf-8"?>
-<p:notes xmlns:a="http://schemas.openxmlformats.org/drawingml/2006/main" xmlns:r="http://schemas.openxmlformats.org/officeDocument/2006/relationships" xmlns:p="http://schemas.openxmlformats.org/presentationml/2006/main">
-  <p:cSld>
-    <p:spTree>
-      <p:nvGrpSpPr>
-        <p:cNvPr id="1" name=""/>
-        <p:cNvGrpSpPr/>
-        <p:nvPr/>
-      </p:nvGrpSpPr>
-      <p:grpSpPr>
-        <a:xfrm>
-          <a:off x="0" y="0"/>
-          <a:ext cx="0" cy="0"/>
-          <a:chOff x="0" y="0"/>
-          <a:chExt cx="0" cy="0"/>
-        </a:xfrm>
-      </p:grpSpPr>
-      <p:sp>
-        <p:nvSpPr>
-          <p:cNvPr id="2" name="Slide Image Placeholder 1"/>
-          <p:cNvSpPr>
-            <a:spLocks noGrp="1" noRot="1" noChangeAspect="1"/>
-          </p:cNvSpPr>
-          <p:nvPr>
-            <p:ph type="sldImg"/>
-          </p:nvPr>
-        </p:nvSpPr>
-        <p:spPr/>
-      </p:sp>
-      <p:sp>
-        <p:nvSpPr>
-          <p:cNvPr id="3" name="Notes Placeholder 2"/>
-          <p:cNvSpPr>
-            <a:spLocks noGrp="1"/>
-          </p:cNvSpPr>
-          <p:nvPr>
-            <p:ph type="body" idx="1"/>
-          </p:nvPr>
-        </p:nvSpPr>
-        <p:spPr/>
-        <p:txBody>
-          <a:bodyPr/>
-          <a:lstStyle/>
-          <a:p>
-            <a:r>
-              <a:rPr lang="en-US" dirty="0"/>
-              <a:t>Sebastian (45 s). En la primera lectura Redis está vacío: MISS. La API consulta PostgreSQL, normaliza y guarda en Redis. PostgreSQL devuelve el precio como texto ("189900.00"); lo convertimos a número en un solo lugar, antes de guardar y de responder, así el HIT devuelve exactamente el mismo JSON (R5, CP-01). Si el producto no existe se responde 404 y no se guarda nada (R4, CP-04).</a:t>
-            </a:r>
-            <a:endParaRPr lang="en-US" dirty="0"/>
-          </a:p>
-        </p:txBody>
-      </p:sp>
-      <p:sp>
-        <p:nvSpPr>
-          <p:cNvPr id="4" name="Slide Number Placeholder 3"/>
-          <p:cNvSpPr>
-            <a:spLocks noGrp="1"/>
-          </p:cNvSpPr>
-          <p:nvPr>
-            <p:ph type="sldNum" sz="quarter" idx="10"/>
-          </p:nvPr>
-        </p:nvSpPr>
-        <p:spPr/>
-        <p:txBody>
-          <a:bodyPr/>
-          <a:lstStyle/>
-          <a:p>
-            <a:fld id="{F7021451-1387-4CA6-816F-3879F97B5CBC}" type="slidenum">
-              <a:rPr lang="en-US"/>
-              <a:t>4</a:t>
-            </a:fld>
-            <a:endParaRPr lang="en-US"/>
-          </a:p>
-        </p:txBody>
-      </p:sp>
-    </p:spTree>
-    <p:extLst>
-      <p:ext uri="{BB962C8B-B14F-4D97-AF65-F5344CB8AC3E}">
-        <p14:creationId xmlns:p14="http://schemas.microsoft.com/office/powerpoint/2010/main" val="1024086991"/>
-      </p:ext>
-    </p:extLst>
-  </p:cSld>
-  <p:clrMapOvr>
-    <a:masterClrMapping/>
-  </p:clrMapOvr>
-</p:notes>
-</file>
-
-<file path=ppt/notesSlides/notesSlide5.xml><?xml version="1.0" encoding="utf-8"?>
-<p:notes xmlns:a="http://schemas.openxmlformats.org/drawingml/2006/main" xmlns:r="http://schemas.openxmlformats.org/officeDocument/2006/relationships" xmlns:p="http://schemas.openxmlformats.org/presentationml/2006/main">
-  <p:cSld>
-    <p:spTree>
-      <p:nvGrpSpPr>
-        <p:cNvPr id="1" name=""/>
-        <p:cNvGrpSpPr/>
-        <p:nvPr/>
-      </p:nvGrpSpPr>
-      <p:grpSpPr>
-        <a:xfrm>
-          <a:off x="0" y="0"/>
-          <a:ext cx="0" cy="0"/>
-          <a:chOff x="0" y="0"/>
-          <a:chExt cx="0" cy="0"/>
-        </a:xfrm>
-      </p:grpSpPr>
-      <p:sp>
-        <p:nvSpPr>
-          <p:cNvPr id="2" name="Slide Image Placeholder 1"/>
-          <p:cNvSpPr>
-            <a:spLocks noGrp="1" noRot="1" noChangeAspect="1"/>
-          </p:cNvSpPr>
-          <p:nvPr>
-            <p:ph type="sldImg"/>
-          </p:nvPr>
-        </p:nvSpPr>
-        <p:spPr/>
-      </p:sp>
-      <p:sp>
-        <p:nvSpPr>
-          <p:cNvPr id="3" name="Notes Placeholder 2"/>
-          <p:cNvSpPr>
-            <a:spLocks noGrp="1"/>
-          </p:cNvSpPr>
-          <p:nvPr>
-            <p:ph type="body" idx="1"/>
-          </p:nvPr>
-        </p:nvSpPr>
-        <p:spPr/>
-        <p:txBody>
-          <a:bodyPr/>
-          <a:lstStyle/>
-          <a:p>
-            <a:r>
-              <a:rPr lang="en-US" dirty="0"/>
-              <a:t>Sebastian (30 s). En un PUT primero se actualiza la BD y después se borra la llave; la siguiente lectura es MISS con el valor nuevo (R1, CP-02). Se borra en vez de actualizar para que la caché solo se llene desde la BD. Si Redis está caído, el módulo de caché no lanza errores: la API lee de PostgreSQL y responde BYPASS (R3, CP-05).</a:t>
-            </a:r>
-            <a:endParaRPr lang="en-US" dirty="0"/>
-          </a:p>
-        </p:txBody>
-      </p:sp>
-      <p:sp>
-        <p:nvSpPr>
-          <p:cNvPr id="4" name="Slide Number Placeholder 3"/>
-          <p:cNvSpPr>
-            <a:spLocks noGrp="1"/>
-          </p:cNvSpPr>
-          <p:nvPr>
-            <p:ph type="sldNum" sz="quarter" idx="10"/>
-          </p:nvPr>
-        </p:nvSpPr>
-        <p:spPr/>
-        <p:txBody>
-          <a:bodyPr/>
-          <a:lstStyle/>
-          <a:p>
-            <a:fld id="{F7021451-1387-4CA6-816F-3879F97B5CBC}" type="slidenum">
-              <a:rPr lang="en-US"/>
-              <a:t>5</a:t>
             </a:fld>
             <a:endParaRPr lang="en-US"/>
           </a:p>
@@ -1703,10 +1426,8 @@
           <a:lstStyle/>
           <a:p>
             <a:r>
-              <a:rPr lang="en-US" dirty="0"/>
-              <a:t>Sebastian (60 s). Hay cuatro puntos donde la integración puede fallar. PI-1, API y Redis: leer, guardar con TTL y borrar, y que un fallo de Redis no llegue a la API. PI-2, API y PostgreSQL: consultas parametrizadas y el tipo del precio. PI-3, cliente y API: rutas, códigos y el header X-Cache. PI-4 es la coherencia entre caché y BD; no es una conexión real, se verifica comparando lo que responde la API con lo que hay en la BD. Ahora lo vemos funcionando.</a:t>
+              <a:t>Sebastian (60 s). Hay cuatro puntos donde la integración puede fallar. PI-1, API y Redis: leer, guardar con TTL y borrar, y que un fallo de Redis no llegue a la API. PI-2, API y PostgreSQL: consultas parametrizadas y el tipo del precio. PI-3, cliente y API: rutas, códigos y el header X-Cache. PI-4 es la coherencia entre caché y BD; no es una conexión real, se verifica comparando lo que responde la API con lo que hay en la BD. Jhon Eduardo explica cómo lo probamos.</a:t>
             </a:r>
-            <a:endParaRPr lang="en-US" dirty="0"/>
           </a:p>
         </p:txBody>
       </p:sp>
@@ -1791,10 +1512,8 @@
           <a:lstStyle/>
           <a:p>
             <a:r>
-              <a:rPr lang="en-US" dirty="0"/>
-              <a:t>Sebastian (2:30). La API ya está corriendo con npm start en la terminal 1. En la terminal 2: (1) curl -i http://localhost:3000/productos/1 y señalar X-Cache: MISS y la línea del log. (2) Repetir: HIT y mismo cuerpo. (3) npm run redis:inspeccionar: la llave producto:1 con su TTL; esto muestra la comunicación API-Redis. (4) PUT con el comando del guion y otro GET: MISS con el precio nuevo. (5) Abrir api/src/rutas-productos.ts y señalar el GET (cache.get, buscarPorId, cache.set) y el PUT (actualizar, cache.del), 30 s. Cerrar: "Jhon Eduardo explica cómo lo probamos y qué pasa cuando Redis falla."</a:t>
+              <a:t>Sebastian (2:30). La API ya está corriendo con npm start en la terminal 1. En la terminal 2: (1) curl -i http://localhost:3000/productos/1 y señalar X-Cache: MISS y la línea del log. (2) Repetir: HIT y mismo cuerpo. (3) npm run redis:inspeccionar: la llave producto:1 con su TTL; esto muestra la comunicación API-Redis. (4) PUT con el comando del guion y otro GET: MISS con el precio nuevo. (5) Abrir api/src/rutas-productos.ts y señalar el GET (cache.get, buscarPorId, cache.set) y el PUT (actualizar, cache.del), 30 s. Cerrar: "Ahora Jhon Eduardo provoca las fallas."</a:t>
             </a:r>
-            <a:endParaRPr lang="en-US" dirty="0"/>
           </a:p>
         </p:txBody>
       </p:sp>
@@ -1967,10 +1686,8 @@
           <a:lstStyle/>
           <a:p>
             <a:r>
-              <a:rPr lang="en-US" dirty="0"/>
-              <a:t>Jhon Eduardo (60 s). Siete riesgos, cada uno con mitigación y caso. R1, que un PUT no invalide: se borra la llave. R3, que Redis caído o lento bloquee la API: sin cola fuera de línea y con timeout de 500 ms. R2, el dato viejo por escrituras externas, no se elimina: se acota con el TTL de 60 s. R6: toda llave se guarda con su TTL en la misma operación. Ahora lo vemos fallar a propósito.</a:t>
+              <a:t>Jhon Eduardo (60 s). Siete riesgos, cada uno con mitigación y caso. R1, que un PUT no invalide: se borra la llave. R3, que Redis caído o lento bloquee la API: sin cola fuera de línea y con timeout de 500 ms. R2, el dato viejo por escrituras externas, no se elimina: se acota con el TTL de 60 s. R6: toda llave se guarda con su TTL en la misma operación. Robin presenta los casos que verifican cada riesgo.</a:t>
             </a:r>
-            <a:endParaRPr lang="en-US" dirty="0"/>
           </a:p>
         </p:txBody>
       </p:sp>
@@ -3021,1651 +2738,6 @@
 
 <file path=ppt/slides/slide10.xml><?xml version="1.0" encoding="utf-8"?>
 <p:sld xmlns:a="http://schemas.openxmlformats.org/drawingml/2006/main" xmlns:r="http://schemas.openxmlformats.org/officeDocument/2006/relationships" xmlns:p="http://schemas.openxmlformats.org/presentationml/2006/main">
-  <p:cSld name="Slide 10">
-    <p:spTree>
-      <p:nvGrpSpPr>
-        <p:cNvPr id="1" name=""/>
-        <p:cNvGrpSpPr/>
-        <p:nvPr/>
-      </p:nvGrpSpPr>
-      <p:grpSpPr>
-        <a:xfrm>
-          <a:off x="0" y="0"/>
-          <a:ext cx="0" cy="0"/>
-          <a:chOff x="0" y="0"/>
-          <a:chExt cx="0" cy="0"/>
-        </a:xfrm>
-      </p:grpSpPr>
-      <p:sp>
-        <p:nvSpPr>
-          <p:cNvPr id="2" name="Text 0"/>
-          <p:cNvSpPr/>
-          <p:nvPr>
-            <p:ph idx="100" type="title" hasCustomPrompt="1"/>
-          </p:nvPr>
-        </p:nvSpPr>
-        <p:spPr>
-          <a:xfrm>
-            <a:off x="548640" y="411480"/>
-            <a:ext cx="11094415" cy="685800"/>
-          </a:xfrm>
-          <a:prstGeom prst="rect">
-            <a:avLst/>
-          </a:prstGeom>
-          <a:noFill/>
-          <a:ln/>
-        </p:spPr>
-        <p:txBody>
-          <a:bodyPr wrap="square" lIns="0" tIns="0" rIns="0" bIns="0" rtlCol="0" anchor="ctr"/>
-          <a:lstStyle/>
-          <a:p>
-            <a:pPr algn="l" indent="0" marL="0">
-              <a:buNone/>
-            </a:pPr>
-            <a:r>
-              <a:rPr lang="en-US" sz="3600" b="1" dirty="0">
-                <a:solidFill>
-                  <a:schemeClr val="bg1"/>
-                </a:solidFill>
-              </a:rPr>
-              <a:t>Demo: Redis falla y se recupera</a:t>
-            </a:r>
-            <a:endParaRPr lang="en-US" sz="3600" dirty="0"/>
-          </a:p>
-        </p:txBody>
-      </p:sp>
-      <p:sp>
-        <p:nvSpPr>
-          <p:cNvPr id="3" name="Text 0"/>
-          <p:cNvSpPr/>
-          <p:nvPr>
-            <p:ph idx="101" type="body" hasCustomPrompt="1"/>
-          </p:nvPr>
-        </p:nvSpPr>
-        <p:spPr>
-          <a:xfrm>
-            <a:off x="548640" y="6355080"/>
-            <a:ext cx="6858000" cy="274320"/>
-          </a:xfrm>
-          <a:prstGeom prst="rect">
-            <a:avLst/>
-          </a:prstGeom>
-          <a:noFill/>
-          <a:ln/>
-        </p:spPr>
-        <p:txBody>
-          <a:bodyPr wrap="square" lIns="0" tIns="0" rIns="0" bIns="0" rtlCol="0" anchor="ctr"/>
-          <a:lstStyle/>
-          <a:p>
-            <a:pPr indent="0" marL="0">
-              <a:buNone/>
-            </a:pPr>
-            <a:r>
-              <a:rPr lang="en-US" sz="1100" dirty="0">
-                <a:solidFill>
-                  <a:schemeClr val="accent6"/>
-                </a:solidFill>
-              </a:rPr>
-              <a:t>2 · Jhon Eduardo · Estrategia, fallas y hallazgo</a:t>
-            </a:r>
-            <a:endParaRPr lang="en-US" sz="1100" dirty="0"/>
-          </a:p>
-        </p:txBody>
-      </p:sp>
-      <p:sp>
-        <p:nvSpPr>
-          <p:cNvPr id="4" name="Text 0"/>
-          <p:cNvSpPr/>
-          <p:nvPr>
-            <p:ph idx="102" type="body" hasCustomPrompt="1"/>
-          </p:nvPr>
-        </p:nvSpPr>
-        <p:spPr>
-          <a:xfrm>
-            <a:off x="7589520" y="6355080"/>
-            <a:ext cx="4053535" cy="274320"/>
-          </a:xfrm>
-          <a:prstGeom prst="rect">
-            <a:avLst/>
-          </a:prstGeom>
-          <a:noFill/>
-          <a:ln/>
-        </p:spPr>
-        <p:txBody>
-          <a:bodyPr wrap="square" lIns="0" tIns="0" rIns="0" bIns="0" rtlCol="0" anchor="ctr"/>
-          <a:lstStyle/>
-          <a:p>
-            <a:pPr algn="r" indent="0" marL="0">
-              <a:buNone/>
-            </a:pPr>
-            <a:r>
-              <a:rPr lang="en-US" sz="1100" dirty="0">
-                <a:solidFill>
-                  <a:schemeClr val="accent6"/>
-                </a:solidFill>
-              </a:rPr>
-              <a:t>Demostración en vivo</a:t>
-            </a:r>
-            <a:endParaRPr lang="en-US" sz="1100" dirty="0"/>
-          </a:p>
-        </p:txBody>
-      </p:sp>
-      <p:sp>
-        <p:nvSpPr>
-          <p:cNvPr id="5" name="Shape 3"/>
-          <p:cNvSpPr/>
-          <p:nvPr/>
-        </p:nvSpPr>
-        <p:spPr>
-          <a:xfrm>
-            <a:off x="548640" y="1417320"/>
-            <a:ext cx="457200" cy="457200"/>
-          </a:xfrm>
-          <a:prstGeom prst="ellipse">
-            <a:avLst/>
-          </a:prstGeom>
-          <a:solidFill>
-            <a:schemeClr val="accent1"/>
-          </a:solidFill>
-          <a:ln/>
-        </p:spPr>
-      </p:sp>
-      <p:sp>
-        <p:nvSpPr>
-          <p:cNvPr id="6" name="Text 4"/>
-          <p:cNvSpPr txBox="1"/>
-          <p:nvPr/>
-        </p:nvSpPr>
-        <p:spPr>
-          <a:xfrm>
-            <a:off x="548640" y="1417320"/>
-            <a:ext cx="457200" cy="457200"/>
-          </a:xfrm>
-          <a:prstGeom prst="rect">
-            <a:avLst/>
-          </a:prstGeom>
-          <a:noFill/>
-          <a:ln/>
-        </p:spPr>
-        <p:txBody>
-          <a:bodyPr wrap="square" lIns="0" tIns="0" rIns="0" bIns="0" rtlCol="0" anchor="ctr"/>
-          <a:lstStyle/>
-          <a:p>
-            <a:pPr algn="ctr" indent="0" marL="0">
-              <a:buNone/>
-            </a:pPr>
-            <a:r>
-              <a:rPr lang="en-US" sz="1600" b="1" dirty="0">
-                <a:solidFill>
-                  <a:schemeClr val="tx1"/>
-                </a:solidFill>
-                <a:latin typeface="Arial" pitchFamily="34" charset="0"/>
-                <a:ea typeface="Arial" pitchFamily="34" charset="-122"/>
-                <a:cs typeface="Arial" pitchFamily="34" charset="-120"/>
-              </a:rPr>
-              <a:t>1</a:t>
-            </a:r>
-            <a:endParaRPr lang="en-US" sz="1600" dirty="0"/>
-          </a:p>
-        </p:txBody>
-      </p:sp>
-      <p:sp>
-        <p:nvSpPr>
-          <p:cNvPr id="7" name="Text 5"/>
-          <p:cNvSpPr txBox="1"/>
-          <p:nvPr/>
-        </p:nvSpPr>
-        <p:spPr>
-          <a:xfrm>
-            <a:off x="1234440" y="1435608"/>
-            <a:ext cx="6309360" cy="365760"/>
-          </a:xfrm>
-          <a:prstGeom prst="rect">
-            <a:avLst/>
-          </a:prstGeom>
-          <a:noFill/>
-          <a:ln/>
-        </p:spPr>
-        <p:txBody>
-          <a:bodyPr wrap="square" lIns="0" tIns="0" rIns="0" bIns="0" rtlCol="0" anchor="t"/>
-          <a:lstStyle/>
-          <a:p>
-            <a:pPr indent="0" marL="0">
-              <a:buNone/>
-            </a:pPr>
-            <a:r>
-              <a:rPr lang="en-US" sz="1600" b="1" dirty="0">
-                <a:solidFill>
-                  <a:schemeClr val="accent1"/>
-                </a:solidFill>
-                <a:latin typeface="Courier New" pitchFamily="34" charset="0"/>
-                <a:ea typeface="Courier New" pitchFamily="34" charset="-122"/>
-                <a:cs typeface="Courier New" pitchFamily="34" charset="-120"/>
-              </a:rPr>
-              <a:t>npm run escenario:cp-05</a:t>
-            </a:r>
-            <a:endParaRPr lang="en-US" sz="1600" dirty="0"/>
-          </a:p>
-        </p:txBody>
-      </p:sp>
-      <p:sp>
-        <p:nvSpPr>
-          <p:cNvPr id="8" name="Text 6"/>
-          <p:cNvSpPr txBox="1"/>
-          <p:nvPr/>
-        </p:nvSpPr>
-        <p:spPr>
-          <a:xfrm>
-            <a:off x="1234440" y="1828800"/>
-            <a:ext cx="6309360" cy="1036320"/>
-          </a:xfrm>
-          <a:prstGeom prst="rect">
-            <a:avLst/>
-          </a:prstGeom>
-          <a:noFill/>
-          <a:ln/>
-        </p:spPr>
-        <p:txBody>
-          <a:bodyPr wrap="square" lIns="0" tIns="0" rIns="0" bIns="0" rtlCol="0" anchor="t"/>
-          <a:lstStyle/>
-          <a:p>
-            <a:pPr indent="0" marL="0">
-              <a:buNone/>
-            </a:pPr>
-            <a:r>
-              <a:rPr lang="en-US" sz="1500" dirty="0">
-                <a:solidFill>
-                  <a:schemeClr val="accent6"/>
-                </a:solidFill>
-                <a:latin typeface="Arial" pitchFamily="34" charset="0"/>
-                <a:ea typeface="Arial" pitchFamily="34" charset="-122"/>
-                <a:cs typeface="Arial" pitchFamily="34" charset="-120"/>
-              </a:rPr>
-              <a:t>Redis detenido: 200 con BYPASS en milisegundos; 404 y 400 siguen funcionando; /health dice degraded.</a:t>
-            </a:r>
-            <a:endParaRPr lang="en-US" sz="1500" dirty="0"/>
-          </a:p>
-        </p:txBody>
-      </p:sp>
-      <p:sp>
-        <p:nvSpPr>
-          <p:cNvPr id="9" name="Shape 7"/>
-          <p:cNvSpPr/>
-          <p:nvPr/>
-        </p:nvSpPr>
-        <p:spPr>
-          <a:xfrm>
-            <a:off x="548640" y="2910840"/>
-            <a:ext cx="457200" cy="457200"/>
-          </a:xfrm>
-          <a:prstGeom prst="ellipse">
-            <a:avLst/>
-          </a:prstGeom>
-          <a:solidFill>
-            <a:schemeClr val="accent1"/>
-          </a:solidFill>
-          <a:ln/>
-        </p:spPr>
-      </p:sp>
-      <p:sp>
-        <p:nvSpPr>
-          <p:cNvPr id="10" name="Text 8"/>
-          <p:cNvSpPr txBox="1"/>
-          <p:nvPr/>
-        </p:nvSpPr>
-        <p:spPr>
-          <a:xfrm>
-            <a:off x="548640" y="2910840"/>
-            <a:ext cx="457200" cy="457200"/>
-          </a:xfrm>
-          <a:prstGeom prst="rect">
-            <a:avLst/>
-          </a:prstGeom>
-          <a:noFill/>
-          <a:ln/>
-        </p:spPr>
-        <p:txBody>
-          <a:bodyPr wrap="square" lIns="0" tIns="0" rIns="0" bIns="0" rtlCol="0" anchor="ctr"/>
-          <a:lstStyle/>
-          <a:p>
-            <a:pPr algn="ctr" indent="0" marL="0">
-              <a:buNone/>
-            </a:pPr>
-            <a:r>
-              <a:rPr lang="en-US" sz="1600" b="1" dirty="0">
-                <a:solidFill>
-                  <a:schemeClr val="tx1"/>
-                </a:solidFill>
-                <a:latin typeface="Arial" pitchFamily="34" charset="0"/>
-                <a:ea typeface="Arial" pitchFamily="34" charset="-122"/>
-                <a:cs typeface="Arial" pitchFamily="34" charset="-120"/>
-              </a:rPr>
-              <a:t>2</a:t>
-            </a:r>
-            <a:endParaRPr lang="en-US" sz="1600" dirty="0"/>
-          </a:p>
-        </p:txBody>
-      </p:sp>
-      <p:sp>
-        <p:nvSpPr>
-          <p:cNvPr id="11" name="Text 9"/>
-          <p:cNvSpPr txBox="1"/>
-          <p:nvPr/>
-        </p:nvSpPr>
-        <p:spPr>
-          <a:xfrm>
-            <a:off x="1234440" y="2929128"/>
-            <a:ext cx="6309360" cy="365760"/>
-          </a:xfrm>
-          <a:prstGeom prst="rect">
-            <a:avLst/>
-          </a:prstGeom>
-          <a:noFill/>
-          <a:ln/>
-        </p:spPr>
-        <p:txBody>
-          <a:bodyPr wrap="square" lIns="0" tIns="0" rIns="0" bIns="0" rtlCol="0" anchor="t"/>
-          <a:lstStyle/>
-          <a:p>
-            <a:pPr indent="0" marL="0">
-              <a:buNone/>
-            </a:pPr>
-            <a:r>
-              <a:rPr lang="en-US" sz="1600" b="1" dirty="0">
-                <a:solidFill>
-                  <a:schemeClr val="accent1"/>
-                </a:solidFill>
-                <a:latin typeface="Courier New" pitchFamily="34" charset="0"/>
-                <a:ea typeface="Courier New" pitchFamily="34" charset="-122"/>
-                <a:cs typeface="Courier New" pitchFamily="34" charset="-120"/>
-              </a:rPr>
-              <a:t>npm run escenario:cp-08</a:t>
-            </a:r>
-            <a:endParaRPr lang="en-US" sz="1600" dirty="0"/>
-          </a:p>
-        </p:txBody>
-      </p:sp>
-      <p:sp>
-        <p:nvSpPr>
-          <p:cNvPr id="12" name="Text 10"/>
-          <p:cNvSpPr txBox="1"/>
-          <p:nvPr/>
-        </p:nvSpPr>
-        <p:spPr>
-          <a:xfrm>
-            <a:off x="1234440" y="3322320"/>
-            <a:ext cx="6309360" cy="1036320"/>
-          </a:xfrm>
-          <a:prstGeom prst="rect">
-            <a:avLst/>
-          </a:prstGeom>
-          <a:noFill/>
-          <a:ln/>
-        </p:spPr>
-        <p:txBody>
-          <a:bodyPr wrap="square" lIns="0" tIns="0" rIns="0" bIns="0" rtlCol="0" anchor="t"/>
-          <a:lstStyle/>
-          <a:p>
-            <a:pPr indent="0" marL="0">
-              <a:buNone/>
-            </a:pPr>
-            <a:r>
-              <a:rPr lang="en-US" sz="1500" dirty="0">
-                <a:solidFill>
-                  <a:schemeClr val="accent6"/>
-                </a:solidFill>
-                <a:latin typeface="Arial" pitchFamily="34" charset="0"/>
-                <a:ea typeface="Arial" pitchFamily="34" charset="-122"/>
-                <a:cs typeface="Arial" pitchFamily="34" charset="-120"/>
-              </a:rPr>
-              <a:t>Redis vuelve vacío; la API se reconecta sola: MISS y luego HIT.</a:t>
-            </a:r>
-            <a:endParaRPr lang="en-US" sz="1500" dirty="0"/>
-          </a:p>
-        </p:txBody>
-      </p:sp>
-      <p:sp>
-        <p:nvSpPr>
-          <p:cNvPr id="13" name="Shape 11"/>
-          <p:cNvSpPr/>
-          <p:nvPr/>
-        </p:nvSpPr>
-        <p:spPr>
-          <a:xfrm>
-            <a:off x="548640" y="4404360"/>
-            <a:ext cx="457200" cy="457200"/>
-          </a:xfrm>
-          <a:prstGeom prst="ellipse">
-            <a:avLst/>
-          </a:prstGeom>
-          <a:solidFill>
-            <a:schemeClr val="accent1"/>
-          </a:solidFill>
-          <a:ln/>
-        </p:spPr>
-      </p:sp>
-      <p:sp>
-        <p:nvSpPr>
-          <p:cNvPr id="14" name="Text 12"/>
-          <p:cNvSpPr txBox="1"/>
-          <p:nvPr/>
-        </p:nvSpPr>
-        <p:spPr>
-          <a:xfrm>
-            <a:off x="548640" y="4404360"/>
-            <a:ext cx="457200" cy="457200"/>
-          </a:xfrm>
-          <a:prstGeom prst="rect">
-            <a:avLst/>
-          </a:prstGeom>
-          <a:noFill/>
-          <a:ln/>
-        </p:spPr>
-        <p:txBody>
-          <a:bodyPr wrap="square" lIns="0" tIns="0" rIns="0" bIns="0" rtlCol="0" anchor="ctr"/>
-          <a:lstStyle/>
-          <a:p>
-            <a:pPr algn="ctr" indent="0" marL="0">
-              <a:buNone/>
-            </a:pPr>
-            <a:r>
-              <a:rPr lang="en-US" sz="1600" b="1" dirty="0">
-                <a:solidFill>
-                  <a:schemeClr val="tx1"/>
-                </a:solidFill>
-                <a:latin typeface="Arial" pitchFamily="34" charset="0"/>
-                <a:ea typeface="Arial" pitchFamily="34" charset="-122"/>
-                <a:cs typeface="Arial" pitchFamily="34" charset="-120"/>
-              </a:rPr>
-              <a:t>3</a:t>
-            </a:r>
-            <a:endParaRPr lang="en-US" sz="1600" dirty="0"/>
-          </a:p>
-        </p:txBody>
-      </p:sp>
-      <p:sp>
-        <p:nvSpPr>
-          <p:cNvPr id="15" name="Text 13"/>
-          <p:cNvSpPr txBox="1"/>
-          <p:nvPr/>
-        </p:nvSpPr>
-        <p:spPr>
-          <a:xfrm>
-            <a:off x="1234440" y="4422648"/>
-            <a:ext cx="6309360" cy="365760"/>
-          </a:xfrm>
-          <a:prstGeom prst="rect">
-            <a:avLst/>
-          </a:prstGeom>
-          <a:noFill/>
-          <a:ln/>
-        </p:spPr>
-        <p:txBody>
-          <a:bodyPr wrap="square" lIns="0" tIns="0" rIns="0" bIns="0" rtlCol="0" anchor="t"/>
-          <a:lstStyle/>
-          <a:p>
-            <a:pPr indent="0" marL="0">
-              <a:buNone/>
-            </a:pPr>
-            <a:r>
-              <a:rPr lang="en-US" sz="1600" b="1" dirty="0">
-                <a:solidFill>
-                  <a:schemeClr val="accent1"/>
-                </a:solidFill>
-                <a:latin typeface="Courier New" pitchFamily="34" charset="0"/>
-                <a:ea typeface="Courier New" pitchFamily="34" charset="-122"/>
-                <a:cs typeface="Courier New" pitchFamily="34" charset="-120"/>
-              </a:rPr>
-              <a:t>Evidencia de CP-06</a:t>
-            </a:r>
-            <a:endParaRPr lang="en-US" sz="1600" dirty="0"/>
-          </a:p>
-        </p:txBody>
-      </p:sp>
-      <p:sp>
-        <p:nvSpPr>
-          <p:cNvPr id="16" name="Text 14"/>
-          <p:cNvSpPr txBox="1"/>
-          <p:nvPr/>
-        </p:nvSpPr>
-        <p:spPr>
-          <a:xfrm>
-            <a:off x="1234440" y="4815840"/>
-            <a:ext cx="6309360" cy="1036320"/>
-          </a:xfrm>
-          <a:prstGeom prst="rect">
-            <a:avLst/>
-          </a:prstGeom>
-          <a:noFill/>
-          <a:ln/>
-        </p:spPr>
-        <p:txBody>
-          <a:bodyPr wrap="square" lIns="0" tIns="0" rIns="0" bIns="0" rtlCol="0" anchor="t"/>
-          <a:lstStyle/>
-          <a:p>
-            <a:pPr indent="0" marL="0">
-              <a:buNone/>
-            </a:pPr>
-            <a:r>
-              <a:rPr lang="en-US" sz="1500" dirty="0">
-                <a:solidFill>
-                  <a:schemeClr val="accent6"/>
-                </a:solidFill>
-                <a:latin typeface="Arial" pitchFamily="34" charset="0"/>
-                <a:ea typeface="Arial" pitchFamily="34" charset="-122"/>
-                <a:cs typeface="Arial" pitchFamily="34" charset="-120"/>
-              </a:rPr>
-              <a:t>La API respondía 99000 desde la caché con 104000 en la BD; al vencer el TTL, MISS con 104000.</a:t>
-            </a:r>
-            <a:endParaRPr lang="en-US" sz="1500" dirty="0"/>
-          </a:p>
-        </p:txBody>
-      </p:sp>
-      <p:sp>
-        <p:nvSpPr>
-          <p:cNvPr id="17" name="Shape 15"/>
-          <p:cNvSpPr/>
-          <p:nvPr/>
-        </p:nvSpPr>
-        <p:spPr>
-          <a:xfrm>
-            <a:off x="7909560" y="1417320"/>
-            <a:ext cx="3733495" cy="4480560"/>
-          </a:xfrm>
-          <a:prstGeom prst="roundRect">
-            <a:avLst>
-              <a:gd name="adj" fmla="val 2449"/>
-            </a:avLst>
-          </a:prstGeom>
-          <a:solidFill>
-            <a:schemeClr val="accent5"/>
-          </a:solidFill>
-          <a:ln/>
-        </p:spPr>
-      </p:sp>
-      <p:sp>
-        <p:nvSpPr>
-          <p:cNvPr id="18" name="Text 16"/>
-          <p:cNvSpPr txBox="1"/>
-          <p:nvPr/>
-        </p:nvSpPr>
-        <p:spPr>
-          <a:xfrm>
-            <a:off x="8229600" y="1691640"/>
-            <a:ext cx="3093415" cy="274320"/>
-          </a:xfrm>
-          <a:prstGeom prst="rect">
-            <a:avLst/>
-          </a:prstGeom>
-          <a:noFill/>
-          <a:ln/>
-        </p:spPr>
-        <p:txBody>
-          <a:bodyPr wrap="square" lIns="0" tIns="0" rIns="0" bIns="0" rtlCol="0" anchor="t"/>
-          <a:lstStyle/>
-          <a:p>
-            <a:pPr indent="0" marL="0">
-              <a:buNone/>
-            </a:pPr>
-            <a:r>
-              <a:rPr lang="en-US" sz="1300" dirty="0">
-                <a:solidFill>
-                  <a:schemeClr val="accent1"/>
-                </a:solidFill>
-                <a:latin typeface="Courier New" pitchFamily="34" charset="0"/>
-                <a:ea typeface="Courier New" pitchFamily="34" charset="-122"/>
-                <a:cs typeface="Courier New" pitchFamily="34" charset="-120"/>
-              </a:rPr>
-              <a:t>En el código</a:t>
-            </a:r>
-            <a:endParaRPr lang="en-US" sz="1300" dirty="0"/>
-          </a:p>
-        </p:txBody>
-      </p:sp>
-      <p:sp>
-        <p:nvSpPr>
-          <p:cNvPr id="19" name="Text 17"/>
-          <p:cNvSpPr txBox="1"/>
-          <p:nvPr/>
-        </p:nvSpPr>
-        <p:spPr>
-          <a:xfrm>
-            <a:off x="8229600" y="2057400"/>
-            <a:ext cx="3093415" cy="548640"/>
-          </a:xfrm>
-          <a:prstGeom prst="rect">
-            <a:avLst/>
-          </a:prstGeom>
-          <a:noFill/>
-          <a:ln/>
-        </p:spPr>
-        <p:txBody>
-          <a:bodyPr wrap="square" lIns="0" tIns="0" rIns="0" bIns="0" rtlCol="0" anchor="t"/>
-          <a:lstStyle/>
-          <a:p>
-            <a:pPr indent="0" marL="0">
-              <a:buNone/>
-            </a:pPr>
-            <a:r>
-              <a:rPr lang="en-US" sz="1400" b="1" dirty="0">
-                <a:solidFill>
-                  <a:schemeClr val="bg1"/>
-                </a:solidFill>
-                <a:latin typeface="Courier New" pitchFamily="34" charset="0"/>
-                <a:ea typeface="Courier New" pitchFamily="34" charset="-122"/>
-                <a:cs typeface="Courier New" pitchFamily="34" charset="-120"/>
-              </a:rPr>
-              <a:t>api/src/cache.ts</a:t>
-            </a:r>
-            <a:endParaRPr lang="en-US" sz="1400" dirty="0"/>
-          </a:p>
-        </p:txBody>
-      </p:sp>
-      <p:sp>
-        <p:nvSpPr>
-          <p:cNvPr id="20" name="Text 18"/>
-          <p:cNvSpPr txBox="1"/>
-          <p:nvPr/>
-        </p:nvSpPr>
-        <p:spPr>
-          <a:xfrm>
-            <a:off x="8229600" y="2743200"/>
-            <a:ext cx="3093415" cy="2926080"/>
-          </a:xfrm>
-          <a:prstGeom prst="rect">
-            <a:avLst/>
-          </a:prstGeom>
-          <a:noFill/>
-          <a:ln/>
-        </p:spPr>
-        <p:txBody>
-          <a:bodyPr wrap="square" lIns="0" tIns="0" rIns="0" bIns="0" rtlCol="0" anchor="t"/>
-          <a:lstStyle/>
-          <a:p>
-            <a:pPr marL="342900" indent="-342900">
-              <a:spcAft>
-                <a:spcPts val="1000"/>
-              </a:spcAft>
-              <a:buSzPct val="100000"/>
-              <a:buChar char="•"/>
-            </a:pPr>
-            <a:r>
-              <a:rPr lang="en-US" sz="1500" dirty="0">
-                <a:solidFill>
-                  <a:schemeClr val="accent6"/>
-                </a:solidFill>
-                <a:latin typeface="Arial" pitchFamily="34" charset="0"/>
-                <a:ea typeface="Arial" pitchFamily="34" charset="-122"/>
-                <a:cs typeface="Arial" pitchFamily="34" charset="-120"/>
-              </a:rPr>
-              <a:t>disableOfflineQueue: true — falla de inmediato si Redis no está</a:t>
-            </a:r>
-            <a:endParaRPr lang="en-US" sz="1500" dirty="0"/>
-          </a:p>
-          <a:p>
-            <a:pPr marL="342900" indent="-342900">
-              <a:spcAft>
-                <a:spcPts val="1000"/>
-              </a:spcAft>
-              <a:buSzPct val="100000"/>
-              <a:buChar char="•"/>
-            </a:pPr>
-            <a:r>
-              <a:rPr lang="en-US" sz="1500" dirty="0">
-                <a:solidFill>
-                  <a:schemeClr val="accent6"/>
-                </a:solidFill>
-                <a:latin typeface="Arial" pitchFamily="34" charset="0"/>
-                <a:ea typeface="Arial" pitchFamily="34" charset="-122"/>
-                <a:cs typeface="Arial" pitchFamily="34" charset="-120"/>
-              </a:rPr>
-              <a:t>withTimeout(…, 500 ms) — corta si Redis no responde</a:t>
-            </a:r>
-            <a:endParaRPr lang="en-US" sz="1500" dirty="0"/>
-          </a:p>
-          <a:p>
-            <a:pPr marL="342900" indent="-342900">
-              <a:spcAft>
-                <a:spcPts val="1000"/>
-              </a:spcAft>
-              <a:buSzPct val="100000"/>
-              <a:buChar char="•"/>
-            </a:pPr>
-            <a:r>
-              <a:rPr lang="en-US" sz="1500" dirty="0">
-                <a:solidFill>
-                  <a:schemeClr val="accent6"/>
-                </a:solidFill>
-                <a:latin typeface="Arial" pitchFamily="34" charset="0"/>
-                <a:ea typeface="Arial" pitchFamily="34" charset="-122"/>
-                <a:cs typeface="Arial" pitchFamily="34" charset="-120"/>
-              </a:rPr>
-              <a:t>get, set y del devuelven ERROR en vez de lanzar</a:t>
-            </a:r>
-            <a:endParaRPr lang="en-US" sz="1500" dirty="0"/>
-          </a:p>
-        </p:txBody>
-      </p:sp>
-    </p:spTree>
-  </p:cSld>
-  <p:clrMapOvr>
-    <a:masterClrMapping/>
-  </p:clrMapOvr>
-</p:sld>
-</file>
-
-<file path=ppt/slides/slide11.xml><?xml version="1.0" encoding="utf-8"?>
-<p:sld xmlns:a="http://schemas.openxmlformats.org/drawingml/2006/main" xmlns:r="http://schemas.openxmlformats.org/officeDocument/2006/relationships" xmlns:p="http://schemas.openxmlformats.org/presentationml/2006/main">
-  <p:cSld name="Slide 11">
-    <p:spTree>
-      <p:nvGrpSpPr>
-        <p:cNvPr id="1" name=""/>
-        <p:cNvGrpSpPr/>
-        <p:nvPr/>
-      </p:nvGrpSpPr>
-      <p:grpSpPr>
-        <a:xfrm>
-          <a:off x="0" y="0"/>
-          <a:ext cx="0" cy="0"/>
-          <a:chOff x="0" y="0"/>
-          <a:chExt cx="0" cy="0"/>
-        </a:xfrm>
-      </p:grpSpPr>
-      <p:sp>
-        <p:nvSpPr>
-          <p:cNvPr id="2" name="Text 0"/>
-          <p:cNvSpPr/>
-          <p:nvPr>
-            <p:ph idx="100" type="title" hasCustomPrompt="1"/>
-          </p:nvPr>
-        </p:nvSpPr>
-        <p:spPr>
-          <a:xfrm>
-            <a:off x="548640" y="411480"/>
-            <a:ext cx="11094415" cy="685800"/>
-          </a:xfrm>
-          <a:prstGeom prst="rect">
-            <a:avLst/>
-          </a:prstGeom>
-          <a:noFill/>
-          <a:ln/>
-        </p:spPr>
-        <p:txBody>
-          <a:bodyPr wrap="square" lIns="0" tIns="0" rIns="0" bIns="0" rtlCol="0" anchor="ctr"/>
-          <a:lstStyle/>
-          <a:p>
-            <a:pPr algn="l" indent="0" marL="0">
-              <a:buNone/>
-            </a:pPr>
-            <a:r>
-              <a:rPr lang="en-US" sz="3600" b="1" dirty="0">
-                <a:solidFill>
-                  <a:schemeClr val="bg1"/>
-                </a:solidFill>
-              </a:rPr>
-              <a:t>H-01: el cliente por defecto bloquea la API</a:t>
-            </a:r>
-            <a:endParaRPr lang="en-US" sz="3600" dirty="0"/>
-          </a:p>
-        </p:txBody>
-      </p:sp>
-      <p:sp>
-        <p:nvSpPr>
-          <p:cNvPr id="3" name="Text 0"/>
-          <p:cNvSpPr/>
-          <p:nvPr>
-            <p:ph idx="101" type="body" hasCustomPrompt="1"/>
-          </p:nvPr>
-        </p:nvSpPr>
-        <p:spPr>
-          <a:xfrm>
-            <a:off x="548640" y="6355080"/>
-            <a:ext cx="6858000" cy="274320"/>
-          </a:xfrm>
-          <a:prstGeom prst="rect">
-            <a:avLst/>
-          </a:prstGeom>
-          <a:noFill/>
-          <a:ln/>
-        </p:spPr>
-        <p:txBody>
-          <a:bodyPr wrap="square" lIns="0" tIns="0" rIns="0" bIns="0" rtlCol="0" anchor="ctr"/>
-          <a:lstStyle/>
-          <a:p>
-            <a:pPr indent="0" marL="0">
-              <a:buNone/>
-            </a:pPr>
-            <a:r>
-              <a:rPr lang="en-US" sz="1100" dirty="0">
-                <a:solidFill>
-                  <a:schemeClr val="accent6"/>
-                </a:solidFill>
-              </a:rPr>
-              <a:t>2 · Jhon Eduardo · Estrategia, fallas y hallazgo</a:t>
-            </a:r>
-            <a:endParaRPr lang="en-US" sz="1100" dirty="0"/>
-          </a:p>
-        </p:txBody>
-      </p:sp>
-      <p:sp>
-        <p:nvSpPr>
-          <p:cNvPr id="4" name="Text 0"/>
-          <p:cNvSpPr/>
-          <p:nvPr>
-            <p:ph idx="102" type="body" hasCustomPrompt="1"/>
-          </p:nvPr>
-        </p:nvSpPr>
-        <p:spPr>
-          <a:xfrm>
-            <a:off x="7589520" y="6355080"/>
-            <a:ext cx="4053535" cy="274320"/>
-          </a:xfrm>
-          <a:prstGeom prst="rect">
-            <a:avLst/>
-          </a:prstGeom>
-          <a:noFill/>
-          <a:ln/>
-        </p:spPr>
-        <p:txBody>
-          <a:bodyPr wrap="square" lIns="0" tIns="0" rIns="0" bIns="0" rtlCol="0" anchor="ctr"/>
-          <a:lstStyle/>
-          <a:p>
-            <a:pPr algn="r" indent="0" marL="0">
-              <a:buNone/>
-            </a:pPr>
-            <a:r>
-              <a:rPr lang="en-US" sz="1100" dirty="0">
-                <a:solidFill>
-                  <a:schemeClr val="accent6"/>
-                </a:solidFill>
-              </a:rPr>
-              <a:t>docs/evidencias/HALLAZGO-01</a:t>
-            </a:r>
-            <a:endParaRPr lang="en-US" sz="1100" dirty="0"/>
-          </a:p>
-        </p:txBody>
-      </p:sp>
-      <p:graphicFrame>
-        <p:nvGraphicFramePr>
-          <p:cNvPr id="12" name="Table 0"/>
-          <p:cNvGraphicFramePr>
-            <a:graphicFrameLocks noGrp="1"/>
-          </p:cNvGraphicFramePr>
-          <p:nvPr>
-            <p:extLst>
-              <p:ext uri="{D42A27DB-BD31-4B8C-83A1-F6EECF244321}">
-                <p14:modId xmlns:p14="http://schemas.microsoft.com/office/powerpoint/2010/main" val="1579011935"/>
-              </p:ext>
-            </p:extLst>
-          </p:nvPr>
-        </p:nvGraphicFramePr>
-        <p:xfrm>
-          <a:off x="548640" y="1417320"/>
-          <a:ext cx="11094415" cy="914400"/>
-        </p:xfrm>
-        <a:graphic>
-          <a:graphicData uri="http://schemas.openxmlformats.org/drawingml/2006/table">
-            <a:tbl>
-              <a:tblPr/>
-              <a:tblGrid>
-                <a:gridCol w="3749040"/>
-                <a:gridCol w="3657600"/>
-                <a:gridCol w="3687775"/>
-              </a:tblGrid>
-              <a:tr h="640080">
-                <a:tc>
-                  <a:txBody>
-                    <a:bodyPr/>
-                    <a:lstStyle/>
-                    <a:p>
-                      <a:pPr indent="0" marL="0">
-                        <a:buNone/>
-                      </a:pPr>
-                      <a:r>
-                        <a:rPr lang="en-US" sz="1700" b="1" dirty="0">
-                          <a:solidFill>
-                            <a:schemeClr val="bg1"/>
-                          </a:solidFill>
-                          <a:latin typeface="Arial" pitchFamily="34" charset="0"/>
-                          <a:ea typeface="Arial" pitchFamily="34" charset="-122"/>
-                          <a:cs typeface="Arial" pitchFamily="34" charset="-120"/>
-                        </a:rPr>
-                        <a:t>Escenario</a:t>
-                      </a:r>
-                      <a:endParaRPr lang="en-US" sz="1700" dirty="0">
-                        <a:latin typeface="Arial" charset="0"/>
-                        <a:ea typeface="Arial" charset="0"/>
-                        <a:cs typeface="Arial" charset="0"/>
-                      </a:endParaRPr>
-                    </a:p>
-                  </a:txBody>
-                  <a:tcPr marL="91440" marR="91440" marT="45720" marB="45720" anchor="ctr">
-                    <a:lnL w="9525" cap="flat" cmpd="sng" algn="ctr">
-                      <a:solidFill>
-                        <a:srgbClr val="34445A"/>
-                      </a:solidFill>
-                      <a:prstDash val="solid"/>
-                      <a:round/>
-                      <a:headEnd type="none" w="med" len="med"/>
-                      <a:tailEnd type="none" w="med" len="med"/>
-                    </a:lnL>
-                    <a:lnR w="9525" cap="flat" cmpd="sng" algn="ctr">
-                      <a:solidFill>
-                        <a:srgbClr val="34445A"/>
-                      </a:solidFill>
-                      <a:prstDash val="solid"/>
-                      <a:round/>
-                      <a:headEnd type="none" w="med" len="med"/>
-                      <a:tailEnd type="none" w="med" len="med"/>
-                    </a:lnR>
-                    <a:lnT w="9525" cap="flat" cmpd="sng" algn="ctr">
-                      <a:solidFill>
-                        <a:srgbClr val="34445A"/>
-                      </a:solidFill>
-                      <a:prstDash val="solid"/>
-                      <a:round/>
-                      <a:headEnd type="none" w="med" len="med"/>
-                      <a:tailEnd type="none" w="med" len="med"/>
-                    </a:lnT>
-                    <a:lnB w="9525" cap="flat" cmpd="sng" algn="ctr">
-                      <a:solidFill>
-                        <a:srgbClr val="34445A"/>
-                      </a:solidFill>
-                      <a:prstDash val="solid"/>
-                      <a:round/>
-                      <a:headEnd type="none" w="med" len="med"/>
-                      <a:tailEnd type="none" w="med" len="med"/>
-                    </a:lnB>
-                    <a:solidFill>
-                      <a:srgbClr val="2C3A4D"/>
-                    </a:solidFill>
-                  </a:tcPr>
-                </a:tc>
-                <a:tc>
-                  <a:txBody>
-                    <a:bodyPr/>
-                    <a:lstStyle/>
-                    <a:p>
-                      <a:pPr indent="0" marL="0">
-                        <a:buNone/>
-                      </a:pPr>
-                      <a:r>
-                        <a:rPr lang="en-US" sz="1700" b="1" dirty="0">
-                          <a:solidFill>
-                            <a:schemeClr val="bg1"/>
-                          </a:solidFill>
-                          <a:latin typeface="Arial" pitchFamily="34" charset="0"/>
-                          <a:ea typeface="Arial" pitchFamily="34" charset="-122"/>
-                          <a:cs typeface="Arial" pitchFamily="34" charset="-120"/>
-                        </a:rPr>
-                        <a:t>Cliente por defecto</a:t>
-                      </a:r>
-                      <a:endParaRPr lang="en-US" sz="1700" dirty="0">
-                        <a:latin typeface="Arial" charset="0"/>
-                        <a:ea typeface="Arial" charset="0"/>
-                        <a:cs typeface="Arial" charset="0"/>
-                      </a:endParaRPr>
-                    </a:p>
-                  </a:txBody>
-                  <a:tcPr marL="91440" marR="91440" marT="45720" marB="45720" anchor="ctr">
-                    <a:lnL w="9525" cap="flat" cmpd="sng" algn="ctr">
-                      <a:solidFill>
-                        <a:srgbClr val="34445A"/>
-                      </a:solidFill>
-                      <a:prstDash val="solid"/>
-                      <a:round/>
-                      <a:headEnd type="none" w="med" len="med"/>
-                      <a:tailEnd type="none" w="med" len="med"/>
-                    </a:lnL>
-                    <a:lnR w="9525" cap="flat" cmpd="sng" algn="ctr">
-                      <a:solidFill>
-                        <a:srgbClr val="34445A"/>
-                      </a:solidFill>
-                      <a:prstDash val="solid"/>
-                      <a:round/>
-                      <a:headEnd type="none" w="med" len="med"/>
-                      <a:tailEnd type="none" w="med" len="med"/>
-                    </a:lnR>
-                    <a:lnT w="9525" cap="flat" cmpd="sng" algn="ctr">
-                      <a:solidFill>
-                        <a:srgbClr val="34445A"/>
-                      </a:solidFill>
-                      <a:prstDash val="solid"/>
-                      <a:round/>
-                      <a:headEnd type="none" w="med" len="med"/>
-                      <a:tailEnd type="none" w="med" len="med"/>
-                    </a:lnT>
-                    <a:lnB w="9525" cap="flat" cmpd="sng" algn="ctr">
-                      <a:solidFill>
-                        <a:srgbClr val="34445A"/>
-                      </a:solidFill>
-                      <a:prstDash val="solid"/>
-                      <a:round/>
-                      <a:headEnd type="none" w="med" len="med"/>
-                      <a:tailEnd type="none" w="med" len="med"/>
-                    </a:lnB>
-                    <a:solidFill>
-                      <a:srgbClr val="2C3A4D"/>
-                    </a:solidFill>
-                  </a:tcPr>
-                </a:tc>
-                <a:tc>
-                  <a:txBody>
-                    <a:bodyPr/>
-                    <a:lstStyle/>
-                    <a:p>
-                      <a:pPr indent="0" marL="0">
-                        <a:buNone/>
-                      </a:pPr>
-                      <a:r>
-                        <a:rPr lang="en-US" sz="1700" b="1" dirty="0">
-                          <a:solidFill>
-                            <a:schemeClr val="accent1"/>
-                          </a:solidFill>
-                          <a:latin typeface="Arial" pitchFamily="34" charset="0"/>
-                          <a:ea typeface="Arial" pitchFamily="34" charset="-122"/>
-                          <a:cs typeface="Arial" pitchFamily="34" charset="-120"/>
-                        </a:rPr>
-                        <a:t>Cliente del laboratorio</a:t>
-                      </a:r>
-                      <a:endParaRPr lang="en-US" sz="1700" dirty="0">
-                        <a:latin typeface="Arial" charset="0"/>
-                        <a:ea typeface="Arial" charset="0"/>
-                        <a:cs typeface="Arial" charset="0"/>
-                      </a:endParaRPr>
-                    </a:p>
-                  </a:txBody>
-                  <a:tcPr marL="91440" marR="91440" marT="45720" marB="45720" anchor="ctr">
-                    <a:lnL w="9525" cap="flat" cmpd="sng" algn="ctr">
-                      <a:solidFill>
-                        <a:srgbClr val="34445A"/>
-                      </a:solidFill>
-                      <a:prstDash val="solid"/>
-                      <a:round/>
-                      <a:headEnd type="none" w="med" len="med"/>
-                      <a:tailEnd type="none" w="med" len="med"/>
-                    </a:lnL>
-                    <a:lnR w="9525" cap="flat" cmpd="sng" algn="ctr">
-                      <a:solidFill>
-                        <a:srgbClr val="34445A"/>
-                      </a:solidFill>
-                      <a:prstDash val="solid"/>
-                      <a:round/>
-                      <a:headEnd type="none" w="med" len="med"/>
-                      <a:tailEnd type="none" w="med" len="med"/>
-                    </a:lnR>
-                    <a:lnT w="9525" cap="flat" cmpd="sng" algn="ctr">
-                      <a:solidFill>
-                        <a:srgbClr val="34445A"/>
-                      </a:solidFill>
-                      <a:prstDash val="solid"/>
-                      <a:round/>
-                      <a:headEnd type="none" w="med" len="med"/>
-                      <a:tailEnd type="none" w="med" len="med"/>
-                    </a:lnT>
-                    <a:lnB w="9525" cap="flat" cmpd="sng" algn="ctr">
-                      <a:solidFill>
-                        <a:srgbClr val="34445A"/>
-                      </a:solidFill>
-                      <a:prstDash val="solid"/>
-                      <a:round/>
-                      <a:headEnd type="none" w="med" len="med"/>
-                      <a:tailEnd type="none" w="med" len="med"/>
-                    </a:lnB>
-                    <a:solidFill>
-                      <a:srgbClr val="2C3A4D"/>
-                    </a:solidFill>
-                  </a:tcPr>
-                </a:tc>
-              </a:tr>
-              <a:tr h="640080">
-                <a:tc>
-                  <a:txBody>
-                    <a:bodyPr/>
-                    <a:lstStyle/>
-                    <a:p>
-                      <a:pPr indent="0" marL="0">
-                        <a:buNone/>
-                      </a:pPr>
-                      <a:r>
-                        <a:rPr lang="en-US" sz="1700" dirty="0">
-                          <a:solidFill>
-                            <a:schemeClr val="bg1"/>
-                          </a:solidFill>
-                          <a:latin typeface="Arial" pitchFamily="34" charset="0"/>
-                          <a:ea typeface="Arial" pitchFamily="34" charset="-122"/>
-                          <a:cs typeface="Arial" pitchFamily="34" charset="-120"/>
-                        </a:rPr>
-                        <a:t>Redis detenido (docker stop)</a:t>
-                      </a:r>
-                      <a:endParaRPr lang="en-US" sz="1700" dirty="0">
-                        <a:latin typeface="Arial" charset="0"/>
-                        <a:ea typeface="Arial" charset="0"/>
-                        <a:cs typeface="Arial" charset="0"/>
-                      </a:endParaRPr>
-                    </a:p>
-                  </a:txBody>
-                  <a:tcPr marL="91440" marR="91440" marT="45720" marB="45720" anchor="ctr">
-                    <a:lnL w="9525" cap="flat" cmpd="sng" algn="ctr">
-                      <a:solidFill>
-                        <a:srgbClr val="34445A"/>
-                      </a:solidFill>
-                      <a:prstDash val="solid"/>
-                      <a:round/>
-                      <a:headEnd type="none" w="med" len="med"/>
-                      <a:tailEnd type="none" w="med" len="med"/>
-                    </a:lnL>
-                    <a:lnR w="9525" cap="flat" cmpd="sng" algn="ctr">
-                      <a:solidFill>
-                        <a:srgbClr val="34445A"/>
-                      </a:solidFill>
-                      <a:prstDash val="solid"/>
-                      <a:round/>
-                      <a:headEnd type="none" w="med" len="med"/>
-                      <a:tailEnd type="none" w="med" len="med"/>
-                    </a:lnR>
-                    <a:lnT w="9525" cap="flat" cmpd="sng" algn="ctr">
-                      <a:solidFill>
-                        <a:srgbClr val="34445A"/>
-                      </a:solidFill>
-                      <a:prstDash val="solid"/>
-                      <a:round/>
-                      <a:headEnd type="none" w="med" len="med"/>
-                      <a:tailEnd type="none" w="med" len="med"/>
-                    </a:lnT>
-                    <a:lnB w="9525" cap="flat" cmpd="sng" algn="ctr">
-                      <a:solidFill>
-                        <a:srgbClr val="34445A"/>
-                      </a:solidFill>
-                      <a:prstDash val="solid"/>
-                      <a:round/>
-                      <a:headEnd type="none" w="med" len="med"/>
-                      <a:tailEnd type="none" w="med" len="med"/>
-                    </a:lnB>
-                    <a:solidFill>
-                      <a:schemeClr val="accent5"/>
-                    </a:solidFill>
-                  </a:tcPr>
-                </a:tc>
-                <a:tc>
-                  <a:txBody>
-                    <a:bodyPr/>
-                    <a:lstStyle/>
-                    <a:p>
-                      <a:pPr indent="0" marL="0">
-                        <a:buNone/>
-                      </a:pPr>
-                      <a:r>
-                        <a:rPr lang="en-US" sz="1700" dirty="0">
-                          <a:solidFill>
-                            <a:schemeClr val="bg1"/>
-                          </a:solidFill>
-                          <a:latin typeface="Arial" pitchFamily="34" charset="0"/>
-                          <a:ea typeface="Arial" pitchFamily="34" charset="-122"/>
-                          <a:cs typeface="Arial" pitchFamily="34" charset="-120"/>
-                        </a:rPr>
-                        <a:t>~5 000 ms y luego TimeoutError</a:t>
-                      </a:r>
-                      <a:endParaRPr lang="en-US" sz="1700" dirty="0">
-                        <a:latin typeface="Arial" charset="0"/>
-                        <a:ea typeface="Arial" charset="0"/>
-                        <a:cs typeface="Arial" charset="0"/>
-                      </a:endParaRPr>
-                    </a:p>
-                  </a:txBody>
-                  <a:tcPr marL="91440" marR="91440" marT="45720" marB="45720" anchor="ctr">
-                    <a:lnL w="9525" cap="flat" cmpd="sng" algn="ctr">
-                      <a:solidFill>
-                        <a:srgbClr val="34445A"/>
-                      </a:solidFill>
-                      <a:prstDash val="solid"/>
-                      <a:round/>
-                      <a:headEnd type="none" w="med" len="med"/>
-                      <a:tailEnd type="none" w="med" len="med"/>
-                    </a:lnL>
-                    <a:lnR w="9525" cap="flat" cmpd="sng" algn="ctr">
-                      <a:solidFill>
-                        <a:srgbClr val="34445A"/>
-                      </a:solidFill>
-                      <a:prstDash val="solid"/>
-                      <a:round/>
-                      <a:headEnd type="none" w="med" len="med"/>
-                      <a:tailEnd type="none" w="med" len="med"/>
-                    </a:lnR>
-                    <a:lnT w="9525" cap="flat" cmpd="sng" algn="ctr">
-                      <a:solidFill>
-                        <a:srgbClr val="34445A"/>
-                      </a:solidFill>
-                      <a:prstDash val="solid"/>
-                      <a:round/>
-                      <a:headEnd type="none" w="med" len="med"/>
-                      <a:tailEnd type="none" w="med" len="med"/>
-                    </a:lnT>
-                    <a:lnB w="9525" cap="flat" cmpd="sng" algn="ctr">
-                      <a:solidFill>
-                        <a:srgbClr val="34445A"/>
-                      </a:solidFill>
-                      <a:prstDash val="solid"/>
-                      <a:round/>
-                      <a:headEnd type="none" w="med" len="med"/>
-                      <a:tailEnd type="none" w="med" len="med"/>
-                    </a:lnB>
-                    <a:solidFill>
-                      <a:schemeClr val="accent5"/>
-                    </a:solidFill>
-                  </a:tcPr>
-                </a:tc>
-                <a:tc>
-                  <a:txBody>
-                    <a:bodyPr/>
-                    <a:lstStyle/>
-                    <a:p>
-                      <a:pPr indent="0" marL="0">
-                        <a:buNone/>
-                      </a:pPr>
-                      <a:r>
-                        <a:rPr lang="en-US" sz="1700" dirty="0">
-                          <a:solidFill>
-                            <a:schemeClr val="bg1"/>
-                          </a:solidFill>
-                          <a:latin typeface="Arial" pitchFamily="34" charset="0"/>
-                          <a:ea typeface="Arial" pitchFamily="34" charset="-122"/>
-                          <a:cs typeface="Arial" pitchFamily="34" charset="-120"/>
-                        </a:rPr>
-                        <a:t>~1 ms → ERROR → BYPASS</a:t>
-                      </a:r>
-                      <a:endParaRPr lang="en-US" sz="1700" dirty="0">
-                        <a:latin typeface="Arial" charset="0"/>
-                        <a:ea typeface="Arial" charset="0"/>
-                        <a:cs typeface="Arial" charset="0"/>
-                      </a:endParaRPr>
-                    </a:p>
-                  </a:txBody>
-                  <a:tcPr marL="91440" marR="91440" marT="45720" marB="45720" anchor="ctr">
-                    <a:lnL w="9525" cap="flat" cmpd="sng" algn="ctr">
-                      <a:solidFill>
-                        <a:srgbClr val="34445A"/>
-                      </a:solidFill>
-                      <a:prstDash val="solid"/>
-                      <a:round/>
-                      <a:headEnd type="none" w="med" len="med"/>
-                      <a:tailEnd type="none" w="med" len="med"/>
-                    </a:lnL>
-                    <a:lnR w="9525" cap="flat" cmpd="sng" algn="ctr">
-                      <a:solidFill>
-                        <a:srgbClr val="34445A"/>
-                      </a:solidFill>
-                      <a:prstDash val="solid"/>
-                      <a:round/>
-                      <a:headEnd type="none" w="med" len="med"/>
-                      <a:tailEnd type="none" w="med" len="med"/>
-                    </a:lnR>
-                    <a:lnT w="9525" cap="flat" cmpd="sng" algn="ctr">
-                      <a:solidFill>
-                        <a:srgbClr val="34445A"/>
-                      </a:solidFill>
-                      <a:prstDash val="solid"/>
-                      <a:round/>
-                      <a:headEnd type="none" w="med" len="med"/>
-                      <a:tailEnd type="none" w="med" len="med"/>
-                    </a:lnT>
-                    <a:lnB w="9525" cap="flat" cmpd="sng" algn="ctr">
-                      <a:solidFill>
-                        <a:srgbClr val="34445A"/>
-                      </a:solidFill>
-                      <a:prstDash val="solid"/>
-                      <a:round/>
-                      <a:headEnd type="none" w="med" len="med"/>
-                      <a:tailEnd type="none" w="med" len="med"/>
-                    </a:lnB>
-                    <a:solidFill>
-                      <a:schemeClr val="accent5"/>
-                    </a:solidFill>
-                  </a:tcPr>
-                </a:tc>
-              </a:tr>
-              <a:tr h="640080">
-                <a:tc>
-                  <a:txBody>
-                    <a:bodyPr/>
-                    <a:lstStyle/>
-                    <a:p>
-                      <a:pPr indent="0" marL="0">
-                        <a:buNone/>
-                      </a:pPr>
-                      <a:r>
-                        <a:rPr lang="en-US" sz="1700" dirty="0">
-                          <a:solidFill>
-                            <a:schemeClr val="bg1"/>
-                          </a:solidFill>
-                          <a:latin typeface="Arial" pitchFamily="34" charset="0"/>
-                          <a:ea typeface="Arial" pitchFamily="34" charset="-122"/>
-                          <a:cs typeface="Arial" pitchFamily="34" charset="-120"/>
-                        </a:rPr>
-                        <a:t>Redis congelado (docker pause)</a:t>
-                      </a:r>
-                      <a:endParaRPr lang="en-US" sz="1700" dirty="0">
-                        <a:latin typeface="Arial" charset="0"/>
-                        <a:ea typeface="Arial" charset="0"/>
-                        <a:cs typeface="Arial" charset="0"/>
-                      </a:endParaRPr>
-                    </a:p>
-                  </a:txBody>
-                  <a:tcPr marL="91440" marR="91440" marT="45720" marB="45720" anchor="ctr">
-                    <a:lnL w="9525" cap="flat" cmpd="sng" algn="ctr">
-                      <a:solidFill>
-                        <a:srgbClr val="34445A"/>
-                      </a:solidFill>
-                      <a:prstDash val="solid"/>
-                      <a:round/>
-                      <a:headEnd type="none" w="med" len="med"/>
-                      <a:tailEnd type="none" w="med" len="med"/>
-                    </a:lnL>
-                    <a:lnR w="9525" cap="flat" cmpd="sng" algn="ctr">
-                      <a:solidFill>
-                        <a:srgbClr val="34445A"/>
-                      </a:solidFill>
-                      <a:prstDash val="solid"/>
-                      <a:round/>
-                      <a:headEnd type="none" w="med" len="med"/>
-                      <a:tailEnd type="none" w="med" len="med"/>
-                    </a:lnR>
-                    <a:lnT w="9525" cap="flat" cmpd="sng" algn="ctr">
-                      <a:solidFill>
-                        <a:srgbClr val="34445A"/>
-                      </a:solidFill>
-                      <a:prstDash val="solid"/>
-                      <a:round/>
-                      <a:headEnd type="none" w="med" len="med"/>
-                      <a:tailEnd type="none" w="med" len="med"/>
-                    </a:lnT>
-                    <a:lnB w="9525" cap="flat" cmpd="sng" algn="ctr">
-                      <a:solidFill>
-                        <a:srgbClr val="34445A"/>
-                      </a:solidFill>
-                      <a:prstDash val="solid"/>
-                      <a:round/>
-                      <a:headEnd type="none" w="med" len="med"/>
-                      <a:tailEnd type="none" w="med" len="med"/>
-                    </a:lnB>
-                    <a:solidFill>
-                      <a:srgbClr val="1F2A38"/>
-                    </a:solidFill>
-                  </a:tcPr>
-                </a:tc>
-                <a:tc>
-                  <a:txBody>
-                    <a:bodyPr/>
-                    <a:lstStyle/>
-                    <a:p>
-                      <a:pPr indent="0" marL="0">
-                        <a:buNone/>
-                      </a:pPr>
-                      <a:r>
-                        <a:rPr lang="en-US" sz="1700" dirty="0">
-                          <a:solidFill>
-                            <a:schemeClr val="bg1"/>
-                          </a:solidFill>
-                          <a:latin typeface="Arial" pitchFamily="34" charset="0"/>
-                          <a:ea typeface="Arial" pitchFamily="34" charset="-122"/>
-                          <a:cs typeface="Arial" pitchFamily="34" charset="-120"/>
-                        </a:rPr>
-                        <a:t>Sin respuesta (corte a 10 000 ms)</a:t>
-                      </a:r>
-                      <a:endParaRPr lang="en-US" sz="1700" dirty="0">
-                        <a:latin typeface="Arial" charset="0"/>
-                        <a:ea typeface="Arial" charset="0"/>
-                        <a:cs typeface="Arial" charset="0"/>
-                      </a:endParaRPr>
-                    </a:p>
-                  </a:txBody>
-                  <a:tcPr marL="91440" marR="91440" marT="45720" marB="45720" anchor="ctr">
-                    <a:lnL w="9525" cap="flat" cmpd="sng" algn="ctr">
-                      <a:solidFill>
-                        <a:srgbClr val="34445A"/>
-                      </a:solidFill>
-                      <a:prstDash val="solid"/>
-                      <a:round/>
-                      <a:headEnd type="none" w="med" len="med"/>
-                      <a:tailEnd type="none" w="med" len="med"/>
-                    </a:lnL>
-                    <a:lnR w="9525" cap="flat" cmpd="sng" algn="ctr">
-                      <a:solidFill>
-                        <a:srgbClr val="34445A"/>
-                      </a:solidFill>
-                      <a:prstDash val="solid"/>
-                      <a:round/>
-                      <a:headEnd type="none" w="med" len="med"/>
-                      <a:tailEnd type="none" w="med" len="med"/>
-                    </a:lnR>
-                    <a:lnT w="9525" cap="flat" cmpd="sng" algn="ctr">
-                      <a:solidFill>
-                        <a:srgbClr val="34445A"/>
-                      </a:solidFill>
-                      <a:prstDash val="solid"/>
-                      <a:round/>
-                      <a:headEnd type="none" w="med" len="med"/>
-                      <a:tailEnd type="none" w="med" len="med"/>
-                    </a:lnT>
-                    <a:lnB w="9525" cap="flat" cmpd="sng" algn="ctr">
-                      <a:solidFill>
-                        <a:srgbClr val="34445A"/>
-                      </a:solidFill>
-                      <a:prstDash val="solid"/>
-                      <a:round/>
-                      <a:headEnd type="none" w="med" len="med"/>
-                      <a:tailEnd type="none" w="med" len="med"/>
-                    </a:lnB>
-                    <a:solidFill>
-                      <a:srgbClr val="1F2A38"/>
-                    </a:solidFill>
-                  </a:tcPr>
-                </a:tc>
-                <a:tc>
-                  <a:txBody>
-                    <a:bodyPr/>
-                    <a:lstStyle/>
-                    <a:p>
-                      <a:pPr indent="0" marL="0">
-                        <a:buNone/>
-                      </a:pPr>
-                      <a:r>
-                        <a:rPr lang="en-US" sz="1700" dirty="0">
-                          <a:solidFill>
-                            <a:schemeClr val="bg1"/>
-                          </a:solidFill>
-                          <a:latin typeface="Arial" pitchFamily="34" charset="0"/>
-                          <a:ea typeface="Arial" pitchFamily="34" charset="-122"/>
-                          <a:cs typeface="Arial" pitchFamily="34" charset="-120"/>
-                        </a:rPr>
-                        <a:t>~500 ms → ERROR → BYPASS</a:t>
-                      </a:r>
-                      <a:endParaRPr lang="en-US" sz="1700" dirty="0">
-                        <a:latin typeface="Arial" charset="0"/>
-                        <a:ea typeface="Arial" charset="0"/>
-                        <a:cs typeface="Arial" charset="0"/>
-                      </a:endParaRPr>
-                    </a:p>
-                  </a:txBody>
-                  <a:tcPr marL="91440" marR="91440" marT="45720" marB="45720" anchor="ctr">
-                    <a:lnL w="9525" cap="flat" cmpd="sng" algn="ctr">
-                      <a:solidFill>
-                        <a:srgbClr val="34445A"/>
-                      </a:solidFill>
-                      <a:prstDash val="solid"/>
-                      <a:round/>
-                      <a:headEnd type="none" w="med" len="med"/>
-                      <a:tailEnd type="none" w="med" len="med"/>
-                    </a:lnL>
-                    <a:lnR w="9525" cap="flat" cmpd="sng" algn="ctr">
-                      <a:solidFill>
-                        <a:srgbClr val="34445A"/>
-                      </a:solidFill>
-                      <a:prstDash val="solid"/>
-                      <a:round/>
-                      <a:headEnd type="none" w="med" len="med"/>
-                      <a:tailEnd type="none" w="med" len="med"/>
-                    </a:lnR>
-                    <a:lnT w="9525" cap="flat" cmpd="sng" algn="ctr">
-                      <a:solidFill>
-                        <a:srgbClr val="34445A"/>
-                      </a:solidFill>
-                      <a:prstDash val="solid"/>
-                      <a:round/>
-                      <a:headEnd type="none" w="med" len="med"/>
-                      <a:tailEnd type="none" w="med" len="med"/>
-                    </a:lnT>
-                    <a:lnB w="9525" cap="flat" cmpd="sng" algn="ctr">
-                      <a:solidFill>
-                        <a:srgbClr val="34445A"/>
-                      </a:solidFill>
-                      <a:prstDash val="solid"/>
-                      <a:round/>
-                      <a:headEnd type="none" w="med" len="med"/>
-                      <a:tailEnd type="none" w="med" len="med"/>
-                    </a:lnB>
-                    <a:solidFill>
-                      <a:srgbClr val="1F2A38"/>
-                    </a:solidFill>
-                  </a:tcPr>
-                </a:tc>
-              </a:tr>
-            </a:tbl>
-          </a:graphicData>
-        </a:graphic>
-      </p:graphicFrame>
-      <p:sp>
-        <p:nvSpPr>
-          <p:cNvPr id="6" name="Shape 3"/>
-          <p:cNvSpPr/>
-          <p:nvPr/>
-        </p:nvSpPr>
-        <p:spPr>
-          <a:xfrm>
-            <a:off x="548640" y="3749040"/>
-            <a:ext cx="5410048" cy="1463040"/>
-          </a:xfrm>
-          <a:prstGeom prst="roundRect">
-            <a:avLst>
-              <a:gd name="adj" fmla="val 6250"/>
-            </a:avLst>
-          </a:prstGeom>
-          <a:solidFill>
-            <a:schemeClr val="accent5"/>
-          </a:solidFill>
-          <a:ln/>
-        </p:spPr>
-      </p:sp>
-      <p:sp>
-        <p:nvSpPr>
-          <p:cNvPr id="7" name="Text 4"/>
-          <p:cNvSpPr txBox="1"/>
-          <p:nvPr/>
-        </p:nvSpPr>
-        <p:spPr>
-          <a:xfrm>
-            <a:off x="914400" y="3749040"/>
-            <a:ext cx="4678528" cy="1463040"/>
-          </a:xfrm>
-          <a:prstGeom prst="rect">
-            <a:avLst/>
-          </a:prstGeom>
-          <a:noFill/>
-          <a:ln/>
-        </p:spPr>
-        <p:txBody>
-          <a:bodyPr wrap="square" lIns="0" tIns="0" rIns="0" bIns="0" rtlCol="0" anchor="ctr"/>
-          <a:lstStyle/>
-          <a:p>
-            <a:pPr indent="0" marL="0">
-              <a:buNone/>
-            </a:pPr>
-            <a:r>
-              <a:rPr lang="en-US" sz="1800" dirty="0">
-                <a:solidFill>
-                  <a:schemeClr val="bg1"/>
-                </a:solidFill>
-                <a:latin typeface="Arial" pitchFamily="34" charset="0"/>
-                <a:ea typeface="Arial" pitchFamily="34" charset="-122"/>
-                <a:cs typeface="Arial" pitchFamily="34" charset="-120"/>
-              </a:rPr>
-              <a:t>Desactivar la cola fuera de línea resuelve la caída, no la lentitud.</a:t>
-            </a:r>
-            <a:endParaRPr lang="en-US" sz="1800" dirty="0"/>
-          </a:p>
-        </p:txBody>
-      </p:sp>
-      <p:sp>
-        <p:nvSpPr>
-          <p:cNvPr id="8" name="Shape 5"/>
-          <p:cNvSpPr/>
-          <p:nvPr/>
-        </p:nvSpPr>
-        <p:spPr>
-          <a:xfrm>
-            <a:off x="6233008" y="3749040"/>
-            <a:ext cx="5410048" cy="1463040"/>
-          </a:xfrm>
-          <a:prstGeom prst="roundRect">
-            <a:avLst>
-              <a:gd name="adj" fmla="val 6250"/>
-            </a:avLst>
-          </a:prstGeom>
-          <a:solidFill>
-            <a:schemeClr val="accent5"/>
-          </a:solidFill>
-          <a:ln/>
-        </p:spPr>
-      </p:sp>
-      <p:sp>
-        <p:nvSpPr>
-          <p:cNvPr id="9" name="Text 6"/>
-          <p:cNvSpPr txBox="1"/>
-          <p:nvPr/>
-        </p:nvSpPr>
-        <p:spPr>
-          <a:xfrm>
-            <a:off x="6598768" y="3749040"/>
-            <a:ext cx="4678528" cy="1463040"/>
-          </a:xfrm>
-          <a:prstGeom prst="rect">
-            <a:avLst/>
-          </a:prstGeom>
-          <a:noFill/>
-          <a:ln/>
-        </p:spPr>
-        <p:txBody>
-          <a:bodyPr wrap="square" lIns="0" tIns="0" rIns="0" bIns="0" rtlCol="0" anchor="ctr"/>
-          <a:lstStyle/>
-          <a:p>
-            <a:pPr indent="0" marL="0">
-              <a:buNone/>
-            </a:pPr>
-            <a:r>
-              <a:rPr lang="en-US" sz="1800" dirty="0">
-                <a:solidFill>
-                  <a:schemeClr val="bg1"/>
-                </a:solidFill>
-                <a:latin typeface="Arial" pitchFamily="34" charset="0"/>
-                <a:ea typeface="Arial" pitchFamily="34" charset="-122"/>
-                <a:cs typeface="Arial" pitchFamily="34" charset="-120"/>
-              </a:rPr>
-              <a:t>El timeout por comando acota el peor caso a 500 ms. Se necesitan las dos medidas.</a:t>
-            </a:r>
-            <a:endParaRPr lang="en-US" sz="1800" dirty="0"/>
-          </a:p>
-        </p:txBody>
-      </p:sp>
-    </p:spTree>
-  </p:cSld>
-  <p:clrMapOvr>
-    <a:masterClrMapping/>
-  </p:clrMapOvr>
-</p:sld>
-</file>
-
-<file path=ppt/slides/slide12.xml><?xml version="1.0" encoding="utf-8"?>
-<p:sld xmlns:a="http://schemas.openxmlformats.org/drawingml/2006/main" xmlns:r="http://schemas.openxmlformats.org/officeDocument/2006/relationships" xmlns:p="http://schemas.openxmlformats.org/presentationml/2006/main">
   <p:cSld name="Slide 12">
     <p:spTree>
       <p:nvGrpSpPr>
@@ -7953,7 +6025,7 @@
 </p:sld>
 </file>
 
-<file path=ppt/slides/slide13.xml><?xml version="1.0" encoding="utf-8"?>
+<file path=ppt/slides/slide11.xml><?xml version="1.0" encoding="utf-8"?>
 <p:sld xmlns:a="http://schemas.openxmlformats.org/drawingml/2006/main" xmlns:r="http://schemas.openxmlformats.org/officeDocument/2006/relationships" xmlns:p="http://schemas.openxmlformats.org/presentationml/2006/main">
   <p:cSld name="Slide 13">
     <p:spTree>
@@ -8705,7 +6777,7 @@
 </p:sld>
 </file>
 
-<file path=ppt/slides/slide14.xml><?xml version="1.0" encoding="utf-8"?>
+<file path=ppt/slides/slide12.xml><?xml version="1.0" encoding="utf-8"?>
 <p:sld xmlns:a="http://schemas.openxmlformats.org/drawingml/2006/main" xmlns:r="http://schemas.openxmlformats.org/officeDocument/2006/relationships" xmlns:p="http://schemas.openxmlformats.org/presentationml/2006/main">
   <p:cSld name="Slide 14">
     <p:spTree>
@@ -10305,7 +8377,7 @@
 </p:sld>
 </file>
 
-<file path=ppt/slides/slide15.xml><?xml version="1.0" encoding="utf-8"?>
+<file path=ppt/slides/slide13.xml><?xml version="1.0" encoding="utf-8"?>
 <p:sld xmlns:a="http://schemas.openxmlformats.org/drawingml/2006/main" xmlns:r="http://schemas.openxmlformats.org/officeDocument/2006/relationships" xmlns:p="http://schemas.openxmlformats.org/presentationml/2006/main">
   <p:cSld name="Slide 15">
     <p:spTree>
@@ -10900,7 +8972,7 @@
 </p:sld>
 </file>
 
-<file path=ppt/slides/slide16.xml><?xml version="1.0" encoding="utf-8"?>
+<file path=ppt/slides/slide14.xml><?xml version="1.0" encoding="utf-8"?>
 <p:sld xmlns:a="http://schemas.openxmlformats.org/drawingml/2006/main" xmlns:r="http://schemas.openxmlformats.org/officeDocument/2006/relationships" xmlns:p="http://schemas.openxmlformats.org/presentationml/2006/main">
   <p:cSld name="Slide 16">
     <p:spTree>
@@ -11431,7 +9503,7 @@
 </p:sld>
 </file>
 
-<file path=ppt/slides/slide17.xml><?xml version="1.0" encoding="utf-8"?>
+<file path=ppt/slides/slide15.xml><?xml version="1.0" encoding="utf-8"?>
 <p:sld xmlns:a="http://schemas.openxmlformats.org/drawingml/2006/main" xmlns:r="http://schemas.openxmlformats.org/officeDocument/2006/relationships" xmlns:p="http://schemas.openxmlformats.org/presentationml/2006/main">
   <p:cSld name="Slide 17">
     <p:spTree>
@@ -11889,701 +9961,6 @@
 </p:sld>
 </file>
 
-<file path=ppt/slides/slide2.xml><?xml version="1.0" encoding="utf-8"?>
-<p:sld xmlns:a="http://schemas.openxmlformats.org/drawingml/2006/main" xmlns:r="http://schemas.openxmlformats.org/officeDocument/2006/relationships" xmlns:p="http://schemas.openxmlformats.org/presentationml/2006/main">
-  <p:cSld name="Slide 2">
-    <p:spTree>
-      <p:nvGrpSpPr>
-        <p:cNvPr id="1" name=""/>
-        <p:cNvGrpSpPr/>
-        <p:nvPr/>
-      </p:nvGrpSpPr>
-      <p:grpSpPr>
-        <a:xfrm>
-          <a:off x="0" y="0"/>
-          <a:ext cx="0" cy="0"/>
-          <a:chOff x="0" y="0"/>
-          <a:chExt cx="0" cy="0"/>
-        </a:xfrm>
-      </p:grpSpPr>
-      <p:sp>
-        <p:nvSpPr>
-          <p:cNvPr id="2" name="Text 0"/>
-          <p:cNvSpPr/>
-          <p:nvPr>
-            <p:ph idx="100" type="title" hasCustomPrompt="1"/>
-          </p:nvPr>
-        </p:nvSpPr>
-        <p:spPr>
-          <a:xfrm>
-            <a:off x="548640" y="411480"/>
-            <a:ext cx="11094415" cy="685800"/>
-          </a:xfrm>
-          <a:prstGeom prst="rect">
-            <a:avLst/>
-          </a:prstGeom>
-          <a:noFill/>
-          <a:ln/>
-        </p:spPr>
-        <p:txBody>
-          <a:bodyPr wrap="square" lIns="0" tIns="0" rIns="0" bIns="0" rtlCol="0" anchor="ctr"/>
-          <a:lstStyle/>
-          <a:p>
-            <a:pPr algn="l" indent="0" marL="0">
-              <a:buNone/>
-            </a:pPr>
-            <a:r>
-              <a:rPr lang="en-US" sz="3600" b="1" dirty="0">
-                <a:solidFill>
-                  <a:schemeClr val="tx1"/>
-                </a:solidFill>
-              </a:rPr>
-              <a:t>Qué debe demostrar el laboratorio</a:t>
-            </a:r>
-            <a:endParaRPr lang="en-US" sz="3600" dirty="0"/>
-          </a:p>
-        </p:txBody>
-      </p:sp>
-      <p:sp>
-        <p:nvSpPr>
-          <p:cNvPr id="3" name="Text 0"/>
-          <p:cNvSpPr/>
-          <p:nvPr>
-            <p:ph idx="101" type="body" hasCustomPrompt="1"/>
-          </p:nvPr>
-        </p:nvSpPr>
-        <p:spPr>
-          <a:xfrm>
-            <a:off x="548640" y="6355080"/>
-            <a:ext cx="6858000" cy="274320"/>
-          </a:xfrm>
-          <a:prstGeom prst="rect">
-            <a:avLst/>
-          </a:prstGeom>
-          <a:noFill/>
-          <a:ln/>
-        </p:spPr>
-        <p:txBody>
-          <a:bodyPr wrap="square" lIns="0" tIns="0" rIns="0" bIns="0" rtlCol="0" anchor="ctr"/>
-          <a:lstStyle/>
-          <a:p>
-            <a:pPr indent="0" marL="0">
-              <a:buNone/>
-            </a:pPr>
-            <a:r>
-              <a:rPr lang="en-US" sz="1100" dirty="0">
-                <a:solidFill>
-                  <a:schemeClr val="accent4"/>
-                </a:solidFill>
-              </a:rPr>
-              <a:t>1 · Sebastian · Arquitectura y flujo exitoso</a:t>
-            </a:r>
-            <a:endParaRPr lang="en-US" sz="1100" dirty="0"/>
-          </a:p>
-        </p:txBody>
-      </p:sp>
-      <p:sp>
-        <p:nvSpPr>
-          <p:cNvPr id="4" name="Text 0"/>
-          <p:cNvSpPr/>
-          <p:nvPr>
-            <p:ph idx="102" type="body" hasCustomPrompt="1"/>
-          </p:nvPr>
-        </p:nvSpPr>
-        <p:spPr>
-          <a:xfrm>
-            <a:off x="7589520" y="6355080"/>
-            <a:ext cx="4053535" cy="274320"/>
-          </a:xfrm>
-          <a:prstGeom prst="rect">
-            <a:avLst/>
-          </a:prstGeom>
-          <a:noFill/>
-          <a:ln/>
-        </p:spPr>
-        <p:txBody>
-          <a:bodyPr wrap="square" lIns="0" tIns="0" rIns="0" bIns="0" rtlCol="0" anchor="ctr"/>
-          <a:lstStyle/>
-          <a:p>
-            <a:pPr algn="r" indent="0" marL="0">
-              <a:buNone/>
-            </a:pPr>
-            <a:r>
-              <a:rPr lang="en-US" sz="1100" dirty="0">
-                <a:solidFill>
-                  <a:schemeClr val="accent4"/>
-                </a:solidFill>
-              </a:rPr>
-              <a:t>Guía, tema 14</a:t>
-            </a:r>
-            <a:endParaRPr lang="en-US" sz="1100" dirty="0"/>
-          </a:p>
-        </p:txBody>
-      </p:sp>
-      <p:sp>
-        <p:nvSpPr>
-          <p:cNvPr id="5" name="Shape 3"/>
-          <p:cNvSpPr/>
-          <p:nvPr/>
-        </p:nvSpPr>
-        <p:spPr>
-          <a:xfrm>
-            <a:off x="548640" y="1371600"/>
-            <a:ext cx="5410048" cy="2240280"/>
-          </a:xfrm>
-          <a:prstGeom prst="roundRect">
-            <a:avLst>
-              <a:gd name="adj" fmla="val 4082"/>
-            </a:avLst>
-          </a:prstGeom>
-          <a:solidFill>
-            <a:schemeClr val="bg2"/>
-          </a:solidFill>
-          <a:ln/>
-        </p:spPr>
-      </p:sp>
-      <p:sp>
-        <p:nvSpPr>
-          <p:cNvPr id="6" name="Text 4"/>
-          <p:cNvSpPr txBox="1"/>
-          <p:nvPr/>
-        </p:nvSpPr>
-        <p:spPr>
-          <a:xfrm>
-            <a:off x="868680" y="1645920"/>
-            <a:ext cx="4769968" cy="274320"/>
-          </a:xfrm>
-          <a:prstGeom prst="rect">
-            <a:avLst/>
-          </a:prstGeom>
-          <a:noFill/>
-          <a:ln/>
-        </p:spPr>
-        <p:txBody>
-          <a:bodyPr wrap="square" lIns="0" tIns="0" rIns="0" bIns="0" rtlCol="0" anchor="t"/>
-          <a:lstStyle/>
-          <a:p>
-            <a:pPr indent="0" marL="0">
-              <a:buNone/>
-            </a:pPr>
-            <a:r>
-              <a:rPr lang="en-US" sz="1300" dirty="0">
-                <a:solidFill>
-                  <a:schemeClr val="accent3"/>
-                </a:solidFill>
-                <a:latin typeface="Courier New" pitchFamily="34" charset="0"/>
-                <a:ea typeface="Courier New" pitchFamily="34" charset="-122"/>
-                <a:cs typeface="Courier New" pitchFamily="34" charset="-120"/>
-              </a:rPr>
-              <a:t>01 · CP-01</a:t>
-            </a:r>
-            <a:endParaRPr lang="en-US" sz="1300" dirty="0"/>
-          </a:p>
-        </p:txBody>
-      </p:sp>
-      <p:sp>
-        <p:nvSpPr>
-          <p:cNvPr id="7" name="Text 5"/>
-          <p:cNvSpPr txBox="1"/>
-          <p:nvPr/>
-        </p:nvSpPr>
-        <p:spPr>
-          <a:xfrm>
-            <a:off x="868680" y="2011680"/>
-            <a:ext cx="4769968" cy="411480"/>
-          </a:xfrm>
-          <a:prstGeom prst="rect">
-            <a:avLst/>
-          </a:prstGeom>
-          <a:noFill/>
-          <a:ln/>
-        </p:spPr>
-        <p:txBody>
-          <a:bodyPr wrap="square" lIns="0" tIns="0" rIns="0" bIns="0" rtlCol="0" anchor="t"/>
-          <a:lstStyle/>
-          <a:p>
-            <a:pPr indent="0" marL="0">
-              <a:buNone/>
-            </a:pPr>
-            <a:r>
-              <a:rPr lang="en-US" sz="2200" b="1" dirty="0">
-                <a:solidFill>
-                  <a:schemeClr val="tx1"/>
-                </a:solidFill>
-                <a:latin typeface="Arial" pitchFamily="34" charset="0"/>
-                <a:ea typeface="Arial" pitchFamily="34" charset="-122"/>
-                <a:cs typeface="Arial" pitchFamily="34" charset="-120"/>
-              </a:rPr>
-              <a:t>Consulta</a:t>
-            </a:r>
-            <a:endParaRPr lang="en-US" sz="2200" dirty="0"/>
-          </a:p>
-        </p:txBody>
-      </p:sp>
-      <p:sp>
-        <p:nvSpPr>
-          <p:cNvPr id="8" name="Text 6"/>
-          <p:cNvSpPr txBox="1"/>
-          <p:nvPr/>
-        </p:nvSpPr>
-        <p:spPr>
-          <a:xfrm>
-            <a:off x="868680" y="2560320"/>
-            <a:ext cx="4769968" cy="868680"/>
-          </a:xfrm>
-          <a:prstGeom prst="rect">
-            <a:avLst/>
-          </a:prstGeom>
-          <a:noFill/>
-          <a:ln/>
-        </p:spPr>
-        <p:txBody>
-          <a:bodyPr wrap="square" lIns="0" tIns="0" rIns="0" bIns="0" rtlCol="0" anchor="t"/>
-          <a:lstStyle/>
-          <a:p>
-            <a:pPr indent="0" marL="0">
-              <a:buNone/>
-            </a:pPr>
-            <a:r>
-              <a:rPr lang="en-US" sz="1600" dirty="0">
-                <a:solidFill>
-                  <a:schemeClr val="tx2"/>
-                </a:solidFill>
-                <a:latin typeface="Arial" pitchFamily="34" charset="0"/>
-                <a:ea typeface="Arial" pitchFamily="34" charset="-122"/>
-                <a:cs typeface="Arial" pitchFamily="34" charset="-120"/>
-              </a:rPr>
-              <a:t>Primera lectura MISS desde PostgreSQL; la segunda, HIT desde Redis, con el mismo JSON.</a:t>
-            </a:r>
-            <a:endParaRPr lang="en-US" sz="1600" dirty="0"/>
-          </a:p>
-        </p:txBody>
-      </p:sp>
-      <p:sp>
-        <p:nvSpPr>
-          <p:cNvPr id="9" name="Shape 7"/>
-          <p:cNvSpPr/>
-          <p:nvPr/>
-        </p:nvSpPr>
-        <p:spPr>
-          <a:xfrm>
-            <a:off x="6233008" y="1371600"/>
-            <a:ext cx="5410048" cy="2240280"/>
-          </a:xfrm>
-          <a:prstGeom prst="roundRect">
-            <a:avLst>
-              <a:gd name="adj" fmla="val 4082"/>
-            </a:avLst>
-          </a:prstGeom>
-          <a:solidFill>
-            <a:schemeClr val="bg2"/>
-          </a:solidFill>
-          <a:ln/>
-        </p:spPr>
-      </p:sp>
-      <p:sp>
-        <p:nvSpPr>
-          <p:cNvPr id="10" name="Text 8"/>
-          <p:cNvSpPr txBox="1"/>
-          <p:nvPr/>
-        </p:nvSpPr>
-        <p:spPr>
-          <a:xfrm>
-            <a:off x="6553048" y="1645920"/>
-            <a:ext cx="4769968" cy="274320"/>
-          </a:xfrm>
-          <a:prstGeom prst="rect">
-            <a:avLst/>
-          </a:prstGeom>
-          <a:noFill/>
-          <a:ln/>
-        </p:spPr>
-        <p:txBody>
-          <a:bodyPr wrap="square" lIns="0" tIns="0" rIns="0" bIns="0" rtlCol="0" anchor="t"/>
-          <a:lstStyle/>
-          <a:p>
-            <a:pPr indent="0" marL="0">
-              <a:buNone/>
-            </a:pPr>
-            <a:r>
-              <a:rPr lang="en-US" sz="1300" dirty="0">
-                <a:solidFill>
-                  <a:schemeClr val="accent3"/>
-                </a:solidFill>
-                <a:latin typeface="Courier New" pitchFamily="34" charset="0"/>
-                <a:ea typeface="Courier New" pitchFamily="34" charset="-122"/>
-                <a:cs typeface="Courier New" pitchFamily="34" charset="-120"/>
-              </a:rPr>
-              <a:t>02 · CP-02 · CP-07</a:t>
-            </a:r>
-            <a:endParaRPr lang="en-US" sz="1300" dirty="0"/>
-          </a:p>
-        </p:txBody>
-      </p:sp>
-      <p:sp>
-        <p:nvSpPr>
-          <p:cNvPr id="11" name="Text 9"/>
-          <p:cNvSpPr txBox="1"/>
-          <p:nvPr/>
-        </p:nvSpPr>
-        <p:spPr>
-          <a:xfrm>
-            <a:off x="6553048" y="2011680"/>
-            <a:ext cx="4769968" cy="411480"/>
-          </a:xfrm>
-          <a:prstGeom prst="rect">
-            <a:avLst/>
-          </a:prstGeom>
-          <a:noFill/>
-          <a:ln/>
-        </p:spPr>
-        <p:txBody>
-          <a:bodyPr wrap="square" lIns="0" tIns="0" rIns="0" bIns="0" rtlCol="0" anchor="t"/>
-          <a:lstStyle/>
-          <a:p>
-            <a:pPr indent="0" marL="0">
-              <a:buNone/>
-            </a:pPr>
-            <a:r>
-              <a:rPr lang="en-US" sz="2200" b="1" dirty="0">
-                <a:solidFill>
-                  <a:schemeClr val="tx1"/>
-                </a:solidFill>
-                <a:latin typeface="Arial" pitchFamily="34" charset="0"/>
-                <a:ea typeface="Arial" pitchFamily="34" charset="-122"/>
-                <a:cs typeface="Arial" pitchFamily="34" charset="-120"/>
-              </a:rPr>
-              <a:t>Actualización e invalidación</a:t>
-            </a:r>
-            <a:endParaRPr lang="en-US" sz="2200" dirty="0"/>
-          </a:p>
-        </p:txBody>
-      </p:sp>
-      <p:sp>
-        <p:nvSpPr>
-          <p:cNvPr id="12" name="Text 10"/>
-          <p:cNvSpPr txBox="1"/>
-          <p:nvPr/>
-        </p:nvSpPr>
-        <p:spPr>
-          <a:xfrm>
-            <a:off x="6553048" y="2560320"/>
-            <a:ext cx="4769968" cy="868680"/>
-          </a:xfrm>
-          <a:prstGeom prst="rect">
-            <a:avLst/>
-          </a:prstGeom>
-          <a:noFill/>
-          <a:ln/>
-        </p:spPr>
-        <p:txBody>
-          <a:bodyPr wrap="square" lIns="0" tIns="0" rIns="0" bIns="0" rtlCol="0" anchor="t"/>
-          <a:lstStyle/>
-          <a:p>
-            <a:pPr indent="0" marL="0">
-              <a:buNone/>
-            </a:pPr>
-            <a:r>
-              <a:rPr lang="en-US" sz="1600" dirty="0">
-                <a:solidFill>
-                  <a:schemeClr val="tx2"/>
-                </a:solidFill>
-                <a:latin typeface="Arial" pitchFamily="34" charset="0"/>
-                <a:ea typeface="Arial" pitchFamily="34" charset="-122"/>
-                <a:cs typeface="Arial" pitchFamily="34" charset="-120"/>
-              </a:rPr>
-              <a:t>Un PUT escribe en la BD y borra la llave; la siguiente lectura trae el valor nuevo.</a:t>
-            </a:r>
-            <a:endParaRPr lang="en-US" sz="1600" dirty="0"/>
-          </a:p>
-        </p:txBody>
-      </p:sp>
-      <p:sp>
-        <p:nvSpPr>
-          <p:cNvPr id="13" name="Shape 11"/>
-          <p:cNvSpPr/>
-          <p:nvPr/>
-        </p:nvSpPr>
-        <p:spPr>
-          <a:xfrm>
-            <a:off x="548640" y="3886200"/>
-            <a:ext cx="5410048" cy="2240280"/>
-          </a:xfrm>
-          <a:prstGeom prst="roundRect">
-            <a:avLst>
-              <a:gd name="adj" fmla="val 4082"/>
-            </a:avLst>
-          </a:prstGeom>
-          <a:solidFill>
-            <a:schemeClr val="bg2"/>
-          </a:solidFill>
-          <a:ln/>
-        </p:spPr>
-      </p:sp>
-      <p:sp>
-        <p:nvSpPr>
-          <p:cNvPr id="14" name="Text 12"/>
-          <p:cNvSpPr txBox="1"/>
-          <p:nvPr/>
-        </p:nvSpPr>
-        <p:spPr>
-          <a:xfrm>
-            <a:off x="868680" y="4160520"/>
-            <a:ext cx="4769968" cy="274320"/>
-          </a:xfrm>
-          <a:prstGeom prst="rect">
-            <a:avLst/>
-          </a:prstGeom>
-          <a:noFill/>
-          <a:ln/>
-        </p:spPr>
-        <p:txBody>
-          <a:bodyPr wrap="square" lIns="0" tIns="0" rIns="0" bIns="0" rtlCol="0" anchor="t"/>
-          <a:lstStyle/>
-          <a:p>
-            <a:pPr indent="0" marL="0">
-              <a:buNone/>
-            </a:pPr>
-            <a:r>
-              <a:rPr lang="en-US" sz="1300" dirty="0">
-                <a:solidFill>
-                  <a:schemeClr val="accent3"/>
-                </a:solidFill>
-                <a:latin typeface="Courier New" pitchFamily="34" charset="0"/>
-                <a:ea typeface="Courier New" pitchFamily="34" charset="-122"/>
-                <a:cs typeface="Courier New" pitchFamily="34" charset="-120"/>
-              </a:rPr>
-              <a:t>03 · CP-05 · CP-08</a:t>
-            </a:r>
-            <a:endParaRPr lang="en-US" sz="1300" dirty="0"/>
-          </a:p>
-        </p:txBody>
-      </p:sp>
-      <p:sp>
-        <p:nvSpPr>
-          <p:cNvPr id="15" name="Text 13"/>
-          <p:cNvSpPr txBox="1"/>
-          <p:nvPr/>
-        </p:nvSpPr>
-        <p:spPr>
-          <a:xfrm>
-            <a:off x="868680" y="4526280"/>
-            <a:ext cx="4769968" cy="411480"/>
-          </a:xfrm>
-          <a:prstGeom prst="rect">
-            <a:avLst/>
-          </a:prstGeom>
-          <a:noFill/>
-          <a:ln/>
-        </p:spPr>
-        <p:txBody>
-          <a:bodyPr wrap="square" lIns="0" tIns="0" rIns="0" bIns="0" rtlCol="0" anchor="t"/>
-          <a:lstStyle/>
-          <a:p>
-            <a:pPr indent="0" marL="0">
-              <a:buNone/>
-            </a:pPr>
-            <a:r>
-              <a:rPr lang="en-US" sz="2200" b="1" dirty="0">
-                <a:solidFill>
-                  <a:schemeClr val="tx1"/>
-                </a:solidFill>
-                <a:latin typeface="Arial" pitchFamily="34" charset="0"/>
-                <a:ea typeface="Arial" pitchFamily="34" charset="-122"/>
-                <a:cs typeface="Arial" pitchFamily="34" charset="-120"/>
-              </a:rPr>
-              <a:t>Falla de la caché</a:t>
-            </a:r>
-            <a:endParaRPr lang="en-US" sz="2200" dirty="0"/>
-          </a:p>
-        </p:txBody>
-      </p:sp>
-      <p:sp>
-        <p:nvSpPr>
-          <p:cNvPr id="16" name="Text 14"/>
-          <p:cNvSpPr txBox="1"/>
-          <p:nvPr/>
-        </p:nvSpPr>
-        <p:spPr>
-          <a:xfrm>
-            <a:off x="868680" y="5074920"/>
-            <a:ext cx="4769968" cy="868680"/>
-          </a:xfrm>
-          <a:prstGeom prst="rect">
-            <a:avLst/>
-          </a:prstGeom>
-          <a:noFill/>
-          <a:ln/>
-        </p:spPr>
-        <p:txBody>
-          <a:bodyPr wrap="square" lIns="0" tIns="0" rIns="0" bIns="0" rtlCol="0" anchor="t"/>
-          <a:lstStyle/>
-          <a:p>
-            <a:pPr indent="0" marL="0">
-              <a:buNone/>
-            </a:pPr>
-            <a:r>
-              <a:rPr lang="en-US" sz="1600" dirty="0">
-                <a:solidFill>
-                  <a:schemeClr val="tx2"/>
-                </a:solidFill>
-                <a:latin typeface="Arial" pitchFamily="34" charset="0"/>
-                <a:ea typeface="Arial" pitchFamily="34" charset="-122"/>
-                <a:cs typeface="Arial" pitchFamily="34" charset="-120"/>
-              </a:rPr>
-              <a:t>Con Redis caído la API sigue respondiendo 200 desde PostgreSQL, sin error 500 ni bloqueo.</a:t>
-            </a:r>
-            <a:endParaRPr lang="en-US" sz="1600" dirty="0"/>
-          </a:p>
-        </p:txBody>
-      </p:sp>
-      <p:sp>
-        <p:nvSpPr>
-          <p:cNvPr id="17" name="Shape 15"/>
-          <p:cNvSpPr/>
-          <p:nvPr/>
-        </p:nvSpPr>
-        <p:spPr>
-          <a:xfrm>
-            <a:off x="6233008" y="3886200"/>
-            <a:ext cx="5410048" cy="2240280"/>
-          </a:xfrm>
-          <a:prstGeom prst="roundRect">
-            <a:avLst>
-              <a:gd name="adj" fmla="val 4082"/>
-            </a:avLst>
-          </a:prstGeom>
-          <a:solidFill>
-            <a:schemeClr val="bg2"/>
-          </a:solidFill>
-          <a:ln/>
-        </p:spPr>
-      </p:sp>
-      <p:sp>
-        <p:nvSpPr>
-          <p:cNvPr id="18" name="Text 16"/>
-          <p:cNvSpPr txBox="1"/>
-          <p:nvPr/>
-        </p:nvSpPr>
-        <p:spPr>
-          <a:xfrm>
-            <a:off x="6553048" y="4160520"/>
-            <a:ext cx="4769968" cy="274320"/>
-          </a:xfrm>
-          <a:prstGeom prst="rect">
-            <a:avLst/>
-          </a:prstGeom>
-          <a:noFill/>
-          <a:ln/>
-        </p:spPr>
-        <p:txBody>
-          <a:bodyPr wrap="square" lIns="0" tIns="0" rIns="0" bIns="0" rtlCol="0" anchor="t"/>
-          <a:lstStyle/>
-          <a:p>
-            <a:pPr indent="0" marL="0">
-              <a:buNone/>
-            </a:pPr>
-            <a:r>
-              <a:rPr lang="en-US" sz="1300" dirty="0">
-                <a:solidFill>
-                  <a:schemeClr val="accent3"/>
-                </a:solidFill>
-                <a:latin typeface="Courier New" pitchFamily="34" charset="0"/>
-                <a:ea typeface="Courier New" pitchFamily="34" charset="-122"/>
-                <a:cs typeface="Courier New" pitchFamily="34" charset="-120"/>
-              </a:rPr>
-              <a:t>04 · CP-06</a:t>
-            </a:r>
-            <a:endParaRPr lang="en-US" sz="1300" dirty="0"/>
-          </a:p>
-        </p:txBody>
-      </p:sp>
-      <p:sp>
-        <p:nvSpPr>
-          <p:cNvPr id="19" name="Text 17"/>
-          <p:cNvSpPr txBox="1"/>
-          <p:nvPr/>
-        </p:nvSpPr>
-        <p:spPr>
-          <a:xfrm>
-            <a:off x="6553048" y="4526280"/>
-            <a:ext cx="4769968" cy="411480"/>
-          </a:xfrm>
-          <a:prstGeom prst="rect">
-            <a:avLst/>
-          </a:prstGeom>
-          <a:noFill/>
-          <a:ln/>
-        </p:spPr>
-        <p:txBody>
-          <a:bodyPr wrap="square" lIns="0" tIns="0" rIns="0" bIns="0" rtlCol="0" anchor="t"/>
-          <a:lstStyle/>
-          <a:p>
-            <a:pPr indent="0" marL="0">
-              <a:buNone/>
-            </a:pPr>
-            <a:r>
-              <a:rPr lang="en-US" sz="2200" b="1" dirty="0">
-                <a:solidFill>
-                  <a:schemeClr val="tx1"/>
-                </a:solidFill>
-                <a:latin typeface="Arial" pitchFamily="34" charset="0"/>
-                <a:ea typeface="Arial" pitchFamily="34" charset="-122"/>
-                <a:cs typeface="Arial" pitchFamily="34" charset="-120"/>
-              </a:rPr>
-              <a:t>Datos desactualizados</a:t>
-            </a:r>
-            <a:endParaRPr lang="en-US" sz="2200" dirty="0"/>
-          </a:p>
-        </p:txBody>
-      </p:sp>
-      <p:sp>
-        <p:nvSpPr>
-          <p:cNvPr id="20" name="Text 18"/>
-          <p:cNvSpPr txBox="1"/>
-          <p:nvPr/>
-        </p:nvSpPr>
-        <p:spPr>
-          <a:xfrm>
-            <a:off x="6553048" y="5074920"/>
-            <a:ext cx="4769968" cy="868680"/>
-          </a:xfrm>
-          <a:prstGeom prst="rect">
-            <a:avLst/>
-          </a:prstGeom>
-          <a:noFill/>
-          <a:ln/>
-        </p:spPr>
-        <p:txBody>
-          <a:bodyPr wrap="square" lIns="0" tIns="0" rIns="0" bIns="0" rtlCol="0" anchor="t"/>
-          <a:lstStyle/>
-          <a:p>
-            <a:pPr indent="0" marL="0">
-              <a:buNone/>
-            </a:pPr>
-            <a:r>
-              <a:rPr lang="en-US" sz="1600" dirty="0">
-                <a:solidFill>
-                  <a:schemeClr val="tx2"/>
-                </a:solidFill>
-                <a:latin typeface="Arial" pitchFamily="34" charset="0"/>
-                <a:ea typeface="Arial" pitchFamily="34" charset="-122"/>
-                <a:cs typeface="Arial" pitchFamily="34" charset="-120"/>
-              </a:rPr>
-              <a:t>Una escritura directa en la BD deja un dato viejo en caché; se detecta y el TTL lo acota.</a:t>
-            </a:r>
-            <a:endParaRPr lang="en-US" sz="1600" dirty="0"/>
-          </a:p>
-        </p:txBody>
-      </p:sp>
-    </p:spTree>
-  </p:cSld>
-  <p:clrMapOvr>
-    <a:masterClrMapping/>
-  </p:clrMapOvr>
-</p:sld>
-</file>
-
 <file path=ppt/slides/slide3.xml><?xml version="1.0" encoding="utf-8"?>
 <p:sld xmlns:a="http://schemas.openxmlformats.org/drawingml/2006/main" xmlns:r="http://schemas.openxmlformats.org/officeDocument/2006/relationships" xmlns:p="http://schemas.openxmlformats.org/presentationml/2006/main">
   <p:cSld name="Slide 3">
@@ -13171,7 +10548,7 @@
                 <a:ea typeface="Arial" pitchFamily="34" charset="-122"/>
                 <a:cs typeface="Arial" pitchFamily="34" charset="-120"/>
               </a:rPr>
-              <a:t>Origen visible</a:t>
+              <a:t>Origen visible (X-Cache)</a:t>
             </a:r>
             <a:endParaRPr lang="en-US" sz="1800" dirty="0"/>
           </a:p>
@@ -13210,7 +10587,7 @@
                 <a:ea typeface="Arial" pitchFamily="34" charset="-122"/>
                 <a:cs typeface="Arial" pitchFamily="34" charset="-120"/>
               </a:rPr>
-              <a:t>Cada respuesta trae X-Cache: HIT, MISS o BYPASS.</a:t>
+              <a:t>HIT: Redis · MISS: PostgreSQL y SET · BYPASS: Redis caído, solo PostgreSQL.</a:t>
             </a:r>
             <a:endParaRPr lang="en-US" sz="1500" dirty="0"/>
           </a:p>
@@ -13225,700 +10602,6 @@
 </file>
 
 <file path=ppt/slides/slide4.xml><?xml version="1.0" encoding="utf-8"?>
-<p:sld xmlns:a="http://schemas.openxmlformats.org/drawingml/2006/main" xmlns:r="http://schemas.openxmlformats.org/officeDocument/2006/relationships" xmlns:p="http://schemas.openxmlformats.org/presentationml/2006/main">
-  <p:cSld name="Slide 4">
-    <p:spTree>
-      <p:nvGrpSpPr>
-        <p:cNvPr id="1" name=""/>
-        <p:cNvGrpSpPr/>
-        <p:nvPr/>
-      </p:nvGrpSpPr>
-      <p:grpSpPr>
-        <a:xfrm>
-          <a:off x="0" y="0"/>
-          <a:ext cx="0" cy="0"/>
-          <a:chOff x="0" y="0"/>
-          <a:chExt cx="0" cy="0"/>
-        </a:xfrm>
-      </p:grpSpPr>
-      <p:sp>
-        <p:nvSpPr>
-          <p:cNvPr id="2" name="Text 0"/>
-          <p:cNvSpPr/>
-          <p:nvPr>
-            <p:ph idx="100" type="title" hasCustomPrompt="1"/>
-          </p:nvPr>
-        </p:nvSpPr>
-        <p:spPr>
-          <a:xfrm>
-            <a:off x="548640" y="411480"/>
-            <a:ext cx="11094415" cy="685800"/>
-          </a:xfrm>
-          <a:prstGeom prst="rect">
-            <a:avLst/>
-          </a:prstGeom>
-          <a:noFill/>
-          <a:ln/>
-        </p:spPr>
-        <p:txBody>
-          <a:bodyPr wrap="square" lIns="0" tIns="0" rIns="0" bIns="0" rtlCol="0" anchor="ctr"/>
-          <a:lstStyle/>
-          <a:p>
-            <a:pPr algn="l" indent="0" marL="0">
-              <a:buNone/>
-            </a:pPr>
-            <a:r>
-              <a:rPr lang="en-US" sz="3600" b="1" dirty="0">
-                <a:solidFill>
-                  <a:schemeClr val="tx1"/>
-                </a:solidFill>
-              </a:rPr>
-              <a:t>Lectura: MISS y HIT</a:t>
-            </a:r>
-            <a:endParaRPr lang="en-US" sz="3600" dirty="0"/>
-          </a:p>
-        </p:txBody>
-      </p:sp>
-      <p:sp>
-        <p:nvSpPr>
-          <p:cNvPr id="3" name="Text 0"/>
-          <p:cNvSpPr/>
-          <p:nvPr>
-            <p:ph idx="101" type="body" hasCustomPrompt="1"/>
-          </p:nvPr>
-        </p:nvSpPr>
-        <p:spPr>
-          <a:xfrm>
-            <a:off x="548640" y="6355080"/>
-            <a:ext cx="6858000" cy="274320"/>
-          </a:xfrm>
-          <a:prstGeom prst="rect">
-            <a:avLst/>
-          </a:prstGeom>
-          <a:noFill/>
-          <a:ln/>
-        </p:spPr>
-        <p:txBody>
-          <a:bodyPr wrap="square" lIns="0" tIns="0" rIns="0" bIns="0" rtlCol="0" anchor="ctr"/>
-          <a:lstStyle/>
-          <a:p>
-            <a:pPr indent="0" marL="0">
-              <a:buNone/>
-            </a:pPr>
-            <a:r>
-              <a:rPr lang="en-US" sz="1100" dirty="0">
-                <a:solidFill>
-                  <a:schemeClr val="accent4"/>
-                </a:solidFill>
-              </a:rPr>
-              <a:t>1 · Sebastian · Arquitectura y flujo exitoso</a:t>
-            </a:r>
-            <a:endParaRPr lang="en-US" sz="1100" dirty="0"/>
-          </a:p>
-        </p:txBody>
-      </p:sp>
-      <p:sp>
-        <p:nvSpPr>
-          <p:cNvPr id="4" name="Text 0"/>
-          <p:cNvSpPr/>
-          <p:nvPr>
-            <p:ph idx="102" type="body" hasCustomPrompt="1"/>
-          </p:nvPr>
-        </p:nvSpPr>
-        <p:spPr>
-          <a:xfrm>
-            <a:off x="7589520" y="6355080"/>
-            <a:ext cx="4053535" cy="274320"/>
-          </a:xfrm>
-          <a:prstGeom prst="rect">
-            <a:avLst/>
-          </a:prstGeom>
-          <a:noFill/>
-          <a:ln/>
-        </p:spPr>
-        <p:txBody>
-          <a:bodyPr wrap="square" lIns="0" tIns="0" rIns="0" bIns="0" rtlCol="0" anchor="ctr"/>
-          <a:lstStyle/>
-          <a:p>
-            <a:pPr algn="r" indent="0" marL="0">
-              <a:buNone/>
-            </a:pPr>
-            <a:r>
-              <a:rPr lang="en-US" sz="1100" dirty="0">
-                <a:solidFill>
-                  <a:schemeClr val="accent4"/>
-                </a:solidFill>
-              </a:rPr>
-              <a:t>docs/arquitectura/02 y 03</a:t>
-            </a:r>
-            <a:endParaRPr lang="en-US" sz="1100" dirty="0"/>
-          </a:p>
-        </p:txBody>
-      </p:sp>
-      <p:sp>
-        <p:nvSpPr>
-          <p:cNvPr id="5" name="Shape 3"/>
-          <p:cNvSpPr/>
-          <p:nvPr/>
-        </p:nvSpPr>
-        <p:spPr>
-          <a:xfrm>
-            <a:off x="548640" y="1371600"/>
-            <a:ext cx="5364328" cy="4069080"/>
-          </a:xfrm>
-          <a:prstGeom prst="roundRect">
-            <a:avLst>
-              <a:gd name="adj" fmla="val 1798"/>
-            </a:avLst>
-          </a:prstGeom>
-          <a:solidFill>
-            <a:schemeClr val="bg1"/>
-          </a:solidFill>
-          <a:ln w="12700">
-            <a:solidFill>
-              <a:schemeClr val="accent6"/>
-            </a:solidFill>
-            <a:prstDash val="solid"/>
-          </a:ln>
-        </p:spPr>
-      </p:sp>
-      <p:pic>
-        <p:nvPicPr>
-          <p:cNvPr id="6" name="Image 0" descr="Secuencia de lectura con MISS: la API consulta Redis, no encuentra la llave, lee de PostgreSQL, normaliza y guarda con TTL">    </p:cNvPr>
-          <p:cNvPicPr>
-            <a:picLocks noChangeAspect="1"/>
-          </p:cNvPicPr>
-          <p:nvPr/>
-        </p:nvPicPr>
-        <p:blipFill>
-          <a:blip r:embed="rId1"/>
-          <a:stretch>
-            <a:fillRect/>
-          </a:stretch>
-        </p:blipFill>
-        <p:spPr>
-          <a:xfrm>
-            <a:off x="658368" y="1637590"/>
-            <a:ext cx="5144872" cy="3537099"/>
-          </a:xfrm>
-          <a:prstGeom prst="rect">
-            <a:avLst/>
-          </a:prstGeom>
-        </p:spPr>
-      </p:pic>
-      <p:sp>
-        <p:nvSpPr>
-          <p:cNvPr id="7" name="Text 4"/>
-          <p:cNvSpPr txBox="1"/>
-          <p:nvPr/>
-        </p:nvSpPr>
-        <p:spPr>
-          <a:xfrm>
-            <a:off x="548640" y="5577840"/>
-            <a:ext cx="5364328" cy="457200"/>
-          </a:xfrm>
-          <a:prstGeom prst="rect">
-            <a:avLst/>
-          </a:prstGeom>
-          <a:noFill/>
-          <a:ln/>
-        </p:spPr>
-        <p:txBody>
-          <a:bodyPr wrap="square" lIns="0" tIns="0" rIns="0" bIns="0" rtlCol="0" anchor="t"/>
-          <a:lstStyle/>
-          <a:p>
-            <a:pPr indent="0" marL="0">
-              <a:buNone/>
-            </a:pPr>
-            <a:r>
-              <a:rPr lang="en-US" sz="1600" b="1" dirty="0">
-                <a:solidFill>
-                  <a:schemeClr val="tx2"/>
-                </a:solidFill>
-                <a:latin typeface="Arial" pitchFamily="34" charset="0"/>
-                <a:ea typeface="Arial" pitchFamily="34" charset="-122"/>
-                <a:cs typeface="Arial" pitchFamily="34" charset="-120"/>
-              </a:rPr>
-              <a:t>MISS:</a:t>
-            </a:r>
-            <a:pPr indent="0" marL="0">
-              <a:buNone/>
-            </a:pPr>
-            <a:r>
-              <a:rPr lang="en-US" sz="1600" dirty="0">
-                <a:solidFill>
-                  <a:schemeClr val="tx2"/>
-                </a:solidFill>
-                <a:latin typeface="Arial" pitchFamily="34" charset="0"/>
-                <a:ea typeface="Arial" pitchFamily="34" charset="-122"/>
-                <a:cs typeface="Arial" pitchFamily="34" charset="-120"/>
-              </a:rPr>
-              <a:t> Redis vacío → SELECT → normalizar() → SET con TTL.</a:t>
-            </a:r>
-            <a:endParaRPr lang="en-US" sz="1600" dirty="0"/>
-          </a:p>
-        </p:txBody>
-      </p:sp>
-      <p:sp>
-        <p:nvSpPr>
-          <p:cNvPr id="8" name="Shape 5"/>
-          <p:cNvSpPr/>
-          <p:nvPr/>
-        </p:nvSpPr>
-        <p:spPr>
-          <a:xfrm>
-            <a:off x="6278728" y="1371600"/>
-            <a:ext cx="5364328" cy="4069080"/>
-          </a:xfrm>
-          <a:prstGeom prst="roundRect">
-            <a:avLst>
-              <a:gd name="adj" fmla="val 1798"/>
-            </a:avLst>
-          </a:prstGeom>
-          <a:solidFill>
-            <a:schemeClr val="bg1"/>
-          </a:solidFill>
-          <a:ln w="12700">
-            <a:solidFill>
-              <a:schemeClr val="accent6"/>
-            </a:solidFill>
-            <a:prstDash val="solid"/>
-          </a:ln>
-        </p:spPr>
-      </p:sp>
-      <p:pic>
-        <p:nvPicPr>
-          <p:cNvPr id="9" name="Image 1" descr="Secuencia de lectura con HIT: la API encuentra la llave en Redis y responde sin consultar PostgreSQL">    </p:cNvPr>
-          <p:cNvPicPr>
-            <a:picLocks noChangeAspect="1"/>
-          </p:cNvPicPr>
-          <p:nvPr/>
-        </p:nvPicPr>
-        <p:blipFill>
-          <a:blip r:embed="rId2"/>
-          <a:stretch>
-            <a:fillRect/>
-          </a:stretch>
-        </p:blipFill>
-        <p:spPr>
-          <a:xfrm>
-            <a:off x="6388456" y="2184797"/>
-            <a:ext cx="5144872" cy="2442686"/>
-          </a:xfrm>
-          <a:prstGeom prst="rect">
-            <a:avLst/>
-          </a:prstGeom>
-        </p:spPr>
-      </p:pic>
-      <p:sp>
-        <p:nvSpPr>
-          <p:cNvPr id="10" name="Text 6"/>
-          <p:cNvSpPr txBox="1"/>
-          <p:nvPr/>
-        </p:nvSpPr>
-        <p:spPr>
-          <a:xfrm>
-            <a:off x="6278728" y="5577840"/>
-            <a:ext cx="5364328" cy="457200"/>
-          </a:xfrm>
-          <a:prstGeom prst="rect">
-            <a:avLst/>
-          </a:prstGeom>
-          <a:noFill/>
-          <a:ln/>
-        </p:spPr>
-        <p:txBody>
-          <a:bodyPr wrap="square" lIns="0" tIns="0" rIns="0" bIns="0" rtlCol="0" anchor="t"/>
-          <a:lstStyle/>
-          <a:p>
-            <a:pPr indent="0" marL="0">
-              <a:buNone/>
-            </a:pPr>
-            <a:r>
-              <a:rPr lang="en-US" sz="1600" b="1" dirty="0">
-                <a:solidFill>
-                  <a:schemeClr val="tx2"/>
-                </a:solidFill>
-                <a:latin typeface="Arial" pitchFamily="34" charset="0"/>
-                <a:ea typeface="Arial" pitchFamily="34" charset="-122"/>
-                <a:cs typeface="Arial" pitchFamily="34" charset="-120"/>
-              </a:rPr>
-              <a:t>HIT:</a:t>
-            </a:r>
-            <a:pPr indent="0" marL="0">
-              <a:buNone/>
-            </a:pPr>
-            <a:r>
-              <a:rPr lang="en-US" sz="1600" dirty="0">
-                <a:solidFill>
-                  <a:schemeClr val="tx2"/>
-                </a:solidFill>
-                <a:latin typeface="Arial" pitchFamily="34" charset="0"/>
-                <a:ea typeface="Arial" pitchFamily="34" charset="-122"/>
-                <a:cs typeface="Arial" pitchFamily="34" charset="-120"/>
-              </a:rPr>
-              <a:t> responde Redis; PostgreSQL no se consulta.</a:t>
-            </a:r>
-            <a:endParaRPr lang="en-US" sz="1600" dirty="0"/>
-          </a:p>
-        </p:txBody>
-      </p:sp>
-    </p:spTree>
-  </p:cSld>
-  <p:clrMapOvr>
-    <a:masterClrMapping/>
-  </p:clrMapOvr>
-</p:sld>
-</file>
-
-<file path=ppt/slides/slide5.xml><?xml version="1.0" encoding="utf-8"?>
-<p:sld xmlns:a="http://schemas.openxmlformats.org/drawingml/2006/main" xmlns:r="http://schemas.openxmlformats.org/officeDocument/2006/relationships" xmlns:p="http://schemas.openxmlformats.org/presentationml/2006/main">
-  <p:cSld name="Slide 5">
-    <p:spTree>
-      <p:nvGrpSpPr>
-        <p:cNvPr id="1" name=""/>
-        <p:cNvGrpSpPr/>
-        <p:nvPr/>
-      </p:nvGrpSpPr>
-      <p:grpSpPr>
-        <a:xfrm>
-          <a:off x="0" y="0"/>
-          <a:ext cx="0" cy="0"/>
-          <a:chOff x="0" y="0"/>
-          <a:chExt cx="0" cy="0"/>
-        </a:xfrm>
-      </p:grpSpPr>
-      <p:sp>
-        <p:nvSpPr>
-          <p:cNvPr id="2" name="Text 0"/>
-          <p:cNvSpPr/>
-          <p:nvPr>
-            <p:ph idx="100" type="title" hasCustomPrompt="1"/>
-          </p:nvPr>
-        </p:nvSpPr>
-        <p:spPr>
-          <a:xfrm>
-            <a:off x="548640" y="411480"/>
-            <a:ext cx="11094415" cy="685800"/>
-          </a:xfrm>
-          <a:prstGeom prst="rect">
-            <a:avLst/>
-          </a:prstGeom>
-          <a:noFill/>
-          <a:ln/>
-        </p:spPr>
-        <p:txBody>
-          <a:bodyPr wrap="square" lIns="0" tIns="0" rIns="0" bIns="0" rtlCol="0" anchor="ctr"/>
-          <a:lstStyle/>
-          <a:p>
-            <a:pPr algn="l" indent="0" marL="0">
-              <a:buNone/>
-            </a:pPr>
-            <a:r>
-              <a:rPr lang="en-US" sz="3600" b="1" dirty="0">
-                <a:solidFill>
-                  <a:schemeClr val="tx1"/>
-                </a:solidFill>
-              </a:rPr>
-              <a:t>Escritura con invalidación y Redis caído</a:t>
-            </a:r>
-            <a:endParaRPr lang="en-US" sz="3600" dirty="0"/>
-          </a:p>
-        </p:txBody>
-      </p:sp>
-      <p:sp>
-        <p:nvSpPr>
-          <p:cNvPr id="3" name="Text 0"/>
-          <p:cNvSpPr/>
-          <p:nvPr>
-            <p:ph idx="101" type="body" hasCustomPrompt="1"/>
-          </p:nvPr>
-        </p:nvSpPr>
-        <p:spPr>
-          <a:xfrm>
-            <a:off x="548640" y="6355080"/>
-            <a:ext cx="6858000" cy="274320"/>
-          </a:xfrm>
-          <a:prstGeom prst="rect">
-            <a:avLst/>
-          </a:prstGeom>
-          <a:noFill/>
-          <a:ln/>
-        </p:spPr>
-        <p:txBody>
-          <a:bodyPr wrap="square" lIns="0" tIns="0" rIns="0" bIns="0" rtlCol="0" anchor="ctr"/>
-          <a:lstStyle/>
-          <a:p>
-            <a:pPr indent="0" marL="0">
-              <a:buNone/>
-            </a:pPr>
-            <a:r>
-              <a:rPr lang="en-US" sz="1100" dirty="0">
-                <a:solidFill>
-                  <a:schemeClr val="accent4"/>
-                </a:solidFill>
-              </a:rPr>
-              <a:t>1 · Sebastian · Arquitectura y flujo exitoso</a:t>
-            </a:r>
-            <a:endParaRPr lang="en-US" sz="1100" dirty="0"/>
-          </a:p>
-        </p:txBody>
-      </p:sp>
-      <p:sp>
-        <p:nvSpPr>
-          <p:cNvPr id="4" name="Text 0"/>
-          <p:cNvSpPr/>
-          <p:nvPr>
-            <p:ph idx="102" type="body" hasCustomPrompt="1"/>
-          </p:nvPr>
-        </p:nvSpPr>
-        <p:spPr>
-          <a:xfrm>
-            <a:off x="7589520" y="6355080"/>
-            <a:ext cx="4053535" cy="274320"/>
-          </a:xfrm>
-          <a:prstGeom prst="rect">
-            <a:avLst/>
-          </a:prstGeom>
-          <a:noFill/>
-          <a:ln/>
-        </p:spPr>
-        <p:txBody>
-          <a:bodyPr wrap="square" lIns="0" tIns="0" rIns="0" bIns="0" rtlCol="0" anchor="ctr"/>
-          <a:lstStyle/>
-          <a:p>
-            <a:pPr algn="r" indent="0" marL="0">
-              <a:buNone/>
-            </a:pPr>
-            <a:r>
-              <a:rPr lang="en-US" sz="1100" dirty="0">
-                <a:solidFill>
-                  <a:schemeClr val="accent4"/>
-                </a:solidFill>
-              </a:rPr>
-              <a:t>docs/arquitectura/04 y 05</a:t>
-            </a:r>
-            <a:endParaRPr lang="en-US" sz="1100" dirty="0"/>
-          </a:p>
-        </p:txBody>
-      </p:sp>
-      <p:sp>
-        <p:nvSpPr>
-          <p:cNvPr id="5" name="Shape 3"/>
-          <p:cNvSpPr/>
-          <p:nvPr/>
-        </p:nvSpPr>
-        <p:spPr>
-          <a:xfrm>
-            <a:off x="548640" y="1371600"/>
-            <a:ext cx="5364328" cy="4069080"/>
-          </a:xfrm>
-          <a:prstGeom prst="roundRect">
-            <a:avLst>
-              <a:gd name="adj" fmla="val 1798"/>
-            </a:avLst>
-          </a:prstGeom>
-          <a:solidFill>
-            <a:schemeClr val="bg1"/>
-          </a:solidFill>
-          <a:ln w="12700">
-            <a:solidFill>
-              <a:schemeClr val="accent6"/>
-            </a:solidFill>
-            <a:prstDash val="solid"/>
-          </a:ln>
-        </p:spPr>
-      </p:sp>
-      <p:pic>
-        <p:nvPicPr>
-          <p:cNvPr id="6" name="Image 0" descr="Secuencia de escritura: PUT, UPDATE en PostgreSQL, DEL de la llave en Redis y lectura posterior con MISS y el valor nuevo">    </p:cNvPr>
-          <p:cNvPicPr>
-            <a:picLocks noChangeAspect="1"/>
-          </p:cNvPicPr>
-          <p:nvPr/>
-        </p:nvPicPr>
-        <p:blipFill>
-          <a:blip r:embed="rId1"/>
-          <a:stretch>
-            <a:fillRect/>
-          </a:stretch>
-        </p:blipFill>
-        <p:spPr>
-          <a:xfrm>
-            <a:off x="911876" y="1481328"/>
-            <a:ext cx="4637856" cy="3849624"/>
-          </a:xfrm>
-          <a:prstGeom prst="rect">
-            <a:avLst/>
-          </a:prstGeom>
-        </p:spPr>
-      </p:pic>
-      <p:sp>
-        <p:nvSpPr>
-          <p:cNvPr id="7" name="Text 4"/>
-          <p:cNvSpPr txBox="1"/>
-          <p:nvPr/>
-        </p:nvSpPr>
-        <p:spPr>
-          <a:xfrm>
-            <a:off x="548640" y="5577840"/>
-            <a:ext cx="5364328" cy="457200"/>
-          </a:xfrm>
-          <a:prstGeom prst="rect">
-            <a:avLst/>
-          </a:prstGeom>
-          <a:noFill/>
-          <a:ln/>
-        </p:spPr>
-        <p:txBody>
-          <a:bodyPr wrap="square" lIns="0" tIns="0" rIns="0" bIns="0" rtlCol="0" anchor="t"/>
-          <a:lstStyle/>
-          <a:p>
-            <a:pPr indent="0" marL="0">
-              <a:buNone/>
-            </a:pPr>
-            <a:r>
-              <a:rPr lang="en-US" sz="1600" b="1" dirty="0">
-                <a:solidFill>
-                  <a:schemeClr val="tx2"/>
-                </a:solidFill>
-                <a:latin typeface="Arial" pitchFamily="34" charset="0"/>
-                <a:ea typeface="Arial" pitchFamily="34" charset="-122"/>
-                <a:cs typeface="Arial" pitchFamily="34" charset="-120"/>
-              </a:rPr>
-              <a:t>PUT:</a:t>
-            </a:r>
-            <a:pPr indent="0" marL="0">
-              <a:buNone/>
-            </a:pPr>
-            <a:r>
-              <a:rPr lang="en-US" sz="1600" dirty="0">
-                <a:solidFill>
-                  <a:schemeClr val="tx2"/>
-                </a:solidFill>
-                <a:latin typeface="Arial" pitchFamily="34" charset="0"/>
-                <a:ea typeface="Arial" pitchFamily="34" charset="-122"/>
-                <a:cs typeface="Arial" pitchFamily="34" charset="-120"/>
-              </a:rPr>
-              <a:t> UPDATE en la BD, luego DEL producto:{id}.</a:t>
-            </a:r>
-            <a:endParaRPr lang="en-US" sz="1600" dirty="0"/>
-          </a:p>
-        </p:txBody>
-      </p:sp>
-      <p:sp>
-        <p:nvSpPr>
-          <p:cNvPr id="8" name="Shape 5"/>
-          <p:cNvSpPr/>
-          <p:nvPr/>
-        </p:nvSpPr>
-        <p:spPr>
-          <a:xfrm>
-            <a:off x="6278728" y="1371600"/>
-            <a:ext cx="5364328" cy="4069080"/>
-          </a:xfrm>
-          <a:prstGeom prst="roundRect">
-            <a:avLst>
-              <a:gd name="adj" fmla="val 1798"/>
-            </a:avLst>
-          </a:prstGeom>
-          <a:solidFill>
-            <a:schemeClr val="bg1"/>
-          </a:solidFill>
-          <a:ln w="12700">
-            <a:solidFill>
-              <a:schemeClr val="accent6"/>
-            </a:solidFill>
-            <a:prstDash val="solid"/>
-          </a:ln>
-        </p:spPr>
-      </p:sp>
-      <p:pic>
-        <p:nvPicPr>
-          <p:cNvPr id="9" name="Image 1" descr="Secuencia con Redis caído: la consulta a Redis falla, la API lee de PostgreSQL y responde con X-Cache BYPASS">    </p:cNvPr>
-          <p:cNvPicPr>
-            <a:picLocks noChangeAspect="1"/>
-          </p:cNvPicPr>
-          <p:nvPr/>
-        </p:nvPicPr>
-        <p:blipFill>
-          <a:blip r:embed="rId2"/>
-          <a:stretch>
-            <a:fillRect/>
-          </a:stretch>
-        </p:blipFill>
-        <p:spPr>
-          <a:xfrm>
-            <a:off x="6388456" y="1772982"/>
-            <a:ext cx="5144872" cy="3266317"/>
-          </a:xfrm>
-          <a:prstGeom prst="rect">
-            <a:avLst/>
-          </a:prstGeom>
-        </p:spPr>
-      </p:pic>
-      <p:sp>
-        <p:nvSpPr>
-          <p:cNvPr id="10" name="Text 6"/>
-          <p:cNvSpPr txBox="1"/>
-          <p:nvPr/>
-        </p:nvSpPr>
-        <p:spPr>
-          <a:xfrm>
-            <a:off x="6278728" y="5577840"/>
-            <a:ext cx="5364328" cy="457200"/>
-          </a:xfrm>
-          <a:prstGeom prst="rect">
-            <a:avLst/>
-          </a:prstGeom>
-          <a:noFill/>
-          <a:ln/>
-        </p:spPr>
-        <p:txBody>
-          <a:bodyPr wrap="square" lIns="0" tIns="0" rIns="0" bIns="0" rtlCol="0" anchor="t"/>
-          <a:lstStyle/>
-          <a:p>
-            <a:pPr indent="0" marL="0">
-              <a:buNone/>
-            </a:pPr>
-            <a:r>
-              <a:rPr lang="en-US" sz="1600" b="1" dirty="0">
-                <a:solidFill>
-                  <a:schemeClr val="tx2"/>
-                </a:solidFill>
-                <a:latin typeface="Arial" pitchFamily="34" charset="0"/>
-                <a:ea typeface="Arial" pitchFamily="34" charset="-122"/>
-                <a:cs typeface="Arial" pitchFamily="34" charset="-120"/>
-              </a:rPr>
-              <a:t>Redis caído:</a:t>
-            </a:r>
-            <a:pPr indent="0" marL="0">
-              <a:buNone/>
-            </a:pPr>
-            <a:r>
-              <a:rPr lang="en-US" sz="1600" dirty="0">
-                <a:solidFill>
-                  <a:schemeClr val="tx2"/>
-                </a:solidFill>
-                <a:latin typeface="Arial" pitchFamily="34" charset="0"/>
-                <a:ea typeface="Arial" pitchFamily="34" charset="-122"/>
-                <a:cs typeface="Arial" pitchFamily="34" charset="-120"/>
-              </a:rPr>
-              <a:t> falla en ≤ 500 ms → SELECT → BYPASS.</a:t>
-            </a:r>
-            <a:endParaRPr lang="en-US" sz="1600" dirty="0"/>
-          </a:p>
-        </p:txBody>
-      </p:sp>
-    </p:spTree>
-  </p:cSld>
-  <p:clrMapOvr>
-    <a:masterClrMapping/>
-  </p:clrMapOvr>
-</p:sld>
-</file>
-
-<file path=ppt/slides/slide6.xml><?xml version="1.0" encoding="utf-8"?>
 <p:sld xmlns:a="http://schemas.openxmlformats.org/drawingml/2006/main" xmlns:r="http://schemas.openxmlformats.org/officeDocument/2006/relationships" xmlns:p="http://schemas.openxmlformats.org/presentationml/2006/main">
   <p:cSld name="Slide 6">
     <p:spTree>
@@ -15520,7 +12203,7 @@
 </p:sld>
 </file>
 
-<file path=ppt/slides/slide7.xml><?xml version="1.0" encoding="utf-8"?>
+<file path=ppt/slides/slide5.xml><?xml version="1.0" encoding="utf-8"?>
 <p:sld xmlns:a="http://schemas.openxmlformats.org/drawingml/2006/main" xmlns:r="http://schemas.openxmlformats.org/officeDocument/2006/relationships" xmlns:p="http://schemas.openxmlformats.org/presentationml/2006/main">
   <p:cSld name="Slide 7">
     <p:spTree>
@@ -16392,7 +13075,7 @@
 </p:sld>
 </file>
 
-<file path=ppt/slides/slide8.xml><?xml version="1.0" encoding="utf-8"?>
+<file path=ppt/slides/slide6.xml><?xml version="1.0" encoding="utf-8"?>
 <p:sld xmlns:a="http://schemas.openxmlformats.org/drawingml/2006/main" xmlns:r="http://schemas.openxmlformats.org/officeDocument/2006/relationships" xmlns:p="http://schemas.openxmlformats.org/presentationml/2006/main">
   <p:cSld name="Slide 8">
     <p:spTree>
@@ -17167,7 +13850,7 @@
 </p:sld>
 </file>
 
-<file path=ppt/slides/slide9.xml><?xml version="1.0" encoding="utf-8"?>
+<file path=ppt/slides/slide7.xml><?xml version="1.0" encoding="utf-8"?>
 <p:sld xmlns:a="http://schemas.openxmlformats.org/drawingml/2006/main" xmlns:r="http://schemas.openxmlformats.org/officeDocument/2006/relationships" xmlns:p="http://schemas.openxmlformats.org/presentationml/2006/main">
   <p:cSld name="Slide 9">
     <p:spTree>
@@ -19522,6 +16205,1651 @@
           </a:graphicData>
         </a:graphic>
       </p:graphicFrame>
+    </p:spTree>
+  </p:cSld>
+  <p:clrMapOvr>
+    <a:masterClrMapping/>
+  </p:clrMapOvr>
+</p:sld>
+</file>
+
+<file path=ppt/slides/slide8.xml><?xml version="1.0" encoding="utf-8"?>
+<p:sld xmlns:a="http://schemas.openxmlformats.org/drawingml/2006/main" xmlns:r="http://schemas.openxmlformats.org/officeDocument/2006/relationships" xmlns:p="http://schemas.openxmlformats.org/presentationml/2006/main">
+  <p:cSld name="Slide 10">
+    <p:spTree>
+      <p:nvGrpSpPr>
+        <p:cNvPr id="1" name=""/>
+        <p:cNvGrpSpPr/>
+        <p:nvPr/>
+      </p:nvGrpSpPr>
+      <p:grpSpPr>
+        <a:xfrm>
+          <a:off x="0" y="0"/>
+          <a:ext cx="0" cy="0"/>
+          <a:chOff x="0" y="0"/>
+          <a:chExt cx="0" cy="0"/>
+        </a:xfrm>
+      </p:grpSpPr>
+      <p:sp>
+        <p:nvSpPr>
+          <p:cNvPr id="2" name="Text 0"/>
+          <p:cNvSpPr/>
+          <p:nvPr>
+            <p:ph idx="100" type="title" hasCustomPrompt="1"/>
+          </p:nvPr>
+        </p:nvSpPr>
+        <p:spPr>
+          <a:xfrm>
+            <a:off x="548640" y="411480"/>
+            <a:ext cx="11094415" cy="685800"/>
+          </a:xfrm>
+          <a:prstGeom prst="rect">
+            <a:avLst/>
+          </a:prstGeom>
+          <a:noFill/>
+          <a:ln/>
+        </p:spPr>
+        <p:txBody>
+          <a:bodyPr wrap="square" lIns="0" tIns="0" rIns="0" bIns="0" rtlCol="0" anchor="ctr"/>
+          <a:lstStyle/>
+          <a:p>
+            <a:pPr algn="l" indent="0" marL="0">
+              <a:buNone/>
+            </a:pPr>
+            <a:r>
+              <a:rPr lang="en-US" sz="3600" b="1" dirty="0">
+                <a:solidFill>
+                  <a:schemeClr val="bg1"/>
+                </a:solidFill>
+              </a:rPr>
+              <a:t>Demo: provocamos las fallas en vivo</a:t>
+            </a:r>
+            <a:endParaRPr lang="en-US" sz="3600" dirty="0"/>
+          </a:p>
+        </p:txBody>
+      </p:sp>
+      <p:sp>
+        <p:nvSpPr>
+          <p:cNvPr id="3" name="Text 0"/>
+          <p:cNvSpPr/>
+          <p:nvPr>
+            <p:ph idx="101" type="body" hasCustomPrompt="1"/>
+          </p:nvPr>
+        </p:nvSpPr>
+        <p:spPr>
+          <a:xfrm>
+            <a:off x="548640" y="6355080"/>
+            <a:ext cx="6858000" cy="274320"/>
+          </a:xfrm>
+          <a:prstGeom prst="rect">
+            <a:avLst/>
+          </a:prstGeom>
+          <a:noFill/>
+          <a:ln/>
+        </p:spPr>
+        <p:txBody>
+          <a:bodyPr wrap="square" lIns="0" tIns="0" rIns="0" bIns="0" rtlCol="0" anchor="ctr"/>
+          <a:lstStyle/>
+          <a:p>
+            <a:pPr indent="0" marL="0">
+              <a:buNone/>
+            </a:pPr>
+            <a:r>
+              <a:rPr lang="en-US" sz="1100" dirty="0">
+                <a:solidFill>
+                  <a:schemeClr val="accent6"/>
+                </a:solidFill>
+              </a:rPr>
+              <a:t>2 · Jhon Eduardo · Estrategia, fallas y hallazgo</a:t>
+            </a:r>
+            <a:endParaRPr lang="en-US" sz="1100" dirty="0"/>
+          </a:p>
+        </p:txBody>
+      </p:sp>
+      <p:sp>
+        <p:nvSpPr>
+          <p:cNvPr id="4" name="Text 0"/>
+          <p:cNvSpPr/>
+          <p:nvPr>
+            <p:ph idx="102" type="body" hasCustomPrompt="1"/>
+          </p:nvPr>
+        </p:nvSpPr>
+        <p:spPr>
+          <a:xfrm>
+            <a:off x="7589520" y="6355080"/>
+            <a:ext cx="4053535" cy="274320"/>
+          </a:xfrm>
+          <a:prstGeom prst="rect">
+            <a:avLst/>
+          </a:prstGeom>
+          <a:noFill/>
+          <a:ln/>
+        </p:spPr>
+        <p:txBody>
+          <a:bodyPr wrap="square" lIns="0" tIns="0" rIns="0" bIns="0" rtlCol="0" anchor="ctr"/>
+          <a:lstStyle/>
+          <a:p>
+            <a:pPr algn="r" indent="0" marL="0">
+              <a:buNone/>
+            </a:pPr>
+            <a:r>
+              <a:rPr lang="en-US" sz="1100" dirty="0">
+                <a:solidFill>
+                  <a:schemeClr val="accent6"/>
+                </a:solidFill>
+              </a:rPr>
+              <a:t>Demostración en vivo</a:t>
+            </a:r>
+            <a:endParaRPr lang="en-US" sz="1100" dirty="0"/>
+          </a:p>
+        </p:txBody>
+      </p:sp>
+      <p:sp>
+        <p:nvSpPr>
+          <p:cNvPr id="5" name="Shape 3"/>
+          <p:cNvSpPr/>
+          <p:nvPr/>
+        </p:nvSpPr>
+        <p:spPr>
+          <a:xfrm>
+            <a:off x="548640" y="1417320"/>
+            <a:ext cx="457200" cy="457200"/>
+          </a:xfrm>
+          <a:prstGeom prst="ellipse">
+            <a:avLst/>
+          </a:prstGeom>
+          <a:solidFill>
+            <a:schemeClr val="accent1"/>
+          </a:solidFill>
+          <a:ln/>
+        </p:spPr>
+      </p:sp>
+      <p:sp>
+        <p:nvSpPr>
+          <p:cNvPr id="6" name="Text 4"/>
+          <p:cNvSpPr txBox="1"/>
+          <p:nvPr/>
+        </p:nvSpPr>
+        <p:spPr>
+          <a:xfrm>
+            <a:off x="548640" y="1417320"/>
+            <a:ext cx="457200" cy="457200"/>
+          </a:xfrm>
+          <a:prstGeom prst="rect">
+            <a:avLst/>
+          </a:prstGeom>
+          <a:noFill/>
+          <a:ln/>
+        </p:spPr>
+        <p:txBody>
+          <a:bodyPr wrap="square" lIns="0" tIns="0" rIns="0" bIns="0" rtlCol="0" anchor="ctr"/>
+          <a:lstStyle/>
+          <a:p>
+            <a:pPr algn="ctr" indent="0" marL="0">
+              <a:buNone/>
+            </a:pPr>
+            <a:r>
+              <a:rPr lang="en-US" sz="1600" b="1" dirty="0">
+                <a:solidFill>
+                  <a:schemeClr val="tx1"/>
+                </a:solidFill>
+                <a:latin typeface="Arial" pitchFamily="34" charset="0"/>
+                <a:ea typeface="Arial" pitchFamily="34" charset="-122"/>
+                <a:cs typeface="Arial" pitchFamily="34" charset="-120"/>
+              </a:rPr>
+              <a:t>1</a:t>
+            </a:r>
+            <a:endParaRPr lang="en-US" sz="1600" dirty="0"/>
+          </a:p>
+        </p:txBody>
+      </p:sp>
+      <p:sp>
+        <p:nvSpPr>
+          <p:cNvPr id="7" name="Text 5"/>
+          <p:cNvSpPr txBox="1"/>
+          <p:nvPr/>
+        </p:nvSpPr>
+        <p:spPr>
+          <a:xfrm>
+            <a:off x="1234440" y="1435608"/>
+            <a:ext cx="6309360" cy="365760"/>
+          </a:xfrm>
+          <a:prstGeom prst="rect">
+            <a:avLst/>
+          </a:prstGeom>
+          <a:noFill/>
+          <a:ln/>
+        </p:spPr>
+        <p:txBody>
+          <a:bodyPr wrap="square" lIns="0" tIns="0" rIns="0" bIns="0" rtlCol="0" anchor="t"/>
+          <a:lstStyle/>
+          <a:p>
+            <a:pPr indent="0" marL="0">
+              <a:buNone/>
+            </a:pPr>
+            <a:r>
+              <a:rPr lang="en-US" sz="1600" b="1" dirty="0">
+                <a:solidFill>
+                  <a:schemeClr val="accent1"/>
+                </a:solidFill>
+                <a:latin typeface="Courier New" pitchFamily="34" charset="0"/>
+                <a:ea typeface="Courier New" pitchFamily="34" charset="-122"/>
+                <a:cs typeface="Courier New" pitchFamily="34" charset="-120"/>
+              </a:rPr>
+              <a:t>npm run demo:api</a:t>
+            </a:r>
+            <a:endParaRPr lang="en-US" sz="1600" dirty="0"/>
+          </a:p>
+        </p:txBody>
+      </p:sp>
+      <p:sp>
+        <p:nvSpPr>
+          <p:cNvPr id="8" name="Text 6"/>
+          <p:cNvSpPr txBox="1"/>
+          <p:nvPr/>
+        </p:nvSpPr>
+        <p:spPr>
+          <a:xfrm>
+            <a:off x="1234440" y="1828800"/>
+            <a:ext cx="6309360" cy="1036320"/>
+          </a:xfrm>
+          <a:prstGeom prst="rect">
+            <a:avLst/>
+          </a:prstGeom>
+          <a:noFill/>
+          <a:ln/>
+        </p:spPr>
+        <p:txBody>
+          <a:bodyPr wrap="square" lIns="0" tIns="0" rIns="0" bIns="0" rtlCol="0" anchor="t"/>
+          <a:lstStyle/>
+          <a:p>
+            <a:pPr indent="0" marL="0">
+              <a:buNone/>
+            </a:pPr>
+            <a:r>
+              <a:rPr lang="en-US" sz="1500" dirty="0">
+                <a:solidFill>
+                  <a:schemeClr val="accent6"/>
+                </a:solidFill>
+                <a:latin typeface="Arial" pitchFamily="34" charset="0"/>
+                <a:ea typeface="Arial" pitchFamily="34" charset="-122"/>
+                <a:cs typeface="Arial" pitchFamily="34" charset="-120"/>
+              </a:rPr>
+              <a:t>Se reinicia la API con TTL de 20 s (en el laboratorio es 60) para ver CP-06 completo. Su log queda a la vista.</a:t>
+            </a:r>
+            <a:endParaRPr lang="en-US" sz="1500" dirty="0"/>
+          </a:p>
+        </p:txBody>
+      </p:sp>
+      <p:sp>
+        <p:nvSpPr>
+          <p:cNvPr id="9" name="Shape 7"/>
+          <p:cNvSpPr/>
+          <p:nvPr/>
+        </p:nvSpPr>
+        <p:spPr>
+          <a:xfrm>
+            <a:off x="548640" y="2910840"/>
+            <a:ext cx="457200" cy="457200"/>
+          </a:xfrm>
+          <a:prstGeom prst="ellipse">
+            <a:avLst/>
+          </a:prstGeom>
+          <a:solidFill>
+            <a:schemeClr val="accent1"/>
+          </a:solidFill>
+          <a:ln/>
+        </p:spPr>
+      </p:sp>
+      <p:sp>
+        <p:nvSpPr>
+          <p:cNvPr id="10" name="Text 8"/>
+          <p:cNvSpPr txBox="1"/>
+          <p:nvPr/>
+        </p:nvSpPr>
+        <p:spPr>
+          <a:xfrm>
+            <a:off x="548640" y="2910840"/>
+            <a:ext cx="457200" cy="457200"/>
+          </a:xfrm>
+          <a:prstGeom prst="rect">
+            <a:avLst/>
+          </a:prstGeom>
+          <a:noFill/>
+          <a:ln/>
+        </p:spPr>
+        <p:txBody>
+          <a:bodyPr wrap="square" lIns="0" tIns="0" rIns="0" bIns="0" rtlCol="0" anchor="ctr"/>
+          <a:lstStyle/>
+          <a:p>
+            <a:pPr algn="ctr" indent="0" marL="0">
+              <a:buNone/>
+            </a:pPr>
+            <a:r>
+              <a:rPr lang="en-US" sz="1600" b="1" dirty="0">
+                <a:solidFill>
+                  <a:schemeClr val="tx1"/>
+                </a:solidFill>
+                <a:latin typeface="Arial" pitchFamily="34" charset="0"/>
+                <a:ea typeface="Arial" pitchFamily="34" charset="-122"/>
+                <a:cs typeface="Arial" pitchFamily="34" charset="-120"/>
+              </a:rPr>
+              <a:t>2</a:t>
+            </a:r>
+            <a:endParaRPr lang="en-US" sz="1600" dirty="0"/>
+          </a:p>
+        </p:txBody>
+      </p:sp>
+      <p:sp>
+        <p:nvSpPr>
+          <p:cNvPr id="11" name="Text 9"/>
+          <p:cNvSpPr txBox="1"/>
+          <p:nvPr/>
+        </p:nvSpPr>
+        <p:spPr>
+          <a:xfrm>
+            <a:off x="1234440" y="2929128"/>
+            <a:ext cx="6309360" cy="365760"/>
+          </a:xfrm>
+          <a:prstGeom prst="rect">
+            <a:avLst/>
+          </a:prstGeom>
+          <a:noFill/>
+          <a:ln/>
+        </p:spPr>
+        <p:txBody>
+          <a:bodyPr wrap="square" lIns="0" tIns="0" rIns="0" bIns="0" rtlCol="0" anchor="t"/>
+          <a:lstStyle/>
+          <a:p>
+            <a:pPr indent="0" marL="0">
+              <a:buNone/>
+            </a:pPr>
+            <a:r>
+              <a:rPr lang="en-US" sz="1600" b="1" dirty="0">
+                <a:solidFill>
+                  <a:schemeClr val="accent1"/>
+                </a:solidFill>
+                <a:latin typeface="Courier New" pitchFamily="34" charset="0"/>
+                <a:ea typeface="Courier New" pitchFamily="34" charset="-122"/>
+                <a:cs typeface="Courier New" pitchFamily="34" charset="-120"/>
+              </a:rPr>
+              <a:t>npm run demo:cp-08</a:t>
+            </a:r>
+            <a:endParaRPr lang="en-US" sz="1600" dirty="0"/>
+          </a:p>
+        </p:txBody>
+      </p:sp>
+      <p:sp>
+        <p:nvSpPr>
+          <p:cNvPr id="12" name="Text 10"/>
+          <p:cNvSpPr txBox="1"/>
+          <p:nvPr/>
+        </p:nvSpPr>
+        <p:spPr>
+          <a:xfrm>
+            <a:off x="1234440" y="3322320"/>
+            <a:ext cx="6309360" cy="1036320"/>
+          </a:xfrm>
+          <a:prstGeom prst="rect">
+            <a:avLst/>
+          </a:prstGeom>
+          <a:noFill/>
+          <a:ln/>
+        </p:spPr>
+        <p:txBody>
+          <a:bodyPr wrap="square" lIns="0" tIns="0" rIns="0" bIns="0" rtlCol="0" anchor="t"/>
+          <a:lstStyle/>
+          <a:p>
+            <a:pPr indent="0" marL="0">
+              <a:buNone/>
+            </a:pPr>
+            <a:r>
+              <a:rPr lang="en-US" sz="1500" dirty="0">
+                <a:solidFill>
+                  <a:schemeClr val="accent6"/>
+                </a:solidFill>
+                <a:latin typeface="Arial" pitchFamily="34" charset="0"/>
+                <a:ea typeface="Arial" pitchFamily="34" charset="-122"/>
+                <a:cs typeface="Arial" pitchFamily="34" charset="-120"/>
+              </a:rPr>
+              <a:t>docker stop lab-cache-redis → 200 con BYPASS y /health degraded. docker start → Redis vuelve vacío: MISS y luego HIT.</a:t>
+            </a:r>
+            <a:endParaRPr lang="en-US" sz="1500" dirty="0"/>
+          </a:p>
+        </p:txBody>
+      </p:sp>
+      <p:sp>
+        <p:nvSpPr>
+          <p:cNvPr id="13" name="Shape 11"/>
+          <p:cNvSpPr/>
+          <p:nvPr/>
+        </p:nvSpPr>
+        <p:spPr>
+          <a:xfrm>
+            <a:off x="548640" y="4404360"/>
+            <a:ext cx="457200" cy="457200"/>
+          </a:xfrm>
+          <a:prstGeom prst="ellipse">
+            <a:avLst/>
+          </a:prstGeom>
+          <a:solidFill>
+            <a:schemeClr val="accent1"/>
+          </a:solidFill>
+          <a:ln/>
+        </p:spPr>
+      </p:sp>
+      <p:sp>
+        <p:nvSpPr>
+          <p:cNvPr id="14" name="Text 12"/>
+          <p:cNvSpPr txBox="1"/>
+          <p:nvPr/>
+        </p:nvSpPr>
+        <p:spPr>
+          <a:xfrm>
+            <a:off x="548640" y="4404360"/>
+            <a:ext cx="457200" cy="457200"/>
+          </a:xfrm>
+          <a:prstGeom prst="rect">
+            <a:avLst/>
+          </a:prstGeom>
+          <a:noFill/>
+          <a:ln/>
+        </p:spPr>
+        <p:txBody>
+          <a:bodyPr wrap="square" lIns="0" tIns="0" rIns="0" bIns="0" rtlCol="0" anchor="ctr"/>
+          <a:lstStyle/>
+          <a:p>
+            <a:pPr algn="ctr" indent="0" marL="0">
+              <a:buNone/>
+            </a:pPr>
+            <a:r>
+              <a:rPr lang="en-US" sz="1600" b="1" dirty="0">
+                <a:solidFill>
+                  <a:schemeClr val="tx1"/>
+                </a:solidFill>
+                <a:latin typeface="Arial" pitchFamily="34" charset="0"/>
+                <a:ea typeface="Arial" pitchFamily="34" charset="-122"/>
+                <a:cs typeface="Arial" pitchFamily="34" charset="-120"/>
+              </a:rPr>
+              <a:t>3</a:t>
+            </a:r>
+            <a:endParaRPr lang="en-US" sz="1600" dirty="0"/>
+          </a:p>
+        </p:txBody>
+      </p:sp>
+      <p:sp>
+        <p:nvSpPr>
+          <p:cNvPr id="15" name="Text 13"/>
+          <p:cNvSpPr txBox="1"/>
+          <p:nvPr/>
+        </p:nvSpPr>
+        <p:spPr>
+          <a:xfrm>
+            <a:off x="1234440" y="4422648"/>
+            <a:ext cx="6309360" cy="365760"/>
+          </a:xfrm>
+          <a:prstGeom prst="rect">
+            <a:avLst/>
+          </a:prstGeom>
+          <a:noFill/>
+          <a:ln/>
+        </p:spPr>
+        <p:txBody>
+          <a:bodyPr wrap="square" lIns="0" tIns="0" rIns="0" bIns="0" rtlCol="0" anchor="t"/>
+          <a:lstStyle/>
+          <a:p>
+            <a:pPr indent="0" marL="0">
+              <a:buNone/>
+            </a:pPr>
+            <a:r>
+              <a:rPr lang="en-US" sz="1600" b="1" dirty="0">
+                <a:solidFill>
+                  <a:schemeClr val="accent1"/>
+                </a:solidFill>
+                <a:latin typeface="Courier New" pitchFamily="34" charset="0"/>
+                <a:ea typeface="Courier New" pitchFamily="34" charset="-122"/>
+                <a:cs typeface="Courier New" pitchFamily="34" charset="-120"/>
+              </a:rPr>
+              <a:t>npm run demo:cp-06</a:t>
+            </a:r>
+            <a:endParaRPr lang="en-US" sz="1600" dirty="0"/>
+          </a:p>
+        </p:txBody>
+      </p:sp>
+      <p:sp>
+        <p:nvSpPr>
+          <p:cNvPr id="16" name="Text 14"/>
+          <p:cNvSpPr txBox="1"/>
+          <p:nvPr/>
+        </p:nvSpPr>
+        <p:spPr>
+          <a:xfrm>
+            <a:off x="1234440" y="4815840"/>
+            <a:ext cx="6309360" cy="1036320"/>
+          </a:xfrm>
+          <a:prstGeom prst="rect">
+            <a:avLst/>
+          </a:prstGeom>
+          <a:noFill/>
+          <a:ln/>
+        </p:spPr>
+        <p:txBody>
+          <a:bodyPr wrap="square" lIns="0" tIns="0" rIns="0" bIns="0" rtlCol="0" anchor="t"/>
+          <a:lstStyle/>
+          <a:p>
+            <a:pPr indent="0" marL="0">
+              <a:buNone/>
+            </a:pPr>
+            <a:r>
+              <a:rPr lang="en-US" sz="1500" dirty="0">
+                <a:solidFill>
+                  <a:schemeClr val="accent6"/>
+                </a:solidFill>
+                <a:latin typeface="Arial" pitchFamily="34" charset="0"/>
+                <a:ea typeface="Arial" pitchFamily="34" charset="-122"/>
+                <a:cs typeface="Arial" pitchFamily="34" charset="-120"/>
+              </a:rPr>
+              <a:t>UPDATE directo con psql → la API responde 99000 (HIT) con 104000 en la BD. Vence el TTL → MISS con 104000.</a:t>
+            </a:r>
+            <a:endParaRPr lang="en-US" sz="1500" dirty="0"/>
+          </a:p>
+        </p:txBody>
+      </p:sp>
+      <p:sp>
+        <p:nvSpPr>
+          <p:cNvPr id="17" name="Shape 15"/>
+          <p:cNvSpPr/>
+          <p:nvPr/>
+        </p:nvSpPr>
+        <p:spPr>
+          <a:xfrm>
+            <a:off x="7909560" y="1417320"/>
+            <a:ext cx="3733495" cy="4480560"/>
+          </a:xfrm>
+          <a:prstGeom prst="roundRect">
+            <a:avLst>
+              <a:gd name="adj" fmla="val 2449"/>
+            </a:avLst>
+          </a:prstGeom>
+          <a:solidFill>
+            <a:schemeClr val="accent5"/>
+          </a:solidFill>
+          <a:ln/>
+        </p:spPr>
+      </p:sp>
+      <p:sp>
+        <p:nvSpPr>
+          <p:cNvPr id="18" name="Text 16"/>
+          <p:cNvSpPr txBox="1"/>
+          <p:nvPr/>
+        </p:nvSpPr>
+        <p:spPr>
+          <a:xfrm>
+            <a:off x="8229600" y="1691640"/>
+            <a:ext cx="3093415" cy="274320"/>
+          </a:xfrm>
+          <a:prstGeom prst="rect">
+            <a:avLst/>
+          </a:prstGeom>
+          <a:noFill/>
+          <a:ln/>
+        </p:spPr>
+        <p:txBody>
+          <a:bodyPr wrap="square" lIns="0" tIns="0" rIns="0" bIns="0" rtlCol="0" anchor="t"/>
+          <a:lstStyle/>
+          <a:p>
+            <a:pPr indent="0" marL="0">
+              <a:buNone/>
+            </a:pPr>
+            <a:r>
+              <a:rPr lang="en-US" sz="1300" dirty="0">
+                <a:solidFill>
+                  <a:schemeClr val="accent1"/>
+                </a:solidFill>
+                <a:latin typeface="Courier New" pitchFamily="34" charset="0"/>
+                <a:ea typeface="Courier New" pitchFamily="34" charset="-122"/>
+                <a:cs typeface="Courier New" pitchFamily="34" charset="-120"/>
+              </a:rPr>
+              <a:t>En el código</a:t>
+            </a:r>
+            <a:endParaRPr lang="en-US" sz="1300" dirty="0"/>
+          </a:p>
+        </p:txBody>
+      </p:sp>
+      <p:sp>
+        <p:nvSpPr>
+          <p:cNvPr id="19" name="Text 17"/>
+          <p:cNvSpPr txBox="1"/>
+          <p:nvPr/>
+        </p:nvSpPr>
+        <p:spPr>
+          <a:xfrm>
+            <a:off x="8229600" y="2057400"/>
+            <a:ext cx="3093415" cy="548640"/>
+          </a:xfrm>
+          <a:prstGeom prst="rect">
+            <a:avLst/>
+          </a:prstGeom>
+          <a:noFill/>
+          <a:ln/>
+        </p:spPr>
+        <p:txBody>
+          <a:bodyPr wrap="square" lIns="0" tIns="0" rIns="0" bIns="0" rtlCol="0" anchor="t"/>
+          <a:lstStyle/>
+          <a:p>
+            <a:pPr indent="0" marL="0">
+              <a:buNone/>
+            </a:pPr>
+            <a:r>
+              <a:rPr lang="en-US" sz="1400" b="1" dirty="0">
+                <a:solidFill>
+                  <a:schemeClr val="bg1"/>
+                </a:solidFill>
+                <a:latin typeface="Courier New" pitchFamily="34" charset="0"/>
+                <a:ea typeface="Courier New" pitchFamily="34" charset="-122"/>
+                <a:cs typeface="Courier New" pitchFamily="34" charset="-120"/>
+              </a:rPr>
+              <a:t>api/src/cache.ts</a:t>
+            </a:r>
+            <a:endParaRPr lang="en-US" sz="1400" dirty="0"/>
+          </a:p>
+        </p:txBody>
+      </p:sp>
+      <p:sp>
+        <p:nvSpPr>
+          <p:cNvPr id="20" name="Text 18"/>
+          <p:cNvSpPr txBox="1"/>
+          <p:nvPr/>
+        </p:nvSpPr>
+        <p:spPr>
+          <a:xfrm>
+            <a:off x="8229600" y="2743200"/>
+            <a:ext cx="3093415" cy="2926080"/>
+          </a:xfrm>
+          <a:prstGeom prst="rect">
+            <a:avLst/>
+          </a:prstGeom>
+          <a:noFill/>
+          <a:ln/>
+        </p:spPr>
+        <p:txBody>
+          <a:bodyPr wrap="square" lIns="0" tIns="0" rIns="0" bIns="0" rtlCol="0" anchor="t"/>
+          <a:lstStyle/>
+          <a:p>
+            <a:pPr marL="342900" indent="-342900">
+              <a:spcAft>
+                <a:spcPts val="1000"/>
+              </a:spcAft>
+              <a:buSzPct val="100000"/>
+              <a:buChar char="•"/>
+            </a:pPr>
+            <a:r>
+              <a:rPr lang="en-US" sz="1500" dirty="0">
+                <a:solidFill>
+                  <a:schemeClr val="accent6"/>
+                </a:solidFill>
+                <a:latin typeface="Arial" pitchFamily="34" charset="0"/>
+                <a:ea typeface="Arial" pitchFamily="34" charset="-122"/>
+                <a:cs typeface="Arial" pitchFamily="34" charset="-120"/>
+              </a:rPr>
+              <a:t>disableOfflineQueue: true — falla de inmediato si Redis no está</a:t>
+            </a:r>
+            <a:endParaRPr lang="en-US" sz="1500" dirty="0"/>
+          </a:p>
+          <a:p>
+            <a:pPr marL="342900" indent="-342900">
+              <a:spcAft>
+                <a:spcPts val="1000"/>
+              </a:spcAft>
+              <a:buSzPct val="100000"/>
+              <a:buChar char="•"/>
+            </a:pPr>
+            <a:r>
+              <a:rPr lang="en-US" sz="1500" dirty="0">
+                <a:solidFill>
+                  <a:schemeClr val="accent6"/>
+                </a:solidFill>
+                <a:latin typeface="Arial" pitchFamily="34" charset="0"/>
+                <a:ea typeface="Arial" pitchFamily="34" charset="-122"/>
+                <a:cs typeface="Arial" pitchFamily="34" charset="-120"/>
+              </a:rPr>
+              <a:t>withTimeout(…, 500 ms) — corta si Redis no responde</a:t>
+            </a:r>
+            <a:endParaRPr lang="en-US" sz="1500" dirty="0"/>
+          </a:p>
+          <a:p>
+            <a:pPr marL="342900" indent="-342900">
+              <a:spcAft>
+                <a:spcPts val="1000"/>
+              </a:spcAft>
+              <a:buSzPct val="100000"/>
+              <a:buChar char="•"/>
+            </a:pPr>
+            <a:r>
+              <a:rPr lang="en-US" sz="1500" dirty="0">
+                <a:solidFill>
+                  <a:schemeClr val="accent6"/>
+                </a:solidFill>
+                <a:latin typeface="Arial" pitchFamily="34" charset="0"/>
+                <a:ea typeface="Arial" pitchFamily="34" charset="-122"/>
+                <a:cs typeface="Arial" pitchFamily="34" charset="-120"/>
+              </a:rPr>
+              <a:t>get, set y del devuelven ERROR en vez de lanzar</a:t>
+            </a:r>
+            <a:endParaRPr lang="en-US" sz="1500" dirty="0"/>
+          </a:p>
+        </p:txBody>
+      </p:sp>
+    </p:spTree>
+  </p:cSld>
+  <p:clrMapOvr>
+    <a:masterClrMapping/>
+  </p:clrMapOvr>
+</p:sld>
+</file>
+
+<file path=ppt/slides/slide9.xml><?xml version="1.0" encoding="utf-8"?>
+<p:sld xmlns:a="http://schemas.openxmlformats.org/drawingml/2006/main" xmlns:r="http://schemas.openxmlformats.org/officeDocument/2006/relationships" xmlns:p="http://schemas.openxmlformats.org/presentationml/2006/main">
+  <p:cSld name="Slide 11">
+    <p:spTree>
+      <p:nvGrpSpPr>
+        <p:cNvPr id="1" name=""/>
+        <p:cNvGrpSpPr/>
+        <p:nvPr/>
+      </p:nvGrpSpPr>
+      <p:grpSpPr>
+        <a:xfrm>
+          <a:off x="0" y="0"/>
+          <a:ext cx="0" cy="0"/>
+          <a:chOff x="0" y="0"/>
+          <a:chExt cx="0" cy="0"/>
+        </a:xfrm>
+      </p:grpSpPr>
+      <p:sp>
+        <p:nvSpPr>
+          <p:cNvPr id="2" name="Text 0"/>
+          <p:cNvSpPr/>
+          <p:nvPr>
+            <p:ph idx="100" type="title" hasCustomPrompt="1"/>
+          </p:nvPr>
+        </p:nvSpPr>
+        <p:spPr>
+          <a:xfrm>
+            <a:off x="548640" y="411480"/>
+            <a:ext cx="11094415" cy="685800"/>
+          </a:xfrm>
+          <a:prstGeom prst="rect">
+            <a:avLst/>
+          </a:prstGeom>
+          <a:noFill/>
+          <a:ln/>
+        </p:spPr>
+        <p:txBody>
+          <a:bodyPr wrap="square" lIns="0" tIns="0" rIns="0" bIns="0" rtlCol="0" anchor="ctr"/>
+          <a:lstStyle/>
+          <a:p>
+            <a:pPr algn="l" indent="0" marL="0">
+              <a:buNone/>
+            </a:pPr>
+            <a:r>
+              <a:rPr lang="en-US" sz="3600" b="1" dirty="0">
+                <a:solidFill>
+                  <a:schemeClr val="bg1"/>
+                </a:solidFill>
+              </a:rPr>
+              <a:t>H-01: el cliente por defecto bloquea la API</a:t>
+            </a:r>
+            <a:endParaRPr lang="en-US" sz="3600" dirty="0"/>
+          </a:p>
+        </p:txBody>
+      </p:sp>
+      <p:sp>
+        <p:nvSpPr>
+          <p:cNvPr id="3" name="Text 0"/>
+          <p:cNvSpPr/>
+          <p:nvPr>
+            <p:ph idx="101" type="body" hasCustomPrompt="1"/>
+          </p:nvPr>
+        </p:nvSpPr>
+        <p:spPr>
+          <a:xfrm>
+            <a:off x="548640" y="6355080"/>
+            <a:ext cx="6858000" cy="274320"/>
+          </a:xfrm>
+          <a:prstGeom prst="rect">
+            <a:avLst/>
+          </a:prstGeom>
+          <a:noFill/>
+          <a:ln/>
+        </p:spPr>
+        <p:txBody>
+          <a:bodyPr wrap="square" lIns="0" tIns="0" rIns="0" bIns="0" rtlCol="0" anchor="ctr"/>
+          <a:lstStyle/>
+          <a:p>
+            <a:pPr indent="0" marL="0">
+              <a:buNone/>
+            </a:pPr>
+            <a:r>
+              <a:rPr lang="en-US" sz="1100" dirty="0">
+                <a:solidFill>
+                  <a:schemeClr val="accent6"/>
+                </a:solidFill>
+              </a:rPr>
+              <a:t>2 · Jhon Eduardo · Estrategia, fallas y hallazgo</a:t>
+            </a:r>
+            <a:endParaRPr lang="en-US" sz="1100" dirty="0"/>
+          </a:p>
+        </p:txBody>
+      </p:sp>
+      <p:sp>
+        <p:nvSpPr>
+          <p:cNvPr id="4" name="Text 0"/>
+          <p:cNvSpPr/>
+          <p:nvPr>
+            <p:ph idx="102" type="body" hasCustomPrompt="1"/>
+          </p:nvPr>
+        </p:nvSpPr>
+        <p:spPr>
+          <a:xfrm>
+            <a:off x="7589520" y="6355080"/>
+            <a:ext cx="4053535" cy="274320"/>
+          </a:xfrm>
+          <a:prstGeom prst="rect">
+            <a:avLst/>
+          </a:prstGeom>
+          <a:noFill/>
+          <a:ln/>
+        </p:spPr>
+        <p:txBody>
+          <a:bodyPr wrap="square" lIns="0" tIns="0" rIns="0" bIns="0" rtlCol="0" anchor="ctr"/>
+          <a:lstStyle/>
+          <a:p>
+            <a:pPr algn="r" indent="0" marL="0">
+              <a:buNone/>
+            </a:pPr>
+            <a:r>
+              <a:rPr lang="en-US" sz="1100" dirty="0">
+                <a:solidFill>
+                  <a:schemeClr val="accent6"/>
+                </a:solidFill>
+              </a:rPr>
+              <a:t>docs/evidencias/HALLAZGO-01</a:t>
+            </a:r>
+            <a:endParaRPr lang="en-US" sz="1100" dirty="0"/>
+          </a:p>
+        </p:txBody>
+      </p:sp>
+      <p:graphicFrame>
+        <p:nvGraphicFramePr>
+          <p:cNvPr id="12" name="Table 0"/>
+          <p:cNvGraphicFramePr>
+            <a:graphicFrameLocks noGrp="1"/>
+          </p:cNvGraphicFramePr>
+          <p:nvPr>
+            <p:extLst>
+              <p:ext uri="{D42A27DB-BD31-4B8C-83A1-F6EECF244321}">
+                <p14:modId xmlns:p14="http://schemas.microsoft.com/office/powerpoint/2010/main" val="1579011935"/>
+              </p:ext>
+            </p:extLst>
+          </p:nvPr>
+        </p:nvGraphicFramePr>
+        <p:xfrm>
+          <a:off x="548640" y="1417320"/>
+          <a:ext cx="11094415" cy="914400"/>
+        </p:xfrm>
+        <a:graphic>
+          <a:graphicData uri="http://schemas.openxmlformats.org/drawingml/2006/table">
+            <a:tbl>
+              <a:tblPr/>
+              <a:tblGrid>
+                <a:gridCol w="3749040"/>
+                <a:gridCol w="3657600"/>
+                <a:gridCol w="3687775"/>
+              </a:tblGrid>
+              <a:tr h="640080">
+                <a:tc>
+                  <a:txBody>
+                    <a:bodyPr/>
+                    <a:lstStyle/>
+                    <a:p>
+                      <a:pPr indent="0" marL="0">
+                        <a:buNone/>
+                      </a:pPr>
+                      <a:r>
+                        <a:rPr lang="en-US" sz="1700" b="1" dirty="0">
+                          <a:solidFill>
+                            <a:schemeClr val="bg1"/>
+                          </a:solidFill>
+                          <a:latin typeface="Arial" pitchFamily="34" charset="0"/>
+                          <a:ea typeface="Arial" pitchFamily="34" charset="-122"/>
+                          <a:cs typeface="Arial" pitchFamily="34" charset="-120"/>
+                        </a:rPr>
+                        <a:t>Escenario</a:t>
+                      </a:r>
+                      <a:endParaRPr lang="en-US" sz="1700" dirty="0">
+                        <a:latin typeface="Arial" charset="0"/>
+                        <a:ea typeface="Arial" charset="0"/>
+                        <a:cs typeface="Arial" charset="0"/>
+                      </a:endParaRPr>
+                    </a:p>
+                  </a:txBody>
+                  <a:tcPr marL="91440" marR="91440" marT="45720" marB="45720" anchor="ctr">
+                    <a:lnL w="9525" cap="flat" cmpd="sng" algn="ctr">
+                      <a:solidFill>
+                        <a:srgbClr val="34445A"/>
+                      </a:solidFill>
+                      <a:prstDash val="solid"/>
+                      <a:round/>
+                      <a:headEnd type="none" w="med" len="med"/>
+                      <a:tailEnd type="none" w="med" len="med"/>
+                    </a:lnL>
+                    <a:lnR w="9525" cap="flat" cmpd="sng" algn="ctr">
+                      <a:solidFill>
+                        <a:srgbClr val="34445A"/>
+                      </a:solidFill>
+                      <a:prstDash val="solid"/>
+                      <a:round/>
+                      <a:headEnd type="none" w="med" len="med"/>
+                      <a:tailEnd type="none" w="med" len="med"/>
+                    </a:lnR>
+                    <a:lnT w="9525" cap="flat" cmpd="sng" algn="ctr">
+                      <a:solidFill>
+                        <a:srgbClr val="34445A"/>
+                      </a:solidFill>
+                      <a:prstDash val="solid"/>
+                      <a:round/>
+                      <a:headEnd type="none" w="med" len="med"/>
+                      <a:tailEnd type="none" w="med" len="med"/>
+                    </a:lnT>
+                    <a:lnB w="9525" cap="flat" cmpd="sng" algn="ctr">
+                      <a:solidFill>
+                        <a:srgbClr val="34445A"/>
+                      </a:solidFill>
+                      <a:prstDash val="solid"/>
+                      <a:round/>
+                      <a:headEnd type="none" w="med" len="med"/>
+                      <a:tailEnd type="none" w="med" len="med"/>
+                    </a:lnB>
+                    <a:solidFill>
+                      <a:srgbClr val="2C3A4D"/>
+                    </a:solidFill>
+                  </a:tcPr>
+                </a:tc>
+                <a:tc>
+                  <a:txBody>
+                    <a:bodyPr/>
+                    <a:lstStyle/>
+                    <a:p>
+                      <a:pPr indent="0" marL="0">
+                        <a:buNone/>
+                      </a:pPr>
+                      <a:r>
+                        <a:rPr lang="en-US" sz="1700" b="1" dirty="0">
+                          <a:solidFill>
+                            <a:schemeClr val="bg1"/>
+                          </a:solidFill>
+                          <a:latin typeface="Arial" pitchFamily="34" charset="0"/>
+                          <a:ea typeface="Arial" pitchFamily="34" charset="-122"/>
+                          <a:cs typeface="Arial" pitchFamily="34" charset="-120"/>
+                        </a:rPr>
+                        <a:t>Cliente por defecto</a:t>
+                      </a:r>
+                      <a:endParaRPr lang="en-US" sz="1700" dirty="0">
+                        <a:latin typeface="Arial" charset="0"/>
+                        <a:ea typeface="Arial" charset="0"/>
+                        <a:cs typeface="Arial" charset="0"/>
+                      </a:endParaRPr>
+                    </a:p>
+                  </a:txBody>
+                  <a:tcPr marL="91440" marR="91440" marT="45720" marB="45720" anchor="ctr">
+                    <a:lnL w="9525" cap="flat" cmpd="sng" algn="ctr">
+                      <a:solidFill>
+                        <a:srgbClr val="34445A"/>
+                      </a:solidFill>
+                      <a:prstDash val="solid"/>
+                      <a:round/>
+                      <a:headEnd type="none" w="med" len="med"/>
+                      <a:tailEnd type="none" w="med" len="med"/>
+                    </a:lnL>
+                    <a:lnR w="9525" cap="flat" cmpd="sng" algn="ctr">
+                      <a:solidFill>
+                        <a:srgbClr val="34445A"/>
+                      </a:solidFill>
+                      <a:prstDash val="solid"/>
+                      <a:round/>
+                      <a:headEnd type="none" w="med" len="med"/>
+                      <a:tailEnd type="none" w="med" len="med"/>
+                    </a:lnR>
+                    <a:lnT w="9525" cap="flat" cmpd="sng" algn="ctr">
+                      <a:solidFill>
+                        <a:srgbClr val="34445A"/>
+                      </a:solidFill>
+                      <a:prstDash val="solid"/>
+                      <a:round/>
+                      <a:headEnd type="none" w="med" len="med"/>
+                      <a:tailEnd type="none" w="med" len="med"/>
+                    </a:lnT>
+                    <a:lnB w="9525" cap="flat" cmpd="sng" algn="ctr">
+                      <a:solidFill>
+                        <a:srgbClr val="34445A"/>
+                      </a:solidFill>
+                      <a:prstDash val="solid"/>
+                      <a:round/>
+                      <a:headEnd type="none" w="med" len="med"/>
+                      <a:tailEnd type="none" w="med" len="med"/>
+                    </a:lnB>
+                    <a:solidFill>
+                      <a:srgbClr val="2C3A4D"/>
+                    </a:solidFill>
+                  </a:tcPr>
+                </a:tc>
+                <a:tc>
+                  <a:txBody>
+                    <a:bodyPr/>
+                    <a:lstStyle/>
+                    <a:p>
+                      <a:pPr indent="0" marL="0">
+                        <a:buNone/>
+                      </a:pPr>
+                      <a:r>
+                        <a:rPr lang="en-US" sz="1700" b="1" dirty="0">
+                          <a:solidFill>
+                            <a:schemeClr val="accent1"/>
+                          </a:solidFill>
+                          <a:latin typeface="Arial" pitchFamily="34" charset="0"/>
+                          <a:ea typeface="Arial" pitchFamily="34" charset="-122"/>
+                          <a:cs typeface="Arial" pitchFamily="34" charset="-120"/>
+                        </a:rPr>
+                        <a:t>Cliente del laboratorio</a:t>
+                      </a:r>
+                      <a:endParaRPr lang="en-US" sz="1700" dirty="0">
+                        <a:latin typeface="Arial" charset="0"/>
+                        <a:ea typeface="Arial" charset="0"/>
+                        <a:cs typeface="Arial" charset="0"/>
+                      </a:endParaRPr>
+                    </a:p>
+                  </a:txBody>
+                  <a:tcPr marL="91440" marR="91440" marT="45720" marB="45720" anchor="ctr">
+                    <a:lnL w="9525" cap="flat" cmpd="sng" algn="ctr">
+                      <a:solidFill>
+                        <a:srgbClr val="34445A"/>
+                      </a:solidFill>
+                      <a:prstDash val="solid"/>
+                      <a:round/>
+                      <a:headEnd type="none" w="med" len="med"/>
+                      <a:tailEnd type="none" w="med" len="med"/>
+                    </a:lnL>
+                    <a:lnR w="9525" cap="flat" cmpd="sng" algn="ctr">
+                      <a:solidFill>
+                        <a:srgbClr val="34445A"/>
+                      </a:solidFill>
+                      <a:prstDash val="solid"/>
+                      <a:round/>
+                      <a:headEnd type="none" w="med" len="med"/>
+                      <a:tailEnd type="none" w="med" len="med"/>
+                    </a:lnR>
+                    <a:lnT w="9525" cap="flat" cmpd="sng" algn="ctr">
+                      <a:solidFill>
+                        <a:srgbClr val="34445A"/>
+                      </a:solidFill>
+                      <a:prstDash val="solid"/>
+                      <a:round/>
+                      <a:headEnd type="none" w="med" len="med"/>
+                      <a:tailEnd type="none" w="med" len="med"/>
+                    </a:lnT>
+                    <a:lnB w="9525" cap="flat" cmpd="sng" algn="ctr">
+                      <a:solidFill>
+                        <a:srgbClr val="34445A"/>
+                      </a:solidFill>
+                      <a:prstDash val="solid"/>
+                      <a:round/>
+                      <a:headEnd type="none" w="med" len="med"/>
+                      <a:tailEnd type="none" w="med" len="med"/>
+                    </a:lnB>
+                    <a:solidFill>
+                      <a:srgbClr val="2C3A4D"/>
+                    </a:solidFill>
+                  </a:tcPr>
+                </a:tc>
+              </a:tr>
+              <a:tr h="640080">
+                <a:tc>
+                  <a:txBody>
+                    <a:bodyPr/>
+                    <a:lstStyle/>
+                    <a:p>
+                      <a:pPr indent="0" marL="0">
+                        <a:buNone/>
+                      </a:pPr>
+                      <a:r>
+                        <a:rPr lang="en-US" sz="1700" dirty="0">
+                          <a:solidFill>
+                            <a:schemeClr val="bg1"/>
+                          </a:solidFill>
+                          <a:latin typeface="Arial" pitchFamily="34" charset="0"/>
+                          <a:ea typeface="Arial" pitchFamily="34" charset="-122"/>
+                          <a:cs typeface="Arial" pitchFamily="34" charset="-120"/>
+                        </a:rPr>
+                        <a:t>Redis detenido (docker stop)</a:t>
+                      </a:r>
+                      <a:endParaRPr lang="en-US" sz="1700" dirty="0">
+                        <a:latin typeface="Arial" charset="0"/>
+                        <a:ea typeface="Arial" charset="0"/>
+                        <a:cs typeface="Arial" charset="0"/>
+                      </a:endParaRPr>
+                    </a:p>
+                  </a:txBody>
+                  <a:tcPr marL="91440" marR="91440" marT="45720" marB="45720" anchor="ctr">
+                    <a:lnL w="9525" cap="flat" cmpd="sng" algn="ctr">
+                      <a:solidFill>
+                        <a:srgbClr val="34445A"/>
+                      </a:solidFill>
+                      <a:prstDash val="solid"/>
+                      <a:round/>
+                      <a:headEnd type="none" w="med" len="med"/>
+                      <a:tailEnd type="none" w="med" len="med"/>
+                    </a:lnL>
+                    <a:lnR w="9525" cap="flat" cmpd="sng" algn="ctr">
+                      <a:solidFill>
+                        <a:srgbClr val="34445A"/>
+                      </a:solidFill>
+                      <a:prstDash val="solid"/>
+                      <a:round/>
+                      <a:headEnd type="none" w="med" len="med"/>
+                      <a:tailEnd type="none" w="med" len="med"/>
+                    </a:lnR>
+                    <a:lnT w="9525" cap="flat" cmpd="sng" algn="ctr">
+                      <a:solidFill>
+                        <a:srgbClr val="34445A"/>
+                      </a:solidFill>
+                      <a:prstDash val="solid"/>
+                      <a:round/>
+                      <a:headEnd type="none" w="med" len="med"/>
+                      <a:tailEnd type="none" w="med" len="med"/>
+                    </a:lnT>
+                    <a:lnB w="9525" cap="flat" cmpd="sng" algn="ctr">
+                      <a:solidFill>
+                        <a:srgbClr val="34445A"/>
+                      </a:solidFill>
+                      <a:prstDash val="solid"/>
+                      <a:round/>
+                      <a:headEnd type="none" w="med" len="med"/>
+                      <a:tailEnd type="none" w="med" len="med"/>
+                    </a:lnB>
+                    <a:solidFill>
+                      <a:schemeClr val="accent5"/>
+                    </a:solidFill>
+                  </a:tcPr>
+                </a:tc>
+                <a:tc>
+                  <a:txBody>
+                    <a:bodyPr/>
+                    <a:lstStyle/>
+                    <a:p>
+                      <a:pPr indent="0" marL="0">
+                        <a:buNone/>
+                      </a:pPr>
+                      <a:r>
+                        <a:rPr lang="en-US" sz="1700" dirty="0">
+                          <a:solidFill>
+                            <a:schemeClr val="bg1"/>
+                          </a:solidFill>
+                          <a:latin typeface="Arial" pitchFamily="34" charset="0"/>
+                          <a:ea typeface="Arial" pitchFamily="34" charset="-122"/>
+                          <a:cs typeface="Arial" pitchFamily="34" charset="-120"/>
+                        </a:rPr>
+                        <a:t>~5 000 ms y luego TimeoutError</a:t>
+                      </a:r>
+                      <a:endParaRPr lang="en-US" sz="1700" dirty="0">
+                        <a:latin typeface="Arial" charset="0"/>
+                        <a:ea typeface="Arial" charset="0"/>
+                        <a:cs typeface="Arial" charset="0"/>
+                      </a:endParaRPr>
+                    </a:p>
+                  </a:txBody>
+                  <a:tcPr marL="91440" marR="91440" marT="45720" marB="45720" anchor="ctr">
+                    <a:lnL w="9525" cap="flat" cmpd="sng" algn="ctr">
+                      <a:solidFill>
+                        <a:srgbClr val="34445A"/>
+                      </a:solidFill>
+                      <a:prstDash val="solid"/>
+                      <a:round/>
+                      <a:headEnd type="none" w="med" len="med"/>
+                      <a:tailEnd type="none" w="med" len="med"/>
+                    </a:lnL>
+                    <a:lnR w="9525" cap="flat" cmpd="sng" algn="ctr">
+                      <a:solidFill>
+                        <a:srgbClr val="34445A"/>
+                      </a:solidFill>
+                      <a:prstDash val="solid"/>
+                      <a:round/>
+                      <a:headEnd type="none" w="med" len="med"/>
+                      <a:tailEnd type="none" w="med" len="med"/>
+                    </a:lnR>
+                    <a:lnT w="9525" cap="flat" cmpd="sng" algn="ctr">
+                      <a:solidFill>
+                        <a:srgbClr val="34445A"/>
+                      </a:solidFill>
+                      <a:prstDash val="solid"/>
+                      <a:round/>
+                      <a:headEnd type="none" w="med" len="med"/>
+                      <a:tailEnd type="none" w="med" len="med"/>
+                    </a:lnT>
+                    <a:lnB w="9525" cap="flat" cmpd="sng" algn="ctr">
+                      <a:solidFill>
+                        <a:srgbClr val="34445A"/>
+                      </a:solidFill>
+                      <a:prstDash val="solid"/>
+                      <a:round/>
+                      <a:headEnd type="none" w="med" len="med"/>
+                      <a:tailEnd type="none" w="med" len="med"/>
+                    </a:lnB>
+                    <a:solidFill>
+                      <a:schemeClr val="accent5"/>
+                    </a:solidFill>
+                  </a:tcPr>
+                </a:tc>
+                <a:tc>
+                  <a:txBody>
+                    <a:bodyPr/>
+                    <a:lstStyle/>
+                    <a:p>
+                      <a:pPr indent="0" marL="0">
+                        <a:buNone/>
+                      </a:pPr>
+                      <a:r>
+                        <a:rPr lang="en-US" sz="1700" dirty="0">
+                          <a:solidFill>
+                            <a:schemeClr val="bg1"/>
+                          </a:solidFill>
+                          <a:latin typeface="Arial" pitchFamily="34" charset="0"/>
+                          <a:ea typeface="Arial" pitchFamily="34" charset="-122"/>
+                          <a:cs typeface="Arial" pitchFamily="34" charset="-120"/>
+                        </a:rPr>
+                        <a:t>~1 ms → ERROR → BYPASS</a:t>
+                      </a:r>
+                      <a:endParaRPr lang="en-US" sz="1700" dirty="0">
+                        <a:latin typeface="Arial" charset="0"/>
+                        <a:ea typeface="Arial" charset="0"/>
+                        <a:cs typeface="Arial" charset="0"/>
+                      </a:endParaRPr>
+                    </a:p>
+                  </a:txBody>
+                  <a:tcPr marL="91440" marR="91440" marT="45720" marB="45720" anchor="ctr">
+                    <a:lnL w="9525" cap="flat" cmpd="sng" algn="ctr">
+                      <a:solidFill>
+                        <a:srgbClr val="34445A"/>
+                      </a:solidFill>
+                      <a:prstDash val="solid"/>
+                      <a:round/>
+                      <a:headEnd type="none" w="med" len="med"/>
+                      <a:tailEnd type="none" w="med" len="med"/>
+                    </a:lnL>
+                    <a:lnR w="9525" cap="flat" cmpd="sng" algn="ctr">
+                      <a:solidFill>
+                        <a:srgbClr val="34445A"/>
+                      </a:solidFill>
+                      <a:prstDash val="solid"/>
+                      <a:round/>
+                      <a:headEnd type="none" w="med" len="med"/>
+                      <a:tailEnd type="none" w="med" len="med"/>
+                    </a:lnR>
+                    <a:lnT w="9525" cap="flat" cmpd="sng" algn="ctr">
+                      <a:solidFill>
+                        <a:srgbClr val="34445A"/>
+                      </a:solidFill>
+                      <a:prstDash val="solid"/>
+                      <a:round/>
+                      <a:headEnd type="none" w="med" len="med"/>
+                      <a:tailEnd type="none" w="med" len="med"/>
+                    </a:lnT>
+                    <a:lnB w="9525" cap="flat" cmpd="sng" algn="ctr">
+                      <a:solidFill>
+                        <a:srgbClr val="34445A"/>
+                      </a:solidFill>
+                      <a:prstDash val="solid"/>
+                      <a:round/>
+                      <a:headEnd type="none" w="med" len="med"/>
+                      <a:tailEnd type="none" w="med" len="med"/>
+                    </a:lnB>
+                    <a:solidFill>
+                      <a:schemeClr val="accent5"/>
+                    </a:solidFill>
+                  </a:tcPr>
+                </a:tc>
+              </a:tr>
+              <a:tr h="640080">
+                <a:tc>
+                  <a:txBody>
+                    <a:bodyPr/>
+                    <a:lstStyle/>
+                    <a:p>
+                      <a:pPr indent="0" marL="0">
+                        <a:buNone/>
+                      </a:pPr>
+                      <a:r>
+                        <a:rPr lang="en-US" sz="1700" dirty="0">
+                          <a:solidFill>
+                            <a:schemeClr val="bg1"/>
+                          </a:solidFill>
+                          <a:latin typeface="Arial" pitchFamily="34" charset="0"/>
+                          <a:ea typeface="Arial" pitchFamily="34" charset="-122"/>
+                          <a:cs typeface="Arial" pitchFamily="34" charset="-120"/>
+                        </a:rPr>
+                        <a:t>Redis congelado (docker pause)</a:t>
+                      </a:r>
+                      <a:endParaRPr lang="en-US" sz="1700" dirty="0">
+                        <a:latin typeface="Arial" charset="0"/>
+                        <a:ea typeface="Arial" charset="0"/>
+                        <a:cs typeface="Arial" charset="0"/>
+                      </a:endParaRPr>
+                    </a:p>
+                  </a:txBody>
+                  <a:tcPr marL="91440" marR="91440" marT="45720" marB="45720" anchor="ctr">
+                    <a:lnL w="9525" cap="flat" cmpd="sng" algn="ctr">
+                      <a:solidFill>
+                        <a:srgbClr val="34445A"/>
+                      </a:solidFill>
+                      <a:prstDash val="solid"/>
+                      <a:round/>
+                      <a:headEnd type="none" w="med" len="med"/>
+                      <a:tailEnd type="none" w="med" len="med"/>
+                    </a:lnL>
+                    <a:lnR w="9525" cap="flat" cmpd="sng" algn="ctr">
+                      <a:solidFill>
+                        <a:srgbClr val="34445A"/>
+                      </a:solidFill>
+                      <a:prstDash val="solid"/>
+                      <a:round/>
+                      <a:headEnd type="none" w="med" len="med"/>
+                      <a:tailEnd type="none" w="med" len="med"/>
+                    </a:lnR>
+                    <a:lnT w="9525" cap="flat" cmpd="sng" algn="ctr">
+                      <a:solidFill>
+                        <a:srgbClr val="34445A"/>
+                      </a:solidFill>
+                      <a:prstDash val="solid"/>
+                      <a:round/>
+                      <a:headEnd type="none" w="med" len="med"/>
+                      <a:tailEnd type="none" w="med" len="med"/>
+                    </a:lnT>
+                    <a:lnB w="9525" cap="flat" cmpd="sng" algn="ctr">
+                      <a:solidFill>
+                        <a:srgbClr val="34445A"/>
+                      </a:solidFill>
+                      <a:prstDash val="solid"/>
+                      <a:round/>
+                      <a:headEnd type="none" w="med" len="med"/>
+                      <a:tailEnd type="none" w="med" len="med"/>
+                    </a:lnB>
+                    <a:solidFill>
+                      <a:srgbClr val="1F2A38"/>
+                    </a:solidFill>
+                  </a:tcPr>
+                </a:tc>
+                <a:tc>
+                  <a:txBody>
+                    <a:bodyPr/>
+                    <a:lstStyle/>
+                    <a:p>
+                      <a:pPr indent="0" marL="0">
+                        <a:buNone/>
+                      </a:pPr>
+                      <a:r>
+                        <a:rPr lang="en-US" sz="1700" dirty="0">
+                          <a:solidFill>
+                            <a:schemeClr val="bg1"/>
+                          </a:solidFill>
+                          <a:latin typeface="Arial" pitchFamily="34" charset="0"/>
+                          <a:ea typeface="Arial" pitchFamily="34" charset="-122"/>
+                          <a:cs typeface="Arial" pitchFamily="34" charset="-120"/>
+                        </a:rPr>
+                        <a:t>Sin respuesta (corte a 10 000 ms)</a:t>
+                      </a:r>
+                      <a:endParaRPr lang="en-US" sz="1700" dirty="0">
+                        <a:latin typeface="Arial" charset="0"/>
+                        <a:ea typeface="Arial" charset="0"/>
+                        <a:cs typeface="Arial" charset="0"/>
+                      </a:endParaRPr>
+                    </a:p>
+                  </a:txBody>
+                  <a:tcPr marL="91440" marR="91440" marT="45720" marB="45720" anchor="ctr">
+                    <a:lnL w="9525" cap="flat" cmpd="sng" algn="ctr">
+                      <a:solidFill>
+                        <a:srgbClr val="34445A"/>
+                      </a:solidFill>
+                      <a:prstDash val="solid"/>
+                      <a:round/>
+                      <a:headEnd type="none" w="med" len="med"/>
+                      <a:tailEnd type="none" w="med" len="med"/>
+                    </a:lnL>
+                    <a:lnR w="9525" cap="flat" cmpd="sng" algn="ctr">
+                      <a:solidFill>
+                        <a:srgbClr val="34445A"/>
+                      </a:solidFill>
+                      <a:prstDash val="solid"/>
+                      <a:round/>
+                      <a:headEnd type="none" w="med" len="med"/>
+                      <a:tailEnd type="none" w="med" len="med"/>
+                    </a:lnR>
+                    <a:lnT w="9525" cap="flat" cmpd="sng" algn="ctr">
+                      <a:solidFill>
+                        <a:srgbClr val="34445A"/>
+                      </a:solidFill>
+                      <a:prstDash val="solid"/>
+                      <a:round/>
+                      <a:headEnd type="none" w="med" len="med"/>
+                      <a:tailEnd type="none" w="med" len="med"/>
+                    </a:lnT>
+                    <a:lnB w="9525" cap="flat" cmpd="sng" algn="ctr">
+                      <a:solidFill>
+                        <a:srgbClr val="34445A"/>
+                      </a:solidFill>
+                      <a:prstDash val="solid"/>
+                      <a:round/>
+                      <a:headEnd type="none" w="med" len="med"/>
+                      <a:tailEnd type="none" w="med" len="med"/>
+                    </a:lnB>
+                    <a:solidFill>
+                      <a:srgbClr val="1F2A38"/>
+                    </a:solidFill>
+                  </a:tcPr>
+                </a:tc>
+                <a:tc>
+                  <a:txBody>
+                    <a:bodyPr/>
+                    <a:lstStyle/>
+                    <a:p>
+                      <a:pPr indent="0" marL="0">
+                        <a:buNone/>
+                      </a:pPr>
+                      <a:r>
+                        <a:rPr lang="en-US" sz="1700" dirty="0">
+                          <a:solidFill>
+                            <a:schemeClr val="bg1"/>
+                          </a:solidFill>
+                          <a:latin typeface="Arial" pitchFamily="34" charset="0"/>
+                          <a:ea typeface="Arial" pitchFamily="34" charset="-122"/>
+                          <a:cs typeface="Arial" pitchFamily="34" charset="-120"/>
+                        </a:rPr>
+                        <a:t>~500 ms → ERROR → BYPASS</a:t>
+                      </a:r>
+                      <a:endParaRPr lang="en-US" sz="1700" dirty="0">
+                        <a:latin typeface="Arial" charset="0"/>
+                        <a:ea typeface="Arial" charset="0"/>
+                        <a:cs typeface="Arial" charset="0"/>
+                      </a:endParaRPr>
+                    </a:p>
+                  </a:txBody>
+                  <a:tcPr marL="91440" marR="91440" marT="45720" marB="45720" anchor="ctr">
+                    <a:lnL w="9525" cap="flat" cmpd="sng" algn="ctr">
+                      <a:solidFill>
+                        <a:srgbClr val="34445A"/>
+                      </a:solidFill>
+                      <a:prstDash val="solid"/>
+                      <a:round/>
+                      <a:headEnd type="none" w="med" len="med"/>
+                      <a:tailEnd type="none" w="med" len="med"/>
+                    </a:lnL>
+                    <a:lnR w="9525" cap="flat" cmpd="sng" algn="ctr">
+                      <a:solidFill>
+                        <a:srgbClr val="34445A"/>
+                      </a:solidFill>
+                      <a:prstDash val="solid"/>
+                      <a:round/>
+                      <a:headEnd type="none" w="med" len="med"/>
+                      <a:tailEnd type="none" w="med" len="med"/>
+                    </a:lnR>
+                    <a:lnT w="9525" cap="flat" cmpd="sng" algn="ctr">
+                      <a:solidFill>
+                        <a:srgbClr val="34445A"/>
+                      </a:solidFill>
+                      <a:prstDash val="solid"/>
+                      <a:round/>
+                      <a:headEnd type="none" w="med" len="med"/>
+                      <a:tailEnd type="none" w="med" len="med"/>
+                    </a:lnT>
+                    <a:lnB w="9525" cap="flat" cmpd="sng" algn="ctr">
+                      <a:solidFill>
+                        <a:srgbClr val="34445A"/>
+                      </a:solidFill>
+                      <a:prstDash val="solid"/>
+                      <a:round/>
+                      <a:headEnd type="none" w="med" len="med"/>
+                      <a:tailEnd type="none" w="med" len="med"/>
+                    </a:lnB>
+                    <a:solidFill>
+                      <a:srgbClr val="1F2A38"/>
+                    </a:solidFill>
+                  </a:tcPr>
+                </a:tc>
+              </a:tr>
+            </a:tbl>
+          </a:graphicData>
+        </a:graphic>
+      </p:graphicFrame>
+      <p:sp>
+        <p:nvSpPr>
+          <p:cNvPr id="6" name="Shape 3"/>
+          <p:cNvSpPr/>
+          <p:nvPr/>
+        </p:nvSpPr>
+        <p:spPr>
+          <a:xfrm>
+            <a:off x="548640" y="3749040"/>
+            <a:ext cx="5410048" cy="1463040"/>
+          </a:xfrm>
+          <a:prstGeom prst="roundRect">
+            <a:avLst>
+              <a:gd name="adj" fmla="val 6250"/>
+            </a:avLst>
+          </a:prstGeom>
+          <a:solidFill>
+            <a:schemeClr val="accent5"/>
+          </a:solidFill>
+          <a:ln/>
+        </p:spPr>
+      </p:sp>
+      <p:sp>
+        <p:nvSpPr>
+          <p:cNvPr id="7" name="Text 4"/>
+          <p:cNvSpPr txBox="1"/>
+          <p:nvPr/>
+        </p:nvSpPr>
+        <p:spPr>
+          <a:xfrm>
+            <a:off x="914400" y="3749040"/>
+            <a:ext cx="4678528" cy="1463040"/>
+          </a:xfrm>
+          <a:prstGeom prst="rect">
+            <a:avLst/>
+          </a:prstGeom>
+          <a:noFill/>
+          <a:ln/>
+        </p:spPr>
+        <p:txBody>
+          <a:bodyPr wrap="square" lIns="0" tIns="0" rIns="0" bIns="0" rtlCol="0" anchor="ctr"/>
+          <a:lstStyle/>
+          <a:p>
+            <a:pPr indent="0" marL="0">
+              <a:buNone/>
+            </a:pPr>
+            <a:r>
+              <a:rPr lang="en-US" sz="1800" dirty="0">
+                <a:solidFill>
+                  <a:schemeClr val="bg1"/>
+                </a:solidFill>
+                <a:latin typeface="Arial" pitchFamily="34" charset="0"/>
+                <a:ea typeface="Arial" pitchFamily="34" charset="-122"/>
+                <a:cs typeface="Arial" pitchFamily="34" charset="-120"/>
+              </a:rPr>
+              <a:t>Desactivar la cola fuera de línea resuelve la caída, no la lentitud.</a:t>
+            </a:r>
+            <a:endParaRPr lang="en-US" sz="1800" dirty="0"/>
+          </a:p>
+        </p:txBody>
+      </p:sp>
+      <p:sp>
+        <p:nvSpPr>
+          <p:cNvPr id="8" name="Shape 5"/>
+          <p:cNvSpPr/>
+          <p:nvPr/>
+        </p:nvSpPr>
+        <p:spPr>
+          <a:xfrm>
+            <a:off x="6233008" y="3749040"/>
+            <a:ext cx="5410048" cy="1463040"/>
+          </a:xfrm>
+          <a:prstGeom prst="roundRect">
+            <a:avLst>
+              <a:gd name="adj" fmla="val 6250"/>
+            </a:avLst>
+          </a:prstGeom>
+          <a:solidFill>
+            <a:schemeClr val="accent5"/>
+          </a:solidFill>
+          <a:ln/>
+        </p:spPr>
+      </p:sp>
+      <p:sp>
+        <p:nvSpPr>
+          <p:cNvPr id="9" name="Text 6"/>
+          <p:cNvSpPr txBox="1"/>
+          <p:nvPr/>
+        </p:nvSpPr>
+        <p:spPr>
+          <a:xfrm>
+            <a:off x="6598768" y="3749040"/>
+            <a:ext cx="4678528" cy="1463040"/>
+          </a:xfrm>
+          <a:prstGeom prst="rect">
+            <a:avLst/>
+          </a:prstGeom>
+          <a:noFill/>
+          <a:ln/>
+        </p:spPr>
+        <p:txBody>
+          <a:bodyPr wrap="square" lIns="0" tIns="0" rIns="0" bIns="0" rtlCol="0" anchor="ctr"/>
+          <a:lstStyle/>
+          <a:p>
+            <a:pPr indent="0" marL="0">
+              <a:buNone/>
+            </a:pPr>
+            <a:r>
+              <a:rPr lang="en-US" sz="1800" dirty="0">
+                <a:solidFill>
+                  <a:schemeClr val="bg1"/>
+                </a:solidFill>
+                <a:latin typeface="Arial" pitchFamily="34" charset="0"/>
+                <a:ea typeface="Arial" pitchFamily="34" charset="-122"/>
+                <a:cs typeface="Arial" pitchFamily="34" charset="-120"/>
+              </a:rPr>
+              <a:t>El timeout por comando acota el peor caso a 500 ms. Se necesitan las dos medidas.</a:t>
+            </a:r>
+            <a:endParaRPr lang="en-US" sz="1800" dirty="0"/>
+          </a:p>
+        </p:txBody>
+      </p:sp>
     </p:spTree>
   </p:cSld>
   <p:clrMapOvr>
